--- a/slides/saida/aula-1.pptx
+++ b/slides/saida/aula-1.pptx
@@ -6010,7 +6010,25 @@
                 </a:solidFill>
                 <a:latin typeface="Segoe UI"/>
               </a:rPr>
-              <a:t>—  **Alucinação** — gera o plausível, não o verdadeiro</a:t>
+              <a:t>—  </a:t>
+            </a:r>
+            <a:r>
+              <a:rPr sz="1900" b="1" i="0">
+                <a:solidFill>
+                  <a:srgbClr val="16181D"/>
+                </a:solidFill>
+                <a:latin typeface="Segoe UI"/>
+              </a:rPr>
+              <a:t>Alucinação</a:t>
+            </a:r>
+            <a:r>
+              <a:rPr sz="1900" b="0" i="0">
+                <a:solidFill>
+                  <a:srgbClr val="16181D"/>
+                </a:solidFill>
+                <a:latin typeface="Segoe UI"/>
+              </a:rPr>
+              <a:t> — gera o plausível, não o verdadeiro</a:t>
             </a:r>
           </a:p>
           <a:p>
@@ -6032,7 +6050,25 @@
                 </a:solidFill>
                 <a:latin typeface="Segoe UI"/>
               </a:rPr>
-              <a:t>—  **Data de corte** — não conhece o que veio depois do treinamento</a:t>
+              <a:t>—  </a:t>
+            </a:r>
+            <a:r>
+              <a:rPr sz="1900" b="1" i="0">
+                <a:solidFill>
+                  <a:srgbClr val="16181D"/>
+                </a:solidFill>
+                <a:latin typeface="Segoe UI"/>
+              </a:rPr>
+              <a:t>Data de corte</a:t>
+            </a:r>
+            <a:r>
+              <a:rPr sz="1900" b="0" i="0">
+                <a:solidFill>
+                  <a:srgbClr val="16181D"/>
+                </a:solidFill>
+                <a:latin typeface="Segoe UI"/>
+              </a:rPr>
+              <a:t> — não conhece o que veio depois do treinamento</a:t>
             </a:r>
           </a:p>
           <a:p>
@@ -6054,7 +6090,25 @@
                 </a:solidFill>
                 <a:latin typeface="Segoe UI"/>
               </a:rPr>
-              <a:t>—  **Ausência de estado** — cada requisição começa do zero</a:t>
+              <a:t>—  </a:t>
+            </a:r>
+            <a:r>
+              <a:rPr sz="1900" b="1" i="0">
+                <a:solidFill>
+                  <a:srgbClr val="16181D"/>
+                </a:solidFill>
+                <a:latin typeface="Segoe UI"/>
+              </a:rPr>
+              <a:t>Ausência de estado</a:t>
+            </a:r>
+            <a:r>
+              <a:rPr sz="1900" b="0" i="0">
+                <a:solidFill>
+                  <a:srgbClr val="16181D"/>
+                </a:solidFill>
+                <a:latin typeface="Segoe UI"/>
+              </a:rPr>
+              <a:t> — cada requisição começa do zero</a:t>
             </a:r>
           </a:p>
           <a:p>
@@ -6704,8 +6758,8 @@
         </p:nvSpPr>
         <p:spPr>
           <a:xfrm>
-            <a:off x="868680" y="5961888"/>
-            <a:ext cx="10454335" cy="274320"/>
+            <a:off x="1357689" y="5998464"/>
+            <a:ext cx="9476315" cy="274320"/>
           </a:xfrm>
           <a:prstGeom prst="rect">
             <a:avLst/>
@@ -7008,7 +7062,25 @@
                 </a:solidFill>
                 <a:latin typeface="Segoe UI"/>
               </a:rPr>
-              <a:t>—  Não é "quanto ele lembra": é quanto cabe **nesta** requisição</a:t>
+              <a:t>—  Não é "quanto ele lembra": é quanto cabe </a:t>
+            </a:r>
+            <a:r>
+              <a:rPr sz="1900" b="1" i="0">
+                <a:solidFill>
+                  <a:srgbClr val="16181D"/>
+                </a:solidFill>
+                <a:latin typeface="Segoe UI"/>
+              </a:rPr>
+              <a:t>nesta</a:t>
+            </a:r>
+            <a:r>
+              <a:rPr sz="1900" b="0" i="0">
+                <a:solidFill>
+                  <a:srgbClr val="16181D"/>
+                </a:solidFill>
+                <a:latin typeface="Segoe UI"/>
+              </a:rPr>
+              <a:t> requisição</a:t>
             </a:r>
           </a:p>
           <a:p>
@@ -7316,8 +7388,8 @@
         </p:nvSpPr>
         <p:spPr>
           <a:xfrm>
-            <a:off x="868680" y="5961888"/>
-            <a:ext cx="10454335" cy="274320"/>
+            <a:off x="1375145" y="5998464"/>
+            <a:ext cx="9441403" cy="274320"/>
           </a:xfrm>
           <a:prstGeom prst="rect">
             <a:avLst/>
@@ -7567,7 +7639,7 @@
         <p:spPr>
           <a:xfrm>
             <a:off x="868680" y="1609343"/>
-            <a:ext cx="3744047" cy="4562856"/>
+            <a:ext cx="4162220" cy="4562856"/>
           </a:xfrm>
           <a:prstGeom prst="rect">
             <a:avLst/>
@@ -7598,7 +7670,25 @@
                 </a:solidFill>
                 <a:latin typeface="Segoe UI"/>
               </a:rPr>
-              <a:t>—  **Prompt caching** — o prefixo repetido é cacheado e sai muito mais barato que a primeira vez</a:t>
+              <a:t>—  </a:t>
+            </a:r>
+            <a:r>
+              <a:rPr sz="1900" b="1" i="0">
+                <a:solidFill>
+                  <a:srgbClr val="16181D"/>
+                </a:solidFill>
+                <a:latin typeface="Segoe UI"/>
+              </a:rPr>
+              <a:t>Prompt caching</a:t>
+            </a:r>
+            <a:r>
+              <a:rPr sz="1900" b="0" i="0">
+                <a:solidFill>
+                  <a:srgbClr val="16181D"/>
+                </a:solidFill>
+                <a:latin typeface="Segoe UI"/>
+              </a:rPr>
+              <a:t> — o prefixo repetido é cacheado e sai muito mais barato que a primeira vez</a:t>
             </a:r>
           </a:p>
           <a:p>
@@ -7664,7 +7754,25 @@
                 </a:solidFill>
                 <a:latin typeface="Segoe UI"/>
               </a:rPr>
-              <a:t>—  **Compaction** — quando a janela satura, a conversa é resumida e recomeça</a:t>
+              <a:t>—  </a:t>
+            </a:r>
+            <a:r>
+              <a:rPr sz="1900" b="1" i="0">
+                <a:solidFill>
+                  <a:srgbClr val="16181D"/>
+                </a:solidFill>
+                <a:latin typeface="Segoe UI"/>
+              </a:rPr>
+              <a:t>Compaction</a:t>
+            </a:r>
+            <a:r>
+              <a:rPr sz="1900" b="0" i="0">
+                <a:solidFill>
+                  <a:srgbClr val="16181D"/>
+                </a:solidFill>
+                <a:latin typeface="Segoe UI"/>
+              </a:rPr>
+              <a:t> — quando a janela satura, a conversa é resumida e recomeça</a:t>
             </a:r>
           </a:p>
         </p:txBody>
@@ -7685,8 +7793,8 @@
         </p:blipFill>
         <p:spPr>
           <a:xfrm>
-            <a:off x="4841327" y="2459099"/>
-            <a:ext cx="6481687" cy="2634745"/>
+            <a:off x="5259500" y="2544091"/>
+            <a:ext cx="6063514" cy="2464761"/>
           </a:xfrm>
           <a:prstGeom prst="rect">
             <a:avLst/>
@@ -7701,8 +7809,8 @@
         </p:nvSpPr>
         <p:spPr>
           <a:xfrm>
-            <a:off x="4841327" y="5961888"/>
-            <a:ext cx="6481687" cy="274320"/>
+            <a:off x="5259500" y="5063716"/>
+            <a:ext cx="6063514" cy="274320"/>
           </a:xfrm>
           <a:prstGeom prst="rect">
             <a:avLst/>
@@ -7983,7 +8091,43 @@
                 </a:solidFill>
                 <a:latin typeface="Segoe UI"/>
               </a:rPr>
-              <a:t>—  **Contexto persistente**: `CLAUDE.md` no Code, Projects e memória no Chat</a:t>
+              <a:t>—  </a:t>
+            </a:r>
+            <a:r>
+              <a:rPr sz="1900" b="1" i="0">
+                <a:solidFill>
+                  <a:srgbClr val="16181D"/>
+                </a:solidFill>
+                <a:latin typeface="Segoe UI"/>
+              </a:rPr>
+              <a:t>Contexto persistente</a:t>
+            </a:r>
+            <a:r>
+              <a:rPr sz="1900" b="0" i="0">
+                <a:solidFill>
+                  <a:srgbClr val="16181D"/>
+                </a:solidFill>
+                <a:latin typeface="Segoe UI"/>
+              </a:rPr>
+              <a:t>: </a:t>
+            </a:r>
+            <a:r>
+              <a:rPr sz="1748" b="0" i="0">
+                <a:solidFill>
+                  <a:srgbClr val="16181D"/>
+                </a:solidFill>
+                <a:latin typeface="Consolas"/>
+              </a:rPr>
+              <a:t>CLAUDE.md</a:t>
+            </a:r>
+            <a:r>
+              <a:rPr sz="1900" b="0" i="0">
+                <a:solidFill>
+                  <a:srgbClr val="16181D"/>
+                </a:solidFill>
+                <a:latin typeface="Segoe UI"/>
+              </a:rPr>
+              <a:t> no Code, Projects e memória no Chat</a:t>
             </a:r>
           </a:p>
           <a:p>
@@ -8005,7 +8149,25 @@
                 </a:solidFill>
                 <a:latin typeface="Segoe UI"/>
               </a:rPr>
-              <a:t>—  Entra **sempre**, em toda requisição — ao contrário do material de apoio, que entra sob demanda</a:t>
+              <a:t>—  Entra </a:t>
+            </a:r>
+            <a:r>
+              <a:rPr sz="1900" b="1" i="0">
+                <a:solidFill>
+                  <a:srgbClr val="16181D"/>
+                </a:solidFill>
+                <a:latin typeface="Segoe UI"/>
+              </a:rPr>
+              <a:t>sempre</a:t>
+            </a:r>
+            <a:r>
+              <a:rPr sz="1900" b="0" i="0">
+                <a:solidFill>
+                  <a:srgbClr val="16181D"/>
+                </a:solidFill>
+                <a:latin typeface="Segoe UI"/>
+              </a:rPr>
+              <a:t>, em toda requisição — ao contrário do material de apoio, que entra sob demanda</a:t>
             </a:r>
           </a:p>
           <a:p>
@@ -8321,7 +8483,25 @@
                 </a:solidFill>
                 <a:latin typeface="Segoe UI"/>
               </a:rPr>
-              <a:t>—  **Modelo**: capacidade × latência × custo. Não existe escolha universalmente certa</a:t>
+              <a:t>—  </a:t>
+            </a:r>
+            <a:r>
+              <a:rPr sz="1900" b="1" i="0">
+                <a:solidFill>
+                  <a:srgbClr val="16181D"/>
+                </a:solidFill>
+                <a:latin typeface="Segoe UI"/>
+              </a:rPr>
+              <a:t>Modelo</a:t>
+            </a:r>
+            <a:r>
+              <a:rPr sz="1900" b="0" i="0">
+                <a:solidFill>
+                  <a:srgbClr val="16181D"/>
+                </a:solidFill>
+                <a:latin typeface="Segoe UI"/>
+              </a:rPr>
+              <a:t>: capacidade × latência × custo. Não existe escolha universalmente certa</a:t>
             </a:r>
           </a:p>
           <a:p>
@@ -8343,7 +8523,25 @@
                 </a:solidFill>
                 <a:latin typeface="Segoe UI"/>
               </a:rPr>
-              <a:t>—  **Thinking**: o modelo raciocina antes de responder — e esse raciocínio também são tokens</a:t>
+              <a:t>—  </a:t>
+            </a:r>
+            <a:r>
+              <a:rPr sz="1900" b="1" i="0">
+                <a:solidFill>
+                  <a:srgbClr val="16181D"/>
+                </a:solidFill>
+                <a:latin typeface="Segoe UI"/>
+              </a:rPr>
+              <a:t>Thinking</a:t>
+            </a:r>
+            <a:r>
+              <a:rPr sz="1900" b="0" i="0">
+                <a:solidFill>
+                  <a:srgbClr val="16181D"/>
+                </a:solidFill>
+                <a:latin typeface="Segoe UI"/>
+              </a:rPr>
+              <a:t>: o modelo raciocina antes de responder — e esse raciocínio também são tokens</a:t>
             </a:r>
           </a:p>
           <a:p>
@@ -8365,7 +8563,25 @@
                 </a:solidFill>
                 <a:latin typeface="Segoe UI"/>
               </a:rPr>
-              <a:t>—  **Effort**: quanto desse raciocínio investir</a:t>
+              <a:t>—  </a:t>
+            </a:r>
+            <a:r>
+              <a:rPr sz="1900" b="1" i="0">
+                <a:solidFill>
+                  <a:srgbClr val="16181D"/>
+                </a:solidFill>
+                <a:latin typeface="Segoe UI"/>
+              </a:rPr>
+              <a:t>Effort</a:t>
+            </a:r>
+            <a:r>
+              <a:rPr sz="1900" b="0" i="0">
+                <a:solidFill>
+                  <a:srgbClr val="16181D"/>
+                </a:solidFill>
+                <a:latin typeface="Segoe UI"/>
+              </a:rPr>
+              <a:t>: quanto desse raciocínio investir</a:t>
             </a:r>
           </a:p>
           <a:p>
@@ -8387,7 +8603,106 @@
                 </a:solidFill>
                 <a:latin typeface="Segoe UI"/>
               </a:rPr>
-              <a:t>·  níveis disponíveis: `low`, `medium`, `high`, `xhigh`, `max`; padrão `high`</a:t>
+              <a:t>·  níveis disponíveis: </a:t>
+            </a:r>
+            <a:r>
+              <a:rPr sz="1472" b="0" i="0">
+                <a:solidFill>
+                  <a:srgbClr val="6A6E76"/>
+                </a:solidFill>
+                <a:latin typeface="Consolas"/>
+              </a:rPr>
+              <a:t>low</a:t>
+            </a:r>
+            <a:r>
+              <a:rPr sz="1600" b="0" i="0">
+                <a:solidFill>
+                  <a:srgbClr val="6A6E76"/>
+                </a:solidFill>
+                <a:latin typeface="Segoe UI"/>
+              </a:rPr>
+              <a:t>, </a:t>
+            </a:r>
+            <a:r>
+              <a:rPr sz="1472" b="0" i="0">
+                <a:solidFill>
+                  <a:srgbClr val="6A6E76"/>
+                </a:solidFill>
+                <a:latin typeface="Consolas"/>
+              </a:rPr>
+              <a:t>medium</a:t>
+            </a:r>
+            <a:r>
+              <a:rPr sz="1600" b="0" i="0">
+                <a:solidFill>
+                  <a:srgbClr val="6A6E76"/>
+                </a:solidFill>
+                <a:latin typeface="Segoe UI"/>
+              </a:rPr>
+              <a:t>, </a:t>
+            </a:r>
+            <a:r>
+              <a:rPr sz="1472" b="0" i="0">
+                <a:solidFill>
+                  <a:srgbClr val="6A6E76"/>
+                </a:solidFill>
+                <a:latin typeface="Consolas"/>
+              </a:rPr>
+              <a:t>high</a:t>
+            </a:r>
+            <a:r>
+              <a:rPr sz="1600" b="0" i="0">
+                <a:solidFill>
+                  <a:srgbClr val="6A6E76"/>
+                </a:solidFill>
+                <a:latin typeface="Segoe UI"/>
+              </a:rPr>
+              <a:t>, </a:t>
+            </a:r>
+            <a:r>
+              <a:rPr sz="1472" b="0" i="0">
+                <a:solidFill>
+                  <a:srgbClr val="6A6E76"/>
+                </a:solidFill>
+                <a:latin typeface="Consolas"/>
+              </a:rPr>
+              <a:t>xhigh</a:t>
+            </a:r>
+            <a:r>
+              <a:rPr sz="1600" b="0" i="0">
+                <a:solidFill>
+                  <a:srgbClr val="6A6E76"/>
+                </a:solidFill>
+                <a:latin typeface="Segoe UI"/>
+              </a:rPr>
+              <a:t>, </a:t>
+            </a:r>
+            <a:r>
+              <a:rPr sz="1472" b="0" i="0">
+                <a:solidFill>
+                  <a:srgbClr val="6A6E76"/>
+                </a:solidFill>
+                <a:latin typeface="Consolas"/>
+              </a:rPr>
+              <a:t>max</a:t>
+            </a:r>
+            <a:r>
+              <a:rPr sz="1600" b="0" i="0">
+                <a:solidFill>
+                  <a:srgbClr val="6A6E76"/>
+                </a:solidFill>
+                <a:latin typeface="Segoe UI"/>
+              </a:rPr>
+              <a:t>; padrão </a:t>
+            </a:r>
+            <a:r>
+              <a:rPr sz="1472" b="0" i="0">
+                <a:solidFill>
+                  <a:srgbClr val="6A6E76"/>
+                </a:solidFill>
+                <a:latin typeface="Consolas"/>
+              </a:rPr>
+              <a:t>high</a:t>
             </a:r>
           </a:p>
           <a:p>
@@ -9405,7 +9720,25 @@
                 </a:solidFill>
                 <a:latin typeface="Segoe UI"/>
               </a:rPr>
-              <a:t>—  O modelo responde **pedindo** uma chamada; o cliente executa e devolve o resultado</a:t>
+              <a:t>—  O modelo responde </a:t>
+            </a:r>
+            <a:r>
+              <a:rPr sz="1900" b="1" i="0">
+                <a:solidFill>
+                  <a:srgbClr val="16181D"/>
+                </a:solidFill>
+                <a:latin typeface="Segoe UI"/>
+              </a:rPr>
+              <a:t>pedindo</a:t>
+            </a:r>
+            <a:r>
+              <a:rPr sz="1900" b="0" i="0">
+                <a:solidFill>
+                  <a:srgbClr val="16181D"/>
+                </a:solidFill>
+                <a:latin typeface="Segoe UI"/>
+              </a:rPr>
+              <a:t> uma chamada; o cliente executa e devolve o resultado</a:t>
             </a:r>
           </a:p>
           <a:p>
@@ -9691,8 +10024,8 @@
         </p:nvSpPr>
         <p:spPr>
           <a:xfrm>
-            <a:off x="868680" y="5961888"/>
-            <a:ext cx="10454335" cy="274320"/>
+            <a:off x="1926798" y="5998464"/>
+            <a:ext cx="8338097" cy="274320"/>
           </a:xfrm>
           <a:prstGeom prst="rect">
             <a:avLst/>
@@ -9995,7 +10328,25 @@
                 </a:solidFill>
                 <a:latin typeface="Segoe UI"/>
               </a:rPr>
-              <a:t>—  É um **papel**, não um produto — o mesmo papel aparece nos três produtos da próxima seção</a:t>
+              <a:t>—  É um </a:t>
+            </a:r>
+            <a:r>
+              <a:rPr sz="1900" b="1" i="0">
+                <a:solidFill>
+                  <a:srgbClr val="16181D"/>
+                </a:solidFill>
+                <a:latin typeface="Segoe UI"/>
+              </a:rPr>
+              <a:t>papel</a:t>
+            </a:r>
+            <a:r>
+              <a:rPr sz="1900" b="0" i="0">
+                <a:solidFill>
+                  <a:srgbClr val="16181D"/>
+                </a:solidFill>
+                <a:latin typeface="Segoe UI"/>
+              </a:rPr>
+              <a:t>, não um produto — o mesmo papel aparece nos três produtos da próxima seção</a:t>
             </a:r>
           </a:p>
           <a:p>
@@ -10017,7 +10368,25 @@
                 </a:solidFill>
                 <a:latin typeface="Segoe UI"/>
               </a:rPr>
-              <a:t>—  No Claude Code, esse papel é descrito em texto, no `CLAUDE.md` do projeto</a:t>
+              <a:t>—  No Claude Code, esse papel é descrito em texto, no </a:t>
+            </a:r>
+            <a:r>
+              <a:rPr sz="1748" b="0" i="0">
+                <a:solidFill>
+                  <a:srgbClr val="16181D"/>
+                </a:solidFill>
+                <a:latin typeface="Consolas"/>
+              </a:rPr>
+              <a:t>CLAUDE.md</a:t>
+            </a:r>
+            <a:r>
+              <a:rPr sz="1900" b="0" i="0">
+                <a:solidFill>
+                  <a:srgbClr val="16181D"/>
+                </a:solidFill>
+                <a:latin typeface="Segoe UI"/>
+              </a:rPr>
+              <a:t> do projeto</a:t>
             </a:r>
           </a:p>
           <a:p>
@@ -10303,8 +10672,8 @@
         </p:nvSpPr>
         <p:spPr>
           <a:xfrm>
-            <a:off x="868680" y="5961888"/>
-            <a:ext cx="10454335" cy="274320"/>
+            <a:off x="1508966" y="5998464"/>
+            <a:ext cx="9173762" cy="274320"/>
           </a:xfrm>
           <a:prstGeom prst="rect">
             <a:avLst/>
@@ -10577,8 +10946,8 @@
         </p:nvSpPr>
         <p:spPr>
           <a:xfrm>
-            <a:off x="868680" y="5961888"/>
-            <a:ext cx="10454335" cy="274320"/>
+            <a:off x="1640003" y="5998464"/>
+            <a:ext cx="8911688" cy="274320"/>
           </a:xfrm>
           <a:prstGeom prst="rect">
             <a:avLst/>
@@ -11215,8 +11584,8 @@
         </p:nvSpPr>
         <p:spPr>
           <a:xfrm>
-            <a:off x="868680" y="5961888"/>
-            <a:ext cx="10454335" cy="274320"/>
+            <a:off x="1418084" y="5998464"/>
+            <a:ext cx="9355526" cy="274320"/>
           </a:xfrm>
           <a:prstGeom prst="rect">
             <a:avLst/>
@@ -11497,7 +11866,25 @@
                 </a:solidFill>
                 <a:latin typeface="Segoe UI"/>
               </a:rPr>
-              <a:t>—  **Chat** — a porta de entrada do pesquisador</a:t>
+              <a:t>—  </a:t>
+            </a:r>
+            <a:r>
+              <a:rPr sz="1900" b="1" i="0">
+                <a:solidFill>
+                  <a:srgbClr val="16181D"/>
+                </a:solidFill>
+                <a:latin typeface="Segoe UI"/>
+              </a:rPr>
+              <a:t>Chat</a:t>
+            </a:r>
+            <a:r>
+              <a:rPr sz="1900" b="0" i="0">
+                <a:solidFill>
+                  <a:srgbClr val="16181D"/>
+                </a:solidFill>
+                <a:latin typeface="Segoe UI"/>
+              </a:rPr>
+              <a:t> — a porta de entrada do pesquisador</a:t>
             </a:r>
           </a:p>
           <a:p>
@@ -11563,7 +11950,25 @@
                 </a:solidFill>
                 <a:latin typeface="Segoe UI"/>
               </a:rPr>
-              <a:t>—  **Cowork** — trabalho delegado sobre arquivos e tarefas</a:t>
+              <a:t>—  </a:t>
+            </a:r>
+            <a:r>
+              <a:rPr sz="1900" b="1" i="0">
+                <a:solidFill>
+                  <a:srgbClr val="16181D"/>
+                </a:solidFill>
+                <a:latin typeface="Segoe UI"/>
+              </a:rPr>
+              <a:t>Cowork</a:t>
+            </a:r>
+            <a:r>
+              <a:rPr sz="1900" b="0" i="0">
+                <a:solidFill>
+                  <a:srgbClr val="16181D"/>
+                </a:solidFill>
+                <a:latin typeface="Segoe UI"/>
+              </a:rPr>
+              <a:t> — trabalho delegado sobre arquivos e tarefas</a:t>
             </a:r>
           </a:p>
           <a:p>
@@ -11872,8 +12277,8 @@
         </p:nvSpPr>
         <p:spPr>
           <a:xfrm>
-            <a:off x="868680" y="5961888"/>
-            <a:ext cx="10454335" cy="274320"/>
+            <a:off x="2547423" y="5998464"/>
+            <a:ext cx="7096849" cy="274320"/>
           </a:xfrm>
           <a:prstGeom prst="rect">
             <a:avLst/>
@@ -12154,7 +12559,25 @@
                 </a:solidFill>
                 <a:latin typeface="Segoe UI"/>
               </a:rPr>
-              <a:t>—  **Code** — o agente dentro do repositório</a:t>
+              <a:t>—  </a:t>
+            </a:r>
+            <a:r>
+              <a:rPr sz="1900" b="1" i="0">
+                <a:solidFill>
+                  <a:srgbClr val="16181D"/>
+                </a:solidFill>
+                <a:latin typeface="Segoe UI"/>
+              </a:rPr>
+              <a:t>Code</a:t>
+            </a:r>
+            <a:r>
+              <a:rPr sz="1900" b="0" i="0">
+                <a:solidFill>
+                  <a:srgbClr val="16181D"/>
+                </a:solidFill>
+                <a:latin typeface="Segoe UI"/>
+              </a:rPr>
+              <a:t> — o agente dentro do repositório</a:t>
             </a:r>
           </a:p>
           <a:p>
@@ -12176,7 +12599,25 @@
                 </a:solidFill>
                 <a:latin typeface="Segoe UI"/>
               </a:rPr>
-              <a:t>·  `CLAUDE.md`, skills, material de apoio e subagents</a:t>
+              <a:t>·  </a:t>
+            </a:r>
+            <a:r>
+              <a:rPr sz="1472" b="0" i="0">
+                <a:solidFill>
+                  <a:srgbClr val="6A6E76"/>
+                </a:solidFill>
+                <a:latin typeface="Consolas"/>
+              </a:rPr>
+              <a:t>CLAUDE.md</a:t>
+            </a:r>
+            <a:r>
+              <a:rPr sz="1600" b="0" i="0">
+                <a:solidFill>
+                  <a:srgbClr val="6A6E76"/>
+                </a:solidFill>
+                <a:latin typeface="Segoe UI"/>
+              </a:rPr>
+              <a:t>, skills, material de apoio e subagents</a:t>
             </a:r>
           </a:p>
           <a:p>
@@ -12220,7 +12661,25 @@
                 </a:solidFill>
                 <a:latin typeface="Segoe UI"/>
               </a:rPr>
-              <a:t>—  **Hooks** — comando determinístico em torno de um núcleo estocástico</a:t>
+              <a:t>—  </a:t>
+            </a:r>
+            <a:r>
+              <a:rPr sz="1900" b="1" i="0">
+                <a:solidFill>
+                  <a:srgbClr val="16181D"/>
+                </a:solidFill>
+                <a:latin typeface="Segoe UI"/>
+              </a:rPr>
+              <a:t>Hooks</a:t>
+            </a:r>
+            <a:r>
+              <a:rPr sz="1900" b="0" i="0">
+                <a:solidFill>
+                  <a:srgbClr val="16181D"/>
+                </a:solidFill>
+                <a:latin typeface="Segoe UI"/>
+              </a:rPr>
+              <a:t> — comando determinístico em torno de um núcleo estocástico</a:t>
             </a:r>
           </a:p>
           <a:p>
@@ -12264,7 +12723,25 @@
                 </a:solidFill>
                 <a:latin typeface="Segoe UI"/>
               </a:rPr>
-              <a:t>—  **Checkpointing** — desfazer o que o agente fez</a:t>
+              <a:t>—  </a:t>
+            </a:r>
+            <a:r>
+              <a:rPr sz="1900" b="1" i="0">
+                <a:solidFill>
+                  <a:srgbClr val="16181D"/>
+                </a:solidFill>
+                <a:latin typeface="Segoe UI"/>
+              </a:rPr>
+              <a:t>Checkpointing</a:t>
+            </a:r>
+            <a:r>
+              <a:rPr sz="1900" b="0" i="0">
+                <a:solidFill>
+                  <a:srgbClr val="16181D"/>
+                </a:solidFill>
+                <a:latin typeface="Segoe UI"/>
+              </a:rPr>
+              <a:t> — desfazer o que o agente fez</a:t>
             </a:r>
           </a:p>
         </p:txBody>
@@ -12651,7 +13128,16 @@
                 </a:solidFill>
                 <a:latin typeface="Segoe UI"/>
               </a:rPr>
-              <a:t>—  **Entender artefato herdado**</a:t>
+              <a:t>—  </a:t>
+            </a:r>
+            <a:r>
+              <a:rPr sz="1900" b="1" i="0">
+                <a:solidFill>
+                  <a:srgbClr val="16181D"/>
+                </a:solidFill>
+                <a:latin typeface="Segoe UI"/>
+              </a:rPr>
+              <a:t>Entender artefato herdado</a:t>
             </a:r>
           </a:p>
           <a:p>
@@ -12717,7 +13203,16 @@
                 </a:solidFill>
                 <a:latin typeface="Segoe UI"/>
               </a:rPr>
-              <a:t>—  **Analisar resultado experimental**</a:t>
+              <a:t>—  </a:t>
+            </a:r>
+            <a:r>
+              <a:rPr sz="1900" b="1" i="0">
+                <a:solidFill>
+                  <a:srgbClr val="16181D"/>
+                </a:solidFill>
+                <a:latin typeface="Segoe UI"/>
+              </a:rPr>
+              <a:t>Analisar resultado experimental</a:t>
             </a:r>
           </a:p>
           <a:p>
@@ -13011,7 +13506,16 @@
                 </a:solidFill>
                 <a:latin typeface="Segoe UI"/>
               </a:rPr>
-              <a:t>—  **Levantar e organizar literatura**</a:t>
+              <a:t>—  </a:t>
+            </a:r>
+            <a:r>
+              <a:rPr sz="1900" b="1" i="0">
+                <a:solidFill>
+                  <a:srgbClr val="16181D"/>
+                </a:solidFill>
+                <a:latin typeface="Segoe UI"/>
+              </a:rPr>
+              <a:t>Levantar e organizar literatura</a:t>
             </a:r>
           </a:p>
           <a:p>
@@ -13077,7 +13581,25 @@
                 </a:solidFill>
                 <a:latin typeface="Segoe UI"/>
               </a:rPr>
-              <a:t>—  **Apoiar a escrita** — estrutura, clareza, revisão de argumento</a:t>
+              <a:t>—  </a:t>
+            </a:r>
+            <a:r>
+              <a:rPr sz="1900" b="1" i="0">
+                <a:solidFill>
+                  <a:srgbClr val="16181D"/>
+                </a:solidFill>
+                <a:latin typeface="Segoe UI"/>
+              </a:rPr>
+              <a:t>Apoiar a escrita</a:t>
+            </a:r>
+            <a:r>
+              <a:rPr sz="1900" b="0" i="0">
+                <a:solidFill>
+                  <a:srgbClr val="16181D"/>
+                </a:solidFill>
+                <a:latin typeface="Segoe UI"/>
+              </a:rPr>
+              <a:t> — estrutura, clareza, revisão de argumento</a:t>
             </a:r>
           </a:p>
           <a:p>
@@ -13099,7 +13621,16 @@
                 </a:solidFill>
                 <a:latin typeface="Segoe UI"/>
               </a:rPr>
-              <a:t>—  Atravessando os quatro: **reprodutibilidade**</a:t>
+              <a:t>—  Atravessando os quatro: </a:t>
+            </a:r>
+            <a:r>
+              <a:rPr sz="1900" b="1" i="0">
+                <a:solidFill>
+                  <a:srgbClr val="16181D"/>
+                </a:solidFill>
+                <a:latin typeface="Segoe UI"/>
+              </a:rPr>
+              <a:t>reprodutibilidade</a:t>
             </a:r>
           </a:p>
           <a:p>
@@ -13415,7 +13946,25 @@
                 </a:solidFill>
                 <a:latin typeface="Segoe UI"/>
               </a:rPr>
-              <a:t>—  **Plan mode**: o agente mostra o plano e espera. Você lê antes de qualquer escrita</a:t>
+              <a:t>—  </a:t>
+            </a:r>
+            <a:r>
+              <a:rPr sz="1900" b="1" i="0">
+                <a:solidFill>
+                  <a:srgbClr val="16181D"/>
+                </a:solidFill>
+                <a:latin typeface="Segoe UI"/>
+              </a:rPr>
+              <a:t>Plan mode</a:t>
+            </a:r>
+            <a:r>
+              <a:rPr sz="1900" b="0" i="0">
+                <a:solidFill>
+                  <a:srgbClr val="16181D"/>
+                </a:solidFill>
+                <a:latin typeface="Segoe UI"/>
+              </a:rPr>
+              <a:t>: o agente mostra o plano e espera. Você lê antes de qualquer escrita</a:t>
             </a:r>
           </a:p>
           <a:p>
@@ -13687,7 +14236,16 @@
                 </a:solidFill>
                 <a:latin typeface="Segoe UI"/>
               </a:rPr>
-              <a:t>—  **Dado técnico**</a:t>
+              <a:t>—  </a:t>
+            </a:r>
+            <a:r>
+              <a:rPr sz="1900" b="1" i="0">
+                <a:solidFill>
+                  <a:srgbClr val="16181D"/>
+                </a:solidFill>
+                <a:latin typeface="Segoe UI"/>
+              </a:rPr>
+              <a:t>Dado técnico</a:t>
             </a:r>
           </a:p>
           <a:p>
@@ -13753,7 +14311,16 @@
                 </a:solidFill>
                 <a:latin typeface="Segoe UI"/>
               </a:rPr>
-              <a:t>—  **Dado de pessoa**</a:t>
+              <a:t>—  </a:t>
+            </a:r>
+            <a:r>
+              <a:rPr sz="1900" b="1" i="0">
+                <a:solidFill>
+                  <a:srgbClr val="16181D"/>
+                </a:solidFill>
+                <a:latin typeface="Segoe UI"/>
+              </a:rPr>
+              <a:t>Dado de pessoa</a:t>
             </a:r>
           </a:p>
           <a:p>
@@ -15380,7 +15947,16 @@
                 </a:solidFill>
                 <a:latin typeface="Segoe UI"/>
               </a:rPr>
-              <a:t>—  Documentação de Agent Skills e do formato `SKILL.md`</a:t>
+              <a:t>—  Documentação de Agent Skills e do formato </a:t>
+            </a:r>
+            <a:r>
+              <a:rPr sz="1748" b="0" i="0">
+                <a:solidFill>
+                  <a:srgbClr val="16181D"/>
+                </a:solidFill>
+                <a:latin typeface="Consolas"/>
+              </a:rPr>
+              <a:t>SKILL.md</a:t>
             </a:r>
           </a:p>
           <a:p>
@@ -15672,8 +16248,8 @@
         </p:blipFill>
         <p:spPr>
           <a:xfrm>
-            <a:off x="1226525" y="1609343"/>
-            <a:ext cx="9738643" cy="4334256"/>
+            <a:off x="1170556" y="1609343"/>
+            <a:ext cx="9850581" cy="4334256"/>
           </a:xfrm>
           <a:prstGeom prst="rect">
             <a:avLst/>
@@ -15688,8 +16264,8 @@
         </p:nvSpPr>
         <p:spPr>
           <a:xfrm>
-            <a:off x="868680" y="5961888"/>
-            <a:ext cx="10454335" cy="274320"/>
+            <a:off x="1170556" y="5998464"/>
+            <a:ext cx="9850581" cy="274320"/>
           </a:xfrm>
           <a:prstGeom prst="rect">
             <a:avLst/>
@@ -15939,7 +16515,7 @@
         <p:spPr>
           <a:xfrm>
             <a:off x="868680" y="1609343"/>
-            <a:ext cx="3744047" cy="4562856"/>
+            <a:ext cx="4162220" cy="4562856"/>
           </a:xfrm>
           <a:prstGeom prst="rect">
             <a:avLst/>
@@ -15992,7 +16568,52 @@
                 </a:solidFill>
                 <a:latin typeface="Segoe UI"/>
               </a:rPr>
-              <a:t>—  É a unidade de **custo**, de **limite** e de **latência**</a:t>
+              <a:t>—  É a unidade de </a:t>
+            </a:r>
+            <a:r>
+              <a:rPr sz="1900" b="1" i="0">
+                <a:solidFill>
+                  <a:srgbClr val="16181D"/>
+                </a:solidFill>
+                <a:latin typeface="Segoe UI"/>
+              </a:rPr>
+              <a:t>custo</a:t>
+            </a:r>
+            <a:r>
+              <a:rPr sz="1900" b="0" i="0">
+                <a:solidFill>
+                  <a:srgbClr val="16181D"/>
+                </a:solidFill>
+                <a:latin typeface="Segoe UI"/>
+              </a:rPr>
+              <a:t>, de </a:t>
+            </a:r>
+            <a:r>
+              <a:rPr sz="1900" b="1" i="0">
+                <a:solidFill>
+                  <a:srgbClr val="16181D"/>
+                </a:solidFill>
+                <a:latin typeface="Segoe UI"/>
+              </a:rPr>
+              <a:t>limite</a:t>
+            </a:r>
+            <a:r>
+              <a:rPr sz="1900" b="0" i="0">
+                <a:solidFill>
+                  <a:srgbClr val="16181D"/>
+                </a:solidFill>
+                <a:latin typeface="Segoe UI"/>
+              </a:rPr>
+              <a:t> e de </a:t>
+            </a:r>
+            <a:r>
+              <a:rPr sz="1900" b="1" i="0">
+                <a:solidFill>
+                  <a:srgbClr val="16181D"/>
+                </a:solidFill>
+                <a:latin typeface="Segoe UI"/>
+              </a:rPr>
+              <a:t>latência</a:t>
             </a:r>
           </a:p>
           <a:p>
@@ -16035,8 +16656,8 @@
         </p:blipFill>
         <p:spPr>
           <a:xfrm>
-            <a:off x="4841327" y="2341344"/>
-            <a:ext cx="6481687" cy="2870254"/>
+            <a:off x="5259500" y="2433933"/>
+            <a:ext cx="6063514" cy="2685076"/>
           </a:xfrm>
           <a:prstGeom prst="rect">
             <a:avLst/>
@@ -16051,8 +16672,8 @@
         </p:nvSpPr>
         <p:spPr>
           <a:xfrm>
-            <a:off x="4841327" y="5961888"/>
-            <a:ext cx="6481687" cy="274320"/>
+            <a:off x="5259500" y="5173874"/>
+            <a:ext cx="6063514" cy="274320"/>
           </a:xfrm>
           <a:prstGeom prst="rect">
             <a:avLst/>
@@ -16663,8 +17284,8 @@
         </p:nvSpPr>
         <p:spPr>
           <a:xfrm>
-            <a:off x="868680" y="5961888"/>
-            <a:ext cx="10454335" cy="274320"/>
+            <a:off x="1050681" y="5998464"/>
+            <a:ext cx="10090331" cy="274320"/>
           </a:xfrm>
           <a:prstGeom prst="rect">
             <a:avLst/>
@@ -16945,7 +17566,25 @@
                 </a:solidFill>
                 <a:latin typeface="Segoe UI"/>
               </a:rPr>
-              <a:t>—  **Pré-treino**: prever texto em larga escala. Produz capacidade bruta</a:t>
+              <a:t>—  </a:t>
+            </a:r>
+            <a:r>
+              <a:rPr sz="1900" b="1" i="0">
+                <a:solidFill>
+                  <a:srgbClr val="16181D"/>
+                </a:solidFill>
+                <a:latin typeface="Segoe UI"/>
+              </a:rPr>
+              <a:t>Pré-treino</a:t>
+            </a:r>
+            <a:r>
+              <a:rPr sz="1900" b="0" i="0">
+                <a:solidFill>
+                  <a:srgbClr val="16181D"/>
+                </a:solidFill>
+                <a:latin typeface="Segoe UI"/>
+              </a:rPr>
+              <a:t>: prever texto em larga escala. Produz capacidade bruta</a:t>
             </a:r>
           </a:p>
           <a:p>
@@ -16967,7 +17606,25 @@
                 </a:solidFill>
                 <a:latin typeface="Segoe UI"/>
               </a:rPr>
-              <a:t>—  **Post-training**: alinhar a modelo de assistente útil e seguro</a:t>
+              <a:t>—  </a:t>
+            </a:r>
+            <a:r>
+              <a:rPr sz="1900" b="1" i="0">
+                <a:solidFill>
+                  <a:srgbClr val="16181D"/>
+                </a:solidFill>
+                <a:latin typeface="Segoe UI"/>
+              </a:rPr>
+              <a:t>Post-training</a:t>
+            </a:r>
+            <a:r>
+              <a:rPr sz="1900" b="0" i="0">
+                <a:solidFill>
+                  <a:srgbClr val="16181D"/>
+                </a:solidFill>
+                <a:latin typeface="Segoe UI"/>
+              </a:rPr>
+              <a:t>: alinhar a modelo de assistente útil e seguro</a:t>
             </a:r>
           </a:p>
           <a:p>
@@ -17033,7 +17690,25 @@
                 </a:solidFill>
                 <a:latin typeface="Segoe UI"/>
               </a:rPr>
-              <a:t>—  **Amostragem e temperatura**: mesmo prompt, saídas diferentes</a:t>
+              <a:t>—  </a:t>
+            </a:r>
+            <a:r>
+              <a:rPr sz="1900" b="1" i="0">
+                <a:solidFill>
+                  <a:srgbClr val="16181D"/>
+                </a:solidFill>
+                <a:latin typeface="Segoe UI"/>
+              </a:rPr>
+              <a:t>Amostragem e temperatura</a:t>
+            </a:r>
+            <a:r>
+              <a:rPr sz="1900" b="0" i="0">
+                <a:solidFill>
+                  <a:srgbClr val="16181D"/>
+                </a:solidFill>
+                <a:latin typeface="Segoe UI"/>
+              </a:rPr>
+              <a:t>: mesmo prompt, saídas diferentes</a:t>
             </a:r>
           </a:p>
           <a:p>

--- a/slides/saida/aula-1.pptx
+++ b/slides/saida/aula-1.pptx
@@ -45,6 +45,8 @@
     <p:sldId id="293" r:id="rId45"/>
     <p:sldId id="294" r:id="rId46"/>
     <p:sldId id="295" r:id="rId47"/>
+    <p:sldId id="296" r:id="rId48"/>
+    <p:sldId id="297" r:id="rId49"/>
   </p:sldIdLst>
   <p:sldSz cx="12191695" cy="6858000" type="screen4x3"/>
   <p:notesSz cx="6858000" cy="9144000"/>
@@ -611,7 +613,7 @@
           <a:lstStyle/>
           <a:p>
             <a:r>
-              <a:t>A maior parte do que o modelo lê não foi escrita naquele turno. Este é o slide mais importante da aula.</a:t>
+              <a:t>A pergunta que fechou o Bloco 1: se o modelo não guarda estado e não executa nada, quem faz o resto? Esta figura é a resposta. O modelo é uma função de texto para texto; a sessão, a memória, os arquivos e as ferramentas são todos do harness. Termo oficial, não apelido: "Claude Code is the harness; Claude is the model inside it".</a:t>
             </a:r>
           </a:p>
         </p:txBody>
@@ -681,7 +683,7 @@
           <a:lstStyle/>
           <a:p>
             <a:r>
-              <a:t>Números do simulador oficial. Se alguém perguntar de onde vêm, a fonte está no rodapé do slide anterior.</a:t>
+              <a:t>Cada linha aqui é um bloco desta aula. Dizer isso em voz alta: o resto da aula é detalhar o que esta caixa faz. Notar que o portão de permissões é do harness — é justamente por isso que ele é confiável.</a:t>
             </a:r>
           </a:p>
         </p:txBody>
@@ -751,7 +753,7 @@
           <a:lstStyle/>
           <a:p>
             <a:r>
-              <a:t>Custo sobe, latência sobe, e o relevante começa a competir com o histórico. É a explicação mecânica de "conversa longa degrada".</a:t>
+              <a:t>A maior parte do que o modelo lê não foi escrita naquele turno. Este é o slide mais importante da aula.</a:t>
             </a:r>
           </a:p>
         </p:txBody>
@@ -821,7 +823,7 @@
           <a:lstStyle/>
           <a:p>
             <a:r>
-              <a:t>Honestidade: o resumo perde detalhe. Daí a decisão consciente entre compactar e abrir sessão nova.</a:t>
+              <a:t>Números do simulador oficial. Se alguém perguntar de onde vêm, a fonte está no rodapé do slide anterior.</a:t>
             </a:r>
           </a:p>
         </p:txBody>
@@ -891,7 +893,7 @@
           <a:lstStyle/>
           <a:p>
             <a:r>
-              <a:t>É a resposta prática à ausência de estado do Bloco 1.</a:t>
+              <a:t>Custo sobe, latência sobe, e o relevante começa a competir com o histórico. É a explicação mecânica de "conversa longa degrada".</a:t>
             </a:r>
           </a:p>
         </p:txBody>
@@ -961,7 +963,7 @@
           <a:lstStyle/>
           <a:p>
             <a:r>
-              <a:t>Não é botão de "ficar mais inteligente". É alocação de orçamento.</a:t>
+              <a:t>Honestidade: o resumo perde detalhe. Daí a decisão consciente entre compactar e abrir sessão nova.</a:t>
             </a:r>
           </a:p>
         </p:txBody>
@@ -1031,7 +1033,7 @@
           <a:lstStyle/>
           <a:p>
             <a:r>
-              <a:t>"O modelo nunca executa nada — ele pede." Para este público, é a frase que destrava o bloco inteiro.</a:t>
+              <a:t>É a resposta prática à ausência de estado do Bloco 1.</a:t>
             </a:r>
           </a:p>
         </p:txBody>
@@ -1101,7 +1103,7 @@
           <a:lstStyle/>
           <a:p>
             <a:r>
-              <a:t>Mapear cada etapa no que acabou de ser descrito. O laço encerra quando o modelo devolve texto em vez de pedir ferramenta.</a:t>
+              <a:t>Não é botão de "ficar mais inteligente". É alocação de orçamento.</a:t>
             </a:r>
           </a:p>
         </p:txBody>
@@ -1171,7 +1173,7 @@
           <a:lstStyle/>
           <a:p>
             <a:r>
-              <a:t>Ponte explícita para a prática.</a:t>
+              <a:t>"O modelo nunca executa nada — ele pede." Para este público, é a frase que destrava o bloco inteiro.</a:t>
             </a:r>
           </a:p>
         </p:txBody>
@@ -1241,7 +1243,7 @@
           <a:lstStyle/>
           <a:p>
             <a:r>
-              <a:t>Procedimento no SKILL.md, configuração nos arquivos de apoio. É o que separa quem reusa skills de quem continua colando prompt.</a:t>
+              <a:t>Mapear cada etapa no que acabou de ser descrito. Quem percorre este laço é o harness: ele é que chama o modelo, executa o que foi pedido e decide se roda outra volta. O laço encerra quando o modelo devolve texto em vez de pedir ferramenta.</a:t>
             </a:r>
           </a:p>
         </p:txBody>
@@ -1381,7 +1383,7 @@
           <a:lstStyle/>
           <a:p>
             <a:r>
-              <a:t>A economia fica visível em vez de afirmada. É a resposta direta ao problema do Bloco 2.</a:t>
+              <a:t>Ponte explícita para a prática.</a:t>
             </a:r>
           </a:p>
         </p:txBody>
@@ -1451,7 +1453,7 @@
           <a:lstStyle/>
           <a:p>
             <a:r>
-              <a:t>Nomes de modelo mudam; o critério capacidade × latência × custo não. Dizer isso em voz alta protege o material do tempo.</a:t>
+              <a:t>Procedimento no SKILL.md, configuração nos arquivos de apoio. É o que separa quem reusa skills de quem continua colando prompt.</a:t>
             </a:r>
           </a:p>
         </p:txBody>
@@ -1521,7 +1523,7 @@
           <a:lstStyle/>
           <a:p>
             <a:r>
-              <a:t>Quando usar qual: pensar no Chat, delegar no Cowork, executar no repositório com o Code.</a:t>
+              <a:t>A economia fica visível em vez de afirmada. É a resposta direta ao problema do Bloco 2.</a:t>
             </a:r>
           </a:p>
         </p:txBody>
@@ -1591,7 +1593,7 @@
           <a:lstStyle/>
           <a:p>
             <a:r>
-              <a:t>Este é o slide que o aluno fotografa. Deixar tempo para isso.</a:t>
+              <a:t>Retomar o Bloco 2 com uma frase: Chat, Cowork e Code são três harnesses sobre o mesmo modelo. O que muda entre eles é o que o harness faz por você, não a inteligência por trás. E nomes de modelo mudam; o critério capacidade × latência × custo não — dizer isso em voz alta protege o material do tempo.</a:t>
             </a:r>
           </a:p>
         </p:txBody>
@@ -1661,7 +1663,7 @@
           <a:lstStyle/>
           <a:p>
             <a:r>
-              <a:t>O bloco é organizado por tipo de trabalho justamente porque o laboratório tem domínios muito diferentes. Ninguém precisa traduzir do domínio alheio para o seu.</a:t>
+              <a:t>Quando usar qual: pensar no Chat, delegar no Cowork, executar no repositório com o Code.</a:t>
             </a:r>
           </a:p>
         </p:txBody>
@@ -1731,7 +1733,7 @@
           <a:lstStyle/>
           <a:p>
             <a:r>
-              <a:t>É aqui que hooks reaparecem: o jeito determinístico de garantir isso em torno de um modelo que não é determinístico.</a:t>
+              <a:t>Este é o slide que o aluno fotografa. Deixar tempo para isso.</a:t>
             </a:r>
           </a:p>
         </p:txBody>
@@ -1801,7 +1803,7 @@
           <a:lstStyle/>
           <a:p>
             <a:r>
-              <a:t>Vocês vão usar plan mode na Aula 2, no primeiro passo.</a:t>
+              <a:t>O bloco é organizado por tipo de trabalho justamente porque o laboratório tem domínios muito diferentes. Ninguém precisa traduzir do domínio alheio para o seu.</a:t>
             </a:r>
           </a:p>
         </p:txBody>
@@ -1871,7 +1873,7 @@
           <a:lstStyle/>
           <a:p>
             <a:r>
-              <a:t>Consultar a política oficial de privacidade e uso de dados, não a opinião de quem está no palco. Este slide é o mais importante do bloco para quem pesquisa saúde e educação.</a:t>
+              <a:t>É aqui que hooks reaparecem: o jeito determinístico de garantir isso em torno de um modelo que não é determinístico.</a:t>
             </a:r>
           </a:p>
         </p:txBody>
@@ -1941,7 +1943,7 @@
           <a:lstStyle/>
           <a:p>
             <a:r>
-              <a:t>Deixar este slide no ar por alguns segundos a mais. É o único ponto da aula sem margem para interpretação.</a:t>
+              <a:t>Vocês vão usar plan mode na Aula 2, no primeiro passo.</a:t>
             </a:r>
           </a:p>
         </p:txBody>
@@ -2011,7 +2013,7 @@
           <a:lstStyle/>
           <a:p>
             <a:r>
-              <a:t>Nada assinado por você entra sem você ter verificado.</a:t>
+              <a:t>Consultar a política oficial de privacidade e uso de dados, não a opinião de quem está no palco. Este slide é o mais importante do bloco para quem pesquisa saúde e educação.</a:t>
             </a:r>
           </a:p>
         </p:txBody>
@@ -2081,7 +2083,7 @@
           <a:lstStyle/>
           <a:p>
             <a:r>
-              <a:t>Este slide reaparece no início de cada bloco, com o item da vez destacado. É a barra de progresso conceitual da aula.</a:t>
+              <a:t>Este slide reaparece no início de cada bloco, com o item da vez destacado. É a barra de progresso conceitual da aula. Adiantar uma frase: tudo isto acontece dentro de uma aplicação, o harness, que é o primeiro assunto do próximo bloco.</a:t>
             </a:r>
           </a:p>
         </p:txBody>
@@ -2151,7 +2153,7 @@
           <a:lstStyle/>
           <a:p>
             <a:r>
-              <a:t>Ponte para a Aula 2 e cobrança do pré-requisito. Repetir que o pré-requisito é o que devolve tempo real de prática.</a:t>
+              <a:t>Deixar este slide no ar por alguns segundos a mais. É o único ponto da aula sem margem para interpretação.</a:t>
             </a:r>
           </a:p>
         </p:txBody>
@@ -2221,6 +2223,146 @@
           <a:lstStyle/>
           <a:p>
             <a:r>
+              <a:t>Nada assinado por você entra sem você ter verificado.</a:t>
+            </a:r>
+          </a:p>
+        </p:txBody>
+      </p:sp>
+      <p:sp>
+        <p:nvSpPr>
+          <p:cNvPr id="4" name="Slide Number Placeholder 3"/>
+          <p:cNvSpPr>
+            <a:spLocks noGrp="1"/>
+          </p:cNvSpPr>
+          <p:nvPr>
+            <p:ph type="sldNum" idx="5" sz="quarter"/>
+          </p:nvPr>
+        </p:nvSpPr>
+        <p:spPr/>
+      </p:sp>
+    </p:spTree>
+  </p:cSld>
+  <p:clrMapOvr>
+    <a:masterClrMapping/>
+  </p:clrMapOvr>
+</p:notes>
+</file>
+
+<file path=ppt/notesSlides/notesSlide32.xml><?xml version="1.0" encoding="utf-8"?>
+<p:notes xmlns:a="http://schemas.openxmlformats.org/drawingml/2006/main" xmlns:p="http://schemas.openxmlformats.org/presentationml/2006/main" xmlns:r="http://schemas.openxmlformats.org/officeDocument/2006/relationships">
+  <p:cSld>
+    <p:spTree>
+      <p:nvGrpSpPr>
+        <p:cNvPr id="1" name=""/>
+        <p:cNvGrpSpPr/>
+        <p:nvPr/>
+      </p:nvGrpSpPr>
+      <p:grpSpPr>
+        <a:xfrm>
+          <a:off x="0" y="0"/>
+          <a:ext cx="0" cy="0"/>
+          <a:chOff x="0" y="0"/>
+          <a:chExt cx="0" cy="0"/>
+        </a:xfrm>
+      </p:grpSpPr>
+      <p:sp>
+        <p:nvSpPr>
+          <p:cNvPr id="2" name="Slide Image Placeholder 1"/>
+          <p:cNvSpPr>
+            <a:spLocks noGrp="1"/>
+          </p:cNvSpPr>
+          <p:nvPr>
+            <p:ph type="sldImg" idx="2"/>
+          </p:nvPr>
+        </p:nvSpPr>
+        <p:spPr/>
+      </p:sp>
+      <p:sp>
+        <p:nvSpPr>
+          <p:cNvPr id="3" name="Notes Placeholder 2"/>
+          <p:cNvSpPr>
+            <a:spLocks noGrp="1"/>
+          </p:cNvSpPr>
+          <p:nvPr>
+            <p:ph type="body" idx="3" sz="quarter"/>
+          </p:nvPr>
+        </p:nvSpPr>
+        <p:spPr/>
+        <p:txBody>
+          <a:bodyPr/>
+          <a:lstStyle/>
+          <a:p>
+            <a:r>
+              <a:t>Ponte para a Aula 2 e cobrança do pré-requisito. Repetir que o pré-requisito é o que devolve tempo real de prática.</a:t>
+            </a:r>
+          </a:p>
+        </p:txBody>
+      </p:sp>
+      <p:sp>
+        <p:nvSpPr>
+          <p:cNvPr id="4" name="Slide Number Placeholder 3"/>
+          <p:cNvSpPr>
+            <a:spLocks noGrp="1"/>
+          </p:cNvSpPr>
+          <p:nvPr>
+            <p:ph type="sldNum" idx="5" sz="quarter"/>
+          </p:nvPr>
+        </p:nvSpPr>
+        <p:spPr/>
+      </p:sp>
+    </p:spTree>
+  </p:cSld>
+  <p:clrMapOvr>
+    <a:masterClrMapping/>
+  </p:clrMapOvr>
+</p:notes>
+</file>
+
+<file path=ppt/notesSlides/notesSlide33.xml><?xml version="1.0" encoding="utf-8"?>
+<p:notes xmlns:a="http://schemas.openxmlformats.org/drawingml/2006/main" xmlns:p="http://schemas.openxmlformats.org/presentationml/2006/main" xmlns:r="http://schemas.openxmlformats.org/officeDocument/2006/relationships">
+  <p:cSld>
+    <p:spTree>
+      <p:nvGrpSpPr>
+        <p:cNvPr id="1" name=""/>
+        <p:cNvGrpSpPr/>
+        <p:nvPr/>
+      </p:nvGrpSpPr>
+      <p:grpSpPr>
+        <a:xfrm>
+          <a:off x="0" y="0"/>
+          <a:ext cx="0" cy="0"/>
+          <a:chOff x="0" y="0"/>
+          <a:chExt cx="0" cy="0"/>
+        </a:xfrm>
+      </p:grpSpPr>
+      <p:sp>
+        <p:nvSpPr>
+          <p:cNvPr id="2" name="Slide Image Placeholder 1"/>
+          <p:cNvSpPr>
+            <a:spLocks noGrp="1"/>
+          </p:cNvSpPr>
+          <p:nvPr>
+            <p:ph type="sldImg" idx="2"/>
+          </p:nvPr>
+        </p:nvSpPr>
+        <p:spPr/>
+      </p:sp>
+      <p:sp>
+        <p:nvSpPr>
+          <p:cNvPr id="3" name="Notes Placeholder 2"/>
+          <p:cNvSpPr>
+            <a:spLocks noGrp="1"/>
+          </p:cNvSpPr>
+          <p:nvPr>
+            <p:ph type="body" idx="3" sz="quarter"/>
+          </p:nvPr>
+        </p:nvSpPr>
+        <p:spPr/>
+        <p:txBody>
+          <a:bodyPr/>
+          <a:lstStyle/>
+          <a:p>
+            <a:r>
               <a:t>Deixar aberto durante as perguntas.</a:t>
             </a:r>
           </a:p>
@@ -2641,7 +2783,7 @@
           <a:lstStyle/>
           <a:p>
             <a:r>
-              <a:t>Fecha o bloco. Cada uma volta adiante: alucinação no Bloco 5, data de corte no tool use, ausência de estado já no Bloco 2.</a:t>
+              <a:t>Fecha o bloco. Cada uma volta adiante: alucinação no Bloco 5, data de corte no tool use, ausência de estado já no próximo slide. Deixar a pergunta no ar antes de virar: se o modelo não guarda nada e não executa nada, quem faz o resto?</a:t>
             </a:r>
           </a:p>
         </p:txBody>
@@ -6677,7 +6819,7 @@
                 </a:solidFill>
                 <a:latin typeface="Georgia"/>
               </a:rPr>
-              <a:t>O que é enviado a cada turno</a:t>
+              <a:t>Você não conversa com o modelo</a:t>
             </a:r>
           </a:p>
         </p:txBody>
@@ -6728,7 +6870,7 @@
       </p:sp>
       <p:pic>
         <p:nvPicPr>
-          <p:cNvPr id="4" name="Picture 3" descr="orcamento-janela.png"/>
+          <p:cNvPr id="4" name="Picture 3" descr="harness.png"/>
           <p:cNvPicPr>
             <a:picLocks noChangeAspect="1"/>
           </p:cNvPicPr>
@@ -6742,8 +6884,8 @@
         </p:blipFill>
         <p:spPr>
           <a:xfrm>
-            <a:off x="1357689" y="1609343"/>
-            <a:ext cx="9476315" cy="4334256"/>
+            <a:off x="1363738" y="1609343"/>
+            <a:ext cx="9464217" cy="4334256"/>
           </a:xfrm>
           <a:prstGeom prst="rect">
             <a:avLst/>
@@ -6758,8 +6900,8 @@
         </p:nvSpPr>
         <p:spPr>
           <a:xfrm>
-            <a:off x="1357689" y="5998464"/>
-            <a:ext cx="9476315" cy="274320"/>
+            <a:off x="1363738" y="5998464"/>
+            <a:ext cx="9464217" cy="274320"/>
           </a:xfrm>
           <a:prstGeom prst="rect">
             <a:avLst/>
@@ -6790,7 +6932,7 @@
                 </a:solidFill>
                 <a:latin typeface="Segoe UI"/>
               </a:rPr>
-              <a:t>Elaboração própria a partir do simulador de janela de contexto da documentação oficial do Claude Code (set. 2026).</a:t>
+              <a:t>Elaboração própria a partir do glossário da documentação oficial do Claude Code (set. 2026).</a:t>
             </a:r>
           </a:p>
         </p:txBody>
@@ -6951,7 +7093,7 @@
                 </a:solidFill>
                 <a:latin typeface="Georgia"/>
               </a:rPr>
-              <a:t>A janela é um orçamento, não uma memória</a:t>
+              <a:t>O que o harness faz por você</a:t>
             </a:r>
           </a:p>
         </p:txBody>
@@ -7040,7 +7182,43 @@
                 </a:solidFill>
                 <a:latin typeface="Segoe UI"/>
               </a:rPr>
-              <a:t>—  200 mil tokens no padrão; 1 milhão em modelos de janela estendida</a:t>
+              <a:t>—  </a:t>
+            </a:r>
+            <a:r>
+              <a:rPr sz="1900" b="1" i="0">
+                <a:solidFill>
+                  <a:srgbClr val="16181D"/>
+                </a:solidFill>
+                <a:latin typeface="Segoe UI"/>
+              </a:rPr>
+              <a:t>Monta a requisição</a:t>
+            </a:r>
+            <a:r>
+              <a:rPr sz="1900" b="0" i="0">
+                <a:solidFill>
+                  <a:srgbClr val="16181D"/>
+                </a:solidFill>
+                <a:latin typeface="Segoe UI"/>
+              </a:rPr>
+              <a:t> — injeta system prompt, </a:t>
+            </a:r>
+            <a:r>
+              <a:rPr sz="1748" b="0" i="0">
+                <a:solidFill>
+                  <a:srgbClr val="16181D"/>
+                </a:solidFill>
+                <a:latin typeface="Consolas"/>
+              </a:rPr>
+              <a:t>CLAUDE.md</a:t>
+            </a:r>
+            <a:r>
+              <a:rPr sz="1900" b="0" i="0">
+                <a:solidFill>
+                  <a:srgbClr val="16181D"/>
+                </a:solidFill>
+                <a:latin typeface="Segoe UI"/>
+              </a:rPr>
+              <a:t> e descrições de skills antes do seu texto</a:t>
             </a:r>
           </a:p>
           <a:p>
@@ -7062,7 +7240,7 @@
                 </a:solidFill>
                 <a:latin typeface="Segoe UI"/>
               </a:rPr>
-              <a:t>—  Não é "quanto ele lembra": é quanto cabe </a:t>
+              <a:t>—  </a:t>
             </a:r>
             <a:r>
               <a:rPr sz="1900" b="1" i="0">
@@ -7071,7 +7249,7 @@
                 </a:solidFill>
                 <a:latin typeface="Segoe UI"/>
               </a:rPr>
-              <a:t>nesta</a:t>
+              <a:t>Mantém a sessão</a:t>
             </a:r>
             <a:r>
               <a:rPr sz="1900" b="0" i="0">
@@ -7080,7 +7258,7 @@
                 </a:solidFill>
                 <a:latin typeface="Segoe UI"/>
               </a:rPr>
-              <a:t> requisição</a:t>
+              <a:t> — reenvia o histórico a cada turno, porque o modelo não guarda nada</a:t>
             </a:r>
           </a:p>
           <a:p>
@@ -7102,51 +7280,105 @@
                 </a:solidFill>
                 <a:latin typeface="Segoe UI"/>
               </a:rPr>
-              <a:t>—  Cada leitura de arquivo debita do mesmo orçamento</a:t>
-            </a:r>
-          </a:p>
-          <a:p>
-            <a:pPr lvl="1">
+              <a:t>—  </a:t>
+            </a:r>
+            <a:r>
+              <a:rPr sz="1900" b="1" i="0">
+                <a:solidFill>
+                  <a:srgbClr val="16181D"/>
+                </a:solidFill>
+                <a:latin typeface="Segoe UI"/>
+              </a:rPr>
+              <a:t>Executa as ferramentas</a:t>
+            </a:r>
+            <a:r>
+              <a:rPr sz="1900" b="0" i="0">
+                <a:solidFill>
+                  <a:srgbClr val="16181D"/>
+                </a:solidFill>
+                <a:latin typeface="Segoe UI"/>
+              </a:rPr>
+              <a:t> — o modelo pede, o harness faz e devolve o resultado</a:t>
+            </a:r>
+          </a:p>
+          <a:p>
+            <a:pPr>
               <a:lnSpc>
                 <a:spcPct val="122000"/>
               </a:lnSpc>
               <a:spcBef>
-                <a:spcPts val="500"/>
-              </a:spcBef>
-              <a:spcAft>
-                <a:spcPts val="0"/>
-              </a:spcAft>
-            </a:pPr>
-            <a:r>
-              <a:rPr sz="1600" b="0" i="0">
-                <a:solidFill>
-                  <a:srgbClr val="6A6E76"/>
-                </a:solidFill>
-                <a:latin typeface="Segoe UI"/>
-              </a:rPr>
-              <a:t>·  um arquivo de código médio custa entre 1.100 e 2.400 tokens</a:t>
-            </a:r>
-          </a:p>
-          <a:p>
-            <a:pPr lvl="1">
+                <a:spcPts val="1300"/>
+              </a:spcBef>
+              <a:spcAft>
+                <a:spcPts val="0"/>
+              </a:spcAft>
+            </a:pPr>
+            <a:r>
+              <a:rPr sz="1900" b="0" i="0">
+                <a:solidFill>
+                  <a:srgbClr val="16181D"/>
+                </a:solidFill>
+                <a:latin typeface="Segoe UI"/>
+              </a:rPr>
+              <a:t>—  </a:t>
+            </a:r>
+            <a:r>
+              <a:rPr sz="1900" b="1" i="0">
+                <a:solidFill>
+                  <a:srgbClr val="16181D"/>
+                </a:solidFill>
+                <a:latin typeface="Segoe UI"/>
+              </a:rPr>
+              <a:t>Aplica o portão</a:t>
+            </a:r>
+            <a:r>
+              <a:rPr sz="1900" b="0" i="0">
+                <a:solidFill>
+                  <a:srgbClr val="16181D"/>
+                </a:solidFill>
+                <a:latin typeface="Segoe UI"/>
+              </a:rPr>
+              <a:t> — permissões e plan mode ficam fora do componente estocástico</a:t>
+            </a:r>
+          </a:p>
+          <a:p>
+            <a:pPr>
               <a:lnSpc>
                 <a:spcPct val="122000"/>
               </a:lnSpc>
               <a:spcBef>
-                <a:spcPts val="500"/>
-              </a:spcBef>
-              <a:spcAft>
-                <a:spcPts val="0"/>
-              </a:spcAft>
-            </a:pPr>
-            <a:r>
-              <a:rPr sz="1600" b="0" i="0">
-                <a:solidFill>
-                  <a:srgbClr val="6A6E76"/>
-                </a:solidFill>
-                <a:latin typeface="Segoe UI"/>
-              </a:rPr>
-              <a:t>·  dez arquivos e o orçamento do turno já mudou de figura</a:t>
+                <a:spcPts val="1300"/>
+              </a:spcBef>
+              <a:spcAft>
+                <a:spcPts val="0"/>
+              </a:spcAft>
+            </a:pPr>
+            <a:r>
+              <a:rPr sz="1900" b="0" i="0">
+                <a:solidFill>
+                  <a:srgbClr val="16181D"/>
+                </a:solidFill>
+                <a:latin typeface="Segoe UI"/>
+              </a:rPr>
+              <a:t>—  </a:t>
+            </a:r>
+            <a:r>
+              <a:rPr sz="1900" b="1" i="0">
+                <a:solidFill>
+                  <a:srgbClr val="16181D"/>
+                </a:solidFill>
+                <a:latin typeface="Segoe UI"/>
+              </a:rPr>
+              <a:t>Administra a janela</a:t>
+            </a:r>
+            <a:r>
+              <a:rPr sz="1900" b="0" i="0">
+                <a:solidFill>
+                  <a:srgbClr val="16181D"/>
+                </a:solidFill>
+                <a:latin typeface="Segoe UI"/>
+              </a:rPr>
+              <a:t> — conta, compacta e abre subagentes quando falta espaço</a:t>
             </a:r>
           </a:p>
         </p:txBody>
@@ -7307,7 +7539,7 @@
                 </a:solidFill>
                 <a:latin typeface="Georgia"/>
               </a:rPr>
-              <a:t>Sessão: o modelo é stateless</a:t>
+              <a:t>O que é enviado a cada turno</a:t>
             </a:r>
           </a:p>
         </p:txBody>
@@ -7358,7 +7590,7 @@
       </p:sp>
       <p:pic>
         <p:nvPicPr>
-          <p:cNvPr id="4" name="Picture 3" descr="sessao-stateless.png"/>
+          <p:cNvPr id="4" name="Picture 3" descr="orcamento-janela.png"/>
           <p:cNvPicPr>
             <a:picLocks noChangeAspect="1"/>
           </p:cNvPicPr>
@@ -7372,8 +7604,8 @@
         </p:blipFill>
         <p:spPr>
           <a:xfrm>
-            <a:off x="1375145" y="1609343"/>
-            <a:ext cx="9441403" cy="4334256"/>
+            <a:off x="1357689" y="1609343"/>
+            <a:ext cx="9476315" cy="4334256"/>
           </a:xfrm>
           <a:prstGeom prst="rect">
             <a:avLst/>
@@ -7388,8 +7620,8 @@
         </p:nvSpPr>
         <p:spPr>
           <a:xfrm>
-            <a:off x="1375145" y="5998464"/>
-            <a:ext cx="9441403" cy="274320"/>
+            <a:off x="1357689" y="5998464"/>
+            <a:ext cx="9476315" cy="274320"/>
           </a:xfrm>
           <a:prstGeom prst="rect">
             <a:avLst/>
@@ -7420,7 +7652,7 @@
                 </a:solidFill>
                 <a:latin typeface="Segoe UI"/>
               </a:rPr>
-              <a:t>Elaboração própria. Valores ilustrativos.</a:t>
+              <a:t>Elaboração própria a partir do simulador de janela de contexto da documentação oficial do Claude Code (set. 2026).</a:t>
             </a:r>
           </a:p>
         </p:txBody>
@@ -7581,7 +7813,7 @@
                 </a:solidFill>
                 <a:latin typeface="Georgia"/>
               </a:rPr>
-              <a:t>Dois contrapesos do sistema</a:t>
+              <a:t>A janela é um orçamento, não uma memória</a:t>
             </a:r>
           </a:p>
         </p:txBody>
@@ -7639,7 +7871,7 @@
         <p:spPr>
           <a:xfrm>
             <a:off x="868680" y="1609343"/>
-            <a:ext cx="4162220" cy="4562856"/>
+            <a:ext cx="10454335" cy="4562856"/>
           </a:xfrm>
           <a:prstGeom prst="rect">
             <a:avLst/>
@@ -7670,7 +7902,29 @@
                 </a:solidFill>
                 <a:latin typeface="Segoe UI"/>
               </a:rPr>
-              <a:t>—  </a:t>
+              <a:t>—  200 mil tokens no padrão; 1 milhão em modelos de janela estendida</a:t>
+            </a:r>
+          </a:p>
+          <a:p>
+            <a:pPr>
+              <a:lnSpc>
+                <a:spcPct val="122000"/>
+              </a:lnSpc>
+              <a:spcBef>
+                <a:spcPts val="1300"/>
+              </a:spcBef>
+              <a:spcAft>
+                <a:spcPts val="0"/>
+              </a:spcAft>
+            </a:pPr>
+            <a:r>
+              <a:rPr sz="1900" b="0" i="0">
+                <a:solidFill>
+                  <a:srgbClr val="16181D"/>
+                </a:solidFill>
+                <a:latin typeface="Segoe UI"/>
+              </a:rPr>
+              <a:t>—  Não é "quanto ele lembra": é quanto cabe </a:t>
             </a:r>
             <a:r>
               <a:rPr sz="1900" b="1" i="0">
@@ -7679,7 +7933,7 @@
                 </a:solidFill>
                 <a:latin typeface="Segoe UI"/>
               </a:rPr>
-              <a:t>Prompt caching</a:t>
+              <a:t>nesta</a:t>
             </a:r>
             <a:r>
               <a:rPr sz="1900" b="0" i="0">
@@ -7688,7 +7942,29 @@
                 </a:solidFill>
                 <a:latin typeface="Segoe UI"/>
               </a:rPr>
-              <a:t> — o prefixo repetido é cacheado e sai muito mais barato que a primeira vez</a:t>
+              <a:t> requisição</a:t>
+            </a:r>
+          </a:p>
+          <a:p>
+            <a:pPr>
+              <a:lnSpc>
+                <a:spcPct val="122000"/>
+              </a:lnSpc>
+              <a:spcBef>
+                <a:spcPts val="1300"/>
+              </a:spcBef>
+              <a:spcAft>
+                <a:spcPts val="0"/>
+              </a:spcAft>
+            </a:pPr>
+            <a:r>
+              <a:rPr sz="1900" b="0" i="0">
+                <a:solidFill>
+                  <a:srgbClr val="16181D"/>
+                </a:solidFill>
+                <a:latin typeface="Segoe UI"/>
+              </a:rPr>
+              <a:t>—  Cada leitura de arquivo debita do mesmo orçamento</a:t>
             </a:r>
           </a:p>
           <a:p>
@@ -7710,7 +7986,7 @@
                 </a:solidFill>
                 <a:latin typeface="Segoe UI"/>
               </a:rPr>
-              <a:t>·  sem isso, o reenvio a cada turno seria inviável</a:t>
+              <a:t>·  um arquivo de código médio custa entre 1.100 e 2.400 tokens</a:t>
             </a:r>
           </a:p>
           <a:p>
@@ -7732,85 +8008,21 @@
                 </a:solidFill>
                 <a:latin typeface="Segoe UI"/>
               </a:rPr>
-              <a:t>·  sessão longa é cara em janela, menos em dinheiro</a:t>
-            </a:r>
-          </a:p>
-          <a:p>
-            <a:pPr>
-              <a:lnSpc>
-                <a:spcPct val="122000"/>
-              </a:lnSpc>
-              <a:spcBef>
-                <a:spcPts val="1300"/>
-              </a:spcBef>
-              <a:spcAft>
-                <a:spcPts val="0"/>
-              </a:spcAft>
-            </a:pPr>
-            <a:r>
-              <a:rPr sz="1900" b="0" i="0">
-                <a:solidFill>
-                  <a:srgbClr val="16181D"/>
-                </a:solidFill>
-                <a:latin typeface="Segoe UI"/>
-              </a:rPr>
-              <a:t>—  </a:t>
-            </a:r>
-            <a:r>
-              <a:rPr sz="1900" b="1" i="0">
-                <a:solidFill>
-                  <a:srgbClr val="16181D"/>
-                </a:solidFill>
-                <a:latin typeface="Segoe UI"/>
-              </a:rPr>
-              <a:t>Compaction</a:t>
-            </a:r>
-            <a:r>
-              <a:rPr sz="1900" b="0" i="0">
-                <a:solidFill>
-                  <a:srgbClr val="16181D"/>
-                </a:solidFill>
-                <a:latin typeface="Segoe UI"/>
-              </a:rPr>
-              <a:t> — quando a janela satura, a conversa é resumida e recomeça</a:t>
-            </a:r>
-          </a:p>
-        </p:txBody>
-      </p:sp>
-      <p:pic>
-        <p:nvPicPr>
-          <p:cNvPr id="5" name="Picture 4" descr="compaction.png"/>
-          <p:cNvPicPr>
-            <a:picLocks noChangeAspect="1"/>
-          </p:cNvPicPr>
-          <p:nvPr/>
-        </p:nvPicPr>
-        <p:blipFill>
-          <a:blip r:embed="rId2"/>
-          <a:stretch>
-            <a:fillRect/>
-          </a:stretch>
-        </p:blipFill>
-        <p:spPr>
-          <a:xfrm>
-            <a:off x="5259500" y="2544091"/>
-            <a:ext cx="6063514" cy="2464761"/>
-          </a:xfrm>
-          <a:prstGeom prst="rect">
-            <a:avLst/>
-          </a:prstGeom>
-        </p:spPr>
-      </p:pic>
-      <p:sp>
-        <p:nvSpPr>
-          <p:cNvPr id="6" name="TextBox 5"/>
+              <a:t>·  dez arquivos e o orçamento do turno já mudou de figura</a:t>
+            </a:r>
+          </a:p>
+        </p:txBody>
+      </p:sp>
+      <p:sp>
+        <p:nvSpPr>
+          <p:cNvPr id="5" name="TextBox 4"/>
           <p:cNvSpPr txBox="1"/>
           <p:nvPr/>
         </p:nvSpPr>
         <p:spPr>
           <a:xfrm>
-            <a:off x="5259500" y="5063716"/>
-            <a:ext cx="6063514" cy="274320"/>
+            <a:off x="868680" y="6355080"/>
+            <a:ext cx="9905695" cy="310896"/>
           </a:xfrm>
           <a:prstGeom prst="rect">
             <a:avLst/>
@@ -7835,57 +8047,12 @@
               </a:spcAft>
             </a:pPr>
             <a:r>
-              <a:rPr sz="1200" b="0" i="1">
+              <a:rPr sz="1000" b="0" i="0">
                 <a:solidFill>
                   <a:srgbClr val="6A6E76"/>
                 </a:solidFill>
                 <a:latin typeface="Segoe UI"/>
               </a:rPr>
-              <a:t>Elaboração própria a partir da documentação oficial do Claude Code (set. 2026).</a:t>
-            </a:r>
-          </a:p>
-        </p:txBody>
-      </p:sp>
-      <p:sp>
-        <p:nvSpPr>
-          <p:cNvPr id="7" name="TextBox 6"/>
-          <p:cNvSpPr txBox="1"/>
-          <p:nvPr/>
-        </p:nvSpPr>
-        <p:spPr>
-          <a:xfrm>
-            <a:off x="868680" y="6355080"/>
-            <a:ext cx="9905695" cy="310896"/>
-          </a:xfrm>
-          <a:prstGeom prst="rect">
-            <a:avLst/>
-          </a:prstGeom>
-          <a:noFill/>
-        </p:spPr>
-        <p:txBody>
-          <a:bodyPr wrap="square" anchor="t">
-            <a:spAutoFit/>
-          </a:bodyPr>
-          <a:lstStyle/>
-          <a:p>
-            <a:pPr algn="l">
-              <a:lnSpc>
-                <a:spcPct val="100000"/>
-              </a:lnSpc>
-              <a:spcBef>
-                <a:spcPts val="0"/>
-              </a:spcBef>
-              <a:spcAft>
-                <a:spcPts val="0"/>
-              </a:spcAft>
-            </a:pPr>
-            <a:r>
-              <a:rPr sz="1000" b="0" i="0">
-                <a:solidFill>
-                  <a:srgbClr val="6A6E76"/>
-                </a:solidFill>
-                <a:latin typeface="Segoe UI"/>
-              </a:rPr>
               <a:t>Paulo E. R. Araujo · 2 · Anatomia da requisição</a:t>
             </a:r>
           </a:p>
@@ -7893,7 +8060,7 @@
       </p:sp>
       <p:sp>
         <p:nvSpPr>
-          <p:cNvPr id="8" name="TextBox 7"/>
+          <p:cNvPr id="6" name="TextBox 5"/>
           <p:cNvSpPr txBox="1"/>
           <p:nvPr/>
         </p:nvSpPr>
@@ -8002,7 +8169,7 @@
                 </a:solidFill>
                 <a:latin typeface="Georgia"/>
               </a:rPr>
-              <a:t>O que atravessa sessões</a:t>
+              <a:t>Sessão: o modelo é stateless</a:t>
             </a:r>
           </a:p>
         </p:txBody>
@@ -8051,16 +8218,40 @@
           </a:p>
         </p:txBody>
       </p:sp>
-      <p:sp>
-        <p:nvSpPr>
-          <p:cNvPr id="4" name="TextBox 3"/>
+      <p:pic>
+        <p:nvPicPr>
+          <p:cNvPr id="4" name="Picture 3" descr="sessao-stateless.png"/>
+          <p:cNvPicPr>
+            <a:picLocks noChangeAspect="1"/>
+          </p:cNvPicPr>
+          <p:nvPr/>
+        </p:nvPicPr>
+        <p:blipFill>
+          <a:blip r:embed="rId2"/>
+          <a:stretch>
+            <a:fillRect/>
+          </a:stretch>
+        </p:blipFill>
+        <p:spPr>
+          <a:xfrm>
+            <a:off x="1375145" y="1609343"/>
+            <a:ext cx="9441403" cy="4334256"/>
+          </a:xfrm>
+          <a:prstGeom prst="rect">
+            <a:avLst/>
+          </a:prstGeom>
+        </p:spPr>
+      </p:pic>
+      <p:sp>
+        <p:nvSpPr>
+          <p:cNvPr id="5" name="TextBox 4"/>
           <p:cNvSpPr txBox="1"/>
           <p:nvPr/>
         </p:nvSpPr>
         <p:spPr>
           <a:xfrm>
-            <a:off x="868680" y="1609343"/>
-            <a:ext cx="10454335" cy="4562856"/>
+            <a:off x="1375145" y="5998464"/>
+            <a:ext cx="9441403" cy="274320"/>
           </a:xfrm>
           <a:prstGeom prst="rect">
             <a:avLst/>
@@ -8075,172 +8266,30 @@
           <a:p>
             <a:pPr algn="l">
               <a:lnSpc>
-                <a:spcPct val="122000"/>
-              </a:lnSpc>
-              <a:spcBef>
-                <a:spcPts val="0"/>
-              </a:spcBef>
-              <a:spcAft>
-                <a:spcPts val="0"/>
-              </a:spcAft>
-            </a:pPr>
-            <a:r>
-              <a:rPr sz="1900" b="0" i="0">
-                <a:solidFill>
-                  <a:srgbClr val="16181D"/>
-                </a:solidFill>
-                <a:latin typeface="Segoe UI"/>
-              </a:rPr>
-              <a:t>—  </a:t>
-            </a:r>
-            <a:r>
-              <a:rPr sz="1900" b="1" i="0">
-                <a:solidFill>
-                  <a:srgbClr val="16181D"/>
-                </a:solidFill>
-                <a:latin typeface="Segoe UI"/>
-              </a:rPr>
-              <a:t>Contexto persistente</a:t>
-            </a:r>
-            <a:r>
-              <a:rPr sz="1900" b="0" i="0">
-                <a:solidFill>
-                  <a:srgbClr val="16181D"/>
-                </a:solidFill>
-                <a:latin typeface="Segoe UI"/>
-              </a:rPr>
-              <a:t>: </a:t>
-            </a:r>
-            <a:r>
-              <a:rPr sz="1748" b="0" i="0">
-                <a:solidFill>
-                  <a:srgbClr val="16181D"/>
-                </a:solidFill>
-                <a:latin typeface="Consolas"/>
-              </a:rPr>
-              <a:t>CLAUDE.md</a:t>
-            </a:r>
-            <a:r>
-              <a:rPr sz="1900" b="0" i="0">
-                <a:solidFill>
-                  <a:srgbClr val="16181D"/>
-                </a:solidFill>
-                <a:latin typeface="Segoe UI"/>
-              </a:rPr>
-              <a:t> no Code, Projects e memória no Chat</a:t>
-            </a:r>
-          </a:p>
-          <a:p>
-            <a:pPr>
-              <a:lnSpc>
-                <a:spcPct val="122000"/>
-              </a:lnSpc>
-              <a:spcBef>
-                <a:spcPts val="1300"/>
-              </a:spcBef>
-              <a:spcAft>
-                <a:spcPts val="0"/>
-              </a:spcAft>
-            </a:pPr>
-            <a:r>
-              <a:rPr sz="1900" b="0" i="0">
-                <a:solidFill>
-                  <a:srgbClr val="16181D"/>
-                </a:solidFill>
-                <a:latin typeface="Segoe UI"/>
-              </a:rPr>
-              <a:t>—  Entra </a:t>
-            </a:r>
-            <a:r>
-              <a:rPr sz="1900" b="1" i="0">
-                <a:solidFill>
-                  <a:srgbClr val="16181D"/>
-                </a:solidFill>
-                <a:latin typeface="Segoe UI"/>
-              </a:rPr>
-              <a:t>sempre</a:t>
-            </a:r>
-            <a:r>
-              <a:rPr sz="1900" b="0" i="0">
-                <a:solidFill>
-                  <a:srgbClr val="16181D"/>
-                </a:solidFill>
-                <a:latin typeface="Segoe UI"/>
-              </a:rPr>
-              <a:t>, em toda requisição — ao contrário do material de apoio, que entra sob demanda</a:t>
-            </a:r>
-          </a:p>
-          <a:p>
-            <a:pPr>
-              <a:lnSpc>
-                <a:spcPct val="122000"/>
-              </a:lnSpc>
-              <a:spcBef>
-                <a:spcPts val="1300"/>
-              </a:spcBef>
-              <a:spcAft>
-                <a:spcPts val="0"/>
-              </a:spcAft>
-            </a:pPr>
-            <a:r>
-              <a:rPr sz="1900" b="0" i="0">
-                <a:solidFill>
-                  <a:srgbClr val="16181D"/>
-                </a:solidFill>
-                <a:latin typeface="Segoe UI"/>
-              </a:rPr>
-              <a:t>—  Consequência dupla:</a:t>
-            </a:r>
-          </a:p>
-          <a:p>
-            <a:pPr lvl="1">
-              <a:lnSpc>
-                <a:spcPct val="122000"/>
-              </a:lnSpc>
-              <a:spcBef>
-                <a:spcPts val="500"/>
-              </a:spcBef>
-              <a:spcAft>
-                <a:spcPts val="0"/>
-              </a:spcAft>
-            </a:pPr>
-            <a:r>
-              <a:rPr sz="1600" b="0" i="0">
+                <a:spcPct val="100000"/>
+              </a:lnSpc>
+              <a:spcBef>
+                <a:spcPts val="0"/>
+              </a:spcBef>
+              <a:spcAft>
+                <a:spcPts val="0"/>
+              </a:spcAft>
+            </a:pPr>
+            <a:r>
+              <a:rPr sz="1200" b="0" i="1">
                 <a:solidFill>
                   <a:srgbClr val="6A6E76"/>
                 </a:solidFill>
                 <a:latin typeface="Segoe UI"/>
               </a:rPr>
-              <a:t>·  escrever demais nele é caro, porque o custo é recorrente</a:t>
-            </a:r>
-          </a:p>
-          <a:p>
-            <a:pPr lvl="1">
-              <a:lnSpc>
-                <a:spcPct val="122000"/>
-              </a:lnSpc>
-              <a:spcBef>
-                <a:spcPts val="500"/>
-              </a:spcBef>
-              <a:spcAft>
-                <a:spcPts val="0"/>
-              </a:spcAft>
-            </a:pPr>
-            <a:r>
-              <a:rPr sz="1600" b="0" i="0">
-                <a:solidFill>
-                  <a:srgbClr val="6A6E76"/>
-                </a:solidFill>
-                <a:latin typeface="Segoe UI"/>
-              </a:rPr>
-              <a:t>·  escrever bem nele é a alavanca de maior retorno que existe</a:t>
-            </a:r>
-          </a:p>
-        </p:txBody>
-      </p:sp>
-      <p:sp>
-        <p:nvSpPr>
-          <p:cNvPr id="5" name="TextBox 4"/>
+              <a:t>Elaboração própria. Valores ilustrativos.</a:t>
+            </a:r>
+          </a:p>
+        </p:txBody>
+      </p:sp>
+      <p:sp>
+        <p:nvSpPr>
+          <p:cNvPr id="6" name="TextBox 5"/>
           <p:cNvSpPr txBox="1"/>
           <p:nvPr/>
         </p:nvSpPr>
@@ -8285,7 +8334,7 @@
       </p:sp>
       <p:sp>
         <p:nvSpPr>
-          <p:cNvPr id="6" name="TextBox 5"/>
+          <p:cNvPr id="7" name="TextBox 6"/>
           <p:cNvSpPr txBox="1"/>
           <p:nvPr/>
         </p:nvSpPr>
@@ -8394,7 +8443,7 @@
                 </a:solidFill>
                 <a:latin typeface="Georgia"/>
               </a:rPr>
-              <a:t>Modelo, thinking e effort</a:t>
+              <a:t>Dois contrapesos do sistema</a:t>
             </a:r>
           </a:p>
         </p:txBody>
@@ -8452,7 +8501,7 @@
         <p:spPr>
           <a:xfrm>
             <a:off x="868680" y="1609343"/>
-            <a:ext cx="10454335" cy="4562856"/>
+            <a:ext cx="4162220" cy="4562856"/>
           </a:xfrm>
           <a:prstGeom prst="rect">
             <a:avLst/>
@@ -8492,7 +8541,7 @@
                 </a:solidFill>
                 <a:latin typeface="Segoe UI"/>
               </a:rPr>
-              <a:t>Modelo</a:t>
+              <a:t>Prompt caching</a:t>
             </a:r>
             <a:r>
               <a:rPr sz="1900" b="0" i="0">
@@ -8501,7 +8550,51 @@
                 </a:solidFill>
                 <a:latin typeface="Segoe UI"/>
               </a:rPr>
-              <a:t>: capacidade × latência × custo. Não existe escolha universalmente certa</a:t>
+              <a:t> — o prefixo repetido é cacheado e sai muito mais barato que a primeira vez</a:t>
+            </a:r>
+          </a:p>
+          <a:p>
+            <a:pPr lvl="1">
+              <a:lnSpc>
+                <a:spcPct val="122000"/>
+              </a:lnSpc>
+              <a:spcBef>
+                <a:spcPts val="500"/>
+              </a:spcBef>
+              <a:spcAft>
+                <a:spcPts val="0"/>
+              </a:spcAft>
+            </a:pPr>
+            <a:r>
+              <a:rPr sz="1600" b="0" i="0">
+                <a:solidFill>
+                  <a:srgbClr val="6A6E76"/>
+                </a:solidFill>
+                <a:latin typeface="Segoe UI"/>
+              </a:rPr>
+              <a:t>·  sem isso, o reenvio a cada turno seria inviável</a:t>
+            </a:r>
+          </a:p>
+          <a:p>
+            <a:pPr lvl="1">
+              <a:lnSpc>
+                <a:spcPct val="122000"/>
+              </a:lnSpc>
+              <a:spcBef>
+                <a:spcPts val="500"/>
+              </a:spcBef>
+              <a:spcAft>
+                <a:spcPts val="0"/>
+              </a:spcAft>
+            </a:pPr>
+            <a:r>
+              <a:rPr sz="1600" b="0" i="0">
+                <a:solidFill>
+                  <a:srgbClr val="6A6E76"/>
+                </a:solidFill>
+                <a:latin typeface="Segoe UI"/>
+              </a:rPr>
+              <a:t>·  sessão longa é cara em janela, menos em dinheiro</a:t>
             </a:r>
           </a:p>
           <a:p>
@@ -8532,7 +8625,7 @@
                 </a:solidFill>
                 <a:latin typeface="Segoe UI"/>
               </a:rPr>
-              <a:t>Thinking</a:t>
+              <a:t>Compaction</a:t>
             </a:r>
             <a:r>
               <a:rPr sz="1900" b="0" i="0">
@@ -8541,226 +8634,45 @@
                 </a:solidFill>
                 <a:latin typeface="Segoe UI"/>
               </a:rPr>
-              <a:t>: o modelo raciocina antes de responder — e esse raciocínio também são tokens</a:t>
-            </a:r>
-          </a:p>
-          <a:p>
-            <a:pPr>
-              <a:lnSpc>
-                <a:spcPct val="122000"/>
-              </a:lnSpc>
-              <a:spcBef>
-                <a:spcPts val="1300"/>
-              </a:spcBef>
-              <a:spcAft>
-                <a:spcPts val="0"/>
-              </a:spcAft>
-            </a:pPr>
-            <a:r>
-              <a:rPr sz="1900" b="0" i="0">
-                <a:solidFill>
-                  <a:srgbClr val="16181D"/>
-                </a:solidFill>
-                <a:latin typeface="Segoe UI"/>
-              </a:rPr>
-              <a:t>—  </a:t>
-            </a:r>
-            <a:r>
-              <a:rPr sz="1900" b="1" i="0">
-                <a:solidFill>
-                  <a:srgbClr val="16181D"/>
-                </a:solidFill>
-                <a:latin typeface="Segoe UI"/>
-              </a:rPr>
-              <a:t>Effort</a:t>
-            </a:r>
-            <a:r>
-              <a:rPr sz="1900" b="0" i="0">
-                <a:solidFill>
-                  <a:srgbClr val="16181D"/>
-                </a:solidFill>
-                <a:latin typeface="Segoe UI"/>
-              </a:rPr>
-              <a:t>: quanto desse raciocínio investir</a:t>
-            </a:r>
-          </a:p>
-          <a:p>
-            <a:pPr lvl="1">
-              <a:lnSpc>
-                <a:spcPct val="122000"/>
-              </a:lnSpc>
-              <a:spcBef>
-                <a:spcPts val="500"/>
-              </a:spcBef>
-              <a:spcAft>
-                <a:spcPts val="0"/>
-              </a:spcAft>
-            </a:pPr>
-            <a:r>
-              <a:rPr sz="1600" b="0" i="0">
-                <a:solidFill>
-                  <a:srgbClr val="6A6E76"/>
-                </a:solidFill>
-                <a:latin typeface="Segoe UI"/>
-              </a:rPr>
-              <a:t>·  níveis disponíveis: </a:t>
-            </a:r>
-            <a:r>
-              <a:rPr sz="1472" b="0" i="0">
-                <a:solidFill>
-                  <a:srgbClr val="6A6E76"/>
-                </a:solidFill>
-                <a:latin typeface="Consolas"/>
-              </a:rPr>
-              <a:t>low</a:t>
-            </a:r>
-            <a:r>
-              <a:rPr sz="1600" b="0" i="0">
-                <a:solidFill>
-                  <a:srgbClr val="6A6E76"/>
-                </a:solidFill>
-                <a:latin typeface="Segoe UI"/>
-              </a:rPr>
-              <a:t>, </a:t>
-            </a:r>
-            <a:r>
-              <a:rPr sz="1472" b="0" i="0">
-                <a:solidFill>
-                  <a:srgbClr val="6A6E76"/>
-                </a:solidFill>
-                <a:latin typeface="Consolas"/>
-              </a:rPr>
-              <a:t>medium</a:t>
-            </a:r>
-            <a:r>
-              <a:rPr sz="1600" b="0" i="0">
-                <a:solidFill>
-                  <a:srgbClr val="6A6E76"/>
-                </a:solidFill>
-                <a:latin typeface="Segoe UI"/>
-              </a:rPr>
-              <a:t>, </a:t>
-            </a:r>
-            <a:r>
-              <a:rPr sz="1472" b="0" i="0">
-                <a:solidFill>
-                  <a:srgbClr val="6A6E76"/>
-                </a:solidFill>
-                <a:latin typeface="Consolas"/>
-              </a:rPr>
-              <a:t>high</a:t>
-            </a:r>
-            <a:r>
-              <a:rPr sz="1600" b="0" i="0">
-                <a:solidFill>
-                  <a:srgbClr val="6A6E76"/>
-                </a:solidFill>
-                <a:latin typeface="Segoe UI"/>
-              </a:rPr>
-              <a:t>, </a:t>
-            </a:r>
-            <a:r>
-              <a:rPr sz="1472" b="0" i="0">
-                <a:solidFill>
-                  <a:srgbClr val="6A6E76"/>
-                </a:solidFill>
-                <a:latin typeface="Consolas"/>
-              </a:rPr>
-              <a:t>xhigh</a:t>
-            </a:r>
-            <a:r>
-              <a:rPr sz="1600" b="0" i="0">
-                <a:solidFill>
-                  <a:srgbClr val="6A6E76"/>
-                </a:solidFill>
-                <a:latin typeface="Segoe UI"/>
-              </a:rPr>
-              <a:t>, </a:t>
-            </a:r>
-            <a:r>
-              <a:rPr sz="1472" b="0" i="0">
-                <a:solidFill>
-                  <a:srgbClr val="6A6E76"/>
-                </a:solidFill>
-                <a:latin typeface="Consolas"/>
-              </a:rPr>
-              <a:t>max</a:t>
-            </a:r>
-            <a:r>
-              <a:rPr sz="1600" b="0" i="0">
-                <a:solidFill>
-                  <a:srgbClr val="6A6E76"/>
-                </a:solidFill>
-                <a:latin typeface="Segoe UI"/>
-              </a:rPr>
-              <a:t>; padrão </a:t>
-            </a:r>
-            <a:r>
-              <a:rPr sz="1472" b="0" i="0">
-                <a:solidFill>
-                  <a:srgbClr val="6A6E76"/>
-                </a:solidFill>
-                <a:latin typeface="Consolas"/>
-              </a:rPr>
-              <a:t>high</a:t>
-            </a:r>
-          </a:p>
-          <a:p>
-            <a:pPr lvl="1">
-              <a:lnSpc>
-                <a:spcPct val="122000"/>
-              </a:lnSpc>
-              <a:spcBef>
-                <a:spcPts val="500"/>
-              </a:spcBef>
-              <a:spcAft>
-                <a:spcPts val="0"/>
-              </a:spcAft>
-            </a:pPr>
-            <a:r>
-              <a:rPr sz="1600" b="0" i="0">
-                <a:solidFill>
-                  <a:srgbClr val="6A6E76"/>
-                </a:solidFill>
-                <a:latin typeface="Segoe UI"/>
-              </a:rPr>
-              <a:t>·  tarefa mecânica com effort alto é tempo e dinheiro jogados fora</a:t>
-            </a:r>
-          </a:p>
-          <a:p>
-            <a:pPr lvl="1">
-              <a:lnSpc>
-                <a:spcPct val="122000"/>
-              </a:lnSpc>
-              <a:spcBef>
-                <a:spcPts val="500"/>
-              </a:spcBef>
-              <a:spcAft>
-                <a:spcPts val="0"/>
-              </a:spcAft>
-            </a:pPr>
-            <a:r>
-              <a:rPr sz="1600" b="0" i="0">
-                <a:solidFill>
-                  <a:srgbClr val="6A6E76"/>
-                </a:solidFill>
-                <a:latin typeface="Segoe UI"/>
-              </a:rPr>
-              <a:t>·  tarefa de projeto com effort baixo é retrabalho</a:t>
-            </a:r>
-          </a:p>
-        </p:txBody>
-      </p:sp>
-      <p:sp>
-        <p:nvSpPr>
-          <p:cNvPr id="5" name="TextBox 4"/>
+              <a:t> — quando a janela satura, a conversa é resumida e recomeça</a:t>
+            </a:r>
+          </a:p>
+        </p:txBody>
+      </p:sp>
+      <p:pic>
+        <p:nvPicPr>
+          <p:cNvPr id="5" name="Picture 4" descr="compaction.png"/>
+          <p:cNvPicPr>
+            <a:picLocks noChangeAspect="1"/>
+          </p:cNvPicPr>
+          <p:nvPr/>
+        </p:nvPicPr>
+        <p:blipFill>
+          <a:blip r:embed="rId2"/>
+          <a:stretch>
+            <a:fillRect/>
+          </a:stretch>
+        </p:blipFill>
+        <p:spPr>
+          <a:xfrm>
+            <a:off x="5259500" y="2544091"/>
+            <a:ext cx="6063514" cy="2464761"/>
+          </a:xfrm>
+          <a:prstGeom prst="rect">
+            <a:avLst/>
+          </a:prstGeom>
+        </p:spPr>
+      </p:pic>
+      <p:sp>
+        <p:nvSpPr>
+          <p:cNvPr id="6" name="TextBox 5"/>
           <p:cNvSpPr txBox="1"/>
           <p:nvPr/>
         </p:nvSpPr>
         <p:spPr>
           <a:xfrm>
-            <a:off x="868680" y="6355080"/>
-            <a:ext cx="9905695" cy="310896"/>
+            <a:off x="5259500" y="5063716"/>
+            <a:ext cx="6063514" cy="274320"/>
           </a:xfrm>
           <a:prstGeom prst="rect">
             <a:avLst/>
@@ -8785,6 +8697,51 @@
               </a:spcAft>
             </a:pPr>
             <a:r>
+              <a:rPr sz="1200" b="0" i="1">
+                <a:solidFill>
+                  <a:srgbClr val="6A6E76"/>
+                </a:solidFill>
+                <a:latin typeface="Segoe UI"/>
+              </a:rPr>
+              <a:t>Elaboração própria a partir da documentação oficial do Claude Code (set. 2026).</a:t>
+            </a:r>
+          </a:p>
+        </p:txBody>
+      </p:sp>
+      <p:sp>
+        <p:nvSpPr>
+          <p:cNvPr id="7" name="TextBox 6"/>
+          <p:cNvSpPr txBox="1"/>
+          <p:nvPr/>
+        </p:nvSpPr>
+        <p:spPr>
+          <a:xfrm>
+            <a:off x="868680" y="6355080"/>
+            <a:ext cx="9905695" cy="310896"/>
+          </a:xfrm>
+          <a:prstGeom prst="rect">
+            <a:avLst/>
+          </a:prstGeom>
+          <a:noFill/>
+        </p:spPr>
+        <p:txBody>
+          <a:bodyPr wrap="square" anchor="t">
+            <a:spAutoFit/>
+          </a:bodyPr>
+          <a:lstStyle/>
+          <a:p>
+            <a:pPr algn="l">
+              <a:lnSpc>
+                <a:spcPct val="100000"/>
+              </a:lnSpc>
+              <a:spcBef>
+                <a:spcPts val="0"/>
+              </a:spcBef>
+              <a:spcAft>
+                <a:spcPts val="0"/>
+              </a:spcAft>
+            </a:pPr>
+            <a:r>
               <a:rPr sz="1000" b="0" i="0">
                 <a:solidFill>
                   <a:srgbClr val="6A6E76"/>
@@ -8798,7 +8755,7 @@
       </p:sp>
       <p:sp>
         <p:nvSpPr>
-          <p:cNvPr id="6" name="TextBox 5"/>
+          <p:cNvPr id="8" name="TextBox 7"/>
           <p:cNvSpPr txBox="1"/>
           <p:nvPr/>
         </p:nvSpPr>
@@ -8855,7 +8812,7 @@
     <p:bg>
       <p:bgPr>
         <a:solidFill>
-          <a:srgbClr val="F1EEE7"/>
+          <a:srgbClr val="FBFAF7"/>
         </a:solidFill>
         <a:effectLst/>
       </p:bgPr>
@@ -8869,20 +8826,65 @@
       <p:grpSpPr/>
       <p:sp>
         <p:nvSpPr>
-          <p:cNvPr id="2" name="Rectangle 1"/>
+          <p:cNvPr id="2" name="TextBox 1"/>
+          <p:cNvSpPr txBox="1"/>
+          <p:nvPr/>
+        </p:nvSpPr>
+        <p:spPr>
+          <a:xfrm>
+            <a:off x="868680" y="566928"/>
+            <a:ext cx="10454335" cy="822960"/>
+          </a:xfrm>
+          <a:prstGeom prst="rect">
+            <a:avLst/>
+          </a:prstGeom>
+          <a:noFill/>
+        </p:spPr>
+        <p:txBody>
+          <a:bodyPr wrap="square" anchor="t">
+            <a:spAutoFit/>
+          </a:bodyPr>
+          <a:lstStyle/>
+          <a:p>
+            <a:pPr algn="l">
+              <a:lnSpc>
+                <a:spcPct val="100000"/>
+              </a:lnSpc>
+              <a:spcBef>
+                <a:spcPts val="0"/>
+              </a:spcBef>
+              <a:spcAft>
+                <a:spcPts val="0"/>
+              </a:spcAft>
+            </a:pPr>
+            <a:r>
+              <a:rPr sz="3000" b="0" i="0">
+                <a:solidFill>
+                  <a:srgbClr val="16181D"/>
+                </a:solidFill>
+                <a:latin typeface="Georgia"/>
+              </a:rPr>
+              <a:t>O que atravessa sessões</a:t>
+            </a:r>
+          </a:p>
+        </p:txBody>
+      </p:sp>
+      <p:sp>
+        <p:nvSpPr>
+          <p:cNvPr id="3" name="Rectangle 2"/>
           <p:cNvSpPr/>
           <p:nvPr/>
         </p:nvSpPr>
         <p:spPr>
           <a:xfrm>
-            <a:off x="868680" y="2331720"/>
-            <a:ext cx="1463040" cy="31750"/>
+            <a:off x="868680" y="1335024"/>
+            <a:ext cx="10454335" cy="12700"/>
           </a:xfrm>
           <a:prstGeom prst="rect">
             <a:avLst/>
           </a:prstGeom>
           <a:solidFill>
-            <a:srgbClr val="BC7A2F"/>
+            <a:srgbClr val="D8D4CB"/>
           </a:solidFill>
           <a:ln>
             <a:noFill/>
@@ -8913,14 +8915,14 @@
       </p:sp>
       <p:sp>
         <p:nvSpPr>
-          <p:cNvPr id="3" name="TextBox 2"/>
+          <p:cNvPr id="4" name="TextBox 3"/>
           <p:cNvSpPr txBox="1"/>
           <p:nvPr/>
         </p:nvSpPr>
         <p:spPr>
           <a:xfrm>
-            <a:off x="868680" y="2651760"/>
-            <a:ext cx="10454335" cy="2377440"/>
+            <a:off x="868680" y="1609343"/>
+            <a:ext cx="10454335" cy="4562856"/>
           </a:xfrm>
           <a:prstGeom prst="rect">
             <a:avLst/>
@@ -8935,52 +8937,172 @@
           <a:p>
             <a:pPr algn="l">
               <a:lnSpc>
-                <a:spcPct val="135000"/>
-              </a:lnSpc>
-              <a:spcBef>
-                <a:spcPts val="0"/>
-              </a:spcBef>
-              <a:spcAft>
-                <a:spcPts val="0"/>
-              </a:spcAft>
-            </a:pPr>
-            <a:r>
-              <a:rPr sz="2500" b="0" i="1">
+                <a:spcPct val="122000"/>
+              </a:lnSpc>
+              <a:spcBef>
+                <a:spcPts val="0"/>
+              </a:spcBef>
+              <a:spcAft>
+                <a:spcPts val="0"/>
+              </a:spcAft>
+            </a:pPr>
+            <a:r>
+              <a:rPr sz="1900" b="0" i="0">
                 <a:solidFill>
                   <a:srgbClr val="16181D"/>
                 </a:solidFill>
-                <a:latin typeface="Georgia"/>
-              </a:rPr>
-              <a:t>Conversa longa degrada porque o histórico inteiro volta a cada turno e empurra o que importa para o meio do ruído. Por isso vale abrir sessão nova quando o assunto muda — e por isso vale escrever o CLAUDE.md uma vez em vez de reexplicar o projeto toda vez.</a:t>
+                <a:latin typeface="Segoe UI"/>
+              </a:rPr>
+              <a:t>—  </a:t>
+            </a:r>
+            <a:r>
+              <a:rPr sz="1900" b="1" i="0">
+                <a:solidFill>
+                  <a:srgbClr val="16181D"/>
+                </a:solidFill>
+                <a:latin typeface="Segoe UI"/>
+              </a:rPr>
+              <a:t>Contexto persistente</a:t>
+            </a:r>
+            <a:r>
+              <a:rPr sz="1900" b="0" i="0">
+                <a:solidFill>
+                  <a:srgbClr val="16181D"/>
+                </a:solidFill>
+                <a:latin typeface="Segoe UI"/>
+              </a:rPr>
+              <a:t>: </a:t>
+            </a:r>
+            <a:r>
+              <a:rPr sz="1748" b="0" i="0">
+                <a:solidFill>
+                  <a:srgbClr val="16181D"/>
+                </a:solidFill>
+                <a:latin typeface="Consolas"/>
+              </a:rPr>
+              <a:t>CLAUDE.md</a:t>
+            </a:r>
+            <a:r>
+              <a:rPr sz="1900" b="0" i="0">
+                <a:solidFill>
+                  <a:srgbClr val="16181D"/>
+                </a:solidFill>
+                <a:latin typeface="Segoe UI"/>
+              </a:rPr>
+              <a:t> no Code, Projects e memória no Chat</a:t>
             </a:r>
           </a:p>
           <a:p>
             <a:pPr>
               <a:lnSpc>
-                <a:spcPct val="100000"/>
-              </a:lnSpc>
-              <a:spcBef>
-                <a:spcPts val="1800"/>
-              </a:spcBef>
-              <a:spcAft>
-                <a:spcPts val="0"/>
-              </a:spcAft>
-            </a:pPr>
-            <a:r>
-              <a:rPr sz="1300" b="0" i="0">
+                <a:spcPct val="122000"/>
+              </a:lnSpc>
+              <a:spcBef>
+                <a:spcPts val="1300"/>
+              </a:spcBef>
+              <a:spcAft>
+                <a:spcPts val="0"/>
+              </a:spcAft>
+            </a:pPr>
+            <a:r>
+              <a:rPr sz="1900" b="0" i="0">
+                <a:solidFill>
+                  <a:srgbClr val="16181D"/>
+                </a:solidFill>
+                <a:latin typeface="Segoe UI"/>
+              </a:rPr>
+              <a:t>—  Entra </a:t>
+            </a:r>
+            <a:r>
+              <a:rPr sz="1900" b="1" i="0">
+                <a:solidFill>
+                  <a:srgbClr val="16181D"/>
+                </a:solidFill>
+                <a:latin typeface="Segoe UI"/>
+              </a:rPr>
+              <a:t>sempre</a:t>
+            </a:r>
+            <a:r>
+              <a:rPr sz="1900" b="0" i="0">
+                <a:solidFill>
+                  <a:srgbClr val="16181D"/>
+                </a:solidFill>
+                <a:latin typeface="Segoe UI"/>
+              </a:rPr>
+              <a:t>, em toda requisição — ao contrário do material de apoio, que entra sob demanda</a:t>
+            </a:r>
+          </a:p>
+          <a:p>
+            <a:pPr>
+              <a:lnSpc>
+                <a:spcPct val="122000"/>
+              </a:lnSpc>
+              <a:spcBef>
+                <a:spcPts val="1300"/>
+              </a:spcBef>
+              <a:spcAft>
+                <a:spcPts val="0"/>
+              </a:spcAft>
+            </a:pPr>
+            <a:r>
+              <a:rPr sz="1900" b="0" i="0">
+                <a:solidFill>
+                  <a:srgbClr val="16181D"/>
+                </a:solidFill>
+                <a:latin typeface="Segoe UI"/>
+              </a:rPr>
+              <a:t>—  Consequência dupla:</a:t>
+            </a:r>
+          </a:p>
+          <a:p>
+            <a:pPr lvl="1">
+              <a:lnSpc>
+                <a:spcPct val="122000"/>
+              </a:lnSpc>
+              <a:spcBef>
+                <a:spcPts val="500"/>
+              </a:spcBef>
+              <a:spcAft>
+                <a:spcPts val="0"/>
+              </a:spcAft>
+            </a:pPr>
+            <a:r>
+              <a:rPr sz="1600" b="0" i="0">
                 <a:solidFill>
                   <a:srgbClr val="6A6E76"/>
                 </a:solidFill>
                 <a:latin typeface="Segoe UI"/>
               </a:rPr>
-              <a:t>Âncora do Bloco 2</a:t>
-            </a:r>
-          </a:p>
-        </p:txBody>
-      </p:sp>
-      <p:sp>
-        <p:nvSpPr>
-          <p:cNvPr id="4" name="TextBox 3"/>
+              <a:t>·  escrever demais nele é caro, porque o custo é recorrente</a:t>
+            </a:r>
+          </a:p>
+          <a:p>
+            <a:pPr lvl="1">
+              <a:lnSpc>
+                <a:spcPct val="122000"/>
+              </a:lnSpc>
+              <a:spcBef>
+                <a:spcPts val="500"/>
+              </a:spcBef>
+              <a:spcAft>
+                <a:spcPts val="0"/>
+              </a:spcAft>
+            </a:pPr>
+            <a:r>
+              <a:rPr sz="1600" b="0" i="0">
+                <a:solidFill>
+                  <a:srgbClr val="6A6E76"/>
+                </a:solidFill>
+                <a:latin typeface="Segoe UI"/>
+              </a:rPr>
+              <a:t>·  escrever bem nele é a alavanca de maior retorno que existe</a:t>
+            </a:r>
+          </a:p>
+        </p:txBody>
+      </p:sp>
+      <p:sp>
+        <p:nvSpPr>
+          <p:cNvPr id="5" name="TextBox 4"/>
           <p:cNvSpPr txBox="1"/>
           <p:nvPr/>
         </p:nvSpPr>
@@ -9025,7 +9147,7 @@
       </p:sp>
       <p:sp>
         <p:nvSpPr>
-          <p:cNvPr id="5" name="TextBox 4"/>
+          <p:cNvPr id="6" name="TextBox 5"/>
           <p:cNvSpPr txBox="1"/>
           <p:nvPr/>
         </p:nvSpPr>
@@ -9289,7 +9411,7 @@
                 </a:solidFill>
                 <a:latin typeface="Segoe UI"/>
               </a:rPr>
-              <a:t>—  Doze conceitos operacionais. Toda a teoria existe para sustentá-los, não o contrário</a:t>
+              <a:t>—  Treze conceitos operacionais. Toda a teoria existe para sustentá-los, não o contrário</a:t>
             </a:r>
           </a:p>
         </p:txBody>
@@ -9393,6 +9515,746 @@
 </file>
 
 <file path=ppt/slides/slide20.xml><?xml version="1.0" encoding="utf-8"?>
+<p:sld xmlns:a="http://schemas.openxmlformats.org/drawingml/2006/main" xmlns:p="http://schemas.openxmlformats.org/presentationml/2006/main" xmlns:r="http://schemas.openxmlformats.org/officeDocument/2006/relationships">
+  <p:cSld>
+    <p:bg>
+      <p:bgPr>
+        <a:solidFill>
+          <a:srgbClr val="FBFAF7"/>
+        </a:solidFill>
+        <a:effectLst/>
+      </p:bgPr>
+    </p:bg>
+    <p:spTree>
+      <p:nvGrpSpPr>
+        <p:cNvPr id="1" name=""/>
+        <p:cNvGrpSpPr/>
+        <p:nvPr/>
+      </p:nvGrpSpPr>
+      <p:grpSpPr/>
+      <p:sp>
+        <p:nvSpPr>
+          <p:cNvPr id="2" name="TextBox 1"/>
+          <p:cNvSpPr txBox="1"/>
+          <p:nvPr/>
+        </p:nvSpPr>
+        <p:spPr>
+          <a:xfrm>
+            <a:off x="868680" y="566928"/>
+            <a:ext cx="10454335" cy="822960"/>
+          </a:xfrm>
+          <a:prstGeom prst="rect">
+            <a:avLst/>
+          </a:prstGeom>
+          <a:noFill/>
+        </p:spPr>
+        <p:txBody>
+          <a:bodyPr wrap="square" anchor="t">
+            <a:spAutoFit/>
+          </a:bodyPr>
+          <a:lstStyle/>
+          <a:p>
+            <a:pPr algn="l">
+              <a:lnSpc>
+                <a:spcPct val="100000"/>
+              </a:lnSpc>
+              <a:spcBef>
+                <a:spcPts val="0"/>
+              </a:spcBef>
+              <a:spcAft>
+                <a:spcPts val="0"/>
+              </a:spcAft>
+            </a:pPr>
+            <a:r>
+              <a:rPr sz="3000" b="0" i="0">
+                <a:solidFill>
+                  <a:srgbClr val="16181D"/>
+                </a:solidFill>
+                <a:latin typeface="Georgia"/>
+              </a:rPr>
+              <a:t>Modelo, thinking e effort</a:t>
+            </a:r>
+          </a:p>
+        </p:txBody>
+      </p:sp>
+      <p:sp>
+        <p:nvSpPr>
+          <p:cNvPr id="3" name="Rectangle 2"/>
+          <p:cNvSpPr/>
+          <p:nvPr/>
+        </p:nvSpPr>
+        <p:spPr>
+          <a:xfrm>
+            <a:off x="868680" y="1335024"/>
+            <a:ext cx="10454335" cy="12700"/>
+          </a:xfrm>
+          <a:prstGeom prst="rect">
+            <a:avLst/>
+          </a:prstGeom>
+          <a:solidFill>
+            <a:srgbClr val="D8D4CB"/>
+          </a:solidFill>
+          <a:ln>
+            <a:noFill/>
+          </a:ln>
+          <a:effectLst/>
+        </p:spPr>
+        <p:style>
+          <a:lnRef idx="1">
+            <a:schemeClr val="accent1"/>
+          </a:lnRef>
+          <a:fillRef idx="3">
+            <a:schemeClr val="accent1"/>
+          </a:fillRef>
+          <a:effectRef idx="2">
+            <a:schemeClr val="accent1"/>
+          </a:effectRef>
+          <a:fontRef idx="minor">
+            <a:schemeClr val="lt1"/>
+          </a:fontRef>
+        </p:style>
+        <p:txBody>
+          <a:bodyPr rtlCol="0" anchor="ctr"/>
+          <a:lstStyle/>
+          <a:p>
+            <a:pPr algn="ctr"/>
+          </a:p>
+        </p:txBody>
+      </p:sp>
+      <p:sp>
+        <p:nvSpPr>
+          <p:cNvPr id="4" name="TextBox 3"/>
+          <p:cNvSpPr txBox="1"/>
+          <p:nvPr/>
+        </p:nvSpPr>
+        <p:spPr>
+          <a:xfrm>
+            <a:off x="868680" y="1609343"/>
+            <a:ext cx="10454335" cy="4562856"/>
+          </a:xfrm>
+          <a:prstGeom prst="rect">
+            <a:avLst/>
+          </a:prstGeom>
+          <a:noFill/>
+        </p:spPr>
+        <p:txBody>
+          <a:bodyPr wrap="square" anchor="t">
+            <a:spAutoFit/>
+          </a:bodyPr>
+          <a:lstStyle/>
+          <a:p>
+            <a:pPr algn="l">
+              <a:lnSpc>
+                <a:spcPct val="122000"/>
+              </a:lnSpc>
+              <a:spcBef>
+                <a:spcPts val="0"/>
+              </a:spcBef>
+              <a:spcAft>
+                <a:spcPts val="0"/>
+              </a:spcAft>
+            </a:pPr>
+            <a:r>
+              <a:rPr sz="1900" b="0" i="0">
+                <a:solidFill>
+                  <a:srgbClr val="16181D"/>
+                </a:solidFill>
+                <a:latin typeface="Segoe UI"/>
+              </a:rPr>
+              <a:t>—  </a:t>
+            </a:r>
+            <a:r>
+              <a:rPr sz="1900" b="1" i="0">
+                <a:solidFill>
+                  <a:srgbClr val="16181D"/>
+                </a:solidFill>
+                <a:latin typeface="Segoe UI"/>
+              </a:rPr>
+              <a:t>Modelo</a:t>
+            </a:r>
+            <a:r>
+              <a:rPr sz="1900" b="0" i="0">
+                <a:solidFill>
+                  <a:srgbClr val="16181D"/>
+                </a:solidFill>
+                <a:latin typeface="Segoe UI"/>
+              </a:rPr>
+              <a:t>: capacidade × latência × custo. Não existe escolha universalmente certa</a:t>
+            </a:r>
+          </a:p>
+          <a:p>
+            <a:pPr>
+              <a:lnSpc>
+                <a:spcPct val="122000"/>
+              </a:lnSpc>
+              <a:spcBef>
+                <a:spcPts val="1300"/>
+              </a:spcBef>
+              <a:spcAft>
+                <a:spcPts val="0"/>
+              </a:spcAft>
+            </a:pPr>
+            <a:r>
+              <a:rPr sz="1900" b="0" i="0">
+                <a:solidFill>
+                  <a:srgbClr val="16181D"/>
+                </a:solidFill>
+                <a:latin typeface="Segoe UI"/>
+              </a:rPr>
+              <a:t>—  </a:t>
+            </a:r>
+            <a:r>
+              <a:rPr sz="1900" b="1" i="0">
+                <a:solidFill>
+                  <a:srgbClr val="16181D"/>
+                </a:solidFill>
+                <a:latin typeface="Segoe UI"/>
+              </a:rPr>
+              <a:t>Thinking</a:t>
+            </a:r>
+            <a:r>
+              <a:rPr sz="1900" b="0" i="0">
+                <a:solidFill>
+                  <a:srgbClr val="16181D"/>
+                </a:solidFill>
+                <a:latin typeface="Segoe UI"/>
+              </a:rPr>
+              <a:t>: o modelo raciocina antes de responder — e esse raciocínio também são tokens</a:t>
+            </a:r>
+          </a:p>
+          <a:p>
+            <a:pPr>
+              <a:lnSpc>
+                <a:spcPct val="122000"/>
+              </a:lnSpc>
+              <a:spcBef>
+                <a:spcPts val="1300"/>
+              </a:spcBef>
+              <a:spcAft>
+                <a:spcPts val="0"/>
+              </a:spcAft>
+            </a:pPr>
+            <a:r>
+              <a:rPr sz="1900" b="0" i="0">
+                <a:solidFill>
+                  <a:srgbClr val="16181D"/>
+                </a:solidFill>
+                <a:latin typeface="Segoe UI"/>
+              </a:rPr>
+              <a:t>—  </a:t>
+            </a:r>
+            <a:r>
+              <a:rPr sz="1900" b="1" i="0">
+                <a:solidFill>
+                  <a:srgbClr val="16181D"/>
+                </a:solidFill>
+                <a:latin typeface="Segoe UI"/>
+              </a:rPr>
+              <a:t>Effort</a:t>
+            </a:r>
+            <a:r>
+              <a:rPr sz="1900" b="0" i="0">
+                <a:solidFill>
+                  <a:srgbClr val="16181D"/>
+                </a:solidFill>
+                <a:latin typeface="Segoe UI"/>
+              </a:rPr>
+              <a:t>: quanto desse raciocínio investir</a:t>
+            </a:r>
+          </a:p>
+          <a:p>
+            <a:pPr lvl="1">
+              <a:lnSpc>
+                <a:spcPct val="122000"/>
+              </a:lnSpc>
+              <a:spcBef>
+                <a:spcPts val="500"/>
+              </a:spcBef>
+              <a:spcAft>
+                <a:spcPts val="0"/>
+              </a:spcAft>
+            </a:pPr>
+            <a:r>
+              <a:rPr sz="1600" b="0" i="0">
+                <a:solidFill>
+                  <a:srgbClr val="6A6E76"/>
+                </a:solidFill>
+                <a:latin typeface="Segoe UI"/>
+              </a:rPr>
+              <a:t>·  níveis disponíveis: </a:t>
+            </a:r>
+            <a:r>
+              <a:rPr sz="1472" b="0" i="0">
+                <a:solidFill>
+                  <a:srgbClr val="6A6E76"/>
+                </a:solidFill>
+                <a:latin typeface="Consolas"/>
+              </a:rPr>
+              <a:t>low</a:t>
+            </a:r>
+            <a:r>
+              <a:rPr sz="1600" b="0" i="0">
+                <a:solidFill>
+                  <a:srgbClr val="6A6E76"/>
+                </a:solidFill>
+                <a:latin typeface="Segoe UI"/>
+              </a:rPr>
+              <a:t>, </a:t>
+            </a:r>
+            <a:r>
+              <a:rPr sz="1472" b="0" i="0">
+                <a:solidFill>
+                  <a:srgbClr val="6A6E76"/>
+                </a:solidFill>
+                <a:latin typeface="Consolas"/>
+              </a:rPr>
+              <a:t>medium</a:t>
+            </a:r>
+            <a:r>
+              <a:rPr sz="1600" b="0" i="0">
+                <a:solidFill>
+                  <a:srgbClr val="6A6E76"/>
+                </a:solidFill>
+                <a:latin typeface="Segoe UI"/>
+              </a:rPr>
+              <a:t>, </a:t>
+            </a:r>
+            <a:r>
+              <a:rPr sz="1472" b="0" i="0">
+                <a:solidFill>
+                  <a:srgbClr val="6A6E76"/>
+                </a:solidFill>
+                <a:latin typeface="Consolas"/>
+              </a:rPr>
+              <a:t>high</a:t>
+            </a:r>
+            <a:r>
+              <a:rPr sz="1600" b="0" i="0">
+                <a:solidFill>
+                  <a:srgbClr val="6A6E76"/>
+                </a:solidFill>
+                <a:latin typeface="Segoe UI"/>
+              </a:rPr>
+              <a:t>, </a:t>
+            </a:r>
+            <a:r>
+              <a:rPr sz="1472" b="0" i="0">
+                <a:solidFill>
+                  <a:srgbClr val="6A6E76"/>
+                </a:solidFill>
+                <a:latin typeface="Consolas"/>
+              </a:rPr>
+              <a:t>xhigh</a:t>
+            </a:r>
+            <a:r>
+              <a:rPr sz="1600" b="0" i="0">
+                <a:solidFill>
+                  <a:srgbClr val="6A6E76"/>
+                </a:solidFill>
+                <a:latin typeface="Segoe UI"/>
+              </a:rPr>
+              <a:t>, </a:t>
+            </a:r>
+            <a:r>
+              <a:rPr sz="1472" b="0" i="0">
+                <a:solidFill>
+                  <a:srgbClr val="6A6E76"/>
+                </a:solidFill>
+                <a:latin typeface="Consolas"/>
+              </a:rPr>
+              <a:t>max</a:t>
+            </a:r>
+            <a:r>
+              <a:rPr sz="1600" b="0" i="0">
+                <a:solidFill>
+                  <a:srgbClr val="6A6E76"/>
+                </a:solidFill>
+                <a:latin typeface="Segoe UI"/>
+              </a:rPr>
+              <a:t>; padrão </a:t>
+            </a:r>
+            <a:r>
+              <a:rPr sz="1472" b="0" i="0">
+                <a:solidFill>
+                  <a:srgbClr val="6A6E76"/>
+                </a:solidFill>
+                <a:latin typeface="Consolas"/>
+              </a:rPr>
+              <a:t>high</a:t>
+            </a:r>
+          </a:p>
+          <a:p>
+            <a:pPr lvl="1">
+              <a:lnSpc>
+                <a:spcPct val="122000"/>
+              </a:lnSpc>
+              <a:spcBef>
+                <a:spcPts val="500"/>
+              </a:spcBef>
+              <a:spcAft>
+                <a:spcPts val="0"/>
+              </a:spcAft>
+            </a:pPr>
+            <a:r>
+              <a:rPr sz="1600" b="0" i="0">
+                <a:solidFill>
+                  <a:srgbClr val="6A6E76"/>
+                </a:solidFill>
+                <a:latin typeface="Segoe UI"/>
+              </a:rPr>
+              <a:t>·  tarefa mecânica com effort alto é tempo e dinheiro jogados fora</a:t>
+            </a:r>
+          </a:p>
+          <a:p>
+            <a:pPr lvl="1">
+              <a:lnSpc>
+                <a:spcPct val="122000"/>
+              </a:lnSpc>
+              <a:spcBef>
+                <a:spcPts val="500"/>
+              </a:spcBef>
+              <a:spcAft>
+                <a:spcPts val="0"/>
+              </a:spcAft>
+            </a:pPr>
+            <a:r>
+              <a:rPr sz="1600" b="0" i="0">
+                <a:solidFill>
+                  <a:srgbClr val="6A6E76"/>
+                </a:solidFill>
+                <a:latin typeface="Segoe UI"/>
+              </a:rPr>
+              <a:t>·  tarefa de projeto com effort baixo é retrabalho</a:t>
+            </a:r>
+          </a:p>
+        </p:txBody>
+      </p:sp>
+      <p:sp>
+        <p:nvSpPr>
+          <p:cNvPr id="5" name="TextBox 4"/>
+          <p:cNvSpPr txBox="1"/>
+          <p:nvPr/>
+        </p:nvSpPr>
+        <p:spPr>
+          <a:xfrm>
+            <a:off x="868680" y="6355080"/>
+            <a:ext cx="9905695" cy="310896"/>
+          </a:xfrm>
+          <a:prstGeom prst="rect">
+            <a:avLst/>
+          </a:prstGeom>
+          <a:noFill/>
+        </p:spPr>
+        <p:txBody>
+          <a:bodyPr wrap="square" anchor="t">
+            <a:spAutoFit/>
+          </a:bodyPr>
+          <a:lstStyle/>
+          <a:p>
+            <a:pPr algn="l">
+              <a:lnSpc>
+                <a:spcPct val="100000"/>
+              </a:lnSpc>
+              <a:spcBef>
+                <a:spcPts val="0"/>
+              </a:spcBef>
+              <a:spcAft>
+                <a:spcPts val="0"/>
+              </a:spcAft>
+            </a:pPr>
+            <a:r>
+              <a:rPr sz="1000" b="0" i="0">
+                <a:solidFill>
+                  <a:srgbClr val="6A6E76"/>
+                </a:solidFill>
+                <a:latin typeface="Segoe UI"/>
+              </a:rPr>
+              <a:t>Paulo E. R. Araujo · 2 · Anatomia da requisição</a:t>
+            </a:r>
+          </a:p>
+        </p:txBody>
+      </p:sp>
+      <p:sp>
+        <p:nvSpPr>
+          <p:cNvPr id="6" name="TextBox 5"/>
+          <p:cNvSpPr txBox="1"/>
+          <p:nvPr/>
+        </p:nvSpPr>
+        <p:spPr>
+          <a:xfrm>
+            <a:off x="10774375" y="6355080"/>
+            <a:ext cx="548640" cy="310896"/>
+          </a:xfrm>
+          <a:prstGeom prst="rect">
+            <a:avLst/>
+          </a:prstGeom>
+          <a:noFill/>
+        </p:spPr>
+        <p:txBody>
+          <a:bodyPr wrap="square" anchor="t">
+            <a:spAutoFit/>
+          </a:bodyPr>
+          <a:lstStyle/>
+          <a:p>
+            <a:pPr algn="r">
+              <a:lnSpc>
+                <a:spcPct val="100000"/>
+              </a:lnSpc>
+              <a:spcBef>
+                <a:spcPts val="0"/>
+              </a:spcBef>
+              <a:spcAft>
+                <a:spcPts val="0"/>
+              </a:spcAft>
+            </a:pPr>
+            <a:r>
+              <a:rPr sz="1000" b="0" i="0">
+                <a:solidFill>
+                  <a:srgbClr val="6A6E76"/>
+                </a:solidFill>
+                <a:latin typeface="Segoe UI"/>
+              </a:rPr>
+              <a:t>17</a:t>
+            </a:r>
+          </a:p>
+        </p:txBody>
+      </p:sp>
+    </p:spTree>
+  </p:cSld>
+  <p:clrMapOvr>
+    <a:masterClrMapping/>
+  </p:clrMapOvr>
+</p:sld>
+</file>
+
+<file path=ppt/slides/slide21.xml><?xml version="1.0" encoding="utf-8"?>
+<p:sld xmlns:a="http://schemas.openxmlformats.org/drawingml/2006/main" xmlns:p="http://schemas.openxmlformats.org/presentationml/2006/main" xmlns:r="http://schemas.openxmlformats.org/officeDocument/2006/relationships">
+  <p:cSld>
+    <p:bg>
+      <p:bgPr>
+        <a:solidFill>
+          <a:srgbClr val="F1EEE7"/>
+        </a:solidFill>
+        <a:effectLst/>
+      </p:bgPr>
+    </p:bg>
+    <p:spTree>
+      <p:nvGrpSpPr>
+        <p:cNvPr id="1" name=""/>
+        <p:cNvGrpSpPr/>
+        <p:nvPr/>
+      </p:nvGrpSpPr>
+      <p:grpSpPr/>
+      <p:sp>
+        <p:nvSpPr>
+          <p:cNvPr id="2" name="Rectangle 1"/>
+          <p:cNvSpPr/>
+          <p:nvPr/>
+        </p:nvSpPr>
+        <p:spPr>
+          <a:xfrm>
+            <a:off x="868680" y="2331720"/>
+            <a:ext cx="1463040" cy="31750"/>
+          </a:xfrm>
+          <a:prstGeom prst="rect">
+            <a:avLst/>
+          </a:prstGeom>
+          <a:solidFill>
+            <a:srgbClr val="BC7A2F"/>
+          </a:solidFill>
+          <a:ln>
+            <a:noFill/>
+          </a:ln>
+          <a:effectLst/>
+        </p:spPr>
+        <p:style>
+          <a:lnRef idx="1">
+            <a:schemeClr val="accent1"/>
+          </a:lnRef>
+          <a:fillRef idx="3">
+            <a:schemeClr val="accent1"/>
+          </a:fillRef>
+          <a:effectRef idx="2">
+            <a:schemeClr val="accent1"/>
+          </a:effectRef>
+          <a:fontRef idx="minor">
+            <a:schemeClr val="lt1"/>
+          </a:fontRef>
+        </p:style>
+        <p:txBody>
+          <a:bodyPr rtlCol="0" anchor="ctr"/>
+          <a:lstStyle/>
+          <a:p>
+            <a:pPr algn="ctr"/>
+          </a:p>
+        </p:txBody>
+      </p:sp>
+      <p:sp>
+        <p:nvSpPr>
+          <p:cNvPr id="3" name="TextBox 2"/>
+          <p:cNvSpPr txBox="1"/>
+          <p:nvPr/>
+        </p:nvSpPr>
+        <p:spPr>
+          <a:xfrm>
+            <a:off x="868680" y="2651760"/>
+            <a:ext cx="10454335" cy="2377440"/>
+          </a:xfrm>
+          <a:prstGeom prst="rect">
+            <a:avLst/>
+          </a:prstGeom>
+          <a:noFill/>
+        </p:spPr>
+        <p:txBody>
+          <a:bodyPr wrap="square" anchor="t">
+            <a:spAutoFit/>
+          </a:bodyPr>
+          <a:lstStyle/>
+          <a:p>
+            <a:pPr algn="l">
+              <a:lnSpc>
+                <a:spcPct val="135000"/>
+              </a:lnSpc>
+              <a:spcBef>
+                <a:spcPts val="0"/>
+              </a:spcBef>
+              <a:spcAft>
+                <a:spcPts val="0"/>
+              </a:spcAft>
+            </a:pPr>
+            <a:r>
+              <a:rPr sz="2500" b="0" i="1">
+                <a:solidFill>
+                  <a:srgbClr val="16181D"/>
+                </a:solidFill>
+                <a:latin typeface="Georgia"/>
+              </a:rPr>
+              <a:t>Conversa longa degrada porque o histórico inteiro volta a cada turno e empurra o que importa para o meio do ruído. Por isso vale abrir sessão nova quando o assunto muda — e por isso vale escrever o CLAUDE.md uma vez em vez de reexplicar o projeto toda vez.</a:t>
+            </a:r>
+          </a:p>
+          <a:p>
+            <a:pPr>
+              <a:lnSpc>
+                <a:spcPct val="100000"/>
+              </a:lnSpc>
+              <a:spcBef>
+                <a:spcPts val="1800"/>
+              </a:spcBef>
+              <a:spcAft>
+                <a:spcPts val="0"/>
+              </a:spcAft>
+            </a:pPr>
+            <a:r>
+              <a:rPr sz="1300" b="0" i="0">
+                <a:solidFill>
+                  <a:srgbClr val="6A6E76"/>
+                </a:solidFill>
+                <a:latin typeface="Segoe UI"/>
+              </a:rPr>
+              <a:t>Âncora do Bloco 2</a:t>
+            </a:r>
+          </a:p>
+        </p:txBody>
+      </p:sp>
+      <p:sp>
+        <p:nvSpPr>
+          <p:cNvPr id="4" name="TextBox 3"/>
+          <p:cNvSpPr txBox="1"/>
+          <p:nvPr/>
+        </p:nvSpPr>
+        <p:spPr>
+          <a:xfrm>
+            <a:off x="868680" y="6355080"/>
+            <a:ext cx="9905695" cy="310896"/>
+          </a:xfrm>
+          <a:prstGeom prst="rect">
+            <a:avLst/>
+          </a:prstGeom>
+          <a:noFill/>
+        </p:spPr>
+        <p:txBody>
+          <a:bodyPr wrap="square" anchor="t">
+            <a:spAutoFit/>
+          </a:bodyPr>
+          <a:lstStyle/>
+          <a:p>
+            <a:pPr algn="l">
+              <a:lnSpc>
+                <a:spcPct val="100000"/>
+              </a:lnSpc>
+              <a:spcBef>
+                <a:spcPts val="0"/>
+              </a:spcBef>
+              <a:spcAft>
+                <a:spcPts val="0"/>
+              </a:spcAft>
+            </a:pPr>
+            <a:r>
+              <a:rPr sz="1000" b="0" i="0">
+                <a:solidFill>
+                  <a:srgbClr val="6A6E76"/>
+                </a:solidFill>
+                <a:latin typeface="Segoe UI"/>
+              </a:rPr>
+              <a:t>Paulo E. R. Araujo · 2 · Anatomia da requisição</a:t>
+            </a:r>
+          </a:p>
+        </p:txBody>
+      </p:sp>
+      <p:sp>
+        <p:nvSpPr>
+          <p:cNvPr id="5" name="TextBox 4"/>
+          <p:cNvSpPr txBox="1"/>
+          <p:nvPr/>
+        </p:nvSpPr>
+        <p:spPr>
+          <a:xfrm>
+            <a:off x="10774375" y="6355080"/>
+            <a:ext cx="548640" cy="310896"/>
+          </a:xfrm>
+          <a:prstGeom prst="rect">
+            <a:avLst/>
+          </a:prstGeom>
+          <a:noFill/>
+        </p:spPr>
+        <p:txBody>
+          <a:bodyPr wrap="square" anchor="t">
+            <a:spAutoFit/>
+          </a:bodyPr>
+          <a:lstStyle/>
+          <a:p>
+            <a:pPr algn="r">
+              <a:lnSpc>
+                <a:spcPct val="100000"/>
+              </a:lnSpc>
+              <a:spcBef>
+                <a:spcPts val="0"/>
+              </a:spcBef>
+              <a:spcAft>
+                <a:spcPts val="0"/>
+              </a:spcAft>
+            </a:pPr>
+            <a:r>
+              <a:rPr sz="1000" b="0" i="0">
+                <a:solidFill>
+                  <a:srgbClr val="6A6E76"/>
+                </a:solidFill>
+                <a:latin typeface="Segoe UI"/>
+              </a:rPr>
+              <a:t>18</a:t>
+            </a:r>
+          </a:p>
+        </p:txBody>
+      </p:sp>
+    </p:spTree>
+  </p:cSld>
+  <p:clrMapOvr>
+    <a:masterClrMapping/>
+  </p:clrMapOvr>
+</p:sld>
+</file>
+
+<file path=ppt/slides/slide22.xml><?xml version="1.0" encoding="utf-8"?>
 <p:sld xmlns:a="http://schemas.openxmlformats.org/drawingml/2006/main" xmlns:p="http://schemas.openxmlformats.org/presentationml/2006/main" xmlns:r="http://schemas.openxmlformats.org/officeDocument/2006/relationships">
   <p:cSld>
     <p:bg>
@@ -9517,636 +10379,6 @@
                 <a:latin typeface="Segoe UI"/>
               </a:rPr>
               <a:t>Do sistema ao agente</a:t>
-            </a:r>
-          </a:p>
-        </p:txBody>
-      </p:sp>
-    </p:spTree>
-  </p:cSld>
-  <p:clrMapOvr>
-    <a:masterClrMapping/>
-  </p:clrMapOvr>
-</p:sld>
-</file>
-
-<file path=ppt/slides/slide21.xml><?xml version="1.0" encoding="utf-8"?>
-<p:sld xmlns:a="http://schemas.openxmlformats.org/drawingml/2006/main" xmlns:p="http://schemas.openxmlformats.org/presentationml/2006/main" xmlns:r="http://schemas.openxmlformats.org/officeDocument/2006/relationships">
-  <p:cSld>
-    <p:bg>
-      <p:bgPr>
-        <a:solidFill>
-          <a:srgbClr val="FBFAF7"/>
-        </a:solidFill>
-        <a:effectLst/>
-      </p:bgPr>
-    </p:bg>
-    <p:spTree>
-      <p:nvGrpSpPr>
-        <p:cNvPr id="1" name=""/>
-        <p:cNvGrpSpPr/>
-        <p:nvPr/>
-      </p:nvGrpSpPr>
-      <p:grpSpPr/>
-      <p:sp>
-        <p:nvSpPr>
-          <p:cNvPr id="2" name="TextBox 1"/>
-          <p:cNvSpPr txBox="1"/>
-          <p:nvPr/>
-        </p:nvSpPr>
-        <p:spPr>
-          <a:xfrm>
-            <a:off x="868680" y="566928"/>
-            <a:ext cx="10454335" cy="822960"/>
-          </a:xfrm>
-          <a:prstGeom prst="rect">
-            <a:avLst/>
-          </a:prstGeom>
-          <a:noFill/>
-        </p:spPr>
-        <p:txBody>
-          <a:bodyPr wrap="square" anchor="t">
-            <a:spAutoFit/>
-          </a:bodyPr>
-          <a:lstStyle/>
-          <a:p>
-            <a:pPr algn="l">
-              <a:lnSpc>
-                <a:spcPct val="100000"/>
-              </a:lnSpc>
-              <a:spcBef>
-                <a:spcPts val="0"/>
-              </a:spcBef>
-              <a:spcAft>
-                <a:spcPts val="0"/>
-              </a:spcAft>
-            </a:pPr>
-            <a:r>
-              <a:rPr sz="3000" b="0" i="0">
-                <a:solidFill>
-                  <a:srgbClr val="16181D"/>
-                </a:solidFill>
-                <a:latin typeface="Georgia"/>
-              </a:rPr>
-              <a:t>Tool use, apresentado como protocolo</a:t>
-            </a:r>
-          </a:p>
-        </p:txBody>
-      </p:sp>
-      <p:sp>
-        <p:nvSpPr>
-          <p:cNvPr id="3" name="Rectangle 2"/>
-          <p:cNvSpPr/>
-          <p:nvPr/>
-        </p:nvSpPr>
-        <p:spPr>
-          <a:xfrm>
-            <a:off x="868680" y="1335024"/>
-            <a:ext cx="10454335" cy="12700"/>
-          </a:xfrm>
-          <a:prstGeom prst="rect">
-            <a:avLst/>
-          </a:prstGeom>
-          <a:solidFill>
-            <a:srgbClr val="D8D4CB"/>
-          </a:solidFill>
-          <a:ln>
-            <a:noFill/>
-          </a:ln>
-          <a:effectLst/>
-        </p:spPr>
-        <p:style>
-          <a:lnRef idx="1">
-            <a:schemeClr val="accent1"/>
-          </a:lnRef>
-          <a:fillRef idx="3">
-            <a:schemeClr val="accent1"/>
-          </a:fillRef>
-          <a:effectRef idx="2">
-            <a:schemeClr val="accent1"/>
-          </a:effectRef>
-          <a:fontRef idx="minor">
-            <a:schemeClr val="lt1"/>
-          </a:fontRef>
-        </p:style>
-        <p:txBody>
-          <a:bodyPr rtlCol="0" anchor="ctr"/>
-          <a:lstStyle/>
-          <a:p>
-            <a:pPr algn="ctr"/>
-          </a:p>
-        </p:txBody>
-      </p:sp>
-      <p:sp>
-        <p:nvSpPr>
-          <p:cNvPr id="4" name="TextBox 3"/>
-          <p:cNvSpPr txBox="1"/>
-          <p:nvPr/>
-        </p:nvSpPr>
-        <p:spPr>
-          <a:xfrm>
-            <a:off x="868680" y="1609343"/>
-            <a:ext cx="10454335" cy="4562856"/>
-          </a:xfrm>
-          <a:prstGeom prst="rect">
-            <a:avLst/>
-          </a:prstGeom>
-          <a:noFill/>
-        </p:spPr>
-        <p:txBody>
-          <a:bodyPr wrap="square" anchor="t">
-            <a:spAutoFit/>
-          </a:bodyPr>
-          <a:lstStyle/>
-          <a:p>
-            <a:pPr algn="l">
-              <a:lnSpc>
-                <a:spcPct val="122000"/>
-              </a:lnSpc>
-              <a:spcBef>
-                <a:spcPts val="0"/>
-              </a:spcBef>
-              <a:spcAft>
-                <a:spcPts val="0"/>
-              </a:spcAft>
-            </a:pPr>
-            <a:r>
-              <a:rPr sz="1900" b="0" i="0">
-                <a:solidFill>
-                  <a:srgbClr val="16181D"/>
-                </a:solidFill>
-                <a:latin typeface="Segoe UI"/>
-              </a:rPr>
-              <a:t>—  O servidor expõe ferramentas com nome, descrição e schema</a:t>
-            </a:r>
-          </a:p>
-          <a:p>
-            <a:pPr>
-              <a:lnSpc>
-                <a:spcPct val="122000"/>
-              </a:lnSpc>
-              <a:spcBef>
-                <a:spcPts val="1300"/>
-              </a:spcBef>
-              <a:spcAft>
-                <a:spcPts val="0"/>
-              </a:spcAft>
-            </a:pPr>
-            <a:r>
-              <a:rPr sz="1900" b="0" i="0">
-                <a:solidFill>
-                  <a:srgbClr val="16181D"/>
-                </a:solidFill>
-                <a:latin typeface="Segoe UI"/>
-              </a:rPr>
-              <a:t>—  O cliente injeta essa lista no contexto do modelo</a:t>
-            </a:r>
-          </a:p>
-          <a:p>
-            <a:pPr>
-              <a:lnSpc>
-                <a:spcPct val="122000"/>
-              </a:lnSpc>
-              <a:spcBef>
-                <a:spcPts val="1300"/>
-              </a:spcBef>
-              <a:spcAft>
-                <a:spcPts val="0"/>
-              </a:spcAft>
-            </a:pPr>
-            <a:r>
-              <a:rPr sz="1900" b="0" i="0">
-                <a:solidFill>
-                  <a:srgbClr val="16181D"/>
-                </a:solidFill>
-                <a:latin typeface="Segoe UI"/>
-              </a:rPr>
-              <a:t>—  O modelo responde </a:t>
-            </a:r>
-            <a:r>
-              <a:rPr sz="1900" b="1" i="0">
-                <a:solidFill>
-                  <a:srgbClr val="16181D"/>
-                </a:solidFill>
-                <a:latin typeface="Segoe UI"/>
-              </a:rPr>
-              <a:t>pedindo</a:t>
-            </a:r>
-            <a:r>
-              <a:rPr sz="1900" b="0" i="0">
-                <a:solidFill>
-                  <a:srgbClr val="16181D"/>
-                </a:solidFill>
-                <a:latin typeface="Segoe UI"/>
-              </a:rPr>
-              <a:t> uma chamada; o cliente executa e devolve o resultado</a:t>
-            </a:r>
-          </a:p>
-          <a:p>
-            <a:pPr>
-              <a:lnSpc>
-                <a:spcPct val="122000"/>
-              </a:lnSpc>
-              <a:spcBef>
-                <a:spcPts val="1300"/>
-              </a:spcBef>
-              <a:spcAft>
-                <a:spcPts val="0"/>
-              </a:spcAft>
-            </a:pPr>
-            <a:r>
-              <a:rPr sz="1900" b="0" i="0">
-                <a:solidFill>
-                  <a:srgbClr val="16181D"/>
-                </a:solidFill>
-                <a:latin typeface="Segoe UI"/>
-              </a:rPr>
-              <a:t>—  MCP é o protocolo aberto que padroniza esse contrato</a:t>
-            </a:r>
-          </a:p>
-          <a:p>
-            <a:pPr lvl="1">
-              <a:lnSpc>
-                <a:spcPct val="122000"/>
-              </a:lnSpc>
-              <a:spcBef>
-                <a:spcPts val="500"/>
-              </a:spcBef>
-              <a:spcAft>
-                <a:spcPts val="0"/>
-              </a:spcAft>
-            </a:pPr>
-            <a:r>
-              <a:rPr sz="1600" b="0" i="0">
-                <a:solidFill>
-                  <a:srgbClr val="6A6E76"/>
-                </a:solidFill>
-                <a:latin typeface="Segoe UI"/>
-              </a:rPr>
-              <a:t>·  a mesma ferramenta serve a qualquer cliente que fale o protocolo</a:t>
-            </a:r>
-          </a:p>
-        </p:txBody>
-      </p:sp>
-      <p:sp>
-        <p:nvSpPr>
-          <p:cNvPr id="5" name="TextBox 4"/>
-          <p:cNvSpPr txBox="1"/>
-          <p:nvPr/>
-        </p:nvSpPr>
-        <p:spPr>
-          <a:xfrm>
-            <a:off x="868680" y="6355080"/>
-            <a:ext cx="9905695" cy="310896"/>
-          </a:xfrm>
-          <a:prstGeom prst="rect">
-            <a:avLst/>
-          </a:prstGeom>
-          <a:noFill/>
-        </p:spPr>
-        <p:txBody>
-          <a:bodyPr wrap="square" anchor="t">
-            <a:spAutoFit/>
-          </a:bodyPr>
-          <a:lstStyle/>
-          <a:p>
-            <a:pPr algn="l">
-              <a:lnSpc>
-                <a:spcPct val="100000"/>
-              </a:lnSpc>
-              <a:spcBef>
-                <a:spcPts val="0"/>
-              </a:spcBef>
-              <a:spcAft>
-                <a:spcPts val="0"/>
-              </a:spcAft>
-            </a:pPr>
-            <a:r>
-              <a:rPr sz="1000" b="0" i="0">
-                <a:solidFill>
-                  <a:srgbClr val="6A6E76"/>
-                </a:solidFill>
-                <a:latin typeface="Segoe UI"/>
-              </a:rPr>
-              <a:t>Paulo E. R. Araujo · 3 · Do sistema ao agente</a:t>
-            </a:r>
-          </a:p>
-        </p:txBody>
-      </p:sp>
-      <p:sp>
-        <p:nvSpPr>
-          <p:cNvPr id="6" name="TextBox 5"/>
-          <p:cNvSpPr txBox="1"/>
-          <p:nvPr/>
-        </p:nvSpPr>
-        <p:spPr>
-          <a:xfrm>
-            <a:off x="10774375" y="6355080"/>
-            <a:ext cx="548640" cy="310896"/>
-          </a:xfrm>
-          <a:prstGeom prst="rect">
-            <a:avLst/>
-          </a:prstGeom>
-          <a:noFill/>
-        </p:spPr>
-        <p:txBody>
-          <a:bodyPr wrap="square" anchor="t">
-            <a:spAutoFit/>
-          </a:bodyPr>
-          <a:lstStyle/>
-          <a:p>
-            <a:pPr algn="r">
-              <a:lnSpc>
-                <a:spcPct val="100000"/>
-              </a:lnSpc>
-              <a:spcBef>
-                <a:spcPts val="0"/>
-              </a:spcBef>
-              <a:spcAft>
-                <a:spcPts val="0"/>
-              </a:spcAft>
-            </a:pPr>
-            <a:r>
-              <a:rPr sz="1000" b="0" i="0">
-                <a:solidFill>
-                  <a:srgbClr val="6A6E76"/>
-                </a:solidFill>
-                <a:latin typeface="Segoe UI"/>
-              </a:rPr>
-              <a:t>17</a:t>
-            </a:r>
-          </a:p>
-        </p:txBody>
-      </p:sp>
-    </p:spTree>
-  </p:cSld>
-  <p:clrMapOvr>
-    <a:masterClrMapping/>
-  </p:clrMapOvr>
-</p:sld>
-</file>
-
-<file path=ppt/slides/slide22.xml><?xml version="1.0" encoding="utf-8"?>
-<p:sld xmlns:a="http://schemas.openxmlformats.org/drawingml/2006/main" xmlns:p="http://schemas.openxmlformats.org/presentationml/2006/main" xmlns:r="http://schemas.openxmlformats.org/officeDocument/2006/relationships">
-  <p:cSld>
-    <p:bg>
-      <p:bgPr>
-        <a:solidFill>
-          <a:srgbClr val="FBFAF7"/>
-        </a:solidFill>
-        <a:effectLst/>
-      </p:bgPr>
-    </p:bg>
-    <p:spTree>
-      <p:nvGrpSpPr>
-        <p:cNvPr id="1" name=""/>
-        <p:cNvGrpSpPr/>
-        <p:nvPr/>
-      </p:nvGrpSpPr>
-      <p:grpSpPr/>
-      <p:sp>
-        <p:nvSpPr>
-          <p:cNvPr id="2" name="TextBox 1"/>
-          <p:cNvSpPr txBox="1"/>
-          <p:nvPr/>
-        </p:nvSpPr>
-        <p:spPr>
-          <a:xfrm>
-            <a:off x="868680" y="566928"/>
-            <a:ext cx="10454335" cy="822960"/>
-          </a:xfrm>
-          <a:prstGeom prst="rect">
-            <a:avLst/>
-          </a:prstGeom>
-          <a:noFill/>
-        </p:spPr>
-        <p:txBody>
-          <a:bodyPr wrap="square" anchor="t">
-            <a:spAutoFit/>
-          </a:bodyPr>
-          <a:lstStyle/>
-          <a:p>
-            <a:pPr algn="l">
-              <a:lnSpc>
-                <a:spcPct val="100000"/>
-              </a:lnSpc>
-              <a:spcBef>
-                <a:spcPts val="0"/>
-              </a:spcBef>
-              <a:spcAft>
-                <a:spcPts val="0"/>
-              </a:spcAft>
-            </a:pPr>
-            <a:r>
-              <a:rPr sz="3000" b="0" i="0">
-                <a:solidFill>
-                  <a:srgbClr val="16181D"/>
-                </a:solidFill>
-                <a:latin typeface="Georgia"/>
-              </a:rPr>
-              <a:t>O laço</a:t>
-            </a:r>
-          </a:p>
-        </p:txBody>
-      </p:sp>
-      <p:sp>
-        <p:nvSpPr>
-          <p:cNvPr id="3" name="Rectangle 2"/>
-          <p:cNvSpPr/>
-          <p:nvPr/>
-        </p:nvSpPr>
-        <p:spPr>
-          <a:xfrm>
-            <a:off x="868680" y="1335024"/>
-            <a:ext cx="10454335" cy="12700"/>
-          </a:xfrm>
-          <a:prstGeom prst="rect">
-            <a:avLst/>
-          </a:prstGeom>
-          <a:solidFill>
-            <a:srgbClr val="D8D4CB"/>
-          </a:solidFill>
-          <a:ln>
-            <a:noFill/>
-          </a:ln>
-          <a:effectLst/>
-        </p:spPr>
-        <p:style>
-          <a:lnRef idx="1">
-            <a:schemeClr val="accent1"/>
-          </a:lnRef>
-          <a:fillRef idx="3">
-            <a:schemeClr val="accent1"/>
-          </a:fillRef>
-          <a:effectRef idx="2">
-            <a:schemeClr val="accent1"/>
-          </a:effectRef>
-          <a:fontRef idx="minor">
-            <a:schemeClr val="lt1"/>
-          </a:fontRef>
-        </p:style>
-        <p:txBody>
-          <a:bodyPr rtlCol="0" anchor="ctr"/>
-          <a:lstStyle/>
-          <a:p>
-            <a:pPr algn="ctr"/>
-          </a:p>
-        </p:txBody>
-      </p:sp>
-      <p:pic>
-        <p:nvPicPr>
-          <p:cNvPr id="4" name="Picture 3" descr="laco-agente.png"/>
-          <p:cNvPicPr>
-            <a:picLocks noChangeAspect="1"/>
-          </p:cNvPicPr>
-          <p:nvPr/>
-        </p:nvPicPr>
-        <p:blipFill>
-          <a:blip r:embed="rId2"/>
-          <a:stretch>
-            <a:fillRect/>
-          </a:stretch>
-        </p:blipFill>
-        <p:spPr>
-          <a:xfrm>
-            <a:off x="1926798" y="1609343"/>
-            <a:ext cx="8338097" cy="4334256"/>
-          </a:xfrm>
-          <a:prstGeom prst="rect">
-            <a:avLst/>
-          </a:prstGeom>
-        </p:spPr>
-      </p:pic>
-      <p:sp>
-        <p:nvSpPr>
-          <p:cNvPr id="5" name="TextBox 4"/>
-          <p:cNvSpPr txBox="1"/>
-          <p:nvPr/>
-        </p:nvSpPr>
-        <p:spPr>
-          <a:xfrm>
-            <a:off x="1926798" y="5998464"/>
-            <a:ext cx="8338097" cy="274320"/>
-          </a:xfrm>
-          <a:prstGeom prst="rect">
-            <a:avLst/>
-          </a:prstGeom>
-          <a:noFill/>
-        </p:spPr>
-        <p:txBody>
-          <a:bodyPr wrap="square" anchor="t">
-            <a:spAutoFit/>
-          </a:bodyPr>
-          <a:lstStyle/>
-          <a:p>
-            <a:pPr algn="l">
-              <a:lnSpc>
-                <a:spcPct val="100000"/>
-              </a:lnSpc>
-              <a:spcBef>
-                <a:spcPts val="0"/>
-              </a:spcBef>
-              <a:spcAft>
-                <a:spcPts val="0"/>
-              </a:spcAft>
-            </a:pPr>
-            <a:r>
-              <a:rPr sz="1200" b="0" i="1">
-                <a:solidFill>
-                  <a:srgbClr val="6A6E76"/>
-                </a:solidFill>
-                <a:latin typeface="Segoe UI"/>
-              </a:rPr>
-              <a:t>Elaboração própria.</a:t>
-            </a:r>
-          </a:p>
-        </p:txBody>
-      </p:sp>
-      <p:sp>
-        <p:nvSpPr>
-          <p:cNvPr id="6" name="TextBox 5"/>
-          <p:cNvSpPr txBox="1"/>
-          <p:nvPr/>
-        </p:nvSpPr>
-        <p:spPr>
-          <a:xfrm>
-            <a:off x="868680" y="6355080"/>
-            <a:ext cx="9905695" cy="310896"/>
-          </a:xfrm>
-          <a:prstGeom prst="rect">
-            <a:avLst/>
-          </a:prstGeom>
-          <a:noFill/>
-        </p:spPr>
-        <p:txBody>
-          <a:bodyPr wrap="square" anchor="t">
-            <a:spAutoFit/>
-          </a:bodyPr>
-          <a:lstStyle/>
-          <a:p>
-            <a:pPr algn="l">
-              <a:lnSpc>
-                <a:spcPct val="100000"/>
-              </a:lnSpc>
-              <a:spcBef>
-                <a:spcPts val="0"/>
-              </a:spcBef>
-              <a:spcAft>
-                <a:spcPts val="0"/>
-              </a:spcAft>
-            </a:pPr>
-            <a:r>
-              <a:rPr sz="1000" b="0" i="0">
-                <a:solidFill>
-                  <a:srgbClr val="6A6E76"/>
-                </a:solidFill>
-                <a:latin typeface="Segoe UI"/>
-              </a:rPr>
-              <a:t>Paulo E. R. Araujo · 3 · Do sistema ao agente</a:t>
-            </a:r>
-          </a:p>
-        </p:txBody>
-      </p:sp>
-      <p:sp>
-        <p:nvSpPr>
-          <p:cNvPr id="7" name="TextBox 6"/>
-          <p:cNvSpPr txBox="1"/>
-          <p:nvPr/>
-        </p:nvSpPr>
-        <p:spPr>
-          <a:xfrm>
-            <a:off x="10774375" y="6355080"/>
-            <a:ext cx="548640" cy="310896"/>
-          </a:xfrm>
-          <a:prstGeom prst="rect">
-            <a:avLst/>
-          </a:prstGeom>
-          <a:noFill/>
-        </p:spPr>
-        <p:txBody>
-          <a:bodyPr wrap="square" anchor="t">
-            <a:spAutoFit/>
-          </a:bodyPr>
-          <a:lstStyle/>
-          <a:p>
-            <a:pPr algn="r">
-              <a:lnSpc>
-                <a:spcPct val="100000"/>
-              </a:lnSpc>
-              <a:spcBef>
-                <a:spcPts val="0"/>
-              </a:spcBef>
-              <a:spcAft>
-                <a:spcPts val="0"/>
-              </a:spcAft>
-            </a:pPr>
-            <a:r>
-              <a:rPr sz="1000" b="0" i="0">
-                <a:solidFill>
-                  <a:srgbClr val="6A6E76"/>
-                </a:solidFill>
-                <a:latin typeface="Segoe UI"/>
-              </a:rPr>
-              <a:t>18</a:t>
             </a:r>
           </a:p>
         </p:txBody>
@@ -10217,7 +10449,7 @@
                 </a:solidFill>
                 <a:latin typeface="Georgia"/>
               </a:rPr>
-              <a:t>Agente orquestrador</a:t>
+              <a:t>Tool use, apresentado como protocolo</a:t>
             </a:r>
           </a:p>
         </p:txBody>
@@ -10306,7 +10538,7 @@
                 </a:solidFill>
                 <a:latin typeface="Segoe UI"/>
               </a:rPr>
-              <a:t>—  Quem roda o laço: mantém o objetivo, escolhe a ferramenta, decide quando delegar e quando parar</a:t>
+              <a:t>—  O servidor expõe ferramentas com nome, descrição e schema</a:t>
             </a:r>
           </a:p>
           <a:p>
@@ -10328,7 +10560,29 @@
                 </a:solidFill>
                 <a:latin typeface="Segoe UI"/>
               </a:rPr>
-              <a:t>—  É um </a:t>
+              <a:t>—  O harness injeta essa lista no contexto do modelo</a:t>
+            </a:r>
+          </a:p>
+          <a:p>
+            <a:pPr>
+              <a:lnSpc>
+                <a:spcPct val="122000"/>
+              </a:lnSpc>
+              <a:spcBef>
+                <a:spcPts val="1300"/>
+              </a:spcBef>
+              <a:spcAft>
+                <a:spcPts val="0"/>
+              </a:spcAft>
+            </a:pPr>
+            <a:r>
+              <a:rPr sz="1900" b="0" i="0">
+                <a:solidFill>
+                  <a:srgbClr val="16181D"/>
+                </a:solidFill>
+                <a:latin typeface="Segoe UI"/>
+              </a:rPr>
+              <a:t>—  O modelo responde </a:t>
             </a:r>
             <a:r>
               <a:rPr sz="1900" b="1" i="0">
@@ -10337,7 +10591,7 @@
                 </a:solidFill>
                 <a:latin typeface="Segoe UI"/>
               </a:rPr>
-              <a:t>papel</a:t>
+              <a:t>pedindo</a:t>
             </a:r>
             <a:r>
               <a:rPr sz="1900" b="0" i="0">
@@ -10346,7 +10600,7 @@
                 </a:solidFill>
                 <a:latin typeface="Segoe UI"/>
               </a:rPr>
-              <a:t>, não um produto — o mesmo papel aparece nos três produtos da próxima seção</a:t>
+              <a:t> uma chamada; o harness executa e devolve o resultado</a:t>
             </a:r>
           </a:p>
           <a:p>
@@ -10368,25 +10622,7 @@
                 </a:solidFill>
                 <a:latin typeface="Segoe UI"/>
               </a:rPr>
-              <a:t>—  No Claude Code, esse papel é descrito em texto, no </a:t>
-            </a:r>
-            <a:r>
-              <a:rPr sz="1748" b="0" i="0">
-                <a:solidFill>
-                  <a:srgbClr val="16181D"/>
-                </a:solidFill>
-                <a:latin typeface="Consolas"/>
-              </a:rPr>
-              <a:t>CLAUDE.md</a:t>
-            </a:r>
-            <a:r>
-              <a:rPr sz="1900" b="0" i="0">
-                <a:solidFill>
-                  <a:srgbClr val="16181D"/>
-                </a:solidFill>
-                <a:latin typeface="Segoe UI"/>
-              </a:rPr>
-              <a:t> do projeto</a:t>
+              <a:t>—  MCP é o protocolo aberto que padroniza esse contrato</a:t>
             </a:r>
           </a:p>
           <a:p>
@@ -10408,29 +10644,7 @@
                 </a:solidFill>
                 <a:latin typeface="Segoe UI"/>
               </a:rPr>
-              <a:t>·  é literalmente Markdown: sem formato secreto, sem API</a:t>
-            </a:r>
-          </a:p>
-          <a:p>
-            <a:pPr lvl="1">
-              <a:lnSpc>
-                <a:spcPct val="122000"/>
-              </a:lnSpc>
-              <a:spcBef>
-                <a:spcPts val="500"/>
-              </a:spcBef>
-              <a:spcAft>
-                <a:spcPts val="0"/>
-              </a:spcAft>
-            </a:pPr>
-            <a:r>
-              <a:rPr sz="1600" b="0" i="0">
-                <a:solidFill>
-                  <a:srgbClr val="6A6E76"/>
-                </a:solidFill>
-                <a:latin typeface="Segoe UI"/>
-              </a:rPr>
-              <a:t>·  é o que vocês vão escrever na Aula 2</a:t>
+              <a:t>·  a mesma ferramenta serve a qualquer harness que fale o protocolo</a:t>
             </a:r>
           </a:p>
         </p:txBody>
@@ -10591,7 +10805,7 @@
                 </a:solidFill>
                 <a:latin typeface="Georgia"/>
               </a:rPr>
-              <a:t>Skills e o material de apoio</a:t>
+              <a:t>O laço</a:t>
             </a:r>
           </a:p>
         </p:txBody>
@@ -10642,7 +10856,7 @@
       </p:sp>
       <p:pic>
         <p:nvPicPr>
-          <p:cNvPr id="4" name="Picture 3" descr="skill-references.png"/>
+          <p:cNvPr id="4" name="Picture 3" descr="laco-agente.png"/>
           <p:cNvPicPr>
             <a:picLocks noChangeAspect="1"/>
           </p:cNvPicPr>
@@ -10656,8 +10870,8 @@
         </p:blipFill>
         <p:spPr>
           <a:xfrm>
-            <a:off x="1508966" y="1609343"/>
-            <a:ext cx="9173762" cy="4334256"/>
+            <a:off x="1926798" y="1609343"/>
+            <a:ext cx="8338097" cy="4334256"/>
           </a:xfrm>
           <a:prstGeom prst="rect">
             <a:avLst/>
@@ -10672,8 +10886,8 @@
         </p:nvSpPr>
         <p:spPr>
           <a:xfrm>
-            <a:off x="1508966" y="5998464"/>
-            <a:ext cx="9173762" cy="274320"/>
+            <a:off x="1926798" y="5998464"/>
+            <a:ext cx="8338097" cy="274320"/>
           </a:xfrm>
           <a:prstGeom prst="rect">
             <a:avLst/>
@@ -10704,7 +10918,7 @@
                 </a:solidFill>
                 <a:latin typeface="Segoe UI"/>
               </a:rPr>
-              <a:t>Elaboração própria a partir da documentação oficial de Agent Skills (set. 2026).</a:t>
+              <a:t>Elaboração própria.</a:t>
             </a:r>
           </a:p>
         </p:txBody>
@@ -10865,7 +11079,7 @@
                 </a:solidFill>
                 <a:latin typeface="Georgia"/>
               </a:rPr>
-              <a:t>Subagents: comprar janela de contexto</a:t>
+              <a:t>Agente orquestrador</a:t>
             </a:r>
           </a:p>
         </p:txBody>
@@ -10914,40 +11128,16 @@
           </a:p>
         </p:txBody>
       </p:sp>
-      <p:pic>
-        <p:nvPicPr>
-          <p:cNvPr id="4" name="Picture 3" descr="subagente.png"/>
-          <p:cNvPicPr>
-            <a:picLocks noChangeAspect="1"/>
-          </p:cNvPicPr>
-          <p:nvPr/>
-        </p:nvPicPr>
-        <p:blipFill>
-          <a:blip r:embed="rId2"/>
-          <a:stretch>
-            <a:fillRect/>
-          </a:stretch>
-        </p:blipFill>
-        <p:spPr>
-          <a:xfrm>
-            <a:off x="1640003" y="1609343"/>
-            <a:ext cx="8911688" cy="4334256"/>
-          </a:xfrm>
-          <a:prstGeom prst="rect">
-            <a:avLst/>
-          </a:prstGeom>
-        </p:spPr>
-      </p:pic>
-      <p:sp>
-        <p:nvSpPr>
-          <p:cNvPr id="5" name="TextBox 4"/>
+      <p:sp>
+        <p:nvSpPr>
+          <p:cNvPr id="4" name="TextBox 3"/>
           <p:cNvSpPr txBox="1"/>
           <p:nvPr/>
         </p:nvSpPr>
         <p:spPr>
           <a:xfrm>
-            <a:off x="1640003" y="5998464"/>
-            <a:ext cx="8911688" cy="274320"/>
+            <a:off x="868680" y="1609343"/>
+            <a:ext cx="10454335" cy="4562856"/>
           </a:xfrm>
           <a:prstGeom prst="rect">
             <a:avLst/>
@@ -10962,30 +11152,154 @@
           <a:p>
             <a:pPr algn="l">
               <a:lnSpc>
-                <a:spcPct val="100000"/>
-              </a:lnSpc>
-              <a:spcBef>
-                <a:spcPts val="0"/>
-              </a:spcBef>
-              <a:spcAft>
-                <a:spcPts val="0"/>
-              </a:spcAft>
-            </a:pPr>
-            <a:r>
-              <a:rPr sz="1200" b="0" i="1">
+                <a:spcPct val="122000"/>
+              </a:lnSpc>
+              <a:spcBef>
+                <a:spcPts val="0"/>
+              </a:spcBef>
+              <a:spcAft>
+                <a:spcPts val="0"/>
+              </a:spcAft>
+            </a:pPr>
+            <a:r>
+              <a:rPr sz="1900" b="0" i="0">
+                <a:solidFill>
+                  <a:srgbClr val="16181D"/>
+                </a:solidFill>
+                <a:latin typeface="Segoe UI"/>
+              </a:rPr>
+              <a:t>—  Quem roda o laço: mantém o objetivo, escolhe a ferramenta, decide quando delegar e quando parar</a:t>
+            </a:r>
+          </a:p>
+          <a:p>
+            <a:pPr>
+              <a:lnSpc>
+                <a:spcPct val="122000"/>
+              </a:lnSpc>
+              <a:spcBef>
+                <a:spcPts val="1300"/>
+              </a:spcBef>
+              <a:spcAft>
+                <a:spcPts val="0"/>
+              </a:spcAft>
+            </a:pPr>
+            <a:r>
+              <a:rPr sz="1900" b="0" i="0">
+                <a:solidFill>
+                  <a:srgbClr val="16181D"/>
+                </a:solidFill>
+                <a:latin typeface="Segoe UI"/>
+              </a:rPr>
+              <a:t>—  É um </a:t>
+            </a:r>
+            <a:r>
+              <a:rPr sz="1900" b="1" i="0">
+                <a:solidFill>
+                  <a:srgbClr val="16181D"/>
+                </a:solidFill>
+                <a:latin typeface="Segoe UI"/>
+              </a:rPr>
+              <a:t>papel</a:t>
+            </a:r>
+            <a:r>
+              <a:rPr sz="1900" b="0" i="0">
+                <a:solidFill>
+                  <a:srgbClr val="16181D"/>
+                </a:solidFill>
+                <a:latin typeface="Segoe UI"/>
+              </a:rPr>
+              <a:t>, não um produto — o mesmo papel aparece nos três produtos da próxima seção</a:t>
+            </a:r>
+          </a:p>
+          <a:p>
+            <a:pPr>
+              <a:lnSpc>
+                <a:spcPct val="122000"/>
+              </a:lnSpc>
+              <a:spcBef>
+                <a:spcPts val="1300"/>
+              </a:spcBef>
+              <a:spcAft>
+                <a:spcPts val="0"/>
+              </a:spcAft>
+            </a:pPr>
+            <a:r>
+              <a:rPr sz="1900" b="0" i="0">
+                <a:solidFill>
+                  <a:srgbClr val="16181D"/>
+                </a:solidFill>
+                <a:latin typeface="Segoe UI"/>
+              </a:rPr>
+              <a:t>—  No Claude Code, esse papel é descrito em texto, no </a:t>
+            </a:r>
+            <a:r>
+              <a:rPr sz="1748" b="0" i="0">
+                <a:solidFill>
+                  <a:srgbClr val="16181D"/>
+                </a:solidFill>
+                <a:latin typeface="Consolas"/>
+              </a:rPr>
+              <a:t>CLAUDE.md</a:t>
+            </a:r>
+            <a:r>
+              <a:rPr sz="1900" b="0" i="0">
+                <a:solidFill>
+                  <a:srgbClr val="16181D"/>
+                </a:solidFill>
+                <a:latin typeface="Segoe UI"/>
+              </a:rPr>
+              <a:t> do projeto</a:t>
+            </a:r>
+          </a:p>
+          <a:p>
+            <a:pPr lvl="1">
+              <a:lnSpc>
+                <a:spcPct val="122000"/>
+              </a:lnSpc>
+              <a:spcBef>
+                <a:spcPts val="500"/>
+              </a:spcBef>
+              <a:spcAft>
+                <a:spcPts val="0"/>
+              </a:spcAft>
+            </a:pPr>
+            <a:r>
+              <a:rPr sz="1600" b="0" i="0">
                 <a:solidFill>
                   <a:srgbClr val="6A6E76"/>
                 </a:solidFill>
                 <a:latin typeface="Segoe UI"/>
               </a:rPr>
-              <a:t>Elaboração própria a partir do simulador de janela de contexto da documentação oficial do Claude Code (set. 2026).</a:t>
-            </a:r>
-          </a:p>
-        </p:txBody>
-      </p:sp>
-      <p:sp>
-        <p:nvSpPr>
-          <p:cNvPr id="6" name="TextBox 5"/>
+              <a:t>·  é literalmente Markdown: sem formato secreto, sem API</a:t>
+            </a:r>
+          </a:p>
+          <a:p>
+            <a:pPr lvl="1">
+              <a:lnSpc>
+                <a:spcPct val="122000"/>
+              </a:lnSpc>
+              <a:spcBef>
+                <a:spcPts val="500"/>
+              </a:spcBef>
+              <a:spcAft>
+                <a:spcPts val="0"/>
+              </a:spcAft>
+            </a:pPr>
+            <a:r>
+              <a:rPr sz="1600" b="0" i="0">
+                <a:solidFill>
+                  <a:srgbClr val="6A6E76"/>
+                </a:solidFill>
+                <a:latin typeface="Segoe UI"/>
+              </a:rPr>
+              <a:t>·  é o que vocês vão escrever na Aula 2</a:t>
+            </a:r>
+          </a:p>
+        </p:txBody>
+      </p:sp>
+      <p:sp>
+        <p:nvSpPr>
+          <p:cNvPr id="5" name="TextBox 4"/>
           <p:cNvSpPr txBox="1"/>
           <p:nvPr/>
         </p:nvSpPr>
@@ -11030,7 +11344,7 @@
       </p:sp>
       <p:sp>
         <p:nvSpPr>
-          <p:cNvPr id="7" name="TextBox 6"/>
+          <p:cNvPr id="6" name="TextBox 5"/>
           <p:cNvSpPr txBox="1"/>
           <p:nvPr/>
         </p:nvSpPr>
@@ -11082,6 +11396,554 @@
 </file>
 
 <file path=ppt/slides/slide26.xml><?xml version="1.0" encoding="utf-8"?>
+<p:sld xmlns:a="http://schemas.openxmlformats.org/drawingml/2006/main" xmlns:p="http://schemas.openxmlformats.org/presentationml/2006/main" xmlns:r="http://schemas.openxmlformats.org/officeDocument/2006/relationships">
+  <p:cSld>
+    <p:bg>
+      <p:bgPr>
+        <a:solidFill>
+          <a:srgbClr val="FBFAF7"/>
+        </a:solidFill>
+        <a:effectLst/>
+      </p:bgPr>
+    </p:bg>
+    <p:spTree>
+      <p:nvGrpSpPr>
+        <p:cNvPr id="1" name=""/>
+        <p:cNvGrpSpPr/>
+        <p:nvPr/>
+      </p:nvGrpSpPr>
+      <p:grpSpPr/>
+      <p:sp>
+        <p:nvSpPr>
+          <p:cNvPr id="2" name="TextBox 1"/>
+          <p:cNvSpPr txBox="1"/>
+          <p:nvPr/>
+        </p:nvSpPr>
+        <p:spPr>
+          <a:xfrm>
+            <a:off x="868680" y="566928"/>
+            <a:ext cx="10454335" cy="822960"/>
+          </a:xfrm>
+          <a:prstGeom prst="rect">
+            <a:avLst/>
+          </a:prstGeom>
+          <a:noFill/>
+        </p:spPr>
+        <p:txBody>
+          <a:bodyPr wrap="square" anchor="t">
+            <a:spAutoFit/>
+          </a:bodyPr>
+          <a:lstStyle/>
+          <a:p>
+            <a:pPr algn="l">
+              <a:lnSpc>
+                <a:spcPct val="100000"/>
+              </a:lnSpc>
+              <a:spcBef>
+                <a:spcPts val="0"/>
+              </a:spcBef>
+              <a:spcAft>
+                <a:spcPts val="0"/>
+              </a:spcAft>
+            </a:pPr>
+            <a:r>
+              <a:rPr sz="3000" b="0" i="0">
+                <a:solidFill>
+                  <a:srgbClr val="16181D"/>
+                </a:solidFill>
+                <a:latin typeface="Georgia"/>
+              </a:rPr>
+              <a:t>Skills e o material de apoio</a:t>
+            </a:r>
+          </a:p>
+        </p:txBody>
+      </p:sp>
+      <p:sp>
+        <p:nvSpPr>
+          <p:cNvPr id="3" name="Rectangle 2"/>
+          <p:cNvSpPr/>
+          <p:nvPr/>
+        </p:nvSpPr>
+        <p:spPr>
+          <a:xfrm>
+            <a:off x="868680" y="1335024"/>
+            <a:ext cx="10454335" cy="12700"/>
+          </a:xfrm>
+          <a:prstGeom prst="rect">
+            <a:avLst/>
+          </a:prstGeom>
+          <a:solidFill>
+            <a:srgbClr val="D8D4CB"/>
+          </a:solidFill>
+          <a:ln>
+            <a:noFill/>
+          </a:ln>
+          <a:effectLst/>
+        </p:spPr>
+        <p:style>
+          <a:lnRef idx="1">
+            <a:schemeClr val="accent1"/>
+          </a:lnRef>
+          <a:fillRef idx="3">
+            <a:schemeClr val="accent1"/>
+          </a:fillRef>
+          <a:effectRef idx="2">
+            <a:schemeClr val="accent1"/>
+          </a:effectRef>
+          <a:fontRef idx="minor">
+            <a:schemeClr val="lt1"/>
+          </a:fontRef>
+        </p:style>
+        <p:txBody>
+          <a:bodyPr rtlCol="0" anchor="ctr"/>
+          <a:lstStyle/>
+          <a:p>
+            <a:pPr algn="ctr"/>
+          </a:p>
+        </p:txBody>
+      </p:sp>
+      <p:pic>
+        <p:nvPicPr>
+          <p:cNvPr id="4" name="Picture 3" descr="skill-references.png"/>
+          <p:cNvPicPr>
+            <a:picLocks noChangeAspect="1"/>
+          </p:cNvPicPr>
+          <p:nvPr/>
+        </p:nvPicPr>
+        <p:blipFill>
+          <a:blip r:embed="rId2"/>
+          <a:stretch>
+            <a:fillRect/>
+          </a:stretch>
+        </p:blipFill>
+        <p:spPr>
+          <a:xfrm>
+            <a:off x="1508966" y="1609343"/>
+            <a:ext cx="9173762" cy="4334256"/>
+          </a:xfrm>
+          <a:prstGeom prst="rect">
+            <a:avLst/>
+          </a:prstGeom>
+        </p:spPr>
+      </p:pic>
+      <p:sp>
+        <p:nvSpPr>
+          <p:cNvPr id="5" name="TextBox 4"/>
+          <p:cNvSpPr txBox="1"/>
+          <p:nvPr/>
+        </p:nvSpPr>
+        <p:spPr>
+          <a:xfrm>
+            <a:off x="1508966" y="5998464"/>
+            <a:ext cx="9173762" cy="274320"/>
+          </a:xfrm>
+          <a:prstGeom prst="rect">
+            <a:avLst/>
+          </a:prstGeom>
+          <a:noFill/>
+        </p:spPr>
+        <p:txBody>
+          <a:bodyPr wrap="square" anchor="t">
+            <a:spAutoFit/>
+          </a:bodyPr>
+          <a:lstStyle/>
+          <a:p>
+            <a:pPr algn="l">
+              <a:lnSpc>
+                <a:spcPct val="100000"/>
+              </a:lnSpc>
+              <a:spcBef>
+                <a:spcPts val="0"/>
+              </a:spcBef>
+              <a:spcAft>
+                <a:spcPts val="0"/>
+              </a:spcAft>
+            </a:pPr>
+            <a:r>
+              <a:rPr sz="1200" b="0" i="1">
+                <a:solidFill>
+                  <a:srgbClr val="6A6E76"/>
+                </a:solidFill>
+                <a:latin typeface="Segoe UI"/>
+              </a:rPr>
+              <a:t>Elaboração própria a partir da documentação oficial de Agent Skills (set. 2026).</a:t>
+            </a:r>
+          </a:p>
+        </p:txBody>
+      </p:sp>
+      <p:sp>
+        <p:nvSpPr>
+          <p:cNvPr id="6" name="TextBox 5"/>
+          <p:cNvSpPr txBox="1"/>
+          <p:nvPr/>
+        </p:nvSpPr>
+        <p:spPr>
+          <a:xfrm>
+            <a:off x="868680" y="6355080"/>
+            <a:ext cx="9905695" cy="310896"/>
+          </a:xfrm>
+          <a:prstGeom prst="rect">
+            <a:avLst/>
+          </a:prstGeom>
+          <a:noFill/>
+        </p:spPr>
+        <p:txBody>
+          <a:bodyPr wrap="square" anchor="t">
+            <a:spAutoFit/>
+          </a:bodyPr>
+          <a:lstStyle/>
+          <a:p>
+            <a:pPr algn="l">
+              <a:lnSpc>
+                <a:spcPct val="100000"/>
+              </a:lnSpc>
+              <a:spcBef>
+                <a:spcPts val="0"/>
+              </a:spcBef>
+              <a:spcAft>
+                <a:spcPts val="0"/>
+              </a:spcAft>
+            </a:pPr>
+            <a:r>
+              <a:rPr sz="1000" b="0" i="0">
+                <a:solidFill>
+                  <a:srgbClr val="6A6E76"/>
+                </a:solidFill>
+                <a:latin typeface="Segoe UI"/>
+              </a:rPr>
+              <a:t>Paulo E. R. Araujo · 3 · Do sistema ao agente</a:t>
+            </a:r>
+          </a:p>
+        </p:txBody>
+      </p:sp>
+      <p:sp>
+        <p:nvSpPr>
+          <p:cNvPr id="7" name="TextBox 6"/>
+          <p:cNvSpPr txBox="1"/>
+          <p:nvPr/>
+        </p:nvSpPr>
+        <p:spPr>
+          <a:xfrm>
+            <a:off x="10774375" y="6355080"/>
+            <a:ext cx="548640" cy="310896"/>
+          </a:xfrm>
+          <a:prstGeom prst="rect">
+            <a:avLst/>
+          </a:prstGeom>
+          <a:noFill/>
+        </p:spPr>
+        <p:txBody>
+          <a:bodyPr wrap="square" anchor="t">
+            <a:spAutoFit/>
+          </a:bodyPr>
+          <a:lstStyle/>
+          <a:p>
+            <a:pPr algn="r">
+              <a:lnSpc>
+                <a:spcPct val="100000"/>
+              </a:lnSpc>
+              <a:spcBef>
+                <a:spcPts val="0"/>
+              </a:spcBef>
+              <a:spcAft>
+                <a:spcPts val="0"/>
+              </a:spcAft>
+            </a:pPr>
+            <a:r>
+              <a:rPr sz="1000" b="0" i="0">
+                <a:solidFill>
+                  <a:srgbClr val="6A6E76"/>
+                </a:solidFill>
+                <a:latin typeface="Segoe UI"/>
+              </a:rPr>
+              <a:t>22</a:t>
+            </a:r>
+          </a:p>
+        </p:txBody>
+      </p:sp>
+    </p:spTree>
+  </p:cSld>
+  <p:clrMapOvr>
+    <a:masterClrMapping/>
+  </p:clrMapOvr>
+</p:sld>
+</file>
+
+<file path=ppt/slides/slide27.xml><?xml version="1.0" encoding="utf-8"?>
+<p:sld xmlns:a="http://schemas.openxmlformats.org/drawingml/2006/main" xmlns:p="http://schemas.openxmlformats.org/presentationml/2006/main" xmlns:r="http://schemas.openxmlformats.org/officeDocument/2006/relationships">
+  <p:cSld>
+    <p:bg>
+      <p:bgPr>
+        <a:solidFill>
+          <a:srgbClr val="FBFAF7"/>
+        </a:solidFill>
+        <a:effectLst/>
+      </p:bgPr>
+    </p:bg>
+    <p:spTree>
+      <p:nvGrpSpPr>
+        <p:cNvPr id="1" name=""/>
+        <p:cNvGrpSpPr/>
+        <p:nvPr/>
+      </p:nvGrpSpPr>
+      <p:grpSpPr/>
+      <p:sp>
+        <p:nvSpPr>
+          <p:cNvPr id="2" name="TextBox 1"/>
+          <p:cNvSpPr txBox="1"/>
+          <p:nvPr/>
+        </p:nvSpPr>
+        <p:spPr>
+          <a:xfrm>
+            <a:off x="868680" y="566928"/>
+            <a:ext cx="10454335" cy="822960"/>
+          </a:xfrm>
+          <a:prstGeom prst="rect">
+            <a:avLst/>
+          </a:prstGeom>
+          <a:noFill/>
+        </p:spPr>
+        <p:txBody>
+          <a:bodyPr wrap="square" anchor="t">
+            <a:spAutoFit/>
+          </a:bodyPr>
+          <a:lstStyle/>
+          <a:p>
+            <a:pPr algn="l">
+              <a:lnSpc>
+                <a:spcPct val="100000"/>
+              </a:lnSpc>
+              <a:spcBef>
+                <a:spcPts val="0"/>
+              </a:spcBef>
+              <a:spcAft>
+                <a:spcPts val="0"/>
+              </a:spcAft>
+            </a:pPr>
+            <a:r>
+              <a:rPr sz="3000" b="0" i="0">
+                <a:solidFill>
+                  <a:srgbClr val="16181D"/>
+                </a:solidFill>
+                <a:latin typeface="Georgia"/>
+              </a:rPr>
+              <a:t>Subagents: comprar janela de contexto</a:t>
+            </a:r>
+          </a:p>
+        </p:txBody>
+      </p:sp>
+      <p:sp>
+        <p:nvSpPr>
+          <p:cNvPr id="3" name="Rectangle 2"/>
+          <p:cNvSpPr/>
+          <p:nvPr/>
+        </p:nvSpPr>
+        <p:spPr>
+          <a:xfrm>
+            <a:off x="868680" y="1335024"/>
+            <a:ext cx="10454335" cy="12700"/>
+          </a:xfrm>
+          <a:prstGeom prst="rect">
+            <a:avLst/>
+          </a:prstGeom>
+          <a:solidFill>
+            <a:srgbClr val="D8D4CB"/>
+          </a:solidFill>
+          <a:ln>
+            <a:noFill/>
+          </a:ln>
+          <a:effectLst/>
+        </p:spPr>
+        <p:style>
+          <a:lnRef idx="1">
+            <a:schemeClr val="accent1"/>
+          </a:lnRef>
+          <a:fillRef idx="3">
+            <a:schemeClr val="accent1"/>
+          </a:fillRef>
+          <a:effectRef idx="2">
+            <a:schemeClr val="accent1"/>
+          </a:effectRef>
+          <a:fontRef idx="minor">
+            <a:schemeClr val="lt1"/>
+          </a:fontRef>
+        </p:style>
+        <p:txBody>
+          <a:bodyPr rtlCol="0" anchor="ctr"/>
+          <a:lstStyle/>
+          <a:p>
+            <a:pPr algn="ctr"/>
+          </a:p>
+        </p:txBody>
+      </p:sp>
+      <p:pic>
+        <p:nvPicPr>
+          <p:cNvPr id="4" name="Picture 3" descr="subagente.png"/>
+          <p:cNvPicPr>
+            <a:picLocks noChangeAspect="1"/>
+          </p:cNvPicPr>
+          <p:nvPr/>
+        </p:nvPicPr>
+        <p:blipFill>
+          <a:blip r:embed="rId2"/>
+          <a:stretch>
+            <a:fillRect/>
+          </a:stretch>
+        </p:blipFill>
+        <p:spPr>
+          <a:xfrm>
+            <a:off x="1640003" y="1609343"/>
+            <a:ext cx="8911688" cy="4334256"/>
+          </a:xfrm>
+          <a:prstGeom prst="rect">
+            <a:avLst/>
+          </a:prstGeom>
+        </p:spPr>
+      </p:pic>
+      <p:sp>
+        <p:nvSpPr>
+          <p:cNvPr id="5" name="TextBox 4"/>
+          <p:cNvSpPr txBox="1"/>
+          <p:nvPr/>
+        </p:nvSpPr>
+        <p:spPr>
+          <a:xfrm>
+            <a:off x="1640003" y="5998464"/>
+            <a:ext cx="8911688" cy="274320"/>
+          </a:xfrm>
+          <a:prstGeom prst="rect">
+            <a:avLst/>
+          </a:prstGeom>
+          <a:noFill/>
+        </p:spPr>
+        <p:txBody>
+          <a:bodyPr wrap="square" anchor="t">
+            <a:spAutoFit/>
+          </a:bodyPr>
+          <a:lstStyle/>
+          <a:p>
+            <a:pPr algn="l">
+              <a:lnSpc>
+                <a:spcPct val="100000"/>
+              </a:lnSpc>
+              <a:spcBef>
+                <a:spcPts val="0"/>
+              </a:spcBef>
+              <a:spcAft>
+                <a:spcPts val="0"/>
+              </a:spcAft>
+            </a:pPr>
+            <a:r>
+              <a:rPr sz="1200" b="0" i="1">
+                <a:solidFill>
+                  <a:srgbClr val="6A6E76"/>
+                </a:solidFill>
+                <a:latin typeface="Segoe UI"/>
+              </a:rPr>
+              <a:t>Elaboração própria a partir do simulador de janela de contexto da documentação oficial do Claude Code (set. 2026).</a:t>
+            </a:r>
+          </a:p>
+        </p:txBody>
+      </p:sp>
+      <p:sp>
+        <p:nvSpPr>
+          <p:cNvPr id="6" name="TextBox 5"/>
+          <p:cNvSpPr txBox="1"/>
+          <p:nvPr/>
+        </p:nvSpPr>
+        <p:spPr>
+          <a:xfrm>
+            <a:off x="868680" y="6355080"/>
+            <a:ext cx="9905695" cy="310896"/>
+          </a:xfrm>
+          <a:prstGeom prst="rect">
+            <a:avLst/>
+          </a:prstGeom>
+          <a:noFill/>
+        </p:spPr>
+        <p:txBody>
+          <a:bodyPr wrap="square" anchor="t">
+            <a:spAutoFit/>
+          </a:bodyPr>
+          <a:lstStyle/>
+          <a:p>
+            <a:pPr algn="l">
+              <a:lnSpc>
+                <a:spcPct val="100000"/>
+              </a:lnSpc>
+              <a:spcBef>
+                <a:spcPts val="0"/>
+              </a:spcBef>
+              <a:spcAft>
+                <a:spcPts val="0"/>
+              </a:spcAft>
+            </a:pPr>
+            <a:r>
+              <a:rPr sz="1000" b="0" i="0">
+                <a:solidFill>
+                  <a:srgbClr val="6A6E76"/>
+                </a:solidFill>
+                <a:latin typeface="Segoe UI"/>
+              </a:rPr>
+              <a:t>Paulo E. R. Araujo · 3 · Do sistema ao agente</a:t>
+            </a:r>
+          </a:p>
+        </p:txBody>
+      </p:sp>
+      <p:sp>
+        <p:nvSpPr>
+          <p:cNvPr id="7" name="TextBox 6"/>
+          <p:cNvSpPr txBox="1"/>
+          <p:nvPr/>
+        </p:nvSpPr>
+        <p:spPr>
+          <a:xfrm>
+            <a:off x="10774375" y="6355080"/>
+            <a:ext cx="548640" cy="310896"/>
+          </a:xfrm>
+          <a:prstGeom prst="rect">
+            <a:avLst/>
+          </a:prstGeom>
+          <a:noFill/>
+        </p:spPr>
+        <p:txBody>
+          <a:bodyPr wrap="square" anchor="t">
+            <a:spAutoFit/>
+          </a:bodyPr>
+          <a:lstStyle/>
+          <a:p>
+            <a:pPr algn="r">
+              <a:lnSpc>
+                <a:spcPct val="100000"/>
+              </a:lnSpc>
+              <a:spcBef>
+                <a:spcPts val="0"/>
+              </a:spcBef>
+              <a:spcAft>
+                <a:spcPts val="0"/>
+              </a:spcAft>
+            </a:pPr>
+            <a:r>
+              <a:rPr sz="1000" b="0" i="0">
+                <a:solidFill>
+                  <a:srgbClr val="6A6E76"/>
+                </a:solidFill>
+                <a:latin typeface="Segoe UI"/>
+              </a:rPr>
+              <a:t>23</a:t>
+            </a:r>
+          </a:p>
+        </p:txBody>
+      </p:sp>
+    </p:spTree>
+  </p:cSld>
+  <p:clrMapOvr>
+    <a:masterClrMapping/>
+  </p:clrMapOvr>
+</p:sld>
+</file>
+
+<file path=ppt/slides/slide28.xml><?xml version="1.0" encoding="utf-8"?>
 <p:sld xmlns:a="http://schemas.openxmlformats.org/drawingml/2006/main" xmlns:p="http://schemas.openxmlformats.org/presentationml/2006/main" xmlns:r="http://schemas.openxmlformats.org/officeDocument/2006/relationships">
   <p:cSld>
     <p:bg>
@@ -11295,7 +12157,7 @@
                 </a:solidFill>
                 <a:latin typeface="Segoe UI"/>
               </a:rPr>
-              <a:t>22</a:t>
+              <a:t>24</a:t>
             </a:r>
           </a:p>
         </p:txBody>
@@ -11308,7 +12170,7 @@
 </p:sld>
 </file>
 
-<file path=ppt/slides/slide27.xml><?xml version="1.0" encoding="utf-8"?>
+<file path=ppt/slides/slide29.xml><?xml version="1.0" encoding="utf-8"?>
 <p:sld xmlns:a="http://schemas.openxmlformats.org/drawingml/2006/main" xmlns:p="http://schemas.openxmlformats.org/presentationml/2006/main" xmlns:r="http://schemas.openxmlformats.org/officeDocument/2006/relationships">
   <p:cSld>
     <p:bg>
@@ -11433,654 +12295,6 @@
                 <a:latin typeface="Segoe UI"/>
               </a:rPr>
               <a:t>Claude concreto: três interfaces, uma base</a:t>
-            </a:r>
-          </a:p>
-        </p:txBody>
-      </p:sp>
-    </p:spTree>
-  </p:cSld>
-  <p:clrMapOvr>
-    <a:masterClrMapping/>
-  </p:clrMapOvr>
-</p:sld>
-</file>
-
-<file path=ppt/slides/slide28.xml><?xml version="1.0" encoding="utf-8"?>
-<p:sld xmlns:a="http://schemas.openxmlformats.org/drawingml/2006/main" xmlns:p="http://schemas.openxmlformats.org/presentationml/2006/main" xmlns:r="http://schemas.openxmlformats.org/officeDocument/2006/relationships">
-  <p:cSld>
-    <p:bg>
-      <p:bgPr>
-        <a:solidFill>
-          <a:srgbClr val="FBFAF7"/>
-        </a:solidFill>
-        <a:effectLst/>
-      </p:bgPr>
-    </p:bg>
-    <p:spTree>
-      <p:nvGrpSpPr>
-        <p:cNvPr id="1" name=""/>
-        <p:cNvGrpSpPr/>
-        <p:nvPr/>
-      </p:nvGrpSpPr>
-      <p:grpSpPr/>
-      <p:sp>
-        <p:nvSpPr>
-          <p:cNvPr id="2" name="TextBox 1"/>
-          <p:cNvSpPr txBox="1"/>
-          <p:nvPr/>
-        </p:nvSpPr>
-        <p:spPr>
-          <a:xfrm>
-            <a:off x="868680" y="566928"/>
-            <a:ext cx="10454335" cy="822960"/>
-          </a:xfrm>
-          <a:prstGeom prst="rect">
-            <a:avLst/>
-          </a:prstGeom>
-          <a:noFill/>
-        </p:spPr>
-        <p:txBody>
-          <a:bodyPr wrap="square" anchor="t">
-            <a:spAutoFit/>
-          </a:bodyPr>
-          <a:lstStyle/>
-          <a:p>
-            <a:pPr algn="l">
-              <a:lnSpc>
-                <a:spcPct val="100000"/>
-              </a:lnSpc>
-              <a:spcBef>
-                <a:spcPts val="0"/>
-              </a:spcBef>
-              <a:spcAft>
-                <a:spcPts val="0"/>
-              </a:spcAft>
-            </a:pPr>
-            <a:r>
-              <a:rPr sz="3000" b="0" i="0">
-                <a:solidFill>
-                  <a:srgbClr val="16181D"/>
-                </a:solidFill>
-                <a:latin typeface="Georgia"/>
-              </a:rPr>
-              <a:t>Três portas para o mesmo prédio</a:t>
-            </a:r>
-          </a:p>
-        </p:txBody>
-      </p:sp>
-      <p:sp>
-        <p:nvSpPr>
-          <p:cNvPr id="3" name="Rectangle 2"/>
-          <p:cNvSpPr/>
-          <p:nvPr/>
-        </p:nvSpPr>
-        <p:spPr>
-          <a:xfrm>
-            <a:off x="868680" y="1335024"/>
-            <a:ext cx="10454335" cy="12700"/>
-          </a:xfrm>
-          <a:prstGeom prst="rect">
-            <a:avLst/>
-          </a:prstGeom>
-          <a:solidFill>
-            <a:srgbClr val="D8D4CB"/>
-          </a:solidFill>
-          <a:ln>
-            <a:noFill/>
-          </a:ln>
-          <a:effectLst/>
-        </p:spPr>
-        <p:style>
-          <a:lnRef idx="1">
-            <a:schemeClr val="accent1"/>
-          </a:lnRef>
-          <a:fillRef idx="3">
-            <a:schemeClr val="accent1"/>
-          </a:fillRef>
-          <a:effectRef idx="2">
-            <a:schemeClr val="accent1"/>
-          </a:effectRef>
-          <a:fontRef idx="minor">
-            <a:schemeClr val="lt1"/>
-          </a:fontRef>
-        </p:style>
-        <p:txBody>
-          <a:bodyPr rtlCol="0" anchor="ctr"/>
-          <a:lstStyle/>
-          <a:p>
-            <a:pPr algn="ctr"/>
-          </a:p>
-        </p:txBody>
-      </p:sp>
-      <p:pic>
-        <p:nvPicPr>
-          <p:cNvPr id="4" name="Picture 3" descr="tres-produtos.png"/>
-          <p:cNvPicPr>
-            <a:picLocks noChangeAspect="1"/>
-          </p:cNvPicPr>
-          <p:nvPr/>
-        </p:nvPicPr>
-        <p:blipFill>
-          <a:blip r:embed="rId2"/>
-          <a:stretch>
-            <a:fillRect/>
-          </a:stretch>
-        </p:blipFill>
-        <p:spPr>
-          <a:xfrm>
-            <a:off x="1418084" y="1609343"/>
-            <a:ext cx="9355526" cy="4334256"/>
-          </a:xfrm>
-          <a:prstGeom prst="rect">
-            <a:avLst/>
-          </a:prstGeom>
-        </p:spPr>
-      </p:pic>
-      <p:sp>
-        <p:nvSpPr>
-          <p:cNvPr id="5" name="TextBox 4"/>
-          <p:cNvSpPr txBox="1"/>
-          <p:nvPr/>
-        </p:nvSpPr>
-        <p:spPr>
-          <a:xfrm>
-            <a:off x="1418084" y="5998464"/>
-            <a:ext cx="9355526" cy="274320"/>
-          </a:xfrm>
-          <a:prstGeom prst="rect">
-            <a:avLst/>
-          </a:prstGeom>
-          <a:noFill/>
-        </p:spPr>
-        <p:txBody>
-          <a:bodyPr wrap="square" anchor="t">
-            <a:spAutoFit/>
-          </a:bodyPr>
-          <a:lstStyle/>
-          <a:p>
-            <a:pPr algn="l">
-              <a:lnSpc>
-                <a:spcPct val="100000"/>
-              </a:lnSpc>
-              <a:spcBef>
-                <a:spcPts val="0"/>
-              </a:spcBef>
-              <a:spcAft>
-                <a:spcPts val="0"/>
-              </a:spcAft>
-            </a:pPr>
-            <a:r>
-              <a:rPr sz="1200" b="0" i="1">
-                <a:solidFill>
-                  <a:srgbClr val="6A6E76"/>
-                </a:solidFill>
-                <a:latin typeface="Segoe UI"/>
-              </a:rPr>
-              <a:t>Elaboração própria.</a:t>
-            </a:r>
-          </a:p>
-        </p:txBody>
-      </p:sp>
-      <p:sp>
-        <p:nvSpPr>
-          <p:cNvPr id="6" name="TextBox 5"/>
-          <p:cNvSpPr txBox="1"/>
-          <p:nvPr/>
-        </p:nvSpPr>
-        <p:spPr>
-          <a:xfrm>
-            <a:off x="868680" y="6355080"/>
-            <a:ext cx="9905695" cy="310896"/>
-          </a:xfrm>
-          <a:prstGeom prst="rect">
-            <a:avLst/>
-          </a:prstGeom>
-          <a:noFill/>
-        </p:spPr>
-        <p:txBody>
-          <a:bodyPr wrap="square" anchor="t">
-            <a:spAutoFit/>
-          </a:bodyPr>
-          <a:lstStyle/>
-          <a:p>
-            <a:pPr algn="l">
-              <a:lnSpc>
-                <a:spcPct val="100000"/>
-              </a:lnSpc>
-              <a:spcBef>
-                <a:spcPts val="0"/>
-              </a:spcBef>
-              <a:spcAft>
-                <a:spcPts val="0"/>
-              </a:spcAft>
-            </a:pPr>
-            <a:r>
-              <a:rPr sz="1000" b="0" i="0">
-                <a:solidFill>
-                  <a:srgbClr val="6A6E76"/>
-                </a:solidFill>
-                <a:latin typeface="Segoe UI"/>
-              </a:rPr>
-              <a:t>Paulo E. R. Araujo · 4 · Claude concreto</a:t>
-            </a:r>
-          </a:p>
-        </p:txBody>
-      </p:sp>
-      <p:sp>
-        <p:nvSpPr>
-          <p:cNvPr id="7" name="TextBox 6"/>
-          <p:cNvSpPr txBox="1"/>
-          <p:nvPr/>
-        </p:nvSpPr>
-        <p:spPr>
-          <a:xfrm>
-            <a:off x="10774375" y="6355080"/>
-            <a:ext cx="548640" cy="310896"/>
-          </a:xfrm>
-          <a:prstGeom prst="rect">
-            <a:avLst/>
-          </a:prstGeom>
-          <a:noFill/>
-        </p:spPr>
-        <p:txBody>
-          <a:bodyPr wrap="square" anchor="t">
-            <a:spAutoFit/>
-          </a:bodyPr>
-          <a:lstStyle/>
-          <a:p>
-            <a:pPr algn="r">
-              <a:lnSpc>
-                <a:spcPct val="100000"/>
-              </a:lnSpc>
-              <a:spcBef>
-                <a:spcPts val="0"/>
-              </a:spcBef>
-              <a:spcAft>
-                <a:spcPts val="0"/>
-              </a:spcAft>
-            </a:pPr>
-            <a:r>
-              <a:rPr sz="1000" b="0" i="0">
-                <a:solidFill>
-                  <a:srgbClr val="6A6E76"/>
-                </a:solidFill>
-                <a:latin typeface="Segoe UI"/>
-              </a:rPr>
-              <a:t>23</a:t>
-            </a:r>
-          </a:p>
-        </p:txBody>
-      </p:sp>
-    </p:spTree>
-  </p:cSld>
-  <p:clrMapOvr>
-    <a:masterClrMapping/>
-  </p:clrMapOvr>
-</p:sld>
-</file>
-
-<file path=ppt/slides/slide29.xml><?xml version="1.0" encoding="utf-8"?>
-<p:sld xmlns:a="http://schemas.openxmlformats.org/drawingml/2006/main" xmlns:p="http://schemas.openxmlformats.org/presentationml/2006/main" xmlns:r="http://schemas.openxmlformats.org/officeDocument/2006/relationships">
-  <p:cSld>
-    <p:bg>
-      <p:bgPr>
-        <a:solidFill>
-          <a:srgbClr val="FBFAF7"/>
-        </a:solidFill>
-        <a:effectLst/>
-      </p:bgPr>
-    </p:bg>
-    <p:spTree>
-      <p:nvGrpSpPr>
-        <p:cNvPr id="1" name=""/>
-        <p:cNvGrpSpPr/>
-        <p:nvPr/>
-      </p:nvGrpSpPr>
-      <p:grpSpPr/>
-      <p:sp>
-        <p:nvSpPr>
-          <p:cNvPr id="2" name="TextBox 1"/>
-          <p:cNvSpPr txBox="1"/>
-          <p:nvPr/>
-        </p:nvSpPr>
-        <p:spPr>
-          <a:xfrm>
-            <a:off x="868680" y="566928"/>
-            <a:ext cx="10454335" cy="822960"/>
-          </a:xfrm>
-          <a:prstGeom prst="rect">
-            <a:avLst/>
-          </a:prstGeom>
-          <a:noFill/>
-        </p:spPr>
-        <p:txBody>
-          <a:bodyPr wrap="square" anchor="t">
-            <a:spAutoFit/>
-          </a:bodyPr>
-          <a:lstStyle/>
-          <a:p>
-            <a:pPr algn="l">
-              <a:lnSpc>
-                <a:spcPct val="100000"/>
-              </a:lnSpc>
-              <a:spcBef>
-                <a:spcPts val="0"/>
-              </a:spcBef>
-              <a:spcAft>
-                <a:spcPts val="0"/>
-              </a:spcAft>
-            </a:pPr>
-            <a:r>
-              <a:rPr sz="3000" b="0" i="0">
-                <a:solidFill>
-                  <a:srgbClr val="16181D"/>
-                </a:solidFill>
-                <a:latin typeface="Georgia"/>
-              </a:rPr>
-              <a:t>Onde cada conceito aparece — Chat e Cowork</a:t>
-            </a:r>
-          </a:p>
-        </p:txBody>
-      </p:sp>
-      <p:sp>
-        <p:nvSpPr>
-          <p:cNvPr id="3" name="Rectangle 2"/>
-          <p:cNvSpPr/>
-          <p:nvPr/>
-        </p:nvSpPr>
-        <p:spPr>
-          <a:xfrm>
-            <a:off x="868680" y="1335024"/>
-            <a:ext cx="10454335" cy="12700"/>
-          </a:xfrm>
-          <a:prstGeom prst="rect">
-            <a:avLst/>
-          </a:prstGeom>
-          <a:solidFill>
-            <a:srgbClr val="D8D4CB"/>
-          </a:solidFill>
-          <a:ln>
-            <a:noFill/>
-          </a:ln>
-          <a:effectLst/>
-        </p:spPr>
-        <p:style>
-          <a:lnRef idx="1">
-            <a:schemeClr val="accent1"/>
-          </a:lnRef>
-          <a:fillRef idx="3">
-            <a:schemeClr val="accent1"/>
-          </a:fillRef>
-          <a:effectRef idx="2">
-            <a:schemeClr val="accent1"/>
-          </a:effectRef>
-          <a:fontRef idx="minor">
-            <a:schemeClr val="lt1"/>
-          </a:fontRef>
-        </p:style>
-        <p:txBody>
-          <a:bodyPr rtlCol="0" anchor="ctr"/>
-          <a:lstStyle/>
-          <a:p>
-            <a:pPr algn="ctr"/>
-          </a:p>
-        </p:txBody>
-      </p:sp>
-      <p:sp>
-        <p:nvSpPr>
-          <p:cNvPr id="4" name="TextBox 3"/>
-          <p:cNvSpPr txBox="1"/>
-          <p:nvPr/>
-        </p:nvSpPr>
-        <p:spPr>
-          <a:xfrm>
-            <a:off x="868680" y="1609343"/>
-            <a:ext cx="10454335" cy="4562856"/>
-          </a:xfrm>
-          <a:prstGeom prst="rect">
-            <a:avLst/>
-          </a:prstGeom>
-          <a:noFill/>
-        </p:spPr>
-        <p:txBody>
-          <a:bodyPr wrap="square" anchor="t">
-            <a:spAutoFit/>
-          </a:bodyPr>
-          <a:lstStyle/>
-          <a:p>
-            <a:pPr algn="l">
-              <a:lnSpc>
-                <a:spcPct val="122000"/>
-              </a:lnSpc>
-              <a:spcBef>
-                <a:spcPts val="0"/>
-              </a:spcBef>
-              <a:spcAft>
-                <a:spcPts val="0"/>
-              </a:spcAft>
-            </a:pPr>
-            <a:r>
-              <a:rPr sz="1900" b="0" i="0">
-                <a:solidFill>
-                  <a:srgbClr val="16181D"/>
-                </a:solidFill>
-                <a:latin typeface="Segoe UI"/>
-              </a:rPr>
-              <a:t>—  </a:t>
-            </a:r>
-            <a:r>
-              <a:rPr sz="1900" b="1" i="0">
-                <a:solidFill>
-                  <a:srgbClr val="16181D"/>
-                </a:solidFill>
-                <a:latin typeface="Segoe UI"/>
-              </a:rPr>
-              <a:t>Chat</a:t>
-            </a:r>
-            <a:r>
-              <a:rPr sz="1900" b="0" i="0">
-                <a:solidFill>
-                  <a:srgbClr val="16181D"/>
-                </a:solidFill>
-                <a:latin typeface="Segoe UI"/>
-              </a:rPr>
-              <a:t> — a porta de entrada do pesquisador</a:t>
-            </a:r>
-          </a:p>
-          <a:p>
-            <a:pPr lvl="1">
-              <a:lnSpc>
-                <a:spcPct val="122000"/>
-              </a:lnSpc>
-              <a:spcBef>
-                <a:spcPts val="500"/>
-              </a:spcBef>
-              <a:spcAft>
-                <a:spcPts val="0"/>
-              </a:spcAft>
-            </a:pPr>
-            <a:r>
-              <a:rPr sz="1600" b="0" i="0">
-                <a:solidFill>
-                  <a:srgbClr val="6A6E76"/>
-                </a:solidFill>
-                <a:latin typeface="Segoe UI"/>
-              </a:rPr>
-              <a:t>·  Projects e memória fazem o papel de contexto persistente</a:t>
-            </a:r>
-          </a:p>
-          <a:p>
-            <a:pPr lvl="1">
-              <a:lnSpc>
-                <a:spcPct val="122000"/>
-              </a:lnSpc>
-              <a:spcBef>
-                <a:spcPts val="500"/>
-              </a:spcBef>
-              <a:spcAft>
-                <a:spcPts val="0"/>
-              </a:spcAft>
-            </a:pPr>
-            <a:r>
-              <a:rPr sz="1600" b="0" i="0">
-                <a:solidFill>
-                  <a:srgbClr val="6A6E76"/>
-                </a:solidFill>
-                <a:latin typeface="Segoe UI"/>
-              </a:rPr>
-              <a:t>·  connectors são tool use com outra roupa</a:t>
-            </a:r>
-          </a:p>
-          <a:p>
-            <a:pPr>
-              <a:lnSpc>
-                <a:spcPct val="122000"/>
-              </a:lnSpc>
-              <a:spcBef>
-                <a:spcPts val="1300"/>
-              </a:spcBef>
-              <a:spcAft>
-                <a:spcPts val="0"/>
-              </a:spcAft>
-            </a:pPr>
-            <a:r>
-              <a:rPr sz="1900" b="0" i="0">
-                <a:solidFill>
-                  <a:srgbClr val="16181D"/>
-                </a:solidFill>
-                <a:latin typeface="Segoe UI"/>
-              </a:rPr>
-              <a:t>—  </a:t>
-            </a:r>
-            <a:r>
-              <a:rPr sz="1900" b="1" i="0">
-                <a:solidFill>
-                  <a:srgbClr val="16181D"/>
-                </a:solidFill>
-                <a:latin typeface="Segoe UI"/>
-              </a:rPr>
-              <a:t>Cowork</a:t>
-            </a:r>
-            <a:r>
-              <a:rPr sz="1900" b="0" i="0">
-                <a:solidFill>
-                  <a:srgbClr val="16181D"/>
-                </a:solidFill>
-                <a:latin typeface="Segoe UI"/>
-              </a:rPr>
-              <a:t> — trabalho delegado sobre arquivos e tarefas</a:t>
-            </a:r>
-          </a:p>
-          <a:p>
-            <a:pPr lvl="1">
-              <a:lnSpc>
-                <a:spcPct val="122000"/>
-              </a:lnSpc>
-              <a:spcBef>
-                <a:spcPts val="500"/>
-              </a:spcBef>
-              <a:spcAft>
-                <a:spcPts val="0"/>
-              </a:spcAft>
-            </a:pPr>
-            <a:r>
-              <a:rPr sz="1600" b="0" i="0">
-                <a:solidFill>
-                  <a:srgbClr val="6A6E76"/>
-                </a:solidFill>
-                <a:latin typeface="Segoe UI"/>
-              </a:rPr>
-              <a:t>·  dispatch e times de agentes são o orquestrador com interface</a:t>
-            </a:r>
-          </a:p>
-        </p:txBody>
-      </p:sp>
-      <p:sp>
-        <p:nvSpPr>
-          <p:cNvPr id="5" name="TextBox 4"/>
-          <p:cNvSpPr txBox="1"/>
-          <p:nvPr/>
-        </p:nvSpPr>
-        <p:spPr>
-          <a:xfrm>
-            <a:off x="868680" y="6355080"/>
-            <a:ext cx="9905695" cy="310896"/>
-          </a:xfrm>
-          <a:prstGeom prst="rect">
-            <a:avLst/>
-          </a:prstGeom>
-          <a:noFill/>
-        </p:spPr>
-        <p:txBody>
-          <a:bodyPr wrap="square" anchor="t">
-            <a:spAutoFit/>
-          </a:bodyPr>
-          <a:lstStyle/>
-          <a:p>
-            <a:pPr algn="l">
-              <a:lnSpc>
-                <a:spcPct val="100000"/>
-              </a:lnSpc>
-              <a:spcBef>
-                <a:spcPts val="0"/>
-              </a:spcBef>
-              <a:spcAft>
-                <a:spcPts val="0"/>
-              </a:spcAft>
-            </a:pPr>
-            <a:r>
-              <a:rPr sz="1000" b="0" i="0">
-                <a:solidFill>
-                  <a:srgbClr val="6A6E76"/>
-                </a:solidFill>
-                <a:latin typeface="Segoe UI"/>
-              </a:rPr>
-              <a:t>Paulo E. R. Araujo · 4 · Claude concreto</a:t>
-            </a:r>
-          </a:p>
-        </p:txBody>
-      </p:sp>
-      <p:sp>
-        <p:nvSpPr>
-          <p:cNvPr id="6" name="TextBox 5"/>
-          <p:cNvSpPr txBox="1"/>
-          <p:nvPr/>
-        </p:nvSpPr>
-        <p:spPr>
-          <a:xfrm>
-            <a:off x="10774375" y="6355080"/>
-            <a:ext cx="548640" cy="310896"/>
-          </a:xfrm>
-          <a:prstGeom prst="rect">
-            <a:avLst/>
-          </a:prstGeom>
-          <a:noFill/>
-        </p:spPr>
-        <p:txBody>
-          <a:bodyPr wrap="square" anchor="t">
-            <a:spAutoFit/>
-          </a:bodyPr>
-          <a:lstStyle/>
-          <a:p>
-            <a:pPr algn="r">
-              <a:lnSpc>
-                <a:spcPct val="100000"/>
-              </a:lnSpc>
-              <a:spcBef>
-                <a:spcPts val="0"/>
-              </a:spcBef>
-              <a:spcAft>
-                <a:spcPts val="0"/>
-              </a:spcAft>
-            </a:pPr>
-            <a:r>
-              <a:rPr sz="1000" b="0" i="0">
-                <a:solidFill>
-                  <a:srgbClr val="6A6E76"/>
-                </a:solidFill>
-                <a:latin typeface="Segoe UI"/>
-              </a:rPr>
-              <a:t>24</a:t>
             </a:r>
           </a:p>
         </p:txBody>
@@ -12470,7 +12684,7 @@
                 </a:solidFill>
                 <a:latin typeface="Georgia"/>
               </a:rPr>
-              <a:t>Onde cada conceito aparece — Code</a:t>
+              <a:t>Três portas para o mesmo prédio</a:t>
             </a:r>
           </a:p>
         </p:txBody>
@@ -12519,16 +12733,40 @@
           </a:p>
         </p:txBody>
       </p:sp>
-      <p:sp>
-        <p:nvSpPr>
-          <p:cNvPr id="4" name="TextBox 3"/>
+      <p:pic>
+        <p:nvPicPr>
+          <p:cNvPr id="4" name="Picture 3" descr="tres-produtos.png"/>
+          <p:cNvPicPr>
+            <a:picLocks noChangeAspect="1"/>
+          </p:cNvPicPr>
+          <p:nvPr/>
+        </p:nvPicPr>
+        <p:blipFill>
+          <a:blip r:embed="rId2"/>
+          <a:stretch>
+            <a:fillRect/>
+          </a:stretch>
+        </p:blipFill>
+        <p:spPr>
+          <a:xfrm>
+            <a:off x="1418084" y="1609343"/>
+            <a:ext cx="9355526" cy="4334256"/>
+          </a:xfrm>
+          <a:prstGeom prst="rect">
+            <a:avLst/>
+          </a:prstGeom>
+        </p:spPr>
+      </p:pic>
+      <p:sp>
+        <p:nvSpPr>
+          <p:cNvPr id="5" name="TextBox 4"/>
           <p:cNvSpPr txBox="1"/>
           <p:nvPr/>
         </p:nvSpPr>
         <p:spPr>
           <a:xfrm>
-            <a:off x="868680" y="1609343"/>
-            <a:ext cx="10454335" cy="4562856"/>
+            <a:off x="1418084" y="5998464"/>
+            <a:ext cx="9355526" cy="274320"/>
           </a:xfrm>
           <a:prstGeom prst="rect">
             <a:avLst/>
@@ -12543,212 +12781,30 @@
           <a:p>
             <a:pPr algn="l">
               <a:lnSpc>
-                <a:spcPct val="122000"/>
-              </a:lnSpc>
-              <a:spcBef>
-                <a:spcPts val="0"/>
-              </a:spcBef>
-              <a:spcAft>
-                <a:spcPts val="0"/>
-              </a:spcAft>
-            </a:pPr>
-            <a:r>
-              <a:rPr sz="1900" b="0" i="0">
-                <a:solidFill>
-                  <a:srgbClr val="16181D"/>
-                </a:solidFill>
-                <a:latin typeface="Segoe UI"/>
-              </a:rPr>
-              <a:t>—  </a:t>
-            </a:r>
-            <a:r>
-              <a:rPr sz="1900" b="1" i="0">
-                <a:solidFill>
-                  <a:srgbClr val="16181D"/>
-                </a:solidFill>
-                <a:latin typeface="Segoe UI"/>
-              </a:rPr>
-              <a:t>Code</a:t>
-            </a:r>
-            <a:r>
-              <a:rPr sz="1900" b="0" i="0">
-                <a:solidFill>
-                  <a:srgbClr val="16181D"/>
-                </a:solidFill>
-                <a:latin typeface="Segoe UI"/>
-              </a:rPr>
-              <a:t> — o agente dentro do repositório</a:t>
-            </a:r>
-          </a:p>
-          <a:p>
-            <a:pPr lvl="1">
-              <a:lnSpc>
-                <a:spcPct val="122000"/>
-              </a:lnSpc>
-              <a:spcBef>
-                <a:spcPts val="500"/>
-              </a:spcBef>
-              <a:spcAft>
-                <a:spcPts val="0"/>
-              </a:spcAft>
-            </a:pPr>
-            <a:r>
-              <a:rPr sz="1600" b="0" i="0">
+                <a:spcPct val="100000"/>
+              </a:lnSpc>
+              <a:spcBef>
+                <a:spcPts val="0"/>
+              </a:spcBef>
+              <a:spcAft>
+                <a:spcPts val="0"/>
+              </a:spcAft>
+            </a:pPr>
+            <a:r>
+              <a:rPr sz="1200" b="0" i="1">
                 <a:solidFill>
                   <a:srgbClr val="6A6E76"/>
                 </a:solidFill>
                 <a:latin typeface="Segoe UI"/>
               </a:rPr>
-              <a:t>·  </a:t>
-            </a:r>
-            <a:r>
-              <a:rPr sz="1472" b="0" i="0">
-                <a:solidFill>
-                  <a:srgbClr val="6A6E76"/>
-                </a:solidFill>
-                <a:latin typeface="Consolas"/>
-              </a:rPr>
-              <a:t>CLAUDE.md</a:t>
-            </a:r>
-            <a:r>
-              <a:rPr sz="1600" b="0" i="0">
-                <a:solidFill>
-                  <a:srgbClr val="6A6E76"/>
-                </a:solidFill>
-                <a:latin typeface="Segoe UI"/>
-              </a:rPr>
-              <a:t>, skills, material de apoio e subagents</a:t>
-            </a:r>
-          </a:p>
-          <a:p>
-            <a:pPr lvl="1">
-              <a:lnSpc>
-                <a:spcPct val="122000"/>
-              </a:lnSpc>
-              <a:spcBef>
-                <a:spcPts val="500"/>
-              </a:spcBef>
-              <a:spcAft>
-                <a:spcPts val="0"/>
-              </a:spcAft>
-            </a:pPr>
-            <a:r>
-              <a:rPr sz="1600" b="0" i="0">
-                <a:solidFill>
-                  <a:srgbClr val="6A6E76"/>
-                </a:solidFill>
-                <a:latin typeface="Segoe UI"/>
-              </a:rPr>
-              <a:t>·  quatro superfícies: terminal, IDE, aplicativo de desktop e web</a:t>
-            </a:r>
-          </a:p>
-          <a:p>
-            <a:pPr>
-              <a:lnSpc>
-                <a:spcPct val="122000"/>
-              </a:lnSpc>
-              <a:spcBef>
-                <a:spcPts val="1300"/>
-              </a:spcBef>
-              <a:spcAft>
-                <a:spcPts val="0"/>
-              </a:spcAft>
-            </a:pPr>
-            <a:r>
-              <a:rPr sz="1900" b="0" i="0">
-                <a:solidFill>
-                  <a:srgbClr val="16181D"/>
-                </a:solidFill>
-                <a:latin typeface="Segoe UI"/>
-              </a:rPr>
-              <a:t>—  </a:t>
-            </a:r>
-            <a:r>
-              <a:rPr sz="1900" b="1" i="0">
-                <a:solidFill>
-                  <a:srgbClr val="16181D"/>
-                </a:solidFill>
-                <a:latin typeface="Segoe UI"/>
-              </a:rPr>
-              <a:t>Hooks</a:t>
-            </a:r>
-            <a:r>
-              <a:rPr sz="1900" b="0" i="0">
-                <a:solidFill>
-                  <a:srgbClr val="16181D"/>
-                </a:solidFill>
-                <a:latin typeface="Segoe UI"/>
-              </a:rPr>
-              <a:t> — comando determinístico em torno de um núcleo estocástico</a:t>
-            </a:r>
-          </a:p>
-          <a:p>
-            <a:pPr lvl="1">
-              <a:lnSpc>
-                <a:spcPct val="122000"/>
-              </a:lnSpc>
-              <a:spcBef>
-                <a:spcPts val="500"/>
-              </a:spcBef>
-              <a:spcAft>
-                <a:spcPts val="0"/>
-              </a:spcAft>
-            </a:pPr>
-            <a:r>
-              <a:rPr sz="1600" b="0" i="0">
-                <a:solidFill>
-                  <a:srgbClr val="6A6E76"/>
-                </a:solidFill>
-                <a:latin typeface="Segoe UI"/>
-              </a:rPr>
-              <a:t>·  é a ponte para reprodutibilidade, que volta no próximo bloco</a:t>
-            </a:r>
-          </a:p>
-          <a:p>
-            <a:pPr>
-              <a:lnSpc>
-                <a:spcPct val="122000"/>
-              </a:lnSpc>
-              <a:spcBef>
-                <a:spcPts val="1300"/>
-              </a:spcBef>
-              <a:spcAft>
-                <a:spcPts val="0"/>
-              </a:spcAft>
-            </a:pPr>
-            <a:r>
-              <a:rPr sz="1900" b="0" i="0">
-                <a:solidFill>
-                  <a:srgbClr val="16181D"/>
-                </a:solidFill>
-                <a:latin typeface="Segoe UI"/>
-              </a:rPr>
-              <a:t>—  </a:t>
-            </a:r>
-            <a:r>
-              <a:rPr sz="1900" b="1" i="0">
-                <a:solidFill>
-                  <a:srgbClr val="16181D"/>
-                </a:solidFill>
-                <a:latin typeface="Segoe UI"/>
-              </a:rPr>
-              <a:t>Checkpointing</a:t>
-            </a:r>
-            <a:r>
-              <a:rPr sz="1900" b="0" i="0">
-                <a:solidFill>
-                  <a:srgbClr val="16181D"/>
-                </a:solidFill>
-                <a:latin typeface="Segoe UI"/>
-              </a:rPr>
-              <a:t> — desfazer o que o agente fez</a:t>
-            </a:r>
-          </a:p>
-        </p:txBody>
-      </p:sp>
-      <p:sp>
-        <p:nvSpPr>
-          <p:cNvPr id="5" name="TextBox 4"/>
+              <a:t>Elaboração própria.</a:t>
+            </a:r>
+          </a:p>
+        </p:txBody>
+      </p:sp>
+      <p:sp>
+        <p:nvSpPr>
+          <p:cNvPr id="6" name="TextBox 5"/>
           <p:cNvSpPr txBox="1"/>
           <p:nvPr/>
         </p:nvSpPr>
@@ -12793,7 +12849,7 @@
       </p:sp>
       <p:sp>
         <p:nvSpPr>
-          <p:cNvPr id="6" name="TextBox 5"/>
+          <p:cNvPr id="7" name="TextBox 6"/>
           <p:cNvSpPr txBox="1"/>
           <p:nvPr/>
         </p:nvSpPr>
@@ -12850,7 +12906,7 @@
     <p:bg>
       <p:bgPr>
         <a:solidFill>
-          <a:srgbClr val="1B2A3A"/>
+          <a:srgbClr val="FBFAF7"/>
         </a:solidFill>
         <a:effectLst/>
       </p:bgPr>
@@ -12864,20 +12920,65 @@
       <p:grpSpPr/>
       <p:sp>
         <p:nvSpPr>
-          <p:cNvPr id="2" name="Rectangle 1"/>
+          <p:cNvPr id="2" name="TextBox 1"/>
+          <p:cNvSpPr txBox="1"/>
+          <p:nvPr/>
+        </p:nvSpPr>
+        <p:spPr>
+          <a:xfrm>
+            <a:off x="868680" y="566928"/>
+            <a:ext cx="10454335" cy="822960"/>
+          </a:xfrm>
+          <a:prstGeom prst="rect">
+            <a:avLst/>
+          </a:prstGeom>
+          <a:noFill/>
+        </p:spPr>
+        <p:txBody>
+          <a:bodyPr wrap="square" anchor="t">
+            <a:spAutoFit/>
+          </a:bodyPr>
+          <a:lstStyle/>
+          <a:p>
+            <a:pPr algn="l">
+              <a:lnSpc>
+                <a:spcPct val="100000"/>
+              </a:lnSpc>
+              <a:spcBef>
+                <a:spcPts val="0"/>
+              </a:spcBef>
+              <a:spcAft>
+                <a:spcPts val="0"/>
+              </a:spcAft>
+            </a:pPr>
+            <a:r>
+              <a:rPr sz="3000" b="0" i="0">
+                <a:solidFill>
+                  <a:srgbClr val="16181D"/>
+                </a:solidFill>
+                <a:latin typeface="Georgia"/>
+              </a:rPr>
+              <a:t>Onde cada conceito aparece — Chat e Cowork</a:t>
+            </a:r>
+          </a:p>
+        </p:txBody>
+      </p:sp>
+      <p:sp>
+        <p:nvSpPr>
+          <p:cNvPr id="3" name="Rectangle 2"/>
           <p:cNvSpPr/>
           <p:nvPr/>
         </p:nvSpPr>
         <p:spPr>
           <a:xfrm>
-            <a:off x="868680" y="2788920"/>
-            <a:ext cx="1463040" cy="31750"/>
+            <a:off x="868680" y="1335024"/>
+            <a:ext cx="10454335" cy="12700"/>
           </a:xfrm>
           <a:prstGeom prst="rect">
             <a:avLst/>
           </a:prstGeom>
           <a:solidFill>
-            <a:srgbClr val="BC7A2F"/>
+            <a:srgbClr val="D8D4CB"/>
           </a:solidFill>
           <a:ln>
             <a:noFill/>
@@ -12908,14 +13009,14 @@
       </p:sp>
       <p:sp>
         <p:nvSpPr>
-          <p:cNvPr id="3" name="TextBox 2"/>
+          <p:cNvPr id="4" name="TextBox 3"/>
           <p:cNvSpPr txBox="1"/>
           <p:nvPr/>
         </p:nvSpPr>
         <p:spPr>
           <a:xfrm>
-            <a:off x="868680" y="3063240"/>
-            <a:ext cx="10454335" cy="1463040"/>
+            <a:off x="868680" y="1609343"/>
+            <a:ext cx="10454335" cy="4562856"/>
           </a:xfrm>
           <a:prstGeom prst="rect">
             <a:avLst/>
@@ -12930,6 +13031,197 @@
           <a:p>
             <a:pPr algn="l">
               <a:lnSpc>
+                <a:spcPct val="122000"/>
+              </a:lnSpc>
+              <a:spcBef>
+                <a:spcPts val="0"/>
+              </a:spcBef>
+              <a:spcAft>
+                <a:spcPts val="0"/>
+              </a:spcAft>
+            </a:pPr>
+            <a:r>
+              <a:rPr sz="1900" b="0" i="0">
+                <a:solidFill>
+                  <a:srgbClr val="16181D"/>
+                </a:solidFill>
+                <a:latin typeface="Segoe UI"/>
+              </a:rPr>
+              <a:t>—  Os dois são harnesses: mesma base, ambientes diferentes</a:t>
+            </a:r>
+          </a:p>
+          <a:p>
+            <a:pPr>
+              <a:lnSpc>
+                <a:spcPct val="122000"/>
+              </a:lnSpc>
+              <a:spcBef>
+                <a:spcPts val="1300"/>
+              </a:spcBef>
+              <a:spcAft>
+                <a:spcPts val="0"/>
+              </a:spcAft>
+            </a:pPr>
+            <a:r>
+              <a:rPr sz="1900" b="0" i="0">
+                <a:solidFill>
+                  <a:srgbClr val="16181D"/>
+                </a:solidFill>
+                <a:latin typeface="Segoe UI"/>
+              </a:rPr>
+              <a:t>—  </a:t>
+            </a:r>
+            <a:r>
+              <a:rPr sz="1900" b="1" i="0">
+                <a:solidFill>
+                  <a:srgbClr val="16181D"/>
+                </a:solidFill>
+                <a:latin typeface="Segoe UI"/>
+              </a:rPr>
+              <a:t>Chat</a:t>
+            </a:r>
+            <a:r>
+              <a:rPr sz="1900" b="0" i="0">
+                <a:solidFill>
+                  <a:srgbClr val="16181D"/>
+                </a:solidFill>
+                <a:latin typeface="Segoe UI"/>
+              </a:rPr>
+              <a:t> — a porta de entrada do pesquisador</a:t>
+            </a:r>
+          </a:p>
+          <a:p>
+            <a:pPr lvl="1">
+              <a:lnSpc>
+                <a:spcPct val="122000"/>
+              </a:lnSpc>
+              <a:spcBef>
+                <a:spcPts val="500"/>
+              </a:spcBef>
+              <a:spcAft>
+                <a:spcPts val="0"/>
+              </a:spcAft>
+            </a:pPr>
+            <a:r>
+              <a:rPr sz="1600" b="0" i="0">
+                <a:solidFill>
+                  <a:srgbClr val="6A6E76"/>
+                </a:solidFill>
+                <a:latin typeface="Segoe UI"/>
+              </a:rPr>
+              <a:t>·  Projects e memória fazem o papel de contexto persistente</a:t>
+            </a:r>
+          </a:p>
+          <a:p>
+            <a:pPr lvl="1">
+              <a:lnSpc>
+                <a:spcPct val="122000"/>
+              </a:lnSpc>
+              <a:spcBef>
+                <a:spcPts val="500"/>
+              </a:spcBef>
+              <a:spcAft>
+                <a:spcPts val="0"/>
+              </a:spcAft>
+            </a:pPr>
+            <a:r>
+              <a:rPr sz="1600" b="0" i="0">
+                <a:solidFill>
+                  <a:srgbClr val="6A6E76"/>
+                </a:solidFill>
+                <a:latin typeface="Segoe UI"/>
+              </a:rPr>
+              <a:t>·  connectors são tool use com outra roupa</a:t>
+            </a:r>
+          </a:p>
+          <a:p>
+            <a:pPr>
+              <a:lnSpc>
+                <a:spcPct val="122000"/>
+              </a:lnSpc>
+              <a:spcBef>
+                <a:spcPts val="1300"/>
+              </a:spcBef>
+              <a:spcAft>
+                <a:spcPts val="0"/>
+              </a:spcAft>
+            </a:pPr>
+            <a:r>
+              <a:rPr sz="1900" b="0" i="0">
+                <a:solidFill>
+                  <a:srgbClr val="16181D"/>
+                </a:solidFill>
+                <a:latin typeface="Segoe UI"/>
+              </a:rPr>
+              <a:t>—  </a:t>
+            </a:r>
+            <a:r>
+              <a:rPr sz="1900" b="1" i="0">
+                <a:solidFill>
+                  <a:srgbClr val="16181D"/>
+                </a:solidFill>
+                <a:latin typeface="Segoe UI"/>
+              </a:rPr>
+              <a:t>Cowork</a:t>
+            </a:r>
+            <a:r>
+              <a:rPr sz="1900" b="0" i="0">
+                <a:solidFill>
+                  <a:srgbClr val="16181D"/>
+                </a:solidFill>
+                <a:latin typeface="Segoe UI"/>
+              </a:rPr>
+              <a:t> — trabalho delegado sobre arquivos e tarefas</a:t>
+            </a:r>
+          </a:p>
+          <a:p>
+            <a:pPr lvl="1">
+              <a:lnSpc>
+                <a:spcPct val="122000"/>
+              </a:lnSpc>
+              <a:spcBef>
+                <a:spcPts val="500"/>
+              </a:spcBef>
+              <a:spcAft>
+                <a:spcPts val="0"/>
+              </a:spcAft>
+            </a:pPr>
+            <a:r>
+              <a:rPr sz="1600" b="0" i="0">
+                <a:solidFill>
+                  <a:srgbClr val="6A6E76"/>
+                </a:solidFill>
+                <a:latin typeface="Segoe UI"/>
+              </a:rPr>
+              <a:t>·  dispatch e times de agentes são o orquestrador com interface</a:t>
+            </a:r>
+          </a:p>
+        </p:txBody>
+      </p:sp>
+      <p:sp>
+        <p:nvSpPr>
+          <p:cNvPr id="5" name="TextBox 4"/>
+          <p:cNvSpPr txBox="1"/>
+          <p:nvPr/>
+        </p:nvSpPr>
+        <p:spPr>
+          <a:xfrm>
+            <a:off x="868680" y="6355080"/>
+            <a:ext cx="9905695" cy="310896"/>
+          </a:xfrm>
+          <a:prstGeom prst="rect">
+            <a:avLst/>
+          </a:prstGeom>
+          <a:noFill/>
+        </p:spPr>
+        <p:txBody>
+          <a:bodyPr wrap="square" anchor="t">
+            <a:spAutoFit/>
+          </a:bodyPr>
+          <a:lstStyle/>
+          <a:p>
+            <a:pPr algn="l">
+              <a:lnSpc>
                 <a:spcPct val="100000"/>
               </a:lnSpc>
               <a:spcBef>
@@ -12940,35 +13232,58 @@
               </a:spcAft>
             </a:pPr>
             <a:r>
-              <a:rPr sz="3200" b="0" i="0">
-                <a:solidFill>
-                  <a:srgbClr val="F7F6F2"/>
-                </a:solidFill>
-                <a:latin typeface="Georgia"/>
-              </a:rPr>
-              <a:t>Bloco 5</a:t>
-            </a:r>
-          </a:p>
-          <a:p>
-            <a:pPr>
+              <a:rPr sz="1000" b="0" i="0">
+                <a:solidFill>
+                  <a:srgbClr val="6A6E76"/>
+                </a:solidFill>
+                <a:latin typeface="Segoe UI"/>
+              </a:rPr>
+              <a:t>Paulo E. R. Araujo · 4 · Claude concreto</a:t>
+            </a:r>
+          </a:p>
+        </p:txBody>
+      </p:sp>
+      <p:sp>
+        <p:nvSpPr>
+          <p:cNvPr id="6" name="TextBox 5"/>
+          <p:cNvSpPr txBox="1"/>
+          <p:nvPr/>
+        </p:nvSpPr>
+        <p:spPr>
+          <a:xfrm>
+            <a:off x="10774375" y="6355080"/>
+            <a:ext cx="548640" cy="310896"/>
+          </a:xfrm>
+          <a:prstGeom prst="rect">
+            <a:avLst/>
+          </a:prstGeom>
+          <a:noFill/>
+        </p:spPr>
+        <p:txBody>
+          <a:bodyPr wrap="square" anchor="t">
+            <a:spAutoFit/>
+          </a:bodyPr>
+          <a:lstStyle/>
+          <a:p>
+            <a:pPr algn="r">
               <a:lnSpc>
                 <a:spcPct val="100000"/>
               </a:lnSpc>
               <a:spcBef>
-                <a:spcPts val="1000"/>
-              </a:spcBef>
-              <a:spcAft>
-                <a:spcPts val="0"/>
-              </a:spcAft>
-            </a:pPr>
-            <a:r>
-              <a:rPr sz="1600" b="0" i="0">
-                <a:solidFill>
-                  <a:srgbClr val="7FA8C9"/>
-                </a:solidFill>
-                <a:latin typeface="Segoe UI"/>
-              </a:rPr>
-              <a:t>Aplicação em pesquisa em computação</a:t>
+                <a:spcPts val="0"/>
+              </a:spcBef>
+              <a:spcAft>
+                <a:spcPts val="0"/>
+              </a:spcAft>
+            </a:pPr>
+            <a:r>
+              <a:rPr sz="1000" b="0" i="0">
+                <a:solidFill>
+                  <a:srgbClr val="6A6E76"/>
+                </a:solidFill>
+                <a:latin typeface="Segoe UI"/>
+              </a:rPr>
+              <a:t>26</a:t>
             </a:r>
           </a:p>
         </p:txBody>
@@ -13039,7 +13354,7 @@
                 </a:solidFill>
                 <a:latin typeface="Georgia"/>
               </a:rPr>
-              <a:t>Quatro tipos de trabalho, não quatro domínios</a:t>
+              <a:t>Onde cada conceito aparece — Code</a:t>
             </a:r>
           </a:p>
         </p:txBody>
@@ -13137,7 +13452,16 @@
                 </a:solidFill>
                 <a:latin typeface="Segoe UI"/>
               </a:rPr>
-              <a:t>Entender artefato herdado</a:t>
+              <a:t>Code</a:t>
+            </a:r>
+            <a:r>
+              <a:rPr sz="1900" b="0" i="0">
+                <a:solidFill>
+                  <a:srgbClr val="16181D"/>
+                </a:solidFill>
+                <a:latin typeface="Segoe UI"/>
+              </a:rPr>
+              <a:t> — o agente dentro do repositório</a:t>
             </a:r>
           </a:p>
           <a:p>
@@ -13159,7 +13483,25 @@
                 </a:solidFill>
                 <a:latin typeface="Segoe UI"/>
               </a:rPr>
-              <a:t>·  o simulador que o aluno anterior deixou, um pipeline, um protótipo</a:t>
+              <a:t>·  </a:t>
+            </a:r>
+            <a:r>
+              <a:rPr sz="1472" b="0" i="0">
+                <a:solidFill>
+                  <a:srgbClr val="6A6E76"/>
+                </a:solidFill>
+                <a:latin typeface="Consolas"/>
+              </a:rPr>
+              <a:t>CLAUDE.md</a:t>
+            </a:r>
+            <a:r>
+              <a:rPr sz="1600" b="0" i="0">
+                <a:solidFill>
+                  <a:srgbClr val="6A6E76"/>
+                </a:solidFill>
+                <a:latin typeface="Segoe UI"/>
+              </a:rPr>
+              <a:t>, skills, material de apoio e subagents</a:t>
             </a:r>
           </a:p>
           <a:p>
@@ -13181,7 +13523,7 @@
                 </a:solidFill>
                 <a:latin typeface="Segoe UI"/>
               </a:rPr>
-              <a:t>·  o problema é sempre o mesmo: código sem ninguém para explicá-lo</a:t>
+              <a:t>·  quatro superfícies: terminal, IDE, aplicativo de desktop e web</a:t>
             </a:r>
           </a:p>
           <a:p>
@@ -13212,7 +13554,16 @@
                 </a:solidFill>
                 <a:latin typeface="Segoe UI"/>
               </a:rPr>
-              <a:t>Analisar resultado experimental</a:t>
+              <a:t>Hooks</a:t>
+            </a:r>
+            <a:r>
+              <a:rPr sz="1900" b="0" i="0">
+                <a:solidFill>
+                  <a:srgbClr val="16181D"/>
+                </a:solidFill>
+                <a:latin typeface="Segoe UI"/>
+              </a:rPr>
+              <a:t> — comando determinístico em torno de um núcleo estocástico</a:t>
             </a:r>
           </a:p>
           <a:p>
@@ -13234,29 +13585,47 @@
                 </a:solidFill>
                 <a:latin typeface="Segoe UI"/>
               </a:rPr>
-              <a:t>·  saída de simulação, log, captura, planilha de coleta, questionário</a:t>
-            </a:r>
-          </a:p>
-          <a:p>
-            <a:pPr lvl="1">
+              <a:t>·  é a ponte para reprodutibilidade, que volta no próximo bloco</a:t>
+            </a:r>
+          </a:p>
+          <a:p>
+            <a:pPr>
               <a:lnSpc>
                 <a:spcPct val="122000"/>
               </a:lnSpc>
               <a:spcBef>
-                <a:spcPts val="500"/>
-              </a:spcBef>
-              <a:spcAft>
-                <a:spcPts val="0"/>
-              </a:spcAft>
-            </a:pPr>
-            <a:r>
-              <a:rPr sz="1600" b="0" i="0">
-                <a:solidFill>
-                  <a:srgbClr val="6A6E76"/>
-                </a:solidFill>
-                <a:latin typeface="Segoe UI"/>
-              </a:rPr>
-              <a:t>·  o problema é sempre o mesmo: volume acima da leitura manual</a:t>
+                <a:spcPts val="1300"/>
+              </a:spcBef>
+              <a:spcAft>
+                <a:spcPts val="0"/>
+              </a:spcAft>
+            </a:pPr>
+            <a:r>
+              <a:rPr sz="1900" b="0" i="0">
+                <a:solidFill>
+                  <a:srgbClr val="16181D"/>
+                </a:solidFill>
+                <a:latin typeface="Segoe UI"/>
+              </a:rPr>
+              <a:t>—  </a:t>
+            </a:r>
+            <a:r>
+              <a:rPr sz="1900" b="1" i="0">
+                <a:solidFill>
+                  <a:srgbClr val="16181D"/>
+                </a:solidFill>
+                <a:latin typeface="Segoe UI"/>
+              </a:rPr>
+              <a:t>Checkpointing</a:t>
+            </a:r>
+            <a:r>
+              <a:rPr sz="1900" b="0" i="0">
+                <a:solidFill>
+                  <a:srgbClr val="16181D"/>
+                </a:solidFill>
+                <a:latin typeface="Segoe UI"/>
+              </a:rPr>
+              <a:t> — desfazer o que o agente fez</a:t>
             </a:r>
           </a:p>
         </p:txBody>
@@ -13301,7 +13670,7 @@
                 </a:solidFill>
                 <a:latin typeface="Segoe UI"/>
               </a:rPr>
-              <a:t>Paulo E. R. Araujo · 5 · Aplicação em pesquisa</a:t>
+              <a:t>Paulo E. R. Araujo · 4 · Claude concreto</a:t>
             </a:r>
           </a:p>
         </p:txBody>
@@ -13346,7 +13715,7 @@
                 </a:solidFill>
                 <a:latin typeface="Segoe UI"/>
               </a:rPr>
-              <a:t>26</a:t>
+              <a:t>27</a:t>
             </a:r>
           </a:p>
         </p:txBody>
@@ -13365,7 +13734,7 @@
     <p:bg>
       <p:bgPr>
         <a:solidFill>
-          <a:srgbClr val="FBFAF7"/>
+          <a:srgbClr val="1B2A3A"/>
         </a:solidFill>
         <a:effectLst/>
       </p:bgPr>
@@ -13379,65 +13748,20 @@
       <p:grpSpPr/>
       <p:sp>
         <p:nvSpPr>
-          <p:cNvPr id="2" name="TextBox 1"/>
-          <p:cNvSpPr txBox="1"/>
-          <p:nvPr/>
-        </p:nvSpPr>
-        <p:spPr>
-          <a:xfrm>
-            <a:off x="868680" y="566928"/>
-            <a:ext cx="10454335" cy="822960"/>
-          </a:xfrm>
-          <a:prstGeom prst="rect">
-            <a:avLst/>
-          </a:prstGeom>
-          <a:noFill/>
-        </p:spPr>
-        <p:txBody>
-          <a:bodyPr wrap="square" anchor="t">
-            <a:spAutoFit/>
-          </a:bodyPr>
-          <a:lstStyle/>
-          <a:p>
-            <a:pPr algn="l">
-              <a:lnSpc>
-                <a:spcPct val="100000"/>
-              </a:lnSpc>
-              <a:spcBef>
-                <a:spcPts val="0"/>
-              </a:spcBef>
-              <a:spcAft>
-                <a:spcPts val="0"/>
-              </a:spcAft>
-            </a:pPr>
-            <a:r>
-              <a:rPr sz="3000" b="0" i="0">
-                <a:solidFill>
-                  <a:srgbClr val="16181D"/>
-                </a:solidFill>
-                <a:latin typeface="Georgia"/>
-              </a:rPr>
-              <a:t>Quatro tipos de trabalho, não quatro domínios</a:t>
-            </a:r>
-          </a:p>
-        </p:txBody>
-      </p:sp>
-      <p:sp>
-        <p:nvSpPr>
-          <p:cNvPr id="3" name="Rectangle 2"/>
+          <p:cNvPr id="2" name="Rectangle 1"/>
           <p:cNvSpPr/>
           <p:nvPr/>
         </p:nvSpPr>
         <p:spPr>
           <a:xfrm>
-            <a:off x="868680" y="1335024"/>
-            <a:ext cx="10454335" cy="12700"/>
+            <a:off x="868680" y="2788920"/>
+            <a:ext cx="1463040" cy="31750"/>
           </a:xfrm>
           <a:prstGeom prst="rect">
             <a:avLst/>
           </a:prstGeom>
           <a:solidFill>
-            <a:srgbClr val="D8D4CB"/>
+            <a:srgbClr val="BC7A2F"/>
           </a:solidFill>
           <a:ln>
             <a:noFill/>
@@ -13468,14 +13792,14 @@
       </p:sp>
       <p:sp>
         <p:nvSpPr>
-          <p:cNvPr id="4" name="TextBox 3"/>
+          <p:cNvPr id="3" name="TextBox 2"/>
           <p:cNvSpPr txBox="1"/>
           <p:nvPr/>
         </p:nvSpPr>
         <p:spPr>
           <a:xfrm>
-            <a:off x="868680" y="1609343"/>
-            <a:ext cx="10454335" cy="4562856"/>
+            <a:off x="868680" y="3063240"/>
+            <a:ext cx="10454335" cy="1463040"/>
           </a:xfrm>
           <a:prstGeom prst="rect">
             <a:avLst/>
@@ -13490,41 +13814,32 @@
           <a:p>
             <a:pPr algn="l">
               <a:lnSpc>
-                <a:spcPct val="122000"/>
-              </a:lnSpc>
-              <a:spcBef>
-                <a:spcPts val="0"/>
-              </a:spcBef>
-              <a:spcAft>
-                <a:spcPts val="0"/>
-              </a:spcAft>
-            </a:pPr>
-            <a:r>
-              <a:rPr sz="1900" b="0" i="0">
-                <a:solidFill>
-                  <a:srgbClr val="16181D"/>
-                </a:solidFill>
-                <a:latin typeface="Segoe UI"/>
-              </a:rPr>
-              <a:t>—  </a:t>
-            </a:r>
-            <a:r>
-              <a:rPr sz="1900" b="1" i="0">
-                <a:solidFill>
-                  <a:srgbClr val="16181D"/>
-                </a:solidFill>
-                <a:latin typeface="Segoe UI"/>
-              </a:rPr>
-              <a:t>Levantar e organizar literatura</a:t>
-            </a:r>
-          </a:p>
-          <a:p>
-            <a:pPr lvl="1">
-              <a:lnSpc>
-                <a:spcPct val="122000"/>
-              </a:lnSpc>
-              <a:spcBef>
-                <a:spcPts val="500"/>
+                <a:spcPct val="100000"/>
+              </a:lnSpc>
+              <a:spcBef>
+                <a:spcPts val="0"/>
+              </a:spcBef>
+              <a:spcAft>
+                <a:spcPts val="0"/>
+              </a:spcAft>
+            </a:pPr>
+            <a:r>
+              <a:rPr sz="3200" b="0" i="0">
+                <a:solidFill>
+                  <a:srgbClr val="F7F6F2"/>
+                </a:solidFill>
+                <a:latin typeface="Georgia"/>
+              </a:rPr>
+              <a:t>Bloco 5</a:t>
+            </a:r>
+          </a:p>
+          <a:p>
+            <a:pPr>
+              <a:lnSpc>
+                <a:spcPct val="100000"/>
+              </a:lnSpc>
+              <a:spcBef>
+                <a:spcPts val="1000"/>
               </a:spcBef>
               <a:spcAft>
                 <a:spcPts val="0"/>
@@ -13533,216 +13848,11 @@
             <a:r>
               <a:rPr sz="1600" b="0" i="0">
                 <a:solidFill>
-                  <a:srgbClr val="6A6E76"/>
-                </a:solidFill>
-                <a:latin typeface="Segoe UI"/>
-              </a:rPr>
-              <a:t>·  triagem, extração de critérios, tabela comparativa de revisão sistemática</a:t>
-            </a:r>
-          </a:p>
-          <a:p>
-            <a:pPr lvl="1">
-              <a:lnSpc>
-                <a:spcPct val="122000"/>
-              </a:lnSpc>
-              <a:spcBef>
-                <a:spcPts val="500"/>
-              </a:spcBef>
-              <a:spcAft>
-                <a:spcPts val="0"/>
-              </a:spcAft>
-            </a:pPr>
-            <a:r>
-              <a:rPr sz="1600" b="0" i="0">
-                <a:solidFill>
-                  <a:srgbClr val="6A6E76"/>
-                </a:solidFill>
-                <a:latin typeface="Segoe UI"/>
-              </a:rPr>
-              <a:t>·  ressalva: o modelo não é fonte bibliográfica, e sim ferramenta de organização sobre o que você forneceu</a:t>
-            </a:r>
-          </a:p>
-          <a:p>
-            <a:pPr>
-              <a:lnSpc>
-                <a:spcPct val="122000"/>
-              </a:lnSpc>
-              <a:spcBef>
-                <a:spcPts val="1300"/>
-              </a:spcBef>
-              <a:spcAft>
-                <a:spcPts val="0"/>
-              </a:spcAft>
-            </a:pPr>
-            <a:r>
-              <a:rPr sz="1900" b="0" i="0">
-                <a:solidFill>
-                  <a:srgbClr val="16181D"/>
-                </a:solidFill>
-                <a:latin typeface="Segoe UI"/>
-              </a:rPr>
-              <a:t>—  </a:t>
-            </a:r>
-            <a:r>
-              <a:rPr sz="1900" b="1" i="0">
-                <a:solidFill>
-                  <a:srgbClr val="16181D"/>
-                </a:solidFill>
-                <a:latin typeface="Segoe UI"/>
-              </a:rPr>
-              <a:t>Apoiar a escrita</a:t>
-            </a:r>
-            <a:r>
-              <a:rPr sz="1900" b="0" i="0">
-                <a:solidFill>
-                  <a:srgbClr val="16181D"/>
-                </a:solidFill>
-                <a:latin typeface="Segoe UI"/>
-              </a:rPr>
-              <a:t> — estrutura, clareza, revisão de argumento</a:t>
-            </a:r>
-          </a:p>
-          <a:p>
-            <a:pPr>
-              <a:lnSpc>
-                <a:spcPct val="122000"/>
-              </a:lnSpc>
-              <a:spcBef>
-                <a:spcPts val="1300"/>
-              </a:spcBef>
-              <a:spcAft>
-                <a:spcPts val="0"/>
-              </a:spcAft>
-            </a:pPr>
-            <a:r>
-              <a:rPr sz="1900" b="0" i="0">
-                <a:solidFill>
-                  <a:srgbClr val="16181D"/>
-                </a:solidFill>
-                <a:latin typeface="Segoe UI"/>
-              </a:rPr>
-              <a:t>—  Atravessando os quatro: </a:t>
-            </a:r>
-            <a:r>
-              <a:rPr sz="1900" b="1" i="0">
-                <a:solidFill>
-                  <a:srgbClr val="16181D"/>
-                </a:solidFill>
-                <a:latin typeface="Segoe UI"/>
-              </a:rPr>
-              <a:t>reprodutibilidade</a:t>
-            </a:r>
-          </a:p>
-          <a:p>
-            <a:pPr lvl="1">
-              <a:lnSpc>
-                <a:spcPct val="122000"/>
-              </a:lnSpc>
-              <a:spcBef>
-                <a:spcPts val="500"/>
-              </a:spcBef>
-              <a:spcAft>
-                <a:spcPts val="0"/>
-              </a:spcAft>
-            </a:pPr>
-            <a:r>
-              <a:rPr sz="1600" b="0" i="0">
-                <a:solidFill>
-                  <a:srgbClr val="6A6E76"/>
-                </a:solidFill>
-                <a:latin typeface="Segoe UI"/>
-              </a:rPr>
-              <a:t>·  o que o agente fez precisa virar script, commit e ambiente registrados</a:t>
-            </a:r>
-          </a:p>
-        </p:txBody>
-      </p:sp>
-      <p:sp>
-        <p:nvSpPr>
-          <p:cNvPr id="5" name="TextBox 4"/>
-          <p:cNvSpPr txBox="1"/>
-          <p:nvPr/>
-        </p:nvSpPr>
-        <p:spPr>
-          <a:xfrm>
-            <a:off x="868680" y="6355080"/>
-            <a:ext cx="9905695" cy="310896"/>
-          </a:xfrm>
-          <a:prstGeom prst="rect">
-            <a:avLst/>
-          </a:prstGeom>
-          <a:noFill/>
-        </p:spPr>
-        <p:txBody>
-          <a:bodyPr wrap="square" anchor="t">
-            <a:spAutoFit/>
-          </a:bodyPr>
-          <a:lstStyle/>
-          <a:p>
-            <a:pPr algn="l">
-              <a:lnSpc>
-                <a:spcPct val="100000"/>
-              </a:lnSpc>
-              <a:spcBef>
-                <a:spcPts val="0"/>
-              </a:spcBef>
-              <a:spcAft>
-                <a:spcPts val="0"/>
-              </a:spcAft>
-            </a:pPr>
-            <a:r>
-              <a:rPr sz="1000" b="0" i="0">
-                <a:solidFill>
-                  <a:srgbClr val="6A6E76"/>
-                </a:solidFill>
-                <a:latin typeface="Segoe UI"/>
-              </a:rPr>
-              <a:t>Paulo E. R. Araujo · 5 · Aplicação em pesquisa</a:t>
-            </a:r>
-          </a:p>
-        </p:txBody>
-      </p:sp>
-      <p:sp>
-        <p:nvSpPr>
-          <p:cNvPr id="6" name="TextBox 5"/>
-          <p:cNvSpPr txBox="1"/>
-          <p:nvPr/>
-        </p:nvSpPr>
-        <p:spPr>
-          <a:xfrm>
-            <a:off x="10774375" y="6355080"/>
-            <a:ext cx="548640" cy="310896"/>
-          </a:xfrm>
-          <a:prstGeom prst="rect">
-            <a:avLst/>
-          </a:prstGeom>
-          <a:noFill/>
-        </p:spPr>
-        <p:txBody>
-          <a:bodyPr wrap="square" anchor="t">
-            <a:spAutoFit/>
-          </a:bodyPr>
-          <a:lstStyle/>
-          <a:p>
-            <a:pPr algn="r">
-              <a:lnSpc>
-                <a:spcPct val="100000"/>
-              </a:lnSpc>
-              <a:spcBef>
-                <a:spcPts val="0"/>
-              </a:spcBef>
-              <a:spcAft>
-                <a:spcPts val="0"/>
-              </a:spcAft>
-            </a:pPr>
-            <a:r>
-              <a:rPr sz="1000" b="0" i="0">
-                <a:solidFill>
-                  <a:srgbClr val="6A6E76"/>
-                </a:solidFill>
-                <a:latin typeface="Segoe UI"/>
-              </a:rPr>
-              <a:t>27</a:t>
+                  <a:srgbClr val="7FA8C9"/>
+                </a:solidFill>
+                <a:latin typeface="Segoe UI"/>
+              </a:rPr>
+              <a:t>Aplicação em pesquisa em computação</a:t>
             </a:r>
           </a:p>
         </p:txBody>
@@ -13813,7 +13923,7 @@
                 </a:solidFill>
                 <a:latin typeface="Georgia"/>
               </a:rPr>
-              <a:t>Permissões: o portão do laço</a:t>
+              <a:t>Quatro tipos de trabalho, não quatro domínios</a:t>
             </a:r>
           </a:p>
         </p:txBody>
@@ -13902,7 +14012,60 @@
                 </a:solidFill>
                 <a:latin typeface="Segoe UI"/>
               </a:rPr>
-              <a:t>—  Um agente com acesso ao repositório edita arquivos e executa comandos</a:t>
+              <a:t>—  </a:t>
+            </a:r>
+            <a:r>
+              <a:rPr sz="1900" b="1" i="0">
+                <a:solidFill>
+                  <a:srgbClr val="16181D"/>
+                </a:solidFill>
+                <a:latin typeface="Segoe UI"/>
+              </a:rPr>
+              <a:t>Entender artefato herdado</a:t>
+            </a:r>
+          </a:p>
+          <a:p>
+            <a:pPr lvl="1">
+              <a:lnSpc>
+                <a:spcPct val="122000"/>
+              </a:lnSpc>
+              <a:spcBef>
+                <a:spcPts val="500"/>
+              </a:spcBef>
+              <a:spcAft>
+                <a:spcPts val="0"/>
+              </a:spcAft>
+            </a:pPr>
+            <a:r>
+              <a:rPr sz="1600" b="0" i="0">
+                <a:solidFill>
+                  <a:srgbClr val="6A6E76"/>
+                </a:solidFill>
+                <a:latin typeface="Segoe UI"/>
+              </a:rPr>
+              <a:t>·  o simulador que o aluno anterior deixou, um pipeline, um protótipo</a:t>
+            </a:r>
+          </a:p>
+          <a:p>
+            <a:pPr lvl="1">
+              <a:lnSpc>
+                <a:spcPct val="122000"/>
+              </a:lnSpc>
+              <a:spcBef>
+                <a:spcPts val="500"/>
+              </a:spcBef>
+              <a:spcAft>
+                <a:spcPts val="0"/>
+              </a:spcAft>
+            </a:pPr>
+            <a:r>
+              <a:rPr sz="1600" b="0" i="0">
+                <a:solidFill>
+                  <a:srgbClr val="6A6E76"/>
+                </a:solidFill>
+                <a:latin typeface="Segoe UI"/>
+              </a:rPr>
+              <a:t>·  o problema é sempre o mesmo: código sem ninguém para explicá-lo</a:t>
             </a:r>
           </a:p>
           <a:p>
@@ -13924,69 +14087,60 @@
                 </a:solidFill>
                 <a:latin typeface="Segoe UI"/>
               </a:rPr>
-              <a:t>—  Modos de permissão definem o portão: pedir aprovação, aceitar edições, ou planejar antes de agir</a:t>
-            </a:r>
-          </a:p>
-          <a:p>
-            <a:pPr>
+              <a:t>—  </a:t>
+            </a:r>
+            <a:r>
+              <a:rPr sz="1900" b="1" i="0">
+                <a:solidFill>
+                  <a:srgbClr val="16181D"/>
+                </a:solidFill>
+                <a:latin typeface="Segoe UI"/>
+              </a:rPr>
+              <a:t>Analisar resultado experimental</a:t>
+            </a:r>
+          </a:p>
+          <a:p>
+            <a:pPr lvl="1">
               <a:lnSpc>
                 <a:spcPct val="122000"/>
               </a:lnSpc>
               <a:spcBef>
-                <a:spcPts val="1300"/>
-              </a:spcBef>
-              <a:spcAft>
-                <a:spcPts val="0"/>
-              </a:spcAft>
-            </a:pPr>
-            <a:r>
-              <a:rPr sz="1900" b="0" i="0">
-                <a:solidFill>
-                  <a:srgbClr val="16181D"/>
-                </a:solidFill>
-                <a:latin typeface="Segoe UI"/>
-              </a:rPr>
-              <a:t>—  </a:t>
-            </a:r>
-            <a:r>
-              <a:rPr sz="1900" b="1" i="0">
-                <a:solidFill>
-                  <a:srgbClr val="16181D"/>
-                </a:solidFill>
-                <a:latin typeface="Segoe UI"/>
-              </a:rPr>
-              <a:t>Plan mode</a:t>
-            </a:r>
-            <a:r>
-              <a:rPr sz="1900" b="0" i="0">
-                <a:solidFill>
-                  <a:srgbClr val="16181D"/>
-                </a:solidFill>
-                <a:latin typeface="Segoe UI"/>
-              </a:rPr>
-              <a:t>: o agente mostra o plano e espera. Você lê antes de qualquer escrita</a:t>
-            </a:r>
-          </a:p>
-          <a:p>
-            <a:pPr>
+                <a:spcPts val="500"/>
+              </a:spcBef>
+              <a:spcAft>
+                <a:spcPts val="0"/>
+              </a:spcAft>
+            </a:pPr>
+            <a:r>
+              <a:rPr sz="1600" b="0" i="0">
+                <a:solidFill>
+                  <a:srgbClr val="6A6E76"/>
+                </a:solidFill>
+                <a:latin typeface="Segoe UI"/>
+              </a:rPr>
+              <a:t>·  saída de simulação, log, captura, planilha de coleta, questionário</a:t>
+            </a:r>
+          </a:p>
+          <a:p>
+            <a:pPr lvl="1">
               <a:lnSpc>
                 <a:spcPct val="122000"/>
               </a:lnSpc>
               <a:spcBef>
-                <a:spcPts val="1300"/>
-              </a:spcBef>
-              <a:spcAft>
-                <a:spcPts val="0"/>
-              </a:spcAft>
-            </a:pPr>
-            <a:r>
-              <a:rPr sz="1900" b="0" i="0">
-                <a:solidFill>
-                  <a:srgbClr val="16181D"/>
-                </a:solidFill>
-                <a:latin typeface="Segoe UI"/>
-              </a:rPr>
-              <a:t>—  Regra prática: repositório de terceiro, base de coleta ou artefato que você não pode recriar começa em plan mode</a:t>
+                <a:spcPts val="500"/>
+              </a:spcBef>
+              <a:spcAft>
+                <a:spcPts val="0"/>
+              </a:spcAft>
+            </a:pPr>
+            <a:r>
+              <a:rPr sz="1600" b="0" i="0">
+                <a:solidFill>
+                  <a:srgbClr val="6A6E76"/>
+                </a:solidFill>
+                <a:latin typeface="Segoe UI"/>
+              </a:rPr>
+              <a:t>·  o problema é sempre o mesmo: volume acima da leitura manual</a:t>
             </a:r>
           </a:p>
         </p:txBody>
@@ -14147,7 +14301,7 @@
                 </a:solidFill>
                 <a:latin typeface="Georgia"/>
               </a:rPr>
-              <a:t>Dados sensíveis: duas categorias, duas réguas</a:t>
+              <a:t>Quatro tipos de trabalho, não quatro domínios</a:t>
             </a:r>
           </a:p>
         </p:txBody>
@@ -14245,7 +14399,7 @@
                 </a:solidFill>
                 <a:latin typeface="Segoe UI"/>
               </a:rPr>
-              <a:t>Dado técnico</a:t>
+              <a:t>Levantar e organizar literatura</a:t>
             </a:r>
           </a:p>
           <a:p>
@@ -14267,7 +14421,7 @@
                 </a:solidFill>
                 <a:latin typeface="Segoe UI"/>
               </a:rPr>
-              <a:t>·  credencial, chave, endereço de infraestrutura, identificador de rede</a:t>
+              <a:t>·  triagem, extração de critérios, tabela comparativa de revisão sistemática</a:t>
             </a:r>
           </a:p>
           <a:p>
@@ -14289,7 +14443,7 @@
                 </a:solidFill>
                 <a:latin typeface="Segoe UI"/>
               </a:rPr>
-              <a:t>·  régua: política da instituição e bom senso operacional</a:t>
+              <a:t>·  ressalva: o modelo não é fonte bibliográfica, e sim ferramenta de organização sobre o que você forneceu</a:t>
             </a:r>
           </a:p>
           <a:p>
@@ -14320,7 +14474,47 @@
                 </a:solidFill>
                 <a:latin typeface="Segoe UI"/>
               </a:rPr>
-              <a:t>Dado de pessoa</a:t>
+              <a:t>Apoiar a escrita</a:t>
+            </a:r>
+            <a:r>
+              <a:rPr sz="1900" b="0" i="0">
+                <a:solidFill>
+                  <a:srgbClr val="16181D"/>
+                </a:solidFill>
+                <a:latin typeface="Segoe UI"/>
+              </a:rPr>
+              <a:t> — estrutura, clareza, revisão de argumento</a:t>
+            </a:r>
+          </a:p>
+          <a:p>
+            <a:pPr>
+              <a:lnSpc>
+                <a:spcPct val="122000"/>
+              </a:lnSpc>
+              <a:spcBef>
+                <a:spcPts val="1300"/>
+              </a:spcBef>
+              <a:spcAft>
+                <a:spcPts val="0"/>
+              </a:spcAft>
+            </a:pPr>
+            <a:r>
+              <a:rPr sz="1900" b="0" i="0">
+                <a:solidFill>
+                  <a:srgbClr val="16181D"/>
+                </a:solidFill>
+                <a:latin typeface="Segoe UI"/>
+              </a:rPr>
+              <a:t>—  Atravessando os quatro: </a:t>
+            </a:r>
+            <a:r>
+              <a:rPr sz="1900" b="1" i="0">
+                <a:solidFill>
+                  <a:srgbClr val="16181D"/>
+                </a:solidFill>
+                <a:latin typeface="Segoe UI"/>
+              </a:rPr>
+              <a:t>reprodutibilidade</a:t>
             </a:r>
           </a:p>
           <a:p>
@@ -14342,29 +14536,7 @@
                 </a:solidFill>
                 <a:latin typeface="Segoe UI"/>
               </a:rPr>
-              <a:t>·  prontuário, registro de aluno, resposta de questionário, qualquer coisa sob TCLE</a:t>
-            </a:r>
-          </a:p>
-          <a:p>
-            <a:pPr lvl="1">
-              <a:lnSpc>
-                <a:spcPct val="122000"/>
-              </a:lnSpc>
-              <a:spcBef>
-                <a:spcPts val="500"/>
-              </a:spcBef>
-              <a:spcAft>
-                <a:spcPts val="0"/>
-              </a:spcAft>
-            </a:pPr>
-            <a:r>
-              <a:rPr sz="1600" b="0" i="0">
-                <a:solidFill>
-                  <a:srgbClr val="6A6E76"/>
-                </a:solidFill>
-                <a:latin typeface="Segoe UI"/>
-              </a:rPr>
-              <a:t>·  régua: o protocolo de pesquisa e a LGPD, não o que a ferramenta permite</a:t>
+              <a:t>·  o que o agente fez precisa virar script, commit e ambiente registrados</a:t>
             </a:r>
           </a:p>
         </p:txBody>
@@ -14525,7 +14697,7 @@
                 </a:solidFill>
                 <a:latin typeface="Georgia"/>
               </a:rPr>
-              <a:t>A régua do dado de pessoa</a:t>
+              <a:t>Permissões: o portão do laço</a:t>
             </a:r>
           </a:p>
         </p:txBody>
@@ -14614,7 +14786,7 @@
                 </a:solidFill>
                 <a:latin typeface="Segoe UI"/>
               </a:rPr>
-              <a:t>—  Se o consentimento não previu processamento por serviço de terceiro, o dado não sai da máquina</a:t>
+              <a:t>—  Um agente com acesso ao repositório edita arquivos e executa comandos</a:t>
             </a:r>
           </a:p>
           <a:p>
@@ -14636,7 +14808,25 @@
                 </a:solidFill>
                 <a:latin typeface="Segoe UI"/>
               </a:rPr>
-              <a:t>—  Anonimização é decisão de projeto, não etapa improvisada na véspera</a:t>
+              <a:t>—  O portão é do </a:t>
+            </a:r>
+            <a:r>
+              <a:rPr sz="1900" b="1" i="0">
+                <a:solidFill>
+                  <a:srgbClr val="16181D"/>
+                </a:solidFill>
+                <a:latin typeface="Segoe UI"/>
+              </a:rPr>
+              <a:t>harness</a:t>
+            </a:r>
+            <a:r>
+              <a:rPr sz="1900" b="0" i="0">
+                <a:solidFill>
+                  <a:srgbClr val="16181D"/>
+                </a:solidFill>
+                <a:latin typeface="Segoe UI"/>
+              </a:rPr>
+              <a:t>, não do modelo: pedir aprovação, aceitar edições, ou planejar antes de agir</a:t>
             </a:r>
           </a:p>
           <a:p>
@@ -14658,7 +14848,47 @@
                 </a:solidFill>
                 <a:latin typeface="Segoe UI"/>
               </a:rPr>
-              <a:t>—  Na dúvida, o caminho é o comitê de ética, não a documentação da ferramenta</a:t>
+              <a:t>—  </a:t>
+            </a:r>
+            <a:r>
+              <a:rPr sz="1900" b="1" i="0">
+                <a:solidFill>
+                  <a:srgbClr val="16181D"/>
+                </a:solidFill>
+                <a:latin typeface="Segoe UI"/>
+              </a:rPr>
+              <a:t>Plan mode</a:t>
+            </a:r>
+            <a:r>
+              <a:rPr sz="1900" b="0" i="0">
+                <a:solidFill>
+                  <a:srgbClr val="16181D"/>
+                </a:solidFill>
+                <a:latin typeface="Segoe UI"/>
+              </a:rPr>
+              <a:t>: o agente mostra o plano e espera. Você lê antes de qualquer escrita</a:t>
+            </a:r>
+          </a:p>
+          <a:p>
+            <a:pPr>
+              <a:lnSpc>
+                <a:spcPct val="122000"/>
+              </a:lnSpc>
+              <a:spcBef>
+                <a:spcPts val="1300"/>
+              </a:spcBef>
+              <a:spcAft>
+                <a:spcPts val="0"/>
+              </a:spcAft>
+            </a:pPr>
+            <a:r>
+              <a:rPr sz="1900" b="0" i="0">
+                <a:solidFill>
+                  <a:srgbClr val="16181D"/>
+                </a:solidFill>
+                <a:latin typeface="Segoe UI"/>
+              </a:rPr>
+              <a:t>—  Regra prática: repositório de terceiro, base de coleta ou artefato que você não pode recriar começa em plan mode</a:t>
             </a:r>
           </a:p>
         </p:txBody>
@@ -14819,7 +15049,7 @@
                 </a:solidFill>
                 <a:latin typeface="Georgia"/>
               </a:rPr>
-              <a:t>Verificação e honestidade acadêmica</a:t>
+              <a:t>Dados sensíveis: duas categorias, duas réguas</a:t>
             </a:r>
           </a:p>
         </p:txBody>
@@ -14908,7 +15138,60 @@
                 </a:solidFill>
                 <a:latin typeface="Segoe UI"/>
               </a:rPr>
-              <a:t>—  Saída plausível não é saída correta — o Bloco 1 já mostrou por quê</a:t>
+              <a:t>—  </a:t>
+            </a:r>
+            <a:r>
+              <a:rPr sz="1900" b="1" i="0">
+                <a:solidFill>
+                  <a:srgbClr val="16181D"/>
+                </a:solidFill>
+                <a:latin typeface="Segoe UI"/>
+              </a:rPr>
+              <a:t>Dado técnico</a:t>
+            </a:r>
+          </a:p>
+          <a:p>
+            <a:pPr lvl="1">
+              <a:lnSpc>
+                <a:spcPct val="122000"/>
+              </a:lnSpc>
+              <a:spcBef>
+                <a:spcPts val="500"/>
+              </a:spcBef>
+              <a:spcAft>
+                <a:spcPts val="0"/>
+              </a:spcAft>
+            </a:pPr>
+            <a:r>
+              <a:rPr sz="1600" b="0" i="0">
+                <a:solidFill>
+                  <a:srgbClr val="6A6E76"/>
+                </a:solidFill>
+                <a:latin typeface="Segoe UI"/>
+              </a:rPr>
+              <a:t>·  credencial, chave, endereço de infraestrutura, identificador de rede</a:t>
+            </a:r>
+          </a:p>
+          <a:p>
+            <a:pPr lvl="1">
+              <a:lnSpc>
+                <a:spcPct val="122000"/>
+              </a:lnSpc>
+              <a:spcBef>
+                <a:spcPts val="500"/>
+              </a:spcBef>
+              <a:spcAft>
+                <a:spcPts val="0"/>
+              </a:spcAft>
+            </a:pPr>
+            <a:r>
+              <a:rPr sz="1600" b="0" i="0">
+                <a:solidFill>
+                  <a:srgbClr val="6A6E76"/>
+                </a:solidFill>
+                <a:latin typeface="Segoe UI"/>
+              </a:rPr>
+              <a:t>·  régua: política da instituição e bom senso operacional</a:t>
             </a:r>
           </a:p>
           <a:p>
@@ -14930,29 +15213,38 @@
                 </a:solidFill>
                 <a:latin typeface="Segoe UI"/>
               </a:rPr>
-              <a:t>—  O que o modelo produz é rascunho até você rodar, conferir e reproduzir</a:t>
-            </a:r>
-          </a:p>
-          <a:p>
-            <a:pPr>
+              <a:t>—  </a:t>
+            </a:r>
+            <a:r>
+              <a:rPr sz="1900" b="1" i="0">
+                <a:solidFill>
+                  <a:srgbClr val="16181D"/>
+                </a:solidFill>
+                <a:latin typeface="Segoe UI"/>
+              </a:rPr>
+              <a:t>Dado de pessoa</a:t>
+            </a:r>
+          </a:p>
+          <a:p>
+            <a:pPr lvl="1">
               <a:lnSpc>
                 <a:spcPct val="122000"/>
               </a:lnSpc>
               <a:spcBef>
-                <a:spcPts val="1300"/>
-              </a:spcBef>
-              <a:spcAft>
-                <a:spcPts val="0"/>
-              </a:spcAft>
-            </a:pPr>
-            <a:r>
-              <a:rPr sz="1900" b="0" i="0">
-                <a:solidFill>
-                  <a:srgbClr val="16181D"/>
-                </a:solidFill>
-                <a:latin typeface="Segoe UI"/>
-              </a:rPr>
-              <a:t>—  Duas armadilhas específicas do nosso trabalho:</a:t>
+                <a:spcPts val="500"/>
+              </a:spcBef>
+              <a:spcAft>
+                <a:spcPts val="0"/>
+              </a:spcAft>
+            </a:pPr>
+            <a:r>
+              <a:rPr sz="1600" b="0" i="0">
+                <a:solidFill>
+                  <a:srgbClr val="6A6E76"/>
+                </a:solidFill>
+                <a:latin typeface="Segoe UI"/>
+              </a:rPr>
+              <a:t>·  prontuário, registro de aluno, resposta de questionário, qualquer coisa sob TCLE</a:t>
             </a:r>
           </a:p>
           <a:p>
@@ -14974,51 +15266,7 @@
                 </a:solidFill>
                 <a:latin typeface="Segoe UI"/>
               </a:rPr>
-              <a:t>·  referência bibliográfica inventada com aparência perfeita</a:t>
-            </a:r>
-          </a:p>
-          <a:p>
-            <a:pPr lvl="1">
-              <a:lnSpc>
-                <a:spcPct val="122000"/>
-              </a:lnSpc>
-              <a:spcBef>
-                <a:spcPts val="500"/>
-              </a:spcBef>
-              <a:spcAft>
-                <a:spcPts val="0"/>
-              </a:spcAft>
-            </a:pPr>
-            <a:r>
-              <a:rPr sz="1600" b="0" i="0">
-                <a:solidFill>
-                  <a:srgbClr val="6A6E76"/>
-                </a:solidFill>
-                <a:latin typeface="Segoe UI"/>
-              </a:rPr>
-              <a:t>·  resultado numérico produzido sem que nada tenha sido executado</a:t>
-            </a:r>
-          </a:p>
-          <a:p>
-            <a:pPr>
-              <a:lnSpc>
-                <a:spcPct val="122000"/>
-              </a:lnSpc>
-              <a:spcBef>
-                <a:spcPts val="1300"/>
-              </a:spcBef>
-              <a:spcAft>
-                <a:spcPts val="0"/>
-              </a:spcAft>
-            </a:pPr>
-            <a:r>
-              <a:rPr sz="1900" b="0" i="0">
-                <a:solidFill>
-                  <a:srgbClr val="16181D"/>
-                </a:solidFill>
-                <a:latin typeface="Segoe UI"/>
-              </a:rPr>
-              <a:t>—  Declarar o uso conforme a norma do programa e do veículo</a:t>
+              <a:t>·  régua: o protocolo de pesquisa e a LGPD, não o que a ferramenta permite</a:t>
             </a:r>
           </a:p>
         </p:txBody>
@@ -15127,7 +15375,7 @@
     <p:bg>
       <p:bgPr>
         <a:solidFill>
-          <a:srgbClr val="F1EEE7"/>
+          <a:srgbClr val="FBFAF7"/>
         </a:solidFill>
         <a:effectLst/>
       </p:bgPr>
@@ -15141,20 +15389,65 @@
       <p:grpSpPr/>
       <p:sp>
         <p:nvSpPr>
-          <p:cNvPr id="2" name="Rectangle 1"/>
+          <p:cNvPr id="2" name="TextBox 1"/>
+          <p:cNvSpPr txBox="1"/>
+          <p:nvPr/>
+        </p:nvSpPr>
+        <p:spPr>
+          <a:xfrm>
+            <a:off x="868680" y="566928"/>
+            <a:ext cx="10454335" cy="822960"/>
+          </a:xfrm>
+          <a:prstGeom prst="rect">
+            <a:avLst/>
+          </a:prstGeom>
+          <a:noFill/>
+        </p:spPr>
+        <p:txBody>
+          <a:bodyPr wrap="square" anchor="t">
+            <a:spAutoFit/>
+          </a:bodyPr>
+          <a:lstStyle/>
+          <a:p>
+            <a:pPr algn="l">
+              <a:lnSpc>
+                <a:spcPct val="100000"/>
+              </a:lnSpc>
+              <a:spcBef>
+                <a:spcPts val="0"/>
+              </a:spcBef>
+              <a:spcAft>
+                <a:spcPts val="0"/>
+              </a:spcAft>
+            </a:pPr>
+            <a:r>
+              <a:rPr sz="3000" b="0" i="0">
+                <a:solidFill>
+                  <a:srgbClr val="16181D"/>
+                </a:solidFill>
+                <a:latin typeface="Georgia"/>
+              </a:rPr>
+              <a:t>A régua do dado de pessoa</a:t>
+            </a:r>
+          </a:p>
+        </p:txBody>
+      </p:sp>
+      <p:sp>
+        <p:nvSpPr>
+          <p:cNvPr id="3" name="Rectangle 2"/>
           <p:cNvSpPr/>
           <p:nvPr/>
         </p:nvSpPr>
         <p:spPr>
           <a:xfrm>
-            <a:off x="868680" y="2331720"/>
-            <a:ext cx="1463040" cy="31750"/>
+            <a:off x="868680" y="1335024"/>
+            <a:ext cx="10454335" cy="12700"/>
           </a:xfrm>
           <a:prstGeom prst="rect">
             <a:avLst/>
           </a:prstGeom>
           <a:solidFill>
-            <a:srgbClr val="BC7A2F"/>
+            <a:srgbClr val="D8D4CB"/>
           </a:solidFill>
           <a:ln>
             <a:noFill/>
@@ -15185,14 +15478,14 @@
       </p:sp>
       <p:sp>
         <p:nvSpPr>
-          <p:cNvPr id="3" name="TextBox 2"/>
+          <p:cNvPr id="4" name="TextBox 3"/>
           <p:cNvSpPr txBox="1"/>
           <p:nvPr/>
         </p:nvSpPr>
         <p:spPr>
           <a:xfrm>
-            <a:off x="868680" y="2651760"/>
-            <a:ext cx="10454335" cy="2377440"/>
+            <a:off x="868680" y="1609343"/>
+            <a:ext cx="10454335" cy="4562856"/>
           </a:xfrm>
           <a:prstGeom prst="rect">
             <a:avLst/>
@@ -15207,52 +15500,74 @@
           <a:p>
             <a:pPr algn="l">
               <a:lnSpc>
-                <a:spcPct val="135000"/>
-              </a:lnSpc>
-              <a:spcBef>
-                <a:spcPts val="0"/>
-              </a:spcBef>
-              <a:spcAft>
-                <a:spcPts val="0"/>
-              </a:spcAft>
-            </a:pPr>
-            <a:r>
-              <a:rPr sz="2500" b="0" i="1">
+                <a:spcPct val="122000"/>
+              </a:lnSpc>
+              <a:spcBef>
+                <a:spcPts val="0"/>
+              </a:spcBef>
+              <a:spcAft>
+                <a:spcPts val="0"/>
+              </a:spcAft>
+            </a:pPr>
+            <a:r>
+              <a:rPr sz="1900" b="0" i="0">
                 <a:solidFill>
                   <a:srgbClr val="16181D"/>
                 </a:solidFill>
-                <a:latin typeface="Georgia"/>
-              </a:rPr>
-              <a:t>O agente acelera a parte mecânica e não assume nenhuma responsabilidade. A assinatura no paper é sua, então a verificação também é — e o dado que saiu do seu computador não volta.</a:t>
+                <a:latin typeface="Segoe UI"/>
+              </a:rPr>
+              <a:t>—  Se o consentimento não previu processamento por serviço de terceiro, o dado não sai da máquina</a:t>
             </a:r>
           </a:p>
           <a:p>
             <a:pPr>
               <a:lnSpc>
-                <a:spcPct val="100000"/>
-              </a:lnSpc>
-              <a:spcBef>
-                <a:spcPts val="1800"/>
-              </a:spcBef>
-              <a:spcAft>
-                <a:spcPts val="0"/>
-              </a:spcAft>
-            </a:pPr>
-            <a:r>
-              <a:rPr sz="1300" b="0" i="0">
-                <a:solidFill>
-                  <a:srgbClr val="6A6E76"/>
-                </a:solidFill>
-                <a:latin typeface="Segoe UI"/>
-              </a:rPr>
-              <a:t>Âncora do Bloco 5</a:t>
-            </a:r>
-          </a:p>
-        </p:txBody>
-      </p:sp>
-      <p:sp>
-        <p:nvSpPr>
-          <p:cNvPr id="4" name="TextBox 3"/>
+                <a:spcPct val="122000"/>
+              </a:lnSpc>
+              <a:spcBef>
+                <a:spcPts val="1300"/>
+              </a:spcBef>
+              <a:spcAft>
+                <a:spcPts val="0"/>
+              </a:spcAft>
+            </a:pPr>
+            <a:r>
+              <a:rPr sz="1900" b="0" i="0">
+                <a:solidFill>
+                  <a:srgbClr val="16181D"/>
+                </a:solidFill>
+                <a:latin typeface="Segoe UI"/>
+              </a:rPr>
+              <a:t>—  Anonimização é decisão de projeto, não etapa improvisada na véspera</a:t>
+            </a:r>
+          </a:p>
+          <a:p>
+            <a:pPr>
+              <a:lnSpc>
+                <a:spcPct val="122000"/>
+              </a:lnSpc>
+              <a:spcBef>
+                <a:spcPts val="1300"/>
+              </a:spcBef>
+              <a:spcAft>
+                <a:spcPts val="0"/>
+              </a:spcAft>
+            </a:pPr>
+            <a:r>
+              <a:rPr sz="1900" b="0" i="0">
+                <a:solidFill>
+                  <a:srgbClr val="16181D"/>
+                </a:solidFill>
+                <a:latin typeface="Segoe UI"/>
+              </a:rPr>
+              <a:t>—  Na dúvida, o caminho é o comitê de ética, não a documentação da ferramenta</a:t>
+            </a:r>
+          </a:p>
+        </p:txBody>
+      </p:sp>
+      <p:sp>
+        <p:nvSpPr>
+          <p:cNvPr id="5" name="TextBox 4"/>
           <p:cNvSpPr txBox="1"/>
           <p:nvPr/>
         </p:nvSpPr>
@@ -15297,7 +15612,7 @@
       </p:sp>
       <p:sp>
         <p:nvSpPr>
-          <p:cNvPr id="5" name="TextBox 4"/>
+          <p:cNvPr id="6" name="TextBox 5"/>
           <p:cNvSpPr txBox="1"/>
           <p:nvPr/>
         </p:nvSpPr>
@@ -15354,7 +15669,7 @@
     <p:bg>
       <p:bgPr>
         <a:solidFill>
-          <a:srgbClr val="1B2A3A"/>
+          <a:srgbClr val="FBFAF7"/>
         </a:solidFill>
         <a:effectLst/>
       </p:bgPr>
@@ -15368,20 +15683,65 @@
       <p:grpSpPr/>
       <p:sp>
         <p:nvSpPr>
-          <p:cNvPr id="2" name="Rectangle 1"/>
+          <p:cNvPr id="2" name="TextBox 1"/>
+          <p:cNvSpPr txBox="1"/>
+          <p:nvPr/>
+        </p:nvSpPr>
+        <p:spPr>
+          <a:xfrm>
+            <a:off x="868680" y="566928"/>
+            <a:ext cx="10454335" cy="822960"/>
+          </a:xfrm>
+          <a:prstGeom prst="rect">
+            <a:avLst/>
+          </a:prstGeom>
+          <a:noFill/>
+        </p:spPr>
+        <p:txBody>
+          <a:bodyPr wrap="square" anchor="t">
+            <a:spAutoFit/>
+          </a:bodyPr>
+          <a:lstStyle/>
+          <a:p>
+            <a:pPr algn="l">
+              <a:lnSpc>
+                <a:spcPct val="100000"/>
+              </a:lnSpc>
+              <a:spcBef>
+                <a:spcPts val="0"/>
+              </a:spcBef>
+              <a:spcAft>
+                <a:spcPts val="0"/>
+              </a:spcAft>
+            </a:pPr>
+            <a:r>
+              <a:rPr sz="3000" b="0" i="0">
+                <a:solidFill>
+                  <a:srgbClr val="16181D"/>
+                </a:solidFill>
+                <a:latin typeface="Georgia"/>
+              </a:rPr>
+              <a:t>Verificação e honestidade acadêmica</a:t>
+            </a:r>
+          </a:p>
+        </p:txBody>
+      </p:sp>
+      <p:sp>
+        <p:nvSpPr>
+          <p:cNvPr id="3" name="Rectangle 2"/>
           <p:cNvSpPr/>
           <p:nvPr/>
         </p:nvSpPr>
         <p:spPr>
           <a:xfrm>
-            <a:off x="868680" y="2148840"/>
-            <a:ext cx="1463040" cy="31750"/>
+            <a:off x="868680" y="1335024"/>
+            <a:ext cx="10454335" cy="12700"/>
           </a:xfrm>
           <a:prstGeom prst="rect">
             <a:avLst/>
           </a:prstGeom>
           <a:solidFill>
-            <a:srgbClr val="BC7A2F"/>
+            <a:srgbClr val="D8D4CB"/>
           </a:solidFill>
           <a:ln>
             <a:noFill/>
@@ -15412,14 +15772,14 @@
       </p:sp>
       <p:sp>
         <p:nvSpPr>
-          <p:cNvPr id="3" name="TextBox 2"/>
+          <p:cNvPr id="4" name="TextBox 3"/>
           <p:cNvSpPr txBox="1"/>
           <p:nvPr/>
         </p:nvSpPr>
         <p:spPr>
           <a:xfrm>
-            <a:off x="868680" y="2468880"/>
-            <a:ext cx="10454335" cy="3108960"/>
+            <a:off x="868680" y="1609343"/>
+            <a:ext cx="10454335" cy="4562856"/>
           </a:xfrm>
           <a:prstGeom prst="rect">
             <a:avLst/>
@@ -15434,118 +15794,140 @@
           <a:p>
             <a:pPr algn="l">
               <a:lnSpc>
-                <a:spcPct val="100000"/>
-              </a:lnSpc>
-              <a:spcBef>
-                <a:spcPts val="0"/>
-              </a:spcBef>
-              <a:spcAft>
-                <a:spcPts val="0"/>
-              </a:spcAft>
-            </a:pPr>
-            <a:r>
-              <a:rPr sz="3000" b="0" i="0">
-                <a:solidFill>
-                  <a:srgbClr val="F7F6F2"/>
-                </a:solidFill>
-                <a:latin typeface="Georgia"/>
-              </a:rPr>
-              <a:t>Na próxima aula, vocês constroem</a:t>
+                <a:spcPct val="122000"/>
+              </a:lnSpc>
+              <a:spcBef>
+                <a:spcPts val="0"/>
+              </a:spcBef>
+              <a:spcAft>
+                <a:spcPts val="0"/>
+              </a:spcAft>
+            </a:pPr>
+            <a:r>
+              <a:rPr sz="1900" b="0" i="0">
+                <a:solidFill>
+                  <a:srgbClr val="16181D"/>
+                </a:solidFill>
+                <a:latin typeface="Segoe UI"/>
+              </a:rPr>
+              <a:t>—  Saída plausível não é saída correta — o Bloco 1 já mostrou por quê</a:t>
             </a:r>
           </a:p>
           <a:p>
             <a:pPr>
               <a:lnSpc>
-                <a:spcPct val="120000"/>
-              </a:lnSpc>
-              <a:spcBef>
-                <a:spcPts val="1200"/>
-              </a:spcBef>
-              <a:spcAft>
-                <a:spcPts val="0"/>
-              </a:spcAft>
-            </a:pPr>
-            <a:r>
-              <a:rPr sz="1500" b="0" i="0">
-                <a:solidFill>
-                  <a:srgbClr val="F7F6F2"/>
-                </a:solidFill>
-                <a:latin typeface="Segoe UI"/>
-              </a:rPr>
-              <a:t>Um agente que busca o que saiu na semana anterior na sua área e escreve uma newsletter</a:t>
+                <a:spcPct val="122000"/>
+              </a:lnSpc>
+              <a:spcBef>
+                <a:spcPts val="1300"/>
+              </a:spcBef>
+              <a:spcAft>
+                <a:spcPts val="0"/>
+              </a:spcAft>
+            </a:pPr>
+            <a:r>
+              <a:rPr sz="1900" b="0" i="0">
+                <a:solidFill>
+                  <a:srgbClr val="16181D"/>
+                </a:solidFill>
+                <a:latin typeface="Segoe UI"/>
+              </a:rPr>
+              <a:t>—  O que o modelo produz é rascunho até você rodar, conferir e reproduzir</a:t>
             </a:r>
           </a:p>
           <a:p>
             <a:pPr>
               <a:lnSpc>
-                <a:spcPct val="120000"/>
-              </a:lnSpc>
-              <a:spcBef>
-                <a:spcPts val="1200"/>
-              </a:spcBef>
-              <a:spcAft>
-                <a:spcPts val="0"/>
-              </a:spcAft>
-            </a:pPr>
-            <a:r>
-              <a:rPr sz="1500" b="0" i="0">
-                <a:solidFill>
-                  <a:srgbClr val="F7F6F2"/>
-                </a:solidFill>
-                <a:latin typeface="Segoe UI"/>
-              </a:rPr>
-              <a:t>Do zero: orquestrador, skills e material de apoio, escritos com o próprio agente</a:t>
+                <a:spcPct val="122000"/>
+              </a:lnSpc>
+              <a:spcBef>
+                <a:spcPts val="1300"/>
+              </a:spcBef>
+              <a:spcAft>
+                <a:spcPts val="0"/>
+              </a:spcAft>
+            </a:pPr>
+            <a:r>
+              <a:rPr sz="1900" b="0" i="0">
+                <a:solidFill>
+                  <a:srgbClr val="16181D"/>
+                </a:solidFill>
+                <a:latin typeface="Segoe UI"/>
+              </a:rPr>
+              <a:t>—  Duas armadilhas específicas do nosso trabalho:</a:t>
+            </a:r>
+          </a:p>
+          <a:p>
+            <a:pPr lvl="1">
+              <a:lnSpc>
+                <a:spcPct val="122000"/>
+              </a:lnSpc>
+              <a:spcBef>
+                <a:spcPts val="500"/>
+              </a:spcBef>
+              <a:spcAft>
+                <a:spcPts val="0"/>
+              </a:spcAft>
+            </a:pPr>
+            <a:r>
+              <a:rPr sz="1600" b="0" i="0">
+                <a:solidFill>
+                  <a:srgbClr val="6A6E76"/>
+                </a:solidFill>
+                <a:latin typeface="Segoe UI"/>
+              </a:rPr>
+              <a:t>·  referência bibliográfica inventada com aparência perfeita</a:t>
+            </a:r>
+          </a:p>
+          <a:p>
+            <a:pPr lvl="1">
+              <a:lnSpc>
+                <a:spcPct val="122000"/>
+              </a:lnSpc>
+              <a:spcBef>
+                <a:spcPts val="500"/>
+              </a:spcBef>
+              <a:spcAft>
+                <a:spcPts val="0"/>
+              </a:spcAft>
+            </a:pPr>
+            <a:r>
+              <a:rPr sz="1600" b="0" i="0">
+                <a:solidFill>
+                  <a:srgbClr val="6A6E76"/>
+                </a:solidFill>
+                <a:latin typeface="Segoe UI"/>
+              </a:rPr>
+              <a:t>·  resultado numérico produzido sem que nada tenha sido executado</a:t>
             </a:r>
           </a:p>
           <a:p>
             <a:pPr>
               <a:lnSpc>
-                <a:spcPct val="120000"/>
-              </a:lnSpc>
-              <a:spcBef>
-                <a:spcPts val="1200"/>
-              </a:spcBef>
-              <a:spcAft>
-                <a:spcPts val="0"/>
-              </a:spcAft>
-            </a:pPr>
-            <a:r>
-              <a:rPr sz="1500" b="0" i="0">
-                <a:solidFill>
-                  <a:srgbClr val="F7F6F2"/>
-                </a:solidFill>
-                <a:latin typeface="Segoe UI"/>
-              </a:rPr>
-              <a:t>Para chegar pronto: Claude Code instalado e testado, e 4 a 6 fontes da sua área com as URLs</a:t>
-            </a:r>
-          </a:p>
-          <a:p>
-            <a:pPr>
-              <a:lnSpc>
-                <a:spcPct val="120000"/>
-              </a:lnSpc>
-              <a:spcBef>
-                <a:spcPts val="1200"/>
-              </a:spcBef>
-              <a:spcAft>
-                <a:spcPts val="0"/>
-              </a:spcAft>
-            </a:pPr>
-            <a:r>
-              <a:rPr sz="1500" b="0" i="0">
-                <a:solidFill>
-                  <a:srgbClr val="F7F6F2"/>
-                </a:solidFill>
-                <a:latin typeface="Segoe UI"/>
-              </a:rPr>
-              <a:t>Quem chegar sem isso perde os primeiros quinze minutos</a:t>
-            </a:r>
-          </a:p>
-        </p:txBody>
-      </p:sp>
-      <p:sp>
-        <p:nvSpPr>
-          <p:cNvPr id="4" name="TextBox 3"/>
+                <a:spcPct val="122000"/>
+              </a:lnSpc>
+              <a:spcBef>
+                <a:spcPts val="1300"/>
+              </a:spcBef>
+              <a:spcAft>
+                <a:spcPts val="0"/>
+              </a:spcAft>
+            </a:pPr>
+            <a:r>
+              <a:rPr sz="1900" b="0" i="0">
+                <a:solidFill>
+                  <a:srgbClr val="16181D"/>
+                </a:solidFill>
+                <a:latin typeface="Segoe UI"/>
+              </a:rPr>
+              <a:t>—  Declarar o uso conforme a norma do programa e do veículo</a:t>
+            </a:r>
+          </a:p>
+        </p:txBody>
+      </p:sp>
+      <p:sp>
+        <p:nvSpPr>
+          <p:cNvPr id="5" name="TextBox 4"/>
           <p:cNvSpPr txBox="1"/>
           <p:nvPr/>
         </p:nvSpPr>
@@ -15590,7 +15972,7 @@
       </p:sp>
       <p:sp>
         <p:nvSpPr>
-          <p:cNvPr id="5" name="TextBox 4"/>
+          <p:cNvPr id="6" name="TextBox 5"/>
           <p:cNvSpPr txBox="1"/>
           <p:nvPr/>
         </p:nvSpPr>
@@ -15628,7 +16010,7 @@
                 </a:solidFill>
                 <a:latin typeface="Segoe UI"/>
               </a:rPr>
-              <a:t>32</a:t>
+              <a:t>33</a:t>
             </a:r>
           </a:p>
         </p:txBody>
@@ -15784,7 +16166,7 @@
     <p:bg>
       <p:bgPr>
         <a:solidFill>
-          <a:srgbClr val="FBFAF7"/>
+          <a:srgbClr val="F1EEE7"/>
         </a:solidFill>
         <a:effectLst/>
       </p:bgPr>
@@ -15798,65 +16180,20 @@
       <p:grpSpPr/>
       <p:sp>
         <p:nvSpPr>
-          <p:cNvPr id="2" name="TextBox 1"/>
-          <p:cNvSpPr txBox="1"/>
-          <p:nvPr/>
-        </p:nvSpPr>
-        <p:spPr>
-          <a:xfrm>
-            <a:off x="868680" y="566928"/>
-            <a:ext cx="10454335" cy="822960"/>
-          </a:xfrm>
-          <a:prstGeom prst="rect">
-            <a:avLst/>
-          </a:prstGeom>
-          <a:noFill/>
-        </p:spPr>
-        <p:txBody>
-          <a:bodyPr wrap="square" anchor="t">
-            <a:spAutoFit/>
-          </a:bodyPr>
-          <a:lstStyle/>
-          <a:p>
-            <a:pPr algn="l">
-              <a:lnSpc>
-                <a:spcPct val="100000"/>
-              </a:lnSpc>
-              <a:spcBef>
-                <a:spcPts val="0"/>
-              </a:spcBef>
-              <a:spcAft>
-                <a:spcPts val="0"/>
-              </a:spcAft>
-            </a:pPr>
-            <a:r>
-              <a:rPr sz="3000" b="0" i="0">
-                <a:solidFill>
-                  <a:srgbClr val="16181D"/>
-                </a:solidFill>
-                <a:latin typeface="Georgia"/>
-              </a:rPr>
-              <a:t>Referências</a:t>
-            </a:r>
-          </a:p>
-        </p:txBody>
-      </p:sp>
-      <p:sp>
-        <p:nvSpPr>
-          <p:cNvPr id="3" name="Rectangle 2"/>
+          <p:cNvPr id="2" name="Rectangle 1"/>
           <p:cNvSpPr/>
           <p:nvPr/>
         </p:nvSpPr>
         <p:spPr>
           <a:xfrm>
-            <a:off x="868680" y="1335024"/>
-            <a:ext cx="10454335" cy="12700"/>
+            <a:off x="868680" y="2331720"/>
+            <a:ext cx="1463040" cy="31750"/>
           </a:xfrm>
           <a:prstGeom prst="rect">
             <a:avLst/>
           </a:prstGeom>
           <a:solidFill>
-            <a:srgbClr val="D8D4CB"/>
+            <a:srgbClr val="BC7A2F"/>
           </a:solidFill>
           <a:ln>
             <a:noFill/>
@@ -15887,14 +16224,14 @@
       </p:sp>
       <p:sp>
         <p:nvSpPr>
-          <p:cNvPr id="4" name="TextBox 3"/>
+          <p:cNvPr id="3" name="TextBox 2"/>
           <p:cNvSpPr txBox="1"/>
           <p:nvPr/>
         </p:nvSpPr>
         <p:spPr>
           <a:xfrm>
-            <a:off x="868680" y="1609343"/>
-            <a:ext cx="10454335" cy="4562856"/>
+            <a:off x="868680" y="2651760"/>
+            <a:ext cx="10454335" cy="2377440"/>
           </a:xfrm>
           <a:prstGeom prst="rect">
             <a:avLst/>
@@ -15909,127 +16246,52 @@
           <a:p>
             <a:pPr algn="l">
               <a:lnSpc>
-                <a:spcPct val="122000"/>
-              </a:lnSpc>
-              <a:spcBef>
-                <a:spcPts val="0"/>
-              </a:spcBef>
-              <a:spcAft>
-                <a:spcPts val="0"/>
-              </a:spcAft>
-            </a:pPr>
-            <a:r>
-              <a:rPr sz="1900" b="0" i="0">
+                <a:spcPct val="135000"/>
+              </a:lnSpc>
+              <a:spcBef>
+                <a:spcPts val="0"/>
+              </a:spcBef>
+              <a:spcAft>
+                <a:spcPts val="0"/>
+              </a:spcAft>
+            </a:pPr>
+            <a:r>
+              <a:rPr sz="2500" b="0" i="1">
                 <a:solidFill>
                   <a:srgbClr val="16181D"/>
                 </a:solidFill>
-                <a:latin typeface="Segoe UI"/>
-              </a:rPr>
-              <a:t>—  Documentação oficial do Claude Code — code.claude.com/docs</a:t>
+                <a:latin typeface="Georgia"/>
+              </a:rPr>
+              <a:t>O agente acelera a parte mecânica e não assume nenhuma responsabilidade. A assinatura no paper é sua, então a verificação também é — e o dado que saiu do seu computador não volta.</a:t>
             </a:r>
           </a:p>
           <a:p>
             <a:pPr>
               <a:lnSpc>
-                <a:spcPct val="122000"/>
-              </a:lnSpc>
-              <a:spcBef>
-                <a:spcPts val="1300"/>
-              </a:spcBef>
-              <a:spcAft>
-                <a:spcPts val="0"/>
-              </a:spcAft>
-            </a:pPr>
-            <a:r>
-              <a:rPr sz="1900" b="0" i="0">
-                <a:solidFill>
-                  <a:srgbClr val="16181D"/>
-                </a:solidFill>
-                <a:latin typeface="Segoe UI"/>
-              </a:rPr>
-              <a:t>—  Documentação de Agent Skills e do formato </a:t>
-            </a:r>
-            <a:r>
-              <a:rPr sz="1748" b="0" i="0">
-                <a:solidFill>
-                  <a:srgbClr val="16181D"/>
-                </a:solidFill>
-                <a:latin typeface="Consolas"/>
-              </a:rPr>
-              <a:t>SKILL.md</a:t>
-            </a:r>
-          </a:p>
-          <a:p>
-            <a:pPr>
-              <a:lnSpc>
-                <a:spcPct val="122000"/>
-              </a:lnSpc>
-              <a:spcBef>
-                <a:spcPts val="1300"/>
-              </a:spcBef>
-              <a:spcAft>
-                <a:spcPts val="0"/>
-              </a:spcAft>
-            </a:pPr>
-            <a:r>
-              <a:rPr sz="1900" b="0" i="0">
-                <a:solidFill>
-                  <a:srgbClr val="16181D"/>
-                </a:solidFill>
-                <a:latin typeface="Segoe UI"/>
-              </a:rPr>
-              <a:t>—  Central de ajuda do Claude: Projects, memória, connectors e Cowork</a:t>
-            </a:r>
-          </a:p>
-          <a:p>
-            <a:pPr>
-              <a:lnSpc>
-                <a:spcPct val="122000"/>
-              </a:lnSpc>
-              <a:spcBef>
-                <a:spcPts val="1300"/>
-              </a:spcBef>
-              <a:spcAft>
-                <a:spcPts val="0"/>
-              </a:spcAft>
-            </a:pPr>
-            <a:r>
-              <a:rPr sz="1900" b="0" i="0">
-                <a:solidFill>
-                  <a:srgbClr val="16181D"/>
-                </a:solidFill>
-                <a:latin typeface="Segoe UI"/>
-              </a:rPr>
-              <a:t>—  Política de privacidade e de uso de dados da Anthropic</a:t>
-            </a:r>
-          </a:p>
-          <a:p>
-            <a:pPr>
-              <a:lnSpc>
-                <a:spcPct val="122000"/>
-              </a:lnSpc>
-              <a:spcBef>
-                <a:spcPts val="1300"/>
-              </a:spcBef>
-              <a:spcAft>
-                <a:spcPts val="0"/>
-              </a:spcAft>
-            </a:pPr>
-            <a:r>
-              <a:rPr sz="1900" b="0" i="0">
-                <a:solidFill>
-                  <a:srgbClr val="16181D"/>
-                </a:solidFill>
-                <a:latin typeface="Segoe UI"/>
-              </a:rPr>
-              <a:t>—  Espelho local consultado para esta aula, com data de captura registrada no repositório</a:t>
-            </a:r>
-          </a:p>
-        </p:txBody>
-      </p:sp>
-      <p:sp>
-        <p:nvSpPr>
-          <p:cNvPr id="5" name="TextBox 4"/>
+                <a:spcPct val="100000"/>
+              </a:lnSpc>
+              <a:spcBef>
+                <a:spcPts val="1800"/>
+              </a:spcBef>
+              <a:spcAft>
+                <a:spcPts val="0"/>
+              </a:spcAft>
+            </a:pPr>
+            <a:r>
+              <a:rPr sz="1300" b="0" i="0">
+                <a:solidFill>
+                  <a:srgbClr val="6A6E76"/>
+                </a:solidFill>
+                <a:latin typeface="Segoe UI"/>
+              </a:rPr>
+              <a:t>Âncora do Bloco 5</a:t>
+            </a:r>
+          </a:p>
+        </p:txBody>
+      </p:sp>
+      <p:sp>
+        <p:nvSpPr>
+          <p:cNvPr id="4" name="TextBox 3"/>
           <p:cNvSpPr txBox="1"/>
           <p:nvPr/>
         </p:nvSpPr>
@@ -16067,14 +16329,14 @@
                 </a:solidFill>
                 <a:latin typeface="Segoe UI"/>
               </a:rPr>
-              <a:t>Paulo E. R. Araujo · Referências</a:t>
-            </a:r>
-          </a:p>
-        </p:txBody>
-      </p:sp>
-      <p:sp>
-        <p:nvSpPr>
-          <p:cNvPr id="6" name="TextBox 5"/>
+              <a:t>Paulo E. R. Araujo · 5 · Aplicação em pesquisa</a:t>
+            </a:r>
+          </a:p>
+        </p:txBody>
+      </p:sp>
+      <p:sp>
+        <p:nvSpPr>
+          <p:cNvPr id="5" name="TextBox 4"/>
           <p:cNvSpPr txBox="1"/>
           <p:nvPr/>
         </p:nvSpPr>
@@ -16112,7 +16374,647 @@
                 </a:solidFill>
                 <a:latin typeface="Segoe UI"/>
               </a:rPr>
-              <a:t>33</a:t>
+              <a:t>34</a:t>
+            </a:r>
+          </a:p>
+        </p:txBody>
+      </p:sp>
+    </p:spTree>
+  </p:cSld>
+  <p:clrMapOvr>
+    <a:masterClrMapping/>
+  </p:clrMapOvr>
+</p:sld>
+</file>
+
+<file path=ppt/slides/slide41.xml><?xml version="1.0" encoding="utf-8"?>
+<p:sld xmlns:a="http://schemas.openxmlformats.org/drawingml/2006/main" xmlns:p="http://schemas.openxmlformats.org/presentationml/2006/main" xmlns:r="http://schemas.openxmlformats.org/officeDocument/2006/relationships">
+  <p:cSld>
+    <p:bg>
+      <p:bgPr>
+        <a:solidFill>
+          <a:srgbClr val="1B2A3A"/>
+        </a:solidFill>
+        <a:effectLst/>
+      </p:bgPr>
+    </p:bg>
+    <p:spTree>
+      <p:nvGrpSpPr>
+        <p:cNvPr id="1" name=""/>
+        <p:cNvGrpSpPr/>
+        <p:nvPr/>
+      </p:nvGrpSpPr>
+      <p:grpSpPr/>
+      <p:sp>
+        <p:nvSpPr>
+          <p:cNvPr id="2" name="Rectangle 1"/>
+          <p:cNvSpPr/>
+          <p:nvPr/>
+        </p:nvSpPr>
+        <p:spPr>
+          <a:xfrm>
+            <a:off x="868680" y="2148840"/>
+            <a:ext cx="1463040" cy="31750"/>
+          </a:xfrm>
+          <a:prstGeom prst="rect">
+            <a:avLst/>
+          </a:prstGeom>
+          <a:solidFill>
+            <a:srgbClr val="BC7A2F"/>
+          </a:solidFill>
+          <a:ln>
+            <a:noFill/>
+          </a:ln>
+          <a:effectLst/>
+        </p:spPr>
+        <p:style>
+          <a:lnRef idx="1">
+            <a:schemeClr val="accent1"/>
+          </a:lnRef>
+          <a:fillRef idx="3">
+            <a:schemeClr val="accent1"/>
+          </a:fillRef>
+          <a:effectRef idx="2">
+            <a:schemeClr val="accent1"/>
+          </a:effectRef>
+          <a:fontRef idx="minor">
+            <a:schemeClr val="lt1"/>
+          </a:fontRef>
+        </p:style>
+        <p:txBody>
+          <a:bodyPr rtlCol="0" anchor="ctr"/>
+          <a:lstStyle/>
+          <a:p>
+            <a:pPr algn="ctr"/>
+          </a:p>
+        </p:txBody>
+      </p:sp>
+      <p:sp>
+        <p:nvSpPr>
+          <p:cNvPr id="3" name="TextBox 2"/>
+          <p:cNvSpPr txBox="1"/>
+          <p:nvPr/>
+        </p:nvSpPr>
+        <p:spPr>
+          <a:xfrm>
+            <a:off x="868680" y="2468880"/>
+            <a:ext cx="10454335" cy="3108960"/>
+          </a:xfrm>
+          <a:prstGeom prst="rect">
+            <a:avLst/>
+          </a:prstGeom>
+          <a:noFill/>
+        </p:spPr>
+        <p:txBody>
+          <a:bodyPr wrap="square" anchor="t">
+            <a:spAutoFit/>
+          </a:bodyPr>
+          <a:lstStyle/>
+          <a:p>
+            <a:pPr algn="l">
+              <a:lnSpc>
+                <a:spcPct val="100000"/>
+              </a:lnSpc>
+              <a:spcBef>
+                <a:spcPts val="0"/>
+              </a:spcBef>
+              <a:spcAft>
+                <a:spcPts val="0"/>
+              </a:spcAft>
+            </a:pPr>
+            <a:r>
+              <a:rPr sz="3000" b="0" i="0">
+                <a:solidFill>
+                  <a:srgbClr val="F7F6F2"/>
+                </a:solidFill>
+                <a:latin typeface="Georgia"/>
+              </a:rPr>
+              <a:t>Na próxima aula, vocês constroem</a:t>
+            </a:r>
+          </a:p>
+          <a:p>
+            <a:pPr>
+              <a:lnSpc>
+                <a:spcPct val="120000"/>
+              </a:lnSpc>
+              <a:spcBef>
+                <a:spcPts val="1200"/>
+              </a:spcBef>
+              <a:spcAft>
+                <a:spcPts val="0"/>
+              </a:spcAft>
+            </a:pPr>
+            <a:r>
+              <a:rPr sz="1500" b="0" i="0">
+                <a:solidFill>
+                  <a:srgbClr val="F7F6F2"/>
+                </a:solidFill>
+                <a:latin typeface="Segoe UI"/>
+              </a:rPr>
+              <a:t>Um agente que busca o que saiu na semana anterior na sua área e escreve uma newsletter</a:t>
+            </a:r>
+          </a:p>
+          <a:p>
+            <a:pPr>
+              <a:lnSpc>
+                <a:spcPct val="120000"/>
+              </a:lnSpc>
+              <a:spcBef>
+                <a:spcPts val="1200"/>
+              </a:spcBef>
+              <a:spcAft>
+                <a:spcPts val="0"/>
+              </a:spcAft>
+            </a:pPr>
+            <a:r>
+              <a:rPr sz="1500" b="0" i="0">
+                <a:solidFill>
+                  <a:srgbClr val="F7F6F2"/>
+                </a:solidFill>
+                <a:latin typeface="Segoe UI"/>
+              </a:rPr>
+              <a:t>Do zero: orquestrador, skills e material de apoio, escritos com o próprio agente</a:t>
+            </a:r>
+          </a:p>
+          <a:p>
+            <a:pPr>
+              <a:lnSpc>
+                <a:spcPct val="120000"/>
+              </a:lnSpc>
+              <a:spcBef>
+                <a:spcPts val="1200"/>
+              </a:spcBef>
+              <a:spcAft>
+                <a:spcPts val="0"/>
+              </a:spcAft>
+            </a:pPr>
+            <a:r>
+              <a:rPr sz="1500" b="0" i="0">
+                <a:solidFill>
+                  <a:srgbClr val="F7F6F2"/>
+                </a:solidFill>
+                <a:latin typeface="Segoe UI"/>
+              </a:rPr>
+              <a:t>Para chegar pronto: Claude Code instalado e testado, e 4 a 6 fontes da sua área com as URLs</a:t>
+            </a:r>
+          </a:p>
+          <a:p>
+            <a:pPr>
+              <a:lnSpc>
+                <a:spcPct val="120000"/>
+              </a:lnSpc>
+              <a:spcBef>
+                <a:spcPts val="1200"/>
+              </a:spcBef>
+              <a:spcAft>
+                <a:spcPts val="0"/>
+              </a:spcAft>
+            </a:pPr>
+            <a:r>
+              <a:rPr sz="1500" b="0" i="0">
+                <a:solidFill>
+                  <a:srgbClr val="F7F6F2"/>
+                </a:solidFill>
+                <a:latin typeface="Segoe UI"/>
+              </a:rPr>
+              <a:t>Quem chegar sem isso perde os primeiros quinze minutos</a:t>
+            </a:r>
+          </a:p>
+        </p:txBody>
+      </p:sp>
+      <p:sp>
+        <p:nvSpPr>
+          <p:cNvPr id="4" name="TextBox 3"/>
+          <p:cNvSpPr txBox="1"/>
+          <p:nvPr/>
+        </p:nvSpPr>
+        <p:spPr>
+          <a:xfrm>
+            <a:off x="868680" y="6355080"/>
+            <a:ext cx="9905695" cy="310896"/>
+          </a:xfrm>
+          <a:prstGeom prst="rect">
+            <a:avLst/>
+          </a:prstGeom>
+          <a:noFill/>
+        </p:spPr>
+        <p:txBody>
+          <a:bodyPr wrap="square" anchor="t">
+            <a:spAutoFit/>
+          </a:bodyPr>
+          <a:lstStyle/>
+          <a:p>
+            <a:pPr algn="l">
+              <a:lnSpc>
+                <a:spcPct val="100000"/>
+              </a:lnSpc>
+              <a:spcBef>
+                <a:spcPts val="0"/>
+              </a:spcBef>
+              <a:spcAft>
+                <a:spcPts val="0"/>
+              </a:spcAft>
+            </a:pPr>
+            <a:r>
+              <a:rPr sz="1000" b="0" i="0">
+                <a:solidFill>
+                  <a:srgbClr val="6A6E76"/>
+                </a:solidFill>
+                <a:latin typeface="Segoe UI"/>
+              </a:rPr>
+              <a:t>Paulo E. R. Araujo · 5 · Aplicação em pesquisa</a:t>
+            </a:r>
+          </a:p>
+        </p:txBody>
+      </p:sp>
+      <p:sp>
+        <p:nvSpPr>
+          <p:cNvPr id="5" name="TextBox 4"/>
+          <p:cNvSpPr txBox="1"/>
+          <p:nvPr/>
+        </p:nvSpPr>
+        <p:spPr>
+          <a:xfrm>
+            <a:off x="10774375" y="6355080"/>
+            <a:ext cx="548640" cy="310896"/>
+          </a:xfrm>
+          <a:prstGeom prst="rect">
+            <a:avLst/>
+          </a:prstGeom>
+          <a:noFill/>
+        </p:spPr>
+        <p:txBody>
+          <a:bodyPr wrap="square" anchor="t">
+            <a:spAutoFit/>
+          </a:bodyPr>
+          <a:lstStyle/>
+          <a:p>
+            <a:pPr algn="r">
+              <a:lnSpc>
+                <a:spcPct val="100000"/>
+              </a:lnSpc>
+              <a:spcBef>
+                <a:spcPts val="0"/>
+              </a:spcBef>
+              <a:spcAft>
+                <a:spcPts val="0"/>
+              </a:spcAft>
+            </a:pPr>
+            <a:r>
+              <a:rPr sz="1000" b="0" i="0">
+                <a:solidFill>
+                  <a:srgbClr val="6A6E76"/>
+                </a:solidFill>
+                <a:latin typeface="Segoe UI"/>
+              </a:rPr>
+              <a:t>34</a:t>
+            </a:r>
+          </a:p>
+        </p:txBody>
+      </p:sp>
+    </p:spTree>
+  </p:cSld>
+  <p:clrMapOvr>
+    <a:masterClrMapping/>
+  </p:clrMapOvr>
+</p:sld>
+</file>
+
+<file path=ppt/slides/slide42.xml><?xml version="1.0" encoding="utf-8"?>
+<p:sld xmlns:a="http://schemas.openxmlformats.org/drawingml/2006/main" xmlns:p="http://schemas.openxmlformats.org/presentationml/2006/main" xmlns:r="http://schemas.openxmlformats.org/officeDocument/2006/relationships">
+  <p:cSld>
+    <p:bg>
+      <p:bgPr>
+        <a:solidFill>
+          <a:srgbClr val="FBFAF7"/>
+        </a:solidFill>
+        <a:effectLst/>
+      </p:bgPr>
+    </p:bg>
+    <p:spTree>
+      <p:nvGrpSpPr>
+        <p:cNvPr id="1" name=""/>
+        <p:cNvGrpSpPr/>
+        <p:nvPr/>
+      </p:nvGrpSpPr>
+      <p:grpSpPr/>
+      <p:sp>
+        <p:nvSpPr>
+          <p:cNvPr id="2" name="TextBox 1"/>
+          <p:cNvSpPr txBox="1"/>
+          <p:nvPr/>
+        </p:nvSpPr>
+        <p:spPr>
+          <a:xfrm>
+            <a:off x="868680" y="566928"/>
+            <a:ext cx="10454335" cy="822960"/>
+          </a:xfrm>
+          <a:prstGeom prst="rect">
+            <a:avLst/>
+          </a:prstGeom>
+          <a:noFill/>
+        </p:spPr>
+        <p:txBody>
+          <a:bodyPr wrap="square" anchor="t">
+            <a:spAutoFit/>
+          </a:bodyPr>
+          <a:lstStyle/>
+          <a:p>
+            <a:pPr algn="l">
+              <a:lnSpc>
+                <a:spcPct val="100000"/>
+              </a:lnSpc>
+              <a:spcBef>
+                <a:spcPts val="0"/>
+              </a:spcBef>
+              <a:spcAft>
+                <a:spcPts val="0"/>
+              </a:spcAft>
+            </a:pPr>
+            <a:r>
+              <a:rPr sz="3000" b="0" i="0">
+                <a:solidFill>
+                  <a:srgbClr val="16181D"/>
+                </a:solidFill>
+                <a:latin typeface="Georgia"/>
+              </a:rPr>
+              <a:t>Referências</a:t>
+            </a:r>
+          </a:p>
+        </p:txBody>
+      </p:sp>
+      <p:sp>
+        <p:nvSpPr>
+          <p:cNvPr id="3" name="Rectangle 2"/>
+          <p:cNvSpPr/>
+          <p:nvPr/>
+        </p:nvSpPr>
+        <p:spPr>
+          <a:xfrm>
+            <a:off x="868680" y="1335024"/>
+            <a:ext cx="10454335" cy="12700"/>
+          </a:xfrm>
+          <a:prstGeom prst="rect">
+            <a:avLst/>
+          </a:prstGeom>
+          <a:solidFill>
+            <a:srgbClr val="D8D4CB"/>
+          </a:solidFill>
+          <a:ln>
+            <a:noFill/>
+          </a:ln>
+          <a:effectLst/>
+        </p:spPr>
+        <p:style>
+          <a:lnRef idx="1">
+            <a:schemeClr val="accent1"/>
+          </a:lnRef>
+          <a:fillRef idx="3">
+            <a:schemeClr val="accent1"/>
+          </a:fillRef>
+          <a:effectRef idx="2">
+            <a:schemeClr val="accent1"/>
+          </a:effectRef>
+          <a:fontRef idx="minor">
+            <a:schemeClr val="lt1"/>
+          </a:fontRef>
+        </p:style>
+        <p:txBody>
+          <a:bodyPr rtlCol="0" anchor="ctr"/>
+          <a:lstStyle/>
+          <a:p>
+            <a:pPr algn="ctr"/>
+          </a:p>
+        </p:txBody>
+      </p:sp>
+      <p:sp>
+        <p:nvSpPr>
+          <p:cNvPr id="4" name="TextBox 3"/>
+          <p:cNvSpPr txBox="1"/>
+          <p:nvPr/>
+        </p:nvSpPr>
+        <p:spPr>
+          <a:xfrm>
+            <a:off x="868680" y="1609343"/>
+            <a:ext cx="10454335" cy="4562856"/>
+          </a:xfrm>
+          <a:prstGeom prst="rect">
+            <a:avLst/>
+          </a:prstGeom>
+          <a:noFill/>
+        </p:spPr>
+        <p:txBody>
+          <a:bodyPr wrap="square" anchor="t">
+            <a:spAutoFit/>
+          </a:bodyPr>
+          <a:lstStyle/>
+          <a:p>
+            <a:pPr algn="l">
+              <a:lnSpc>
+                <a:spcPct val="122000"/>
+              </a:lnSpc>
+              <a:spcBef>
+                <a:spcPts val="0"/>
+              </a:spcBef>
+              <a:spcAft>
+                <a:spcPts val="0"/>
+              </a:spcAft>
+            </a:pPr>
+            <a:r>
+              <a:rPr sz="1900" b="0" i="0">
+                <a:solidFill>
+                  <a:srgbClr val="16181D"/>
+                </a:solidFill>
+                <a:latin typeface="Segoe UI"/>
+              </a:rPr>
+              <a:t>—  Documentação oficial do Claude Code — code.claude.com/docs, incluindo o glossário e "How Claude Code works", onde o harness é definido</a:t>
+            </a:r>
+          </a:p>
+          <a:p>
+            <a:pPr>
+              <a:lnSpc>
+                <a:spcPct val="122000"/>
+              </a:lnSpc>
+              <a:spcBef>
+                <a:spcPts val="1300"/>
+              </a:spcBef>
+              <a:spcAft>
+                <a:spcPts val="0"/>
+              </a:spcAft>
+            </a:pPr>
+            <a:r>
+              <a:rPr sz="1900" b="0" i="0">
+                <a:solidFill>
+                  <a:srgbClr val="16181D"/>
+                </a:solidFill>
+                <a:latin typeface="Segoe UI"/>
+              </a:rPr>
+              <a:t>—  Documentação de Agent Skills e do formato </a:t>
+            </a:r>
+            <a:r>
+              <a:rPr sz="1748" b="0" i="0">
+                <a:solidFill>
+                  <a:srgbClr val="16181D"/>
+                </a:solidFill>
+                <a:latin typeface="Consolas"/>
+              </a:rPr>
+              <a:t>SKILL.md</a:t>
+            </a:r>
+          </a:p>
+          <a:p>
+            <a:pPr>
+              <a:lnSpc>
+                <a:spcPct val="122000"/>
+              </a:lnSpc>
+              <a:spcBef>
+                <a:spcPts val="1300"/>
+              </a:spcBef>
+              <a:spcAft>
+                <a:spcPts val="0"/>
+              </a:spcAft>
+            </a:pPr>
+            <a:r>
+              <a:rPr sz="1900" b="0" i="0">
+                <a:solidFill>
+                  <a:srgbClr val="16181D"/>
+                </a:solidFill>
+                <a:latin typeface="Segoe UI"/>
+              </a:rPr>
+              <a:t>—  Central de ajuda do Claude: Projects, memória, connectors e Cowork</a:t>
+            </a:r>
+          </a:p>
+          <a:p>
+            <a:pPr>
+              <a:lnSpc>
+                <a:spcPct val="122000"/>
+              </a:lnSpc>
+              <a:spcBef>
+                <a:spcPts val="1300"/>
+              </a:spcBef>
+              <a:spcAft>
+                <a:spcPts val="0"/>
+              </a:spcAft>
+            </a:pPr>
+            <a:r>
+              <a:rPr sz="1900" b="0" i="0">
+                <a:solidFill>
+                  <a:srgbClr val="16181D"/>
+                </a:solidFill>
+                <a:latin typeface="Segoe UI"/>
+              </a:rPr>
+              <a:t>—  Política de privacidade e de uso de dados da Anthropic</a:t>
+            </a:r>
+          </a:p>
+          <a:p>
+            <a:pPr>
+              <a:lnSpc>
+                <a:spcPct val="122000"/>
+              </a:lnSpc>
+              <a:spcBef>
+                <a:spcPts val="1300"/>
+              </a:spcBef>
+              <a:spcAft>
+                <a:spcPts val="0"/>
+              </a:spcAft>
+            </a:pPr>
+            <a:r>
+              <a:rPr sz="1900" b="0" i="0">
+                <a:solidFill>
+                  <a:srgbClr val="16181D"/>
+                </a:solidFill>
+                <a:latin typeface="Segoe UI"/>
+              </a:rPr>
+              <a:t>—  Espelho local consultado para esta aula, com data de captura registrada no repositório</a:t>
+            </a:r>
+          </a:p>
+        </p:txBody>
+      </p:sp>
+      <p:sp>
+        <p:nvSpPr>
+          <p:cNvPr id="5" name="TextBox 4"/>
+          <p:cNvSpPr txBox="1"/>
+          <p:nvPr/>
+        </p:nvSpPr>
+        <p:spPr>
+          <a:xfrm>
+            <a:off x="868680" y="6355080"/>
+            <a:ext cx="9905695" cy="310896"/>
+          </a:xfrm>
+          <a:prstGeom prst="rect">
+            <a:avLst/>
+          </a:prstGeom>
+          <a:noFill/>
+        </p:spPr>
+        <p:txBody>
+          <a:bodyPr wrap="square" anchor="t">
+            <a:spAutoFit/>
+          </a:bodyPr>
+          <a:lstStyle/>
+          <a:p>
+            <a:pPr algn="l">
+              <a:lnSpc>
+                <a:spcPct val="100000"/>
+              </a:lnSpc>
+              <a:spcBef>
+                <a:spcPts val="0"/>
+              </a:spcBef>
+              <a:spcAft>
+                <a:spcPts val="0"/>
+              </a:spcAft>
+            </a:pPr>
+            <a:r>
+              <a:rPr sz="1000" b="0" i="0">
+                <a:solidFill>
+                  <a:srgbClr val="6A6E76"/>
+                </a:solidFill>
+                <a:latin typeface="Segoe UI"/>
+              </a:rPr>
+              <a:t>Paulo E. R. Araujo · Referências</a:t>
+            </a:r>
+          </a:p>
+        </p:txBody>
+      </p:sp>
+      <p:sp>
+        <p:nvSpPr>
+          <p:cNvPr id="6" name="TextBox 5"/>
+          <p:cNvSpPr txBox="1"/>
+          <p:nvPr/>
+        </p:nvSpPr>
+        <p:spPr>
+          <a:xfrm>
+            <a:off x="10774375" y="6355080"/>
+            <a:ext cx="548640" cy="310896"/>
+          </a:xfrm>
+          <a:prstGeom prst="rect">
+            <a:avLst/>
+          </a:prstGeom>
+          <a:noFill/>
+        </p:spPr>
+        <p:txBody>
+          <a:bodyPr wrap="square" anchor="t">
+            <a:spAutoFit/>
+          </a:bodyPr>
+          <a:lstStyle/>
+          <a:p>
+            <a:pPr algn="r">
+              <a:lnSpc>
+                <a:spcPct val="100000"/>
+              </a:lnSpc>
+              <a:spcBef>
+                <a:spcPts val="0"/>
+              </a:spcBef>
+              <a:spcAft>
+                <a:spcPts val="0"/>
+              </a:spcAft>
+            </a:pPr>
+            <a:r>
+              <a:rPr sz="1000" b="0" i="0">
+                <a:solidFill>
+                  <a:srgbClr val="6A6E76"/>
+                </a:solidFill>
+                <a:latin typeface="Segoe UI"/>
+              </a:rPr>
+              <a:t>35</a:t>
             </a:r>
           </a:p>
         </p:txBody>

--- a/slides/saida/aula-1.pptx
+++ b/slides/saida/aula-1.pptx
@@ -47,6 +47,9 @@
     <p:sldId id="295" r:id="rId47"/>
     <p:sldId id="296" r:id="rId48"/>
     <p:sldId id="297" r:id="rId49"/>
+    <p:sldId id="298" r:id="rId50"/>
+    <p:sldId id="299" r:id="rId51"/>
+    <p:sldId id="300" r:id="rId52"/>
   </p:sldIdLst>
   <p:sldSz cx="12191695" cy="6858000" type="screen4x3"/>
   <p:notesSz cx="6858000" cy="9144000"/>
@@ -1243,7 +1246,7 @@
           <a:lstStyle/>
           <a:p>
             <a:r>
-              <a:t>Mapear cada etapa no que acabou de ser descrito. Quem percorre este laço é o harness: ele é que chama o modelo, executa o que foi pedido e decide se roda outra volta. O laço encerra quando o modelo devolve texto em vez de pedir ferramenta.</a:t>
+              <a:t>Ler a figura de cima para baixo, narrando. O ponto que fica: nada aqui é chamada de função. É texto estruturado indo e voltando, e o `stop_reason` é o que diz ao harness se o laço continua ou para.</a:t>
             </a:r>
           </a:p>
         </p:txBody>
@@ -1383,7 +1386,7 @@
           <a:lstStyle/>
           <a:p>
             <a:r>
-              <a:t>Ponte explícita para a prática.</a:t>
+              <a:t>É tudo a mesma conversa — por isso ela cresce tão rápido. Sem canal separado para máquina, resultado de ferramenta ocupa a mesma janela do Bloco 2.</a:t>
             </a:r>
           </a:p>
         </p:txBody>
@@ -1453,7 +1456,7 @@
           <a:lstStyle/>
           <a:p>
             <a:r>
-              <a:t>Procedimento no SKILL.md, configuração nos arquivos de apoio. É o que separa quem reusa skills de quem continua colando prompt.</a:t>
+              <a:t>Essas três regras são do harness, não suas. Servem para explicar por que o agente às vezes "esquece" de paralelizar: normalmente é o laço que foi mal implementado, não o modelo.</a:t>
             </a:r>
           </a:p>
         </p:txBody>
@@ -1523,7 +1526,7 @@
           <a:lstStyle/>
           <a:p>
             <a:r>
-              <a:t>A economia fica visível em vez de afirmada. É a resposta direta ao problema do Bloco 2.</a:t>
+              <a:t>Mapear cada etapa no que acabou de ser descrito. Quem percorre este laço é o harness: ele é que chama o modelo, executa o que foi pedido e decide se roda outra volta. O laço encerra quando o modelo devolve texto em vez de pedir ferramenta.</a:t>
             </a:r>
           </a:p>
         </p:txBody>
@@ -1593,7 +1596,7 @@
           <a:lstStyle/>
           <a:p>
             <a:r>
-              <a:t>Retomar o Bloco 2 com uma frase: Chat, Cowork e Code são três harnesses sobre o mesmo modelo. O que muda entre eles é o que o harness faz por você, não a inteligência por trás. E nomes de modelo mudam; o critério capacidade × latência × custo não — dizer isso em voz alta protege o material do tempo.</a:t>
+              <a:t>Ponte explícita para a prática.</a:t>
             </a:r>
           </a:p>
         </p:txBody>
@@ -1663,7 +1666,7 @@
           <a:lstStyle/>
           <a:p>
             <a:r>
-              <a:t>Quando usar qual: pensar no Chat, delegar no Cowork, executar no repositório com o Code.</a:t>
+              <a:t>Procedimento no SKILL.md, configuração nos arquivos de apoio. É o que separa quem reusa skills de quem continua colando prompt.</a:t>
             </a:r>
           </a:p>
         </p:txBody>
@@ -1733,7 +1736,7 @@
           <a:lstStyle/>
           <a:p>
             <a:r>
-              <a:t>Este é o slide que o aluno fotografa. Deixar tempo para isso.</a:t>
+              <a:t>A economia fica visível em vez de afirmada. É a resposta direta ao problema do Bloco 2.</a:t>
             </a:r>
           </a:p>
         </p:txBody>
@@ -1803,7 +1806,7 @@
           <a:lstStyle/>
           <a:p>
             <a:r>
-              <a:t>O bloco é organizado por tipo de trabalho justamente porque o laboratório tem domínios muito diferentes. Ninguém precisa traduzir do domínio alheio para o seu.</a:t>
+              <a:t>Retomar o Bloco 2 com uma frase: Chat, Cowork e Code são três harnesses sobre o mesmo modelo. O que muda entre eles é o que o harness faz por você, não a inteligência por trás. E nomes de modelo mudam; o critério capacidade × latência × custo não — dizer isso em voz alta protege o material do tempo.</a:t>
             </a:r>
           </a:p>
         </p:txBody>
@@ -1873,7 +1876,7 @@
           <a:lstStyle/>
           <a:p>
             <a:r>
-              <a:t>É aqui que hooks reaparecem: o jeito determinístico de garantir isso em torno de um modelo que não é determinístico.</a:t>
+              <a:t>Quando usar qual: pensar no Chat, delegar no Cowork, executar no repositório com o Code.</a:t>
             </a:r>
           </a:p>
         </p:txBody>
@@ -1943,7 +1946,7 @@
           <a:lstStyle/>
           <a:p>
             <a:r>
-              <a:t>Vocês vão usar plan mode na Aula 2, no primeiro passo.</a:t>
+              <a:t>Este é o slide que o aluno fotografa. Deixar tempo para isso.</a:t>
             </a:r>
           </a:p>
         </p:txBody>
@@ -2013,7 +2016,7 @@
           <a:lstStyle/>
           <a:p>
             <a:r>
-              <a:t>Consultar a política oficial de privacidade e uso de dados, não a opinião de quem está no palco. Este slide é o mais importante do bloco para quem pesquisa saúde e educação.</a:t>
+              <a:t>O bloco é organizado por tipo de trabalho justamente porque o laboratório tem domínios muito diferentes. Ninguém precisa traduzir do domínio alheio para o seu.</a:t>
             </a:r>
           </a:p>
         </p:txBody>
@@ -2153,7 +2156,7 @@
           <a:lstStyle/>
           <a:p>
             <a:r>
-              <a:t>Deixar este slide no ar por alguns segundos a mais. É o único ponto da aula sem margem para interpretação.</a:t>
+              <a:t>É aqui que hooks reaparecem: o jeito determinístico de garantir isso em torno de um modelo que não é determinístico.</a:t>
             </a:r>
           </a:p>
         </p:txBody>
@@ -2223,7 +2226,7 @@
           <a:lstStyle/>
           <a:p>
             <a:r>
-              <a:t>Nada assinado por você entra sem você ter verificado.</a:t>
+              <a:t>Vocês vão usar plan mode na Aula 2, no primeiro passo.</a:t>
             </a:r>
           </a:p>
         </p:txBody>
@@ -2293,7 +2296,7 @@
           <a:lstStyle/>
           <a:p>
             <a:r>
-              <a:t>Ponte para a Aula 2 e cobrança do pré-requisito. Repetir que o pré-requisito é o que devolve tempo real de prática.</a:t>
+              <a:t>Consultar a política oficial de privacidade e uso de dados, não a opinião de quem está no palco. Este slide é o mais importante do bloco para quem pesquisa saúde e educação.</a:t>
             </a:r>
           </a:p>
         </p:txBody>
@@ -2319,6 +2322,216 @@
 </file>
 
 <file path=ppt/notesSlides/notesSlide33.xml><?xml version="1.0" encoding="utf-8"?>
+<p:notes xmlns:a="http://schemas.openxmlformats.org/drawingml/2006/main" xmlns:p="http://schemas.openxmlformats.org/presentationml/2006/main" xmlns:r="http://schemas.openxmlformats.org/officeDocument/2006/relationships">
+  <p:cSld>
+    <p:spTree>
+      <p:nvGrpSpPr>
+        <p:cNvPr id="1" name=""/>
+        <p:cNvGrpSpPr/>
+        <p:nvPr/>
+      </p:nvGrpSpPr>
+      <p:grpSpPr>
+        <a:xfrm>
+          <a:off x="0" y="0"/>
+          <a:ext cx="0" cy="0"/>
+          <a:chOff x="0" y="0"/>
+          <a:chExt cx="0" cy="0"/>
+        </a:xfrm>
+      </p:grpSpPr>
+      <p:sp>
+        <p:nvSpPr>
+          <p:cNvPr id="2" name="Slide Image Placeholder 1"/>
+          <p:cNvSpPr>
+            <a:spLocks noGrp="1"/>
+          </p:cNvSpPr>
+          <p:nvPr>
+            <p:ph type="sldImg" idx="2"/>
+          </p:nvPr>
+        </p:nvSpPr>
+        <p:spPr/>
+      </p:sp>
+      <p:sp>
+        <p:nvSpPr>
+          <p:cNvPr id="3" name="Notes Placeholder 2"/>
+          <p:cNvSpPr>
+            <a:spLocks noGrp="1"/>
+          </p:cNvSpPr>
+          <p:nvPr>
+            <p:ph type="body" idx="3" sz="quarter"/>
+          </p:nvPr>
+        </p:nvSpPr>
+        <p:spPr/>
+        <p:txBody>
+          <a:bodyPr/>
+          <a:lstStyle/>
+          <a:p>
+            <a:r>
+              <a:t>Deixar este slide no ar por alguns segundos a mais. É o único ponto da aula sem margem para interpretação.</a:t>
+            </a:r>
+          </a:p>
+        </p:txBody>
+      </p:sp>
+      <p:sp>
+        <p:nvSpPr>
+          <p:cNvPr id="4" name="Slide Number Placeholder 3"/>
+          <p:cNvSpPr>
+            <a:spLocks noGrp="1"/>
+          </p:cNvSpPr>
+          <p:nvPr>
+            <p:ph type="sldNum" idx="5" sz="quarter"/>
+          </p:nvPr>
+        </p:nvSpPr>
+        <p:spPr/>
+      </p:sp>
+    </p:spTree>
+  </p:cSld>
+  <p:clrMapOvr>
+    <a:masterClrMapping/>
+  </p:clrMapOvr>
+</p:notes>
+</file>
+
+<file path=ppt/notesSlides/notesSlide34.xml><?xml version="1.0" encoding="utf-8"?>
+<p:notes xmlns:a="http://schemas.openxmlformats.org/drawingml/2006/main" xmlns:p="http://schemas.openxmlformats.org/presentationml/2006/main" xmlns:r="http://schemas.openxmlformats.org/officeDocument/2006/relationships">
+  <p:cSld>
+    <p:spTree>
+      <p:nvGrpSpPr>
+        <p:cNvPr id="1" name=""/>
+        <p:cNvGrpSpPr/>
+        <p:nvPr/>
+      </p:nvGrpSpPr>
+      <p:grpSpPr>
+        <a:xfrm>
+          <a:off x="0" y="0"/>
+          <a:ext cx="0" cy="0"/>
+          <a:chOff x="0" y="0"/>
+          <a:chExt cx="0" cy="0"/>
+        </a:xfrm>
+      </p:grpSpPr>
+      <p:sp>
+        <p:nvSpPr>
+          <p:cNvPr id="2" name="Slide Image Placeholder 1"/>
+          <p:cNvSpPr>
+            <a:spLocks noGrp="1"/>
+          </p:cNvSpPr>
+          <p:nvPr>
+            <p:ph type="sldImg" idx="2"/>
+          </p:nvPr>
+        </p:nvSpPr>
+        <p:spPr/>
+      </p:sp>
+      <p:sp>
+        <p:nvSpPr>
+          <p:cNvPr id="3" name="Notes Placeholder 2"/>
+          <p:cNvSpPr>
+            <a:spLocks noGrp="1"/>
+          </p:cNvSpPr>
+          <p:nvPr>
+            <p:ph type="body" idx="3" sz="quarter"/>
+          </p:nvPr>
+        </p:nvSpPr>
+        <p:spPr/>
+        <p:txBody>
+          <a:bodyPr/>
+          <a:lstStyle/>
+          <a:p>
+            <a:r>
+              <a:t>Nada assinado por você entra sem você ter verificado.</a:t>
+            </a:r>
+          </a:p>
+        </p:txBody>
+      </p:sp>
+      <p:sp>
+        <p:nvSpPr>
+          <p:cNvPr id="4" name="Slide Number Placeholder 3"/>
+          <p:cNvSpPr>
+            <a:spLocks noGrp="1"/>
+          </p:cNvSpPr>
+          <p:nvPr>
+            <p:ph type="sldNum" idx="5" sz="quarter"/>
+          </p:nvPr>
+        </p:nvSpPr>
+        <p:spPr/>
+      </p:sp>
+    </p:spTree>
+  </p:cSld>
+  <p:clrMapOvr>
+    <a:masterClrMapping/>
+  </p:clrMapOvr>
+</p:notes>
+</file>
+
+<file path=ppt/notesSlides/notesSlide35.xml><?xml version="1.0" encoding="utf-8"?>
+<p:notes xmlns:a="http://schemas.openxmlformats.org/drawingml/2006/main" xmlns:p="http://schemas.openxmlformats.org/presentationml/2006/main" xmlns:r="http://schemas.openxmlformats.org/officeDocument/2006/relationships">
+  <p:cSld>
+    <p:spTree>
+      <p:nvGrpSpPr>
+        <p:cNvPr id="1" name=""/>
+        <p:cNvGrpSpPr/>
+        <p:nvPr/>
+      </p:nvGrpSpPr>
+      <p:grpSpPr>
+        <a:xfrm>
+          <a:off x="0" y="0"/>
+          <a:ext cx="0" cy="0"/>
+          <a:chOff x="0" y="0"/>
+          <a:chExt cx="0" cy="0"/>
+        </a:xfrm>
+      </p:grpSpPr>
+      <p:sp>
+        <p:nvSpPr>
+          <p:cNvPr id="2" name="Slide Image Placeholder 1"/>
+          <p:cNvSpPr>
+            <a:spLocks noGrp="1"/>
+          </p:cNvSpPr>
+          <p:nvPr>
+            <p:ph type="sldImg" idx="2"/>
+          </p:nvPr>
+        </p:nvSpPr>
+        <p:spPr/>
+      </p:sp>
+      <p:sp>
+        <p:nvSpPr>
+          <p:cNvPr id="3" name="Notes Placeholder 2"/>
+          <p:cNvSpPr>
+            <a:spLocks noGrp="1"/>
+          </p:cNvSpPr>
+          <p:nvPr>
+            <p:ph type="body" idx="3" sz="quarter"/>
+          </p:nvPr>
+        </p:nvSpPr>
+        <p:spPr/>
+        <p:txBody>
+          <a:bodyPr/>
+          <a:lstStyle/>
+          <a:p>
+            <a:r>
+              <a:t>Ponte para a Aula 2 e cobrança do pré-requisito. Repetir que o pré-requisito é o que devolve tempo real de prática.</a:t>
+            </a:r>
+          </a:p>
+        </p:txBody>
+      </p:sp>
+      <p:sp>
+        <p:nvSpPr>
+          <p:cNvPr id="4" name="Slide Number Placeholder 3"/>
+          <p:cNvSpPr>
+            <a:spLocks noGrp="1"/>
+          </p:cNvSpPr>
+          <p:nvPr>
+            <p:ph type="sldNum" idx="5" sz="quarter"/>
+          </p:nvPr>
+        </p:nvSpPr>
+        <p:spPr/>
+      </p:sp>
+    </p:spTree>
+  </p:cSld>
+  <p:clrMapOvr>
+    <a:masterClrMapping/>
+  </p:clrMapOvr>
+</p:notes>
+</file>
+
+<file path=ppt/notesSlides/notesSlide36.xml><?xml version="1.0" encoding="utf-8"?>
 <p:notes xmlns:a="http://schemas.openxmlformats.org/drawingml/2006/main" xmlns:p="http://schemas.openxmlformats.org/presentationml/2006/main" xmlns:r="http://schemas.openxmlformats.org/officeDocument/2006/relationships">
   <p:cSld>
     <p:spTree>
@@ -10805,7 +11018,7 @@
                 </a:solidFill>
                 <a:latin typeface="Georgia"/>
               </a:rPr>
-              <a:t>O laço</a:t>
+              <a:t>As mensagens trocadas</a:t>
             </a:r>
           </a:p>
         </p:txBody>
@@ -10856,7 +11069,7 @@
       </p:sp>
       <p:pic>
         <p:nvPicPr>
-          <p:cNvPr id="4" name="Picture 3" descr="laco-agente.png"/>
+          <p:cNvPr id="4" name="Picture 3" descr="mensagens.png"/>
           <p:cNvPicPr>
             <a:picLocks noChangeAspect="1"/>
           </p:cNvPicPr>
@@ -10870,8 +11083,8 @@
         </p:blipFill>
         <p:spPr>
           <a:xfrm>
-            <a:off x="1926798" y="1609343"/>
-            <a:ext cx="8338097" cy="4334256"/>
+            <a:off x="1098579" y="1609343"/>
+            <a:ext cx="9994536" cy="4334256"/>
           </a:xfrm>
           <a:prstGeom prst="rect">
             <a:avLst/>
@@ -10886,8 +11099,8 @@
         </p:nvSpPr>
         <p:spPr>
           <a:xfrm>
-            <a:off x="1926798" y="5998464"/>
-            <a:ext cx="8338097" cy="274320"/>
+            <a:off x="1098579" y="5998464"/>
+            <a:ext cx="9994536" cy="274320"/>
           </a:xfrm>
           <a:prstGeom prst="rect">
             <a:avLst/>
@@ -10918,7 +11131,7 @@
                 </a:solidFill>
                 <a:latin typeface="Segoe UI"/>
               </a:rPr>
-              <a:t>Elaboração própria.</a:t>
+              <a:t>Estrutura conforme a Messages API da documentação oficial da Claude API (set. 2026). Campos abreviados.</a:t>
             </a:r>
           </a:p>
         </p:txBody>
@@ -11079,7 +11292,7 @@
                 </a:solidFill>
                 <a:latin typeface="Georgia"/>
               </a:rPr>
-              <a:t>Agente orquestrador</a:t>
+              <a:t>O vocabulário das mensagens</a:t>
             </a:r>
           </a:p>
         </p:txBody>
@@ -11168,7 +11381,110 @@
                 </a:solidFill>
                 <a:latin typeface="Segoe UI"/>
               </a:rPr>
-              <a:t>—  Quem roda o laço: mantém o objetivo, escolhe a ferramenta, decide quando delegar e quando parar</a:t>
+              <a:t>—  </a:t>
+            </a:r>
+            <a:r>
+              <a:rPr sz="1900" b="1" i="0">
+                <a:solidFill>
+                  <a:srgbClr val="16181D"/>
+                </a:solidFill>
+                <a:latin typeface="Segoe UI"/>
+              </a:rPr>
+              <a:t>Papéis</a:t>
+            </a:r>
+            <a:r>
+              <a:rPr sz="1900" b="0" i="0">
+                <a:solidFill>
+                  <a:srgbClr val="16181D"/>
+                </a:solidFill>
+                <a:latin typeface="Segoe UI"/>
+              </a:rPr>
+              <a:t>: </a:t>
+            </a:r>
+            <a:r>
+              <a:rPr sz="1748" b="0" i="0">
+                <a:solidFill>
+                  <a:srgbClr val="16181D"/>
+                </a:solidFill>
+                <a:latin typeface="Consolas"/>
+              </a:rPr>
+              <a:t>system</a:t>
+            </a:r>
+            <a:r>
+              <a:rPr sz="1900" b="0" i="0">
+                <a:solidFill>
+                  <a:srgbClr val="16181D"/>
+                </a:solidFill>
+                <a:latin typeface="Segoe UI"/>
+              </a:rPr>
+              <a:t>, </a:t>
+            </a:r>
+            <a:r>
+              <a:rPr sz="1748" b="0" i="0">
+                <a:solidFill>
+                  <a:srgbClr val="16181D"/>
+                </a:solidFill>
+                <a:latin typeface="Consolas"/>
+              </a:rPr>
+              <a:t>user</a:t>
+            </a:r>
+            <a:r>
+              <a:rPr sz="1900" b="0" i="0">
+                <a:solidFill>
+                  <a:srgbClr val="16181D"/>
+                </a:solidFill>
+                <a:latin typeface="Segoe UI"/>
+              </a:rPr>
+              <a:t> e </a:t>
+            </a:r>
+            <a:r>
+              <a:rPr sz="1748" b="0" i="0">
+                <a:solidFill>
+                  <a:srgbClr val="16181D"/>
+                </a:solidFill>
+                <a:latin typeface="Consolas"/>
+              </a:rPr>
+              <a:t>assistant</a:t>
+            </a:r>
+          </a:p>
+          <a:p>
+            <a:pPr lvl="1">
+              <a:lnSpc>
+                <a:spcPct val="122000"/>
+              </a:lnSpc>
+              <a:spcBef>
+                <a:spcPts val="500"/>
+              </a:spcBef>
+              <a:spcAft>
+                <a:spcPts val="0"/>
+              </a:spcAft>
+            </a:pPr>
+            <a:r>
+              <a:rPr sz="1600" b="0" i="0">
+                <a:solidFill>
+                  <a:srgbClr val="6A6E76"/>
+                </a:solidFill>
+                <a:latin typeface="Segoe UI"/>
+              </a:rPr>
+              <a:t>·  o resultado de uma ferramenta chega como </a:t>
+            </a:r>
+            <a:r>
+              <a:rPr sz="1472" b="0" i="0">
+                <a:solidFill>
+                  <a:srgbClr val="6A6E76"/>
+                </a:solidFill>
+                <a:latin typeface="Consolas"/>
+              </a:rPr>
+              <a:t>user</a:t>
+            </a:r>
+            <a:r>
+              <a:rPr sz="1600" b="0" i="0">
+                <a:solidFill>
+                  <a:srgbClr val="6A6E76"/>
+                </a:solidFill>
+                <a:latin typeface="Segoe UI"/>
+              </a:rPr>
+              <a:t>: não há canal separado para máquina</a:t>
             </a:r>
           </a:p>
           <a:p>
@@ -11190,7 +11506,7 @@
                 </a:solidFill>
                 <a:latin typeface="Segoe UI"/>
               </a:rPr>
-              <a:t>—  É um </a:t>
+              <a:t>—  </a:t>
             </a:r>
             <a:r>
               <a:rPr sz="1900" b="1" i="0">
@@ -11199,7 +11515,7 @@
                 </a:solidFill>
                 <a:latin typeface="Segoe UI"/>
               </a:rPr>
-              <a:t>papel</a:t>
+              <a:t>Blocos de conteúdo</a:t>
             </a:r>
             <a:r>
               <a:rPr sz="1900" b="0" i="0">
@@ -11208,7 +11524,92 @@
                 </a:solidFill>
                 <a:latin typeface="Segoe UI"/>
               </a:rPr>
-              <a:t>, não um produto — o mesmo papel aparece nos três produtos da próxima seção</a:t>
+              <a:t>: </a:t>
+            </a:r>
+            <a:r>
+              <a:rPr sz="1748" b="0" i="0">
+                <a:solidFill>
+                  <a:srgbClr val="16181D"/>
+                </a:solidFill>
+                <a:latin typeface="Consolas"/>
+              </a:rPr>
+              <a:t>text</a:t>
+            </a:r>
+            <a:r>
+              <a:rPr sz="1900" b="0" i="0">
+                <a:solidFill>
+                  <a:srgbClr val="16181D"/>
+                </a:solidFill>
+                <a:latin typeface="Segoe UI"/>
+              </a:rPr>
+              <a:t>, </a:t>
+            </a:r>
+            <a:r>
+              <a:rPr sz="1748" b="0" i="0">
+                <a:solidFill>
+                  <a:srgbClr val="16181D"/>
+                </a:solidFill>
+                <a:latin typeface="Consolas"/>
+              </a:rPr>
+              <a:t>thinking</a:t>
+            </a:r>
+            <a:r>
+              <a:rPr sz="1900" b="0" i="0">
+                <a:solidFill>
+                  <a:srgbClr val="16181D"/>
+                </a:solidFill>
+                <a:latin typeface="Segoe UI"/>
+              </a:rPr>
+              <a:t>, </a:t>
+            </a:r>
+            <a:r>
+              <a:rPr sz="1748" b="0" i="0">
+                <a:solidFill>
+                  <a:srgbClr val="16181D"/>
+                </a:solidFill>
+                <a:latin typeface="Consolas"/>
+              </a:rPr>
+              <a:t>tool_use</a:t>
+            </a:r>
+            <a:r>
+              <a:rPr sz="1900" b="0" i="0">
+                <a:solidFill>
+                  <a:srgbClr val="16181D"/>
+                </a:solidFill>
+                <a:latin typeface="Segoe UI"/>
+              </a:rPr>
+              <a:t>, </a:t>
+            </a:r>
+            <a:r>
+              <a:rPr sz="1748" b="0" i="0">
+                <a:solidFill>
+                  <a:srgbClr val="16181D"/>
+                </a:solidFill>
+                <a:latin typeface="Consolas"/>
+              </a:rPr>
+              <a:t>tool_result</a:t>
+            </a:r>
+          </a:p>
+          <a:p>
+            <a:pPr lvl="1">
+              <a:lnSpc>
+                <a:spcPct val="122000"/>
+              </a:lnSpc>
+              <a:spcBef>
+                <a:spcPts val="500"/>
+              </a:spcBef>
+              <a:spcAft>
+                <a:spcPts val="0"/>
+              </a:spcAft>
+            </a:pPr>
+            <a:r>
+              <a:rPr sz="1600" b="0" i="0">
+                <a:solidFill>
+                  <a:srgbClr val="6A6E76"/>
+                </a:solidFill>
+                <a:latin typeface="Segoe UI"/>
+              </a:rPr>
+              <a:t>·  imagem e documento entram como blocos também</a:t>
             </a:r>
           </a:p>
           <a:p>
@@ -11230,16 +11631,16 @@
                 </a:solidFill>
                 <a:latin typeface="Segoe UI"/>
               </a:rPr>
-              <a:t>—  No Claude Code, esse papel é descrito em texto, no </a:t>
-            </a:r>
-            <a:r>
-              <a:rPr sz="1748" b="0" i="0">
+              <a:t>—  </a:t>
+            </a:r>
+            <a:r>
+              <a:rPr sz="1748" b="1" i="0">
                 <a:solidFill>
                   <a:srgbClr val="16181D"/>
                 </a:solidFill>
                 <a:latin typeface="Consolas"/>
               </a:rPr>
-              <a:t>CLAUDE.md</a:t>
+              <a:t>stop_reason</a:t>
             </a:r>
             <a:r>
               <a:rPr sz="1900" b="0" i="0">
@@ -11248,7 +11649,7 @@
                 </a:solidFill>
                 <a:latin typeface="Segoe UI"/>
               </a:rPr>
-              <a:t> do projeto</a:t>
+              <a:t>: por que o modelo parou</a:t>
             </a:r>
           </a:p>
           <a:p>
@@ -11270,21 +11671,17 @@
                 </a:solidFill>
                 <a:latin typeface="Segoe UI"/>
               </a:rPr>
-              <a:t>·  é literalmente Markdown: sem formato secreto, sem API</a:t>
-            </a:r>
-          </a:p>
-          <a:p>
-            <a:pPr lvl="1">
-              <a:lnSpc>
-                <a:spcPct val="122000"/>
-              </a:lnSpc>
-              <a:spcBef>
-                <a:spcPts val="500"/>
-              </a:spcBef>
-              <a:spcAft>
-                <a:spcPts val="0"/>
-              </a:spcAft>
-            </a:pPr>
+              <a:t>·  </a:t>
+            </a:r>
+            <a:r>
+              <a:rPr sz="1472" b="0" i="0">
+                <a:solidFill>
+                  <a:srgbClr val="6A6E76"/>
+                </a:solidFill>
+                <a:latin typeface="Consolas"/>
+              </a:rPr>
+              <a:t>tool_use</a:t>
+            </a:r>
             <a:r>
               <a:rPr sz="1600" b="0" i="0">
                 <a:solidFill>
@@ -11292,7 +11689,43 @@
                 </a:solidFill>
                 <a:latin typeface="Segoe UI"/>
               </a:rPr>
-              <a:t>·  é o que vocês vão escrever na Aula 2</a:t>
+              <a:t> pede execução · </a:t>
+            </a:r>
+            <a:r>
+              <a:rPr sz="1472" b="0" i="0">
+                <a:solidFill>
+                  <a:srgbClr val="6A6E76"/>
+                </a:solidFill>
+                <a:latin typeface="Consolas"/>
+              </a:rPr>
+              <a:t>end_turn</a:t>
+            </a:r>
+            <a:r>
+              <a:rPr sz="1600" b="0" i="0">
+                <a:solidFill>
+                  <a:srgbClr val="6A6E76"/>
+                </a:solidFill>
+                <a:latin typeface="Segoe UI"/>
+              </a:rPr>
+              <a:t> encerra · </a:t>
+            </a:r>
+            <a:r>
+              <a:rPr sz="1472" b="0" i="0">
+                <a:solidFill>
+                  <a:srgbClr val="6A6E76"/>
+                </a:solidFill>
+                <a:latin typeface="Consolas"/>
+              </a:rPr>
+              <a:t>max_tokens</a:t>
+            </a:r>
+            <a:r>
+              <a:rPr sz="1600" b="0" i="0">
+                <a:solidFill>
+                  <a:srgbClr val="6A6E76"/>
+                </a:solidFill>
+                <a:latin typeface="Segoe UI"/>
+              </a:rPr>
+              <a:t> truncou</a:t>
             </a:r>
           </a:p>
         </p:txBody>
@@ -11453,7 +11886,7 @@
                 </a:solidFill>
                 <a:latin typeface="Georgia"/>
               </a:rPr>
-              <a:t>Skills e o material de apoio</a:t>
+              <a:t>Três regras que explicam muita coisa</a:t>
             </a:r>
           </a:p>
         </p:txBody>
@@ -11502,40 +11935,16 @@
           </a:p>
         </p:txBody>
       </p:sp>
-      <p:pic>
-        <p:nvPicPr>
-          <p:cNvPr id="4" name="Picture 3" descr="skill-references.png"/>
-          <p:cNvPicPr>
-            <a:picLocks noChangeAspect="1"/>
-          </p:cNvPicPr>
-          <p:nvPr/>
-        </p:nvPicPr>
-        <p:blipFill>
-          <a:blip r:embed="rId2"/>
-          <a:stretch>
-            <a:fillRect/>
-          </a:stretch>
-        </p:blipFill>
-        <p:spPr>
-          <a:xfrm>
-            <a:off x="1508966" y="1609343"/>
-            <a:ext cx="9173762" cy="4334256"/>
-          </a:xfrm>
-          <a:prstGeom prst="rect">
-            <a:avLst/>
-          </a:prstGeom>
-        </p:spPr>
-      </p:pic>
-      <p:sp>
-        <p:nvSpPr>
-          <p:cNvPr id="5" name="TextBox 4"/>
+      <p:sp>
+        <p:nvSpPr>
+          <p:cNvPr id="4" name="TextBox 3"/>
           <p:cNvSpPr txBox="1"/>
           <p:nvPr/>
         </p:nvSpPr>
         <p:spPr>
           <a:xfrm>
-            <a:off x="1508966" y="5998464"/>
-            <a:ext cx="9173762" cy="274320"/>
+            <a:off x="868680" y="1609343"/>
+            <a:ext cx="10454335" cy="4562856"/>
           </a:xfrm>
           <a:prstGeom prst="rect">
             <a:avLst/>
@@ -11550,30 +11959,208 @@
           <a:p>
             <a:pPr algn="l">
               <a:lnSpc>
-                <a:spcPct val="100000"/>
-              </a:lnSpc>
-              <a:spcBef>
-                <a:spcPts val="0"/>
-              </a:spcBef>
-              <a:spcAft>
-                <a:spcPts val="0"/>
-              </a:spcAft>
-            </a:pPr>
-            <a:r>
-              <a:rPr sz="1200" b="0" i="1">
+                <a:spcPct val="122000"/>
+              </a:lnSpc>
+              <a:spcBef>
+                <a:spcPts val="0"/>
+              </a:spcBef>
+              <a:spcAft>
+                <a:spcPts val="0"/>
+              </a:spcAft>
+            </a:pPr>
+            <a:r>
+              <a:rPr sz="1900" b="0" i="0">
+                <a:solidFill>
+                  <a:srgbClr val="16181D"/>
+                </a:solidFill>
+                <a:latin typeface="Segoe UI"/>
+              </a:rPr>
+              <a:t>—  Todo </a:t>
+            </a:r>
+            <a:r>
+              <a:rPr sz="1748" b="0" i="0">
+                <a:solidFill>
+                  <a:srgbClr val="16181D"/>
+                </a:solidFill>
+                <a:latin typeface="Consolas"/>
+              </a:rPr>
+              <a:t>tool_result</a:t>
+            </a:r>
+            <a:r>
+              <a:rPr sz="1900" b="0" i="0">
+                <a:solidFill>
+                  <a:srgbClr val="16181D"/>
+                </a:solidFill>
+                <a:latin typeface="Segoe UI"/>
+              </a:rPr>
+              <a:t> cita o </a:t>
+            </a:r>
+            <a:r>
+              <a:rPr sz="1748" b="0" i="0">
+                <a:solidFill>
+                  <a:srgbClr val="16181D"/>
+                </a:solidFill>
+                <a:latin typeface="Consolas"/>
+              </a:rPr>
+              <a:t>tool_use_id</a:t>
+            </a:r>
+            <a:r>
+              <a:rPr sz="1900" b="0" i="0">
+                <a:solidFill>
+                  <a:srgbClr val="16181D"/>
+                </a:solidFill>
+                <a:latin typeface="Segoe UI"/>
+              </a:rPr>
+              <a:t> do pedido que o originou</a:t>
+            </a:r>
+          </a:p>
+          <a:p>
+            <a:pPr lvl="1">
+              <a:lnSpc>
+                <a:spcPct val="122000"/>
+              </a:lnSpc>
+              <a:spcBef>
+                <a:spcPts val="500"/>
+              </a:spcBef>
+              <a:spcAft>
+                <a:spcPts val="0"/>
+              </a:spcAft>
+            </a:pPr>
+            <a:r>
+              <a:rPr sz="1600" b="0" i="0">
                 <a:solidFill>
                   <a:srgbClr val="6A6E76"/>
                 </a:solidFill>
                 <a:latin typeface="Segoe UI"/>
               </a:rPr>
-              <a:t>Elaboração própria a partir da documentação oficial de Agent Skills (set. 2026).</a:t>
-            </a:r>
-          </a:p>
-        </p:txBody>
-      </p:sp>
-      <p:sp>
-        <p:nvSpPr>
-          <p:cNvPr id="6" name="TextBox 5"/>
+              <a:t>·  é o que permite ao modelo casar resposta com pergunta quando há várias em voo</a:t>
+            </a:r>
+          </a:p>
+          <a:p>
+            <a:pPr>
+              <a:lnSpc>
+                <a:spcPct val="122000"/>
+              </a:lnSpc>
+              <a:spcBef>
+                <a:spcPts val="1300"/>
+              </a:spcBef>
+              <a:spcAft>
+                <a:spcPts val="0"/>
+              </a:spcAft>
+            </a:pPr>
+            <a:r>
+              <a:rPr sz="1900" b="0" i="0">
+                <a:solidFill>
+                  <a:srgbClr val="16181D"/>
+                </a:solidFill>
+                <a:latin typeface="Segoe UI"/>
+              </a:rPr>
+              <a:t>—  Se o modelo pediu várias ferramentas, </a:t>
+            </a:r>
+            <a:r>
+              <a:rPr sz="1900" b="1" i="0">
+                <a:solidFill>
+                  <a:srgbClr val="16181D"/>
+                </a:solidFill>
+                <a:latin typeface="Segoe UI"/>
+              </a:rPr>
+              <a:t>todos</a:t>
+            </a:r>
+            <a:r>
+              <a:rPr sz="1900" b="0" i="0">
+                <a:solidFill>
+                  <a:srgbClr val="16181D"/>
+                </a:solidFill>
+                <a:latin typeface="Segoe UI"/>
+              </a:rPr>
+              <a:t> os resultados voltam em uma única mensagem</a:t>
+            </a:r>
+          </a:p>
+          <a:p>
+            <a:pPr lvl="1">
+              <a:lnSpc>
+                <a:spcPct val="122000"/>
+              </a:lnSpc>
+              <a:spcBef>
+                <a:spcPts val="500"/>
+              </a:spcBef>
+              <a:spcAft>
+                <a:spcPts val="0"/>
+              </a:spcAft>
+            </a:pPr>
+            <a:r>
+              <a:rPr sz="1600" b="0" i="0">
+                <a:solidFill>
+                  <a:srgbClr val="6A6E76"/>
+                </a:solidFill>
+                <a:latin typeface="Segoe UI"/>
+              </a:rPr>
+              <a:t>·  devolver em mensagens separadas ensina o modelo a parar de pedir em paralelo</a:t>
+            </a:r>
+          </a:p>
+          <a:p>
+            <a:pPr>
+              <a:lnSpc>
+                <a:spcPct val="122000"/>
+              </a:lnSpc>
+              <a:spcBef>
+                <a:spcPts val="1300"/>
+              </a:spcBef>
+              <a:spcAft>
+                <a:spcPts val="0"/>
+              </a:spcAft>
+            </a:pPr>
+            <a:r>
+              <a:rPr sz="1900" b="0" i="0">
+                <a:solidFill>
+                  <a:srgbClr val="16181D"/>
+                </a:solidFill>
+                <a:latin typeface="Segoe UI"/>
+              </a:rPr>
+              <a:t>—  Erro também é resultado: volta como </a:t>
+            </a:r>
+            <a:r>
+              <a:rPr sz="1748" b="0" i="0">
+                <a:solidFill>
+                  <a:srgbClr val="16181D"/>
+                </a:solidFill>
+                <a:latin typeface="Consolas"/>
+              </a:rPr>
+              <a:t>tool_result</a:t>
+            </a:r>
+            <a:r>
+              <a:rPr sz="1900" b="0" i="0">
+                <a:solidFill>
+                  <a:srgbClr val="16181D"/>
+                </a:solidFill>
+                <a:latin typeface="Segoe UI"/>
+              </a:rPr>
+              <a:t> com </a:t>
+            </a:r>
+            <a:r>
+              <a:rPr sz="1748" b="0" i="0">
+                <a:solidFill>
+                  <a:srgbClr val="16181D"/>
+                </a:solidFill>
+                <a:latin typeface="Consolas"/>
+              </a:rPr>
+              <a:t>is_error</a:t>
+            </a:r>
+            <a:r>
+              <a:rPr sz="1900" b="0" i="0">
+                <a:solidFill>
+                  <a:srgbClr val="16181D"/>
+                </a:solidFill>
+                <a:latin typeface="Segoe UI"/>
+              </a:rPr>
+              <a:t>, nunca como silêncio</a:t>
+            </a:r>
+          </a:p>
+        </p:txBody>
+      </p:sp>
+      <p:sp>
+        <p:nvSpPr>
+          <p:cNvPr id="5" name="TextBox 4"/>
           <p:cNvSpPr txBox="1"/>
           <p:nvPr/>
         </p:nvSpPr>
@@ -11618,7 +12205,7 @@
       </p:sp>
       <p:sp>
         <p:nvSpPr>
-          <p:cNvPr id="7" name="TextBox 6"/>
+          <p:cNvPr id="6" name="TextBox 5"/>
           <p:cNvSpPr txBox="1"/>
           <p:nvPr/>
         </p:nvSpPr>
@@ -11727,7 +12314,7 @@
                 </a:solidFill>
                 <a:latin typeface="Georgia"/>
               </a:rPr>
-              <a:t>Subagents: comprar janela de contexto</a:t>
+              <a:t>O laço</a:t>
             </a:r>
           </a:p>
         </p:txBody>
@@ -11778,7 +12365,7 @@
       </p:sp>
       <p:pic>
         <p:nvPicPr>
-          <p:cNvPr id="4" name="Picture 3" descr="subagente.png"/>
+          <p:cNvPr id="4" name="Picture 3" descr="laco-agente.png"/>
           <p:cNvPicPr>
             <a:picLocks noChangeAspect="1"/>
           </p:cNvPicPr>
@@ -11792,8 +12379,8 @@
         </p:blipFill>
         <p:spPr>
           <a:xfrm>
-            <a:off x="1640003" y="1609343"/>
-            <a:ext cx="8911688" cy="4334256"/>
+            <a:off x="1926798" y="1609343"/>
+            <a:ext cx="8338097" cy="4334256"/>
           </a:xfrm>
           <a:prstGeom prst="rect">
             <a:avLst/>
@@ -11808,8 +12395,8 @@
         </p:nvSpPr>
         <p:spPr>
           <a:xfrm>
-            <a:off x="1640003" y="5998464"/>
-            <a:ext cx="8911688" cy="274320"/>
+            <a:off x="1926798" y="5998464"/>
+            <a:ext cx="8338097" cy="274320"/>
           </a:xfrm>
           <a:prstGeom prst="rect">
             <a:avLst/>
@@ -11840,7 +12427,7 @@
                 </a:solidFill>
                 <a:latin typeface="Segoe UI"/>
               </a:rPr>
-              <a:t>Elaboração própria a partir do simulador de janela de contexto da documentação oficial do Claude Code (set. 2026).</a:t>
+              <a:t>Elaboração própria.</a:t>
             </a:r>
           </a:p>
         </p:txBody>
@@ -11949,7 +12536,7 @@
     <p:bg>
       <p:bgPr>
         <a:solidFill>
-          <a:srgbClr val="F1EEE7"/>
+          <a:srgbClr val="FBFAF7"/>
         </a:solidFill>
         <a:effectLst/>
       </p:bgPr>
@@ -11963,20 +12550,65 @@
       <p:grpSpPr/>
       <p:sp>
         <p:nvSpPr>
-          <p:cNvPr id="2" name="Rectangle 1"/>
+          <p:cNvPr id="2" name="TextBox 1"/>
+          <p:cNvSpPr txBox="1"/>
+          <p:nvPr/>
+        </p:nvSpPr>
+        <p:spPr>
+          <a:xfrm>
+            <a:off x="868680" y="566928"/>
+            <a:ext cx="10454335" cy="822960"/>
+          </a:xfrm>
+          <a:prstGeom prst="rect">
+            <a:avLst/>
+          </a:prstGeom>
+          <a:noFill/>
+        </p:spPr>
+        <p:txBody>
+          <a:bodyPr wrap="square" anchor="t">
+            <a:spAutoFit/>
+          </a:bodyPr>
+          <a:lstStyle/>
+          <a:p>
+            <a:pPr algn="l">
+              <a:lnSpc>
+                <a:spcPct val="100000"/>
+              </a:lnSpc>
+              <a:spcBef>
+                <a:spcPts val="0"/>
+              </a:spcBef>
+              <a:spcAft>
+                <a:spcPts val="0"/>
+              </a:spcAft>
+            </a:pPr>
+            <a:r>
+              <a:rPr sz="3000" b="0" i="0">
+                <a:solidFill>
+                  <a:srgbClr val="16181D"/>
+                </a:solidFill>
+                <a:latin typeface="Georgia"/>
+              </a:rPr>
+              <a:t>Agente orquestrador</a:t>
+            </a:r>
+          </a:p>
+        </p:txBody>
+      </p:sp>
+      <p:sp>
+        <p:nvSpPr>
+          <p:cNvPr id="3" name="Rectangle 2"/>
           <p:cNvSpPr/>
           <p:nvPr/>
         </p:nvSpPr>
         <p:spPr>
           <a:xfrm>
-            <a:off x="868680" y="2331720"/>
-            <a:ext cx="1463040" cy="31750"/>
+            <a:off x="868680" y="1335024"/>
+            <a:ext cx="10454335" cy="12700"/>
           </a:xfrm>
           <a:prstGeom prst="rect">
             <a:avLst/>
           </a:prstGeom>
           <a:solidFill>
-            <a:srgbClr val="BC7A2F"/>
+            <a:srgbClr val="D8D4CB"/>
           </a:solidFill>
           <a:ln>
             <a:noFill/>
@@ -12007,14 +12639,14 @@
       </p:sp>
       <p:sp>
         <p:nvSpPr>
-          <p:cNvPr id="3" name="TextBox 2"/>
+          <p:cNvPr id="4" name="TextBox 3"/>
           <p:cNvSpPr txBox="1"/>
           <p:nvPr/>
         </p:nvSpPr>
         <p:spPr>
           <a:xfrm>
-            <a:off x="868680" y="2651760"/>
-            <a:ext cx="10454335" cy="2377440"/>
+            <a:off x="868680" y="1609343"/>
+            <a:ext cx="10454335" cy="4562856"/>
           </a:xfrm>
           <a:prstGeom prst="rect">
             <a:avLst/>
@@ -12029,52 +12661,154 @@
           <a:p>
             <a:pPr algn="l">
               <a:lnSpc>
-                <a:spcPct val="135000"/>
-              </a:lnSpc>
-              <a:spcBef>
-                <a:spcPts val="0"/>
-              </a:spcBef>
-              <a:spcAft>
-                <a:spcPts val="0"/>
-              </a:spcAft>
-            </a:pPr>
-            <a:r>
-              <a:rPr sz="2500" b="0" i="1">
-                <a:solidFill>
-                  <a:srgbClr val="16181D"/>
-                </a:solidFill>
-                <a:latin typeface="Georgia"/>
-              </a:rPr>
-              <a:t>Contexto é o recurso escasso, e você tem três formas de gastá-lo menos: skill em vez de repetir instrução, material de apoio em vez de colar documentação, subagente em vez de ler dez arquivos no contexto principal.</a:t>
+                <a:spcPct val="122000"/>
+              </a:lnSpc>
+              <a:spcBef>
+                <a:spcPts val="0"/>
+              </a:spcBef>
+              <a:spcAft>
+                <a:spcPts val="0"/>
+              </a:spcAft>
+            </a:pPr>
+            <a:r>
+              <a:rPr sz="1900" b="0" i="0">
+                <a:solidFill>
+                  <a:srgbClr val="16181D"/>
+                </a:solidFill>
+                <a:latin typeface="Segoe UI"/>
+              </a:rPr>
+              <a:t>—  Quem roda o laço: mantém o objetivo, escolhe a ferramenta, decide quando delegar e quando parar</a:t>
             </a:r>
           </a:p>
           <a:p>
             <a:pPr>
               <a:lnSpc>
-                <a:spcPct val="100000"/>
-              </a:lnSpc>
-              <a:spcBef>
-                <a:spcPts val="1800"/>
-              </a:spcBef>
-              <a:spcAft>
-                <a:spcPts val="0"/>
-              </a:spcAft>
-            </a:pPr>
-            <a:r>
-              <a:rPr sz="1300" b="0" i="0">
+                <a:spcPct val="122000"/>
+              </a:lnSpc>
+              <a:spcBef>
+                <a:spcPts val="1300"/>
+              </a:spcBef>
+              <a:spcAft>
+                <a:spcPts val="0"/>
+              </a:spcAft>
+            </a:pPr>
+            <a:r>
+              <a:rPr sz="1900" b="0" i="0">
+                <a:solidFill>
+                  <a:srgbClr val="16181D"/>
+                </a:solidFill>
+                <a:latin typeface="Segoe UI"/>
+              </a:rPr>
+              <a:t>—  É um </a:t>
+            </a:r>
+            <a:r>
+              <a:rPr sz="1900" b="1" i="0">
+                <a:solidFill>
+                  <a:srgbClr val="16181D"/>
+                </a:solidFill>
+                <a:latin typeface="Segoe UI"/>
+              </a:rPr>
+              <a:t>papel</a:t>
+            </a:r>
+            <a:r>
+              <a:rPr sz="1900" b="0" i="0">
+                <a:solidFill>
+                  <a:srgbClr val="16181D"/>
+                </a:solidFill>
+                <a:latin typeface="Segoe UI"/>
+              </a:rPr>
+              <a:t>, não um produto — o mesmo papel aparece nos três produtos da próxima seção</a:t>
+            </a:r>
+          </a:p>
+          <a:p>
+            <a:pPr>
+              <a:lnSpc>
+                <a:spcPct val="122000"/>
+              </a:lnSpc>
+              <a:spcBef>
+                <a:spcPts val="1300"/>
+              </a:spcBef>
+              <a:spcAft>
+                <a:spcPts val="0"/>
+              </a:spcAft>
+            </a:pPr>
+            <a:r>
+              <a:rPr sz="1900" b="0" i="0">
+                <a:solidFill>
+                  <a:srgbClr val="16181D"/>
+                </a:solidFill>
+                <a:latin typeface="Segoe UI"/>
+              </a:rPr>
+              <a:t>—  No Claude Code, esse papel é descrito em texto, no </a:t>
+            </a:r>
+            <a:r>
+              <a:rPr sz="1748" b="0" i="0">
+                <a:solidFill>
+                  <a:srgbClr val="16181D"/>
+                </a:solidFill>
+                <a:latin typeface="Consolas"/>
+              </a:rPr>
+              <a:t>CLAUDE.md</a:t>
+            </a:r>
+            <a:r>
+              <a:rPr sz="1900" b="0" i="0">
+                <a:solidFill>
+                  <a:srgbClr val="16181D"/>
+                </a:solidFill>
+                <a:latin typeface="Segoe UI"/>
+              </a:rPr>
+              <a:t> do projeto</a:t>
+            </a:r>
+          </a:p>
+          <a:p>
+            <a:pPr lvl="1">
+              <a:lnSpc>
+                <a:spcPct val="122000"/>
+              </a:lnSpc>
+              <a:spcBef>
+                <a:spcPts val="500"/>
+              </a:spcBef>
+              <a:spcAft>
+                <a:spcPts val="0"/>
+              </a:spcAft>
+            </a:pPr>
+            <a:r>
+              <a:rPr sz="1600" b="0" i="0">
                 <a:solidFill>
                   <a:srgbClr val="6A6E76"/>
                 </a:solidFill>
                 <a:latin typeface="Segoe UI"/>
               </a:rPr>
-              <a:t>Âncora do Bloco 3</a:t>
-            </a:r>
-          </a:p>
-        </p:txBody>
-      </p:sp>
-      <p:sp>
-        <p:nvSpPr>
-          <p:cNvPr id="4" name="TextBox 3"/>
+              <a:t>·  é literalmente Markdown: sem formato secreto, sem API</a:t>
+            </a:r>
+          </a:p>
+          <a:p>
+            <a:pPr lvl="1">
+              <a:lnSpc>
+                <a:spcPct val="122000"/>
+              </a:lnSpc>
+              <a:spcBef>
+                <a:spcPts val="500"/>
+              </a:spcBef>
+              <a:spcAft>
+                <a:spcPts val="0"/>
+              </a:spcAft>
+            </a:pPr>
+            <a:r>
+              <a:rPr sz="1600" b="0" i="0">
+                <a:solidFill>
+                  <a:srgbClr val="6A6E76"/>
+                </a:solidFill>
+                <a:latin typeface="Segoe UI"/>
+              </a:rPr>
+              <a:t>·  é o que vocês vão escrever na Aula 2</a:t>
+            </a:r>
+          </a:p>
+        </p:txBody>
+      </p:sp>
+      <p:sp>
+        <p:nvSpPr>
+          <p:cNvPr id="5" name="TextBox 4"/>
           <p:cNvSpPr txBox="1"/>
           <p:nvPr/>
         </p:nvSpPr>
@@ -12119,7 +12853,7 @@
       </p:sp>
       <p:sp>
         <p:nvSpPr>
-          <p:cNvPr id="5" name="TextBox 4"/>
+          <p:cNvPr id="6" name="TextBox 5"/>
           <p:cNvSpPr txBox="1"/>
           <p:nvPr/>
         </p:nvSpPr>
@@ -12176,7 +12910,7 @@
     <p:bg>
       <p:bgPr>
         <a:solidFill>
-          <a:srgbClr val="1B2A3A"/>
+          <a:srgbClr val="FBFAF7"/>
         </a:solidFill>
         <a:effectLst/>
       </p:bgPr>
@@ -12190,20 +12924,65 @@
       <p:grpSpPr/>
       <p:sp>
         <p:nvSpPr>
-          <p:cNvPr id="2" name="Rectangle 1"/>
+          <p:cNvPr id="2" name="TextBox 1"/>
+          <p:cNvSpPr txBox="1"/>
+          <p:nvPr/>
+        </p:nvSpPr>
+        <p:spPr>
+          <a:xfrm>
+            <a:off x="868680" y="566928"/>
+            <a:ext cx="10454335" cy="822960"/>
+          </a:xfrm>
+          <a:prstGeom prst="rect">
+            <a:avLst/>
+          </a:prstGeom>
+          <a:noFill/>
+        </p:spPr>
+        <p:txBody>
+          <a:bodyPr wrap="square" anchor="t">
+            <a:spAutoFit/>
+          </a:bodyPr>
+          <a:lstStyle/>
+          <a:p>
+            <a:pPr algn="l">
+              <a:lnSpc>
+                <a:spcPct val="100000"/>
+              </a:lnSpc>
+              <a:spcBef>
+                <a:spcPts val="0"/>
+              </a:spcBef>
+              <a:spcAft>
+                <a:spcPts val="0"/>
+              </a:spcAft>
+            </a:pPr>
+            <a:r>
+              <a:rPr sz="3000" b="0" i="0">
+                <a:solidFill>
+                  <a:srgbClr val="16181D"/>
+                </a:solidFill>
+                <a:latin typeface="Georgia"/>
+              </a:rPr>
+              <a:t>Skills e o material de apoio</a:t>
+            </a:r>
+          </a:p>
+        </p:txBody>
+      </p:sp>
+      <p:sp>
+        <p:nvSpPr>
+          <p:cNvPr id="3" name="Rectangle 2"/>
           <p:cNvSpPr/>
           <p:nvPr/>
         </p:nvSpPr>
         <p:spPr>
           <a:xfrm>
-            <a:off x="868680" y="2788920"/>
-            <a:ext cx="1463040" cy="31750"/>
+            <a:off x="868680" y="1335024"/>
+            <a:ext cx="10454335" cy="12700"/>
           </a:xfrm>
           <a:prstGeom prst="rect">
             <a:avLst/>
           </a:prstGeom>
           <a:solidFill>
-            <a:srgbClr val="BC7A2F"/>
+            <a:srgbClr val="D8D4CB"/>
           </a:solidFill>
           <a:ln>
             <a:noFill/>
@@ -12232,16 +13011,40 @@
           </a:p>
         </p:txBody>
       </p:sp>
-      <p:sp>
-        <p:nvSpPr>
-          <p:cNvPr id="3" name="TextBox 2"/>
+      <p:pic>
+        <p:nvPicPr>
+          <p:cNvPr id="4" name="Picture 3" descr="skill-references.png"/>
+          <p:cNvPicPr>
+            <a:picLocks noChangeAspect="1"/>
+          </p:cNvPicPr>
+          <p:nvPr/>
+        </p:nvPicPr>
+        <p:blipFill>
+          <a:blip r:embed="rId2"/>
+          <a:stretch>
+            <a:fillRect/>
+          </a:stretch>
+        </p:blipFill>
+        <p:spPr>
+          <a:xfrm>
+            <a:off x="1508966" y="1609343"/>
+            <a:ext cx="9173762" cy="4334256"/>
+          </a:xfrm>
+          <a:prstGeom prst="rect">
+            <a:avLst/>
+          </a:prstGeom>
+        </p:spPr>
+      </p:pic>
+      <p:sp>
+        <p:nvSpPr>
+          <p:cNvPr id="5" name="TextBox 4"/>
           <p:cNvSpPr txBox="1"/>
           <p:nvPr/>
         </p:nvSpPr>
         <p:spPr>
           <a:xfrm>
-            <a:off x="868680" y="3063240"/>
-            <a:ext cx="10454335" cy="1463040"/>
+            <a:off x="1508966" y="5998464"/>
+            <a:ext cx="9173762" cy="274320"/>
           </a:xfrm>
           <a:prstGeom prst="rect">
             <a:avLst/>
@@ -12266,35 +13069,103 @@
               </a:spcAft>
             </a:pPr>
             <a:r>
-              <a:rPr sz="3200" b="0" i="0">
-                <a:solidFill>
-                  <a:srgbClr val="F7F6F2"/>
-                </a:solidFill>
-                <a:latin typeface="Georgia"/>
-              </a:rPr>
-              <a:t>Bloco 4</a:t>
-            </a:r>
-          </a:p>
-          <a:p>
-            <a:pPr>
+              <a:rPr sz="1200" b="0" i="1">
+                <a:solidFill>
+                  <a:srgbClr val="6A6E76"/>
+                </a:solidFill>
+                <a:latin typeface="Segoe UI"/>
+              </a:rPr>
+              <a:t>Elaboração própria a partir da documentação oficial de Agent Skills (set. 2026).</a:t>
+            </a:r>
+          </a:p>
+        </p:txBody>
+      </p:sp>
+      <p:sp>
+        <p:nvSpPr>
+          <p:cNvPr id="6" name="TextBox 5"/>
+          <p:cNvSpPr txBox="1"/>
+          <p:nvPr/>
+        </p:nvSpPr>
+        <p:spPr>
+          <a:xfrm>
+            <a:off x="868680" y="6355080"/>
+            <a:ext cx="9905695" cy="310896"/>
+          </a:xfrm>
+          <a:prstGeom prst="rect">
+            <a:avLst/>
+          </a:prstGeom>
+          <a:noFill/>
+        </p:spPr>
+        <p:txBody>
+          <a:bodyPr wrap="square" anchor="t">
+            <a:spAutoFit/>
+          </a:bodyPr>
+          <a:lstStyle/>
+          <a:p>
+            <a:pPr algn="l">
               <a:lnSpc>
                 <a:spcPct val="100000"/>
               </a:lnSpc>
               <a:spcBef>
-                <a:spcPts val="1000"/>
-              </a:spcBef>
-              <a:spcAft>
-                <a:spcPts val="0"/>
-              </a:spcAft>
-            </a:pPr>
-            <a:r>
-              <a:rPr sz="1600" b="0" i="0">
-                <a:solidFill>
-                  <a:srgbClr val="7FA8C9"/>
-                </a:solidFill>
-                <a:latin typeface="Segoe UI"/>
-              </a:rPr>
-              <a:t>Claude concreto: três interfaces, uma base</a:t>
+                <a:spcPts val="0"/>
+              </a:spcBef>
+              <a:spcAft>
+                <a:spcPts val="0"/>
+              </a:spcAft>
+            </a:pPr>
+            <a:r>
+              <a:rPr sz="1000" b="0" i="0">
+                <a:solidFill>
+                  <a:srgbClr val="6A6E76"/>
+                </a:solidFill>
+                <a:latin typeface="Segoe UI"/>
+              </a:rPr>
+              <a:t>Paulo E. R. Araujo · 3 · Do sistema ao agente</a:t>
+            </a:r>
+          </a:p>
+        </p:txBody>
+      </p:sp>
+      <p:sp>
+        <p:nvSpPr>
+          <p:cNvPr id="7" name="TextBox 6"/>
+          <p:cNvSpPr txBox="1"/>
+          <p:nvPr/>
+        </p:nvSpPr>
+        <p:spPr>
+          <a:xfrm>
+            <a:off x="10774375" y="6355080"/>
+            <a:ext cx="548640" cy="310896"/>
+          </a:xfrm>
+          <a:prstGeom prst="rect">
+            <a:avLst/>
+          </a:prstGeom>
+          <a:noFill/>
+        </p:spPr>
+        <p:txBody>
+          <a:bodyPr wrap="square" anchor="t">
+            <a:spAutoFit/>
+          </a:bodyPr>
+          <a:lstStyle/>
+          <a:p>
+            <a:pPr algn="r">
+              <a:lnSpc>
+                <a:spcPct val="100000"/>
+              </a:lnSpc>
+              <a:spcBef>
+                <a:spcPts val="0"/>
+              </a:spcBef>
+              <a:spcAft>
+                <a:spcPts val="0"/>
+              </a:spcAft>
+            </a:pPr>
+            <a:r>
+              <a:rPr sz="1000" b="0" i="0">
+                <a:solidFill>
+                  <a:srgbClr val="6A6E76"/>
+                </a:solidFill>
+                <a:latin typeface="Segoe UI"/>
+              </a:rPr>
+              <a:t>25</a:t>
             </a:r>
           </a:p>
         </p:txBody>
@@ -12684,7 +13555,7 @@
                 </a:solidFill>
                 <a:latin typeface="Georgia"/>
               </a:rPr>
-              <a:t>Três portas para o mesmo prédio</a:t>
+              <a:t>Subagents: comprar janela de contexto</a:t>
             </a:r>
           </a:p>
         </p:txBody>
@@ -12735,7 +13606,7 @@
       </p:sp>
       <p:pic>
         <p:nvPicPr>
-          <p:cNvPr id="4" name="Picture 3" descr="tres-produtos.png"/>
+          <p:cNvPr id="4" name="Picture 3" descr="subagente.png"/>
           <p:cNvPicPr>
             <a:picLocks noChangeAspect="1"/>
           </p:cNvPicPr>
@@ -12749,8 +13620,8 @@
         </p:blipFill>
         <p:spPr>
           <a:xfrm>
-            <a:off x="1418084" y="1609343"/>
-            <a:ext cx="9355526" cy="4334256"/>
+            <a:off x="1640003" y="1609343"/>
+            <a:ext cx="8911688" cy="4334256"/>
           </a:xfrm>
           <a:prstGeom prst="rect">
             <a:avLst/>
@@ -12765,8 +13636,8 @@
         </p:nvSpPr>
         <p:spPr>
           <a:xfrm>
-            <a:off x="1418084" y="5998464"/>
-            <a:ext cx="9355526" cy="274320"/>
+            <a:off x="1640003" y="5998464"/>
+            <a:ext cx="8911688" cy="274320"/>
           </a:xfrm>
           <a:prstGeom prst="rect">
             <a:avLst/>
@@ -12797,7 +13668,7 @@
                 </a:solidFill>
                 <a:latin typeface="Segoe UI"/>
               </a:rPr>
-              <a:t>Elaboração própria.</a:t>
+              <a:t>Elaboração própria a partir do simulador de janela de contexto da documentação oficial do Claude Code (set. 2026).</a:t>
             </a:r>
           </a:p>
         </p:txBody>
@@ -12842,7 +13713,7 @@
                 </a:solidFill>
                 <a:latin typeface="Segoe UI"/>
               </a:rPr>
-              <a:t>Paulo E. R. Araujo · 4 · Claude concreto</a:t>
+              <a:t>Paulo E. R. Araujo · 3 · Do sistema ao agente</a:t>
             </a:r>
           </a:p>
         </p:txBody>
@@ -12887,7 +13758,7 @@
                 </a:solidFill>
                 <a:latin typeface="Segoe UI"/>
               </a:rPr>
-              <a:t>25</a:t>
+              <a:t>26</a:t>
             </a:r>
           </a:p>
         </p:txBody>
@@ -12901,6 +13772,370 @@
 </file>
 
 <file path=ppt/slides/slide31.xml><?xml version="1.0" encoding="utf-8"?>
+<p:sld xmlns:a="http://schemas.openxmlformats.org/drawingml/2006/main" xmlns:p="http://schemas.openxmlformats.org/presentationml/2006/main" xmlns:r="http://schemas.openxmlformats.org/officeDocument/2006/relationships">
+  <p:cSld>
+    <p:bg>
+      <p:bgPr>
+        <a:solidFill>
+          <a:srgbClr val="F1EEE7"/>
+        </a:solidFill>
+        <a:effectLst/>
+      </p:bgPr>
+    </p:bg>
+    <p:spTree>
+      <p:nvGrpSpPr>
+        <p:cNvPr id="1" name=""/>
+        <p:cNvGrpSpPr/>
+        <p:nvPr/>
+      </p:nvGrpSpPr>
+      <p:grpSpPr/>
+      <p:sp>
+        <p:nvSpPr>
+          <p:cNvPr id="2" name="Rectangle 1"/>
+          <p:cNvSpPr/>
+          <p:nvPr/>
+        </p:nvSpPr>
+        <p:spPr>
+          <a:xfrm>
+            <a:off x="868680" y="2331720"/>
+            <a:ext cx="1463040" cy="31750"/>
+          </a:xfrm>
+          <a:prstGeom prst="rect">
+            <a:avLst/>
+          </a:prstGeom>
+          <a:solidFill>
+            <a:srgbClr val="BC7A2F"/>
+          </a:solidFill>
+          <a:ln>
+            <a:noFill/>
+          </a:ln>
+          <a:effectLst/>
+        </p:spPr>
+        <p:style>
+          <a:lnRef idx="1">
+            <a:schemeClr val="accent1"/>
+          </a:lnRef>
+          <a:fillRef idx="3">
+            <a:schemeClr val="accent1"/>
+          </a:fillRef>
+          <a:effectRef idx="2">
+            <a:schemeClr val="accent1"/>
+          </a:effectRef>
+          <a:fontRef idx="minor">
+            <a:schemeClr val="lt1"/>
+          </a:fontRef>
+        </p:style>
+        <p:txBody>
+          <a:bodyPr rtlCol="0" anchor="ctr"/>
+          <a:lstStyle/>
+          <a:p>
+            <a:pPr algn="ctr"/>
+          </a:p>
+        </p:txBody>
+      </p:sp>
+      <p:sp>
+        <p:nvSpPr>
+          <p:cNvPr id="3" name="TextBox 2"/>
+          <p:cNvSpPr txBox="1"/>
+          <p:nvPr/>
+        </p:nvSpPr>
+        <p:spPr>
+          <a:xfrm>
+            <a:off x="868680" y="2651760"/>
+            <a:ext cx="10454335" cy="2377440"/>
+          </a:xfrm>
+          <a:prstGeom prst="rect">
+            <a:avLst/>
+          </a:prstGeom>
+          <a:noFill/>
+        </p:spPr>
+        <p:txBody>
+          <a:bodyPr wrap="square" anchor="t">
+            <a:spAutoFit/>
+          </a:bodyPr>
+          <a:lstStyle/>
+          <a:p>
+            <a:pPr algn="l">
+              <a:lnSpc>
+                <a:spcPct val="135000"/>
+              </a:lnSpc>
+              <a:spcBef>
+                <a:spcPts val="0"/>
+              </a:spcBef>
+              <a:spcAft>
+                <a:spcPts val="0"/>
+              </a:spcAft>
+            </a:pPr>
+            <a:r>
+              <a:rPr sz="2500" b="0" i="1">
+                <a:solidFill>
+                  <a:srgbClr val="16181D"/>
+                </a:solidFill>
+                <a:latin typeface="Georgia"/>
+              </a:rPr>
+              <a:t>Contexto é o recurso escasso, e você tem três formas de gastá-lo menos: skill em vez de repetir instrução, material de apoio em vez de colar documentação, subagente em vez de ler dez arquivos no contexto principal.</a:t>
+            </a:r>
+          </a:p>
+          <a:p>
+            <a:pPr>
+              <a:lnSpc>
+                <a:spcPct val="100000"/>
+              </a:lnSpc>
+              <a:spcBef>
+                <a:spcPts val="1800"/>
+              </a:spcBef>
+              <a:spcAft>
+                <a:spcPts val="0"/>
+              </a:spcAft>
+            </a:pPr>
+            <a:r>
+              <a:rPr sz="1300" b="0" i="0">
+                <a:solidFill>
+                  <a:srgbClr val="6A6E76"/>
+                </a:solidFill>
+                <a:latin typeface="Segoe UI"/>
+              </a:rPr>
+              <a:t>Âncora do Bloco 3</a:t>
+            </a:r>
+          </a:p>
+        </p:txBody>
+      </p:sp>
+      <p:sp>
+        <p:nvSpPr>
+          <p:cNvPr id="4" name="TextBox 3"/>
+          <p:cNvSpPr txBox="1"/>
+          <p:nvPr/>
+        </p:nvSpPr>
+        <p:spPr>
+          <a:xfrm>
+            <a:off x="868680" y="6355080"/>
+            <a:ext cx="9905695" cy="310896"/>
+          </a:xfrm>
+          <a:prstGeom prst="rect">
+            <a:avLst/>
+          </a:prstGeom>
+          <a:noFill/>
+        </p:spPr>
+        <p:txBody>
+          <a:bodyPr wrap="square" anchor="t">
+            <a:spAutoFit/>
+          </a:bodyPr>
+          <a:lstStyle/>
+          <a:p>
+            <a:pPr algn="l">
+              <a:lnSpc>
+                <a:spcPct val="100000"/>
+              </a:lnSpc>
+              <a:spcBef>
+                <a:spcPts val="0"/>
+              </a:spcBef>
+              <a:spcAft>
+                <a:spcPts val="0"/>
+              </a:spcAft>
+            </a:pPr>
+            <a:r>
+              <a:rPr sz="1000" b="0" i="0">
+                <a:solidFill>
+                  <a:srgbClr val="6A6E76"/>
+                </a:solidFill>
+                <a:latin typeface="Segoe UI"/>
+              </a:rPr>
+              <a:t>Paulo E. R. Araujo · 3 · Do sistema ao agente</a:t>
+            </a:r>
+          </a:p>
+        </p:txBody>
+      </p:sp>
+      <p:sp>
+        <p:nvSpPr>
+          <p:cNvPr id="5" name="TextBox 4"/>
+          <p:cNvSpPr txBox="1"/>
+          <p:nvPr/>
+        </p:nvSpPr>
+        <p:spPr>
+          <a:xfrm>
+            <a:off x="10774375" y="6355080"/>
+            <a:ext cx="548640" cy="310896"/>
+          </a:xfrm>
+          <a:prstGeom prst="rect">
+            <a:avLst/>
+          </a:prstGeom>
+          <a:noFill/>
+        </p:spPr>
+        <p:txBody>
+          <a:bodyPr wrap="square" anchor="t">
+            <a:spAutoFit/>
+          </a:bodyPr>
+          <a:lstStyle/>
+          <a:p>
+            <a:pPr algn="r">
+              <a:lnSpc>
+                <a:spcPct val="100000"/>
+              </a:lnSpc>
+              <a:spcBef>
+                <a:spcPts val="0"/>
+              </a:spcBef>
+              <a:spcAft>
+                <a:spcPts val="0"/>
+              </a:spcAft>
+            </a:pPr>
+            <a:r>
+              <a:rPr sz="1000" b="0" i="0">
+                <a:solidFill>
+                  <a:srgbClr val="6A6E76"/>
+                </a:solidFill>
+                <a:latin typeface="Segoe UI"/>
+              </a:rPr>
+              <a:t>27</a:t>
+            </a:r>
+          </a:p>
+        </p:txBody>
+      </p:sp>
+    </p:spTree>
+  </p:cSld>
+  <p:clrMapOvr>
+    <a:masterClrMapping/>
+  </p:clrMapOvr>
+</p:sld>
+</file>
+
+<file path=ppt/slides/slide32.xml><?xml version="1.0" encoding="utf-8"?>
+<p:sld xmlns:a="http://schemas.openxmlformats.org/drawingml/2006/main" xmlns:p="http://schemas.openxmlformats.org/presentationml/2006/main" xmlns:r="http://schemas.openxmlformats.org/officeDocument/2006/relationships">
+  <p:cSld>
+    <p:bg>
+      <p:bgPr>
+        <a:solidFill>
+          <a:srgbClr val="1B2A3A"/>
+        </a:solidFill>
+        <a:effectLst/>
+      </p:bgPr>
+    </p:bg>
+    <p:spTree>
+      <p:nvGrpSpPr>
+        <p:cNvPr id="1" name=""/>
+        <p:cNvGrpSpPr/>
+        <p:nvPr/>
+      </p:nvGrpSpPr>
+      <p:grpSpPr/>
+      <p:sp>
+        <p:nvSpPr>
+          <p:cNvPr id="2" name="Rectangle 1"/>
+          <p:cNvSpPr/>
+          <p:nvPr/>
+        </p:nvSpPr>
+        <p:spPr>
+          <a:xfrm>
+            <a:off x="868680" y="2788920"/>
+            <a:ext cx="1463040" cy="31750"/>
+          </a:xfrm>
+          <a:prstGeom prst="rect">
+            <a:avLst/>
+          </a:prstGeom>
+          <a:solidFill>
+            <a:srgbClr val="BC7A2F"/>
+          </a:solidFill>
+          <a:ln>
+            <a:noFill/>
+          </a:ln>
+          <a:effectLst/>
+        </p:spPr>
+        <p:style>
+          <a:lnRef idx="1">
+            <a:schemeClr val="accent1"/>
+          </a:lnRef>
+          <a:fillRef idx="3">
+            <a:schemeClr val="accent1"/>
+          </a:fillRef>
+          <a:effectRef idx="2">
+            <a:schemeClr val="accent1"/>
+          </a:effectRef>
+          <a:fontRef idx="minor">
+            <a:schemeClr val="lt1"/>
+          </a:fontRef>
+        </p:style>
+        <p:txBody>
+          <a:bodyPr rtlCol="0" anchor="ctr"/>
+          <a:lstStyle/>
+          <a:p>
+            <a:pPr algn="ctr"/>
+          </a:p>
+        </p:txBody>
+      </p:sp>
+      <p:sp>
+        <p:nvSpPr>
+          <p:cNvPr id="3" name="TextBox 2"/>
+          <p:cNvSpPr txBox="1"/>
+          <p:nvPr/>
+        </p:nvSpPr>
+        <p:spPr>
+          <a:xfrm>
+            <a:off x="868680" y="3063240"/>
+            <a:ext cx="10454335" cy="1463040"/>
+          </a:xfrm>
+          <a:prstGeom prst="rect">
+            <a:avLst/>
+          </a:prstGeom>
+          <a:noFill/>
+        </p:spPr>
+        <p:txBody>
+          <a:bodyPr wrap="square" anchor="t">
+            <a:spAutoFit/>
+          </a:bodyPr>
+          <a:lstStyle/>
+          <a:p>
+            <a:pPr algn="l">
+              <a:lnSpc>
+                <a:spcPct val="100000"/>
+              </a:lnSpc>
+              <a:spcBef>
+                <a:spcPts val="0"/>
+              </a:spcBef>
+              <a:spcAft>
+                <a:spcPts val="0"/>
+              </a:spcAft>
+            </a:pPr>
+            <a:r>
+              <a:rPr sz="3200" b="0" i="0">
+                <a:solidFill>
+                  <a:srgbClr val="F7F6F2"/>
+                </a:solidFill>
+                <a:latin typeface="Georgia"/>
+              </a:rPr>
+              <a:t>Bloco 4</a:t>
+            </a:r>
+          </a:p>
+          <a:p>
+            <a:pPr>
+              <a:lnSpc>
+                <a:spcPct val="100000"/>
+              </a:lnSpc>
+              <a:spcBef>
+                <a:spcPts val="1000"/>
+              </a:spcBef>
+              <a:spcAft>
+                <a:spcPts val="0"/>
+              </a:spcAft>
+            </a:pPr>
+            <a:r>
+              <a:rPr sz="1600" b="0" i="0">
+                <a:solidFill>
+                  <a:srgbClr val="7FA8C9"/>
+                </a:solidFill>
+                <a:latin typeface="Segoe UI"/>
+              </a:rPr>
+              <a:t>Claude concreto: três interfaces, uma base</a:t>
+            </a:r>
+          </a:p>
+        </p:txBody>
+      </p:sp>
+    </p:spTree>
+  </p:cSld>
+  <p:clrMapOvr>
+    <a:masterClrMapping/>
+  </p:clrMapOvr>
+</p:sld>
+</file>
+
+<file path=ppt/slides/slide33.xml><?xml version="1.0" encoding="utf-8"?>
 <p:sld xmlns:a="http://schemas.openxmlformats.org/drawingml/2006/main" xmlns:p="http://schemas.openxmlformats.org/presentationml/2006/main" xmlns:r="http://schemas.openxmlformats.org/officeDocument/2006/relationships">
   <p:cSld>
     <p:bg>
@@ -12958,7 +14193,7 @@
                 </a:solidFill>
                 <a:latin typeface="Georgia"/>
               </a:rPr>
-              <a:t>Onde cada conceito aparece — Chat e Cowork</a:t>
+              <a:t>Três portas para o mesmo prédio</a:t>
             </a:r>
           </a:p>
         </p:txBody>
@@ -13007,16 +14242,40 @@
           </a:p>
         </p:txBody>
       </p:sp>
-      <p:sp>
-        <p:nvSpPr>
-          <p:cNvPr id="4" name="TextBox 3"/>
+      <p:pic>
+        <p:nvPicPr>
+          <p:cNvPr id="4" name="Picture 3" descr="tres-produtos.png"/>
+          <p:cNvPicPr>
+            <a:picLocks noChangeAspect="1"/>
+          </p:cNvPicPr>
+          <p:nvPr/>
+        </p:nvPicPr>
+        <p:blipFill>
+          <a:blip r:embed="rId2"/>
+          <a:stretch>
+            <a:fillRect/>
+          </a:stretch>
+        </p:blipFill>
+        <p:spPr>
+          <a:xfrm>
+            <a:off x="1418084" y="1609343"/>
+            <a:ext cx="9355526" cy="4334256"/>
+          </a:xfrm>
+          <a:prstGeom prst="rect">
+            <a:avLst/>
+          </a:prstGeom>
+        </p:spPr>
+      </p:pic>
+      <p:sp>
+        <p:nvSpPr>
+          <p:cNvPr id="5" name="TextBox 4"/>
           <p:cNvSpPr txBox="1"/>
           <p:nvPr/>
         </p:nvSpPr>
         <p:spPr>
           <a:xfrm>
-            <a:off x="868680" y="1609343"/>
-            <a:ext cx="10454335" cy="4562856"/>
+            <a:off x="1418084" y="5998464"/>
+            <a:ext cx="9355526" cy="274320"/>
           </a:xfrm>
           <a:prstGeom prst="rect">
             <a:avLst/>
@@ -13031,176 +14290,30 @@
           <a:p>
             <a:pPr algn="l">
               <a:lnSpc>
-                <a:spcPct val="122000"/>
-              </a:lnSpc>
-              <a:spcBef>
-                <a:spcPts val="0"/>
-              </a:spcBef>
-              <a:spcAft>
-                <a:spcPts val="0"/>
-              </a:spcAft>
-            </a:pPr>
-            <a:r>
-              <a:rPr sz="1900" b="0" i="0">
-                <a:solidFill>
-                  <a:srgbClr val="16181D"/>
-                </a:solidFill>
-                <a:latin typeface="Segoe UI"/>
-              </a:rPr>
-              <a:t>—  Os dois são harnesses: mesma base, ambientes diferentes</a:t>
-            </a:r>
-          </a:p>
-          <a:p>
-            <a:pPr>
-              <a:lnSpc>
-                <a:spcPct val="122000"/>
-              </a:lnSpc>
-              <a:spcBef>
-                <a:spcPts val="1300"/>
-              </a:spcBef>
-              <a:spcAft>
-                <a:spcPts val="0"/>
-              </a:spcAft>
-            </a:pPr>
-            <a:r>
-              <a:rPr sz="1900" b="0" i="0">
-                <a:solidFill>
-                  <a:srgbClr val="16181D"/>
-                </a:solidFill>
-                <a:latin typeface="Segoe UI"/>
-              </a:rPr>
-              <a:t>—  </a:t>
-            </a:r>
-            <a:r>
-              <a:rPr sz="1900" b="1" i="0">
-                <a:solidFill>
-                  <a:srgbClr val="16181D"/>
-                </a:solidFill>
-                <a:latin typeface="Segoe UI"/>
-              </a:rPr>
-              <a:t>Chat</a:t>
-            </a:r>
-            <a:r>
-              <a:rPr sz="1900" b="0" i="0">
-                <a:solidFill>
-                  <a:srgbClr val="16181D"/>
-                </a:solidFill>
-                <a:latin typeface="Segoe UI"/>
-              </a:rPr>
-              <a:t> — a porta de entrada do pesquisador</a:t>
-            </a:r>
-          </a:p>
-          <a:p>
-            <a:pPr lvl="1">
-              <a:lnSpc>
-                <a:spcPct val="122000"/>
-              </a:lnSpc>
-              <a:spcBef>
-                <a:spcPts val="500"/>
-              </a:spcBef>
-              <a:spcAft>
-                <a:spcPts val="0"/>
-              </a:spcAft>
-            </a:pPr>
-            <a:r>
-              <a:rPr sz="1600" b="0" i="0">
+                <a:spcPct val="100000"/>
+              </a:lnSpc>
+              <a:spcBef>
+                <a:spcPts val="0"/>
+              </a:spcBef>
+              <a:spcAft>
+                <a:spcPts val="0"/>
+              </a:spcAft>
+            </a:pPr>
+            <a:r>
+              <a:rPr sz="1200" b="0" i="1">
                 <a:solidFill>
                   <a:srgbClr val="6A6E76"/>
                 </a:solidFill>
                 <a:latin typeface="Segoe UI"/>
               </a:rPr>
-              <a:t>·  Projects e memória fazem o papel de contexto persistente</a:t>
-            </a:r>
-          </a:p>
-          <a:p>
-            <a:pPr lvl="1">
-              <a:lnSpc>
-                <a:spcPct val="122000"/>
-              </a:lnSpc>
-              <a:spcBef>
-                <a:spcPts val="500"/>
-              </a:spcBef>
-              <a:spcAft>
-                <a:spcPts val="0"/>
-              </a:spcAft>
-            </a:pPr>
-            <a:r>
-              <a:rPr sz="1600" b="0" i="0">
-                <a:solidFill>
-                  <a:srgbClr val="6A6E76"/>
-                </a:solidFill>
-                <a:latin typeface="Segoe UI"/>
-              </a:rPr>
-              <a:t>·  connectors são tool use com outra roupa</a:t>
-            </a:r>
-          </a:p>
-          <a:p>
-            <a:pPr>
-              <a:lnSpc>
-                <a:spcPct val="122000"/>
-              </a:lnSpc>
-              <a:spcBef>
-                <a:spcPts val="1300"/>
-              </a:spcBef>
-              <a:spcAft>
-                <a:spcPts val="0"/>
-              </a:spcAft>
-            </a:pPr>
-            <a:r>
-              <a:rPr sz="1900" b="0" i="0">
-                <a:solidFill>
-                  <a:srgbClr val="16181D"/>
-                </a:solidFill>
-                <a:latin typeface="Segoe UI"/>
-              </a:rPr>
-              <a:t>—  </a:t>
-            </a:r>
-            <a:r>
-              <a:rPr sz="1900" b="1" i="0">
-                <a:solidFill>
-                  <a:srgbClr val="16181D"/>
-                </a:solidFill>
-                <a:latin typeface="Segoe UI"/>
-              </a:rPr>
-              <a:t>Cowork</a:t>
-            </a:r>
-            <a:r>
-              <a:rPr sz="1900" b="0" i="0">
-                <a:solidFill>
-                  <a:srgbClr val="16181D"/>
-                </a:solidFill>
-                <a:latin typeface="Segoe UI"/>
-              </a:rPr>
-              <a:t> — trabalho delegado sobre arquivos e tarefas</a:t>
-            </a:r>
-          </a:p>
-          <a:p>
-            <a:pPr lvl="1">
-              <a:lnSpc>
-                <a:spcPct val="122000"/>
-              </a:lnSpc>
-              <a:spcBef>
-                <a:spcPts val="500"/>
-              </a:spcBef>
-              <a:spcAft>
-                <a:spcPts val="0"/>
-              </a:spcAft>
-            </a:pPr>
-            <a:r>
-              <a:rPr sz="1600" b="0" i="0">
-                <a:solidFill>
-                  <a:srgbClr val="6A6E76"/>
-                </a:solidFill>
-                <a:latin typeface="Segoe UI"/>
-              </a:rPr>
-              <a:t>·  dispatch e times de agentes são o orquestrador com interface</a:t>
-            </a:r>
-          </a:p>
-        </p:txBody>
-      </p:sp>
-      <p:sp>
-        <p:nvSpPr>
-          <p:cNvPr id="5" name="TextBox 4"/>
+              <a:t>Elaboração própria.</a:t>
+            </a:r>
+          </a:p>
+        </p:txBody>
+      </p:sp>
+      <p:sp>
+        <p:nvSpPr>
+          <p:cNvPr id="6" name="TextBox 5"/>
           <p:cNvSpPr txBox="1"/>
           <p:nvPr/>
         </p:nvSpPr>
@@ -13245,7 +14358,7 @@
       </p:sp>
       <p:sp>
         <p:nvSpPr>
-          <p:cNvPr id="6" name="TextBox 5"/>
+          <p:cNvPr id="7" name="TextBox 6"/>
           <p:cNvSpPr txBox="1"/>
           <p:nvPr/>
         </p:nvSpPr>
@@ -13283,576 +14396,7 @@
                 </a:solidFill>
                 <a:latin typeface="Segoe UI"/>
               </a:rPr>
-              <a:t>26</a:t>
-            </a:r>
-          </a:p>
-        </p:txBody>
-      </p:sp>
-    </p:spTree>
-  </p:cSld>
-  <p:clrMapOvr>
-    <a:masterClrMapping/>
-  </p:clrMapOvr>
-</p:sld>
-</file>
-
-<file path=ppt/slides/slide32.xml><?xml version="1.0" encoding="utf-8"?>
-<p:sld xmlns:a="http://schemas.openxmlformats.org/drawingml/2006/main" xmlns:p="http://schemas.openxmlformats.org/presentationml/2006/main" xmlns:r="http://schemas.openxmlformats.org/officeDocument/2006/relationships">
-  <p:cSld>
-    <p:bg>
-      <p:bgPr>
-        <a:solidFill>
-          <a:srgbClr val="FBFAF7"/>
-        </a:solidFill>
-        <a:effectLst/>
-      </p:bgPr>
-    </p:bg>
-    <p:spTree>
-      <p:nvGrpSpPr>
-        <p:cNvPr id="1" name=""/>
-        <p:cNvGrpSpPr/>
-        <p:nvPr/>
-      </p:nvGrpSpPr>
-      <p:grpSpPr/>
-      <p:sp>
-        <p:nvSpPr>
-          <p:cNvPr id="2" name="TextBox 1"/>
-          <p:cNvSpPr txBox="1"/>
-          <p:nvPr/>
-        </p:nvSpPr>
-        <p:spPr>
-          <a:xfrm>
-            <a:off x="868680" y="566928"/>
-            <a:ext cx="10454335" cy="822960"/>
-          </a:xfrm>
-          <a:prstGeom prst="rect">
-            <a:avLst/>
-          </a:prstGeom>
-          <a:noFill/>
-        </p:spPr>
-        <p:txBody>
-          <a:bodyPr wrap="square" anchor="t">
-            <a:spAutoFit/>
-          </a:bodyPr>
-          <a:lstStyle/>
-          <a:p>
-            <a:pPr algn="l">
-              <a:lnSpc>
-                <a:spcPct val="100000"/>
-              </a:lnSpc>
-              <a:spcBef>
-                <a:spcPts val="0"/>
-              </a:spcBef>
-              <a:spcAft>
-                <a:spcPts val="0"/>
-              </a:spcAft>
-            </a:pPr>
-            <a:r>
-              <a:rPr sz="3000" b="0" i="0">
-                <a:solidFill>
-                  <a:srgbClr val="16181D"/>
-                </a:solidFill>
-                <a:latin typeface="Georgia"/>
-              </a:rPr>
-              <a:t>Onde cada conceito aparece — Code</a:t>
-            </a:r>
-          </a:p>
-        </p:txBody>
-      </p:sp>
-      <p:sp>
-        <p:nvSpPr>
-          <p:cNvPr id="3" name="Rectangle 2"/>
-          <p:cNvSpPr/>
-          <p:nvPr/>
-        </p:nvSpPr>
-        <p:spPr>
-          <a:xfrm>
-            <a:off x="868680" y="1335024"/>
-            <a:ext cx="10454335" cy="12700"/>
-          </a:xfrm>
-          <a:prstGeom prst="rect">
-            <a:avLst/>
-          </a:prstGeom>
-          <a:solidFill>
-            <a:srgbClr val="D8D4CB"/>
-          </a:solidFill>
-          <a:ln>
-            <a:noFill/>
-          </a:ln>
-          <a:effectLst/>
-        </p:spPr>
-        <p:style>
-          <a:lnRef idx="1">
-            <a:schemeClr val="accent1"/>
-          </a:lnRef>
-          <a:fillRef idx="3">
-            <a:schemeClr val="accent1"/>
-          </a:fillRef>
-          <a:effectRef idx="2">
-            <a:schemeClr val="accent1"/>
-          </a:effectRef>
-          <a:fontRef idx="minor">
-            <a:schemeClr val="lt1"/>
-          </a:fontRef>
-        </p:style>
-        <p:txBody>
-          <a:bodyPr rtlCol="0" anchor="ctr"/>
-          <a:lstStyle/>
-          <a:p>
-            <a:pPr algn="ctr"/>
-          </a:p>
-        </p:txBody>
-      </p:sp>
-      <p:sp>
-        <p:nvSpPr>
-          <p:cNvPr id="4" name="TextBox 3"/>
-          <p:cNvSpPr txBox="1"/>
-          <p:nvPr/>
-        </p:nvSpPr>
-        <p:spPr>
-          <a:xfrm>
-            <a:off x="868680" y="1609343"/>
-            <a:ext cx="10454335" cy="4562856"/>
-          </a:xfrm>
-          <a:prstGeom prst="rect">
-            <a:avLst/>
-          </a:prstGeom>
-          <a:noFill/>
-        </p:spPr>
-        <p:txBody>
-          <a:bodyPr wrap="square" anchor="t">
-            <a:spAutoFit/>
-          </a:bodyPr>
-          <a:lstStyle/>
-          <a:p>
-            <a:pPr algn="l">
-              <a:lnSpc>
-                <a:spcPct val="122000"/>
-              </a:lnSpc>
-              <a:spcBef>
-                <a:spcPts val="0"/>
-              </a:spcBef>
-              <a:spcAft>
-                <a:spcPts val="0"/>
-              </a:spcAft>
-            </a:pPr>
-            <a:r>
-              <a:rPr sz="1900" b="0" i="0">
-                <a:solidFill>
-                  <a:srgbClr val="16181D"/>
-                </a:solidFill>
-                <a:latin typeface="Segoe UI"/>
-              </a:rPr>
-              <a:t>—  </a:t>
-            </a:r>
-            <a:r>
-              <a:rPr sz="1900" b="1" i="0">
-                <a:solidFill>
-                  <a:srgbClr val="16181D"/>
-                </a:solidFill>
-                <a:latin typeface="Segoe UI"/>
-              </a:rPr>
-              <a:t>Code</a:t>
-            </a:r>
-            <a:r>
-              <a:rPr sz="1900" b="0" i="0">
-                <a:solidFill>
-                  <a:srgbClr val="16181D"/>
-                </a:solidFill>
-                <a:latin typeface="Segoe UI"/>
-              </a:rPr>
-              <a:t> — o agente dentro do repositório</a:t>
-            </a:r>
-          </a:p>
-          <a:p>
-            <a:pPr lvl="1">
-              <a:lnSpc>
-                <a:spcPct val="122000"/>
-              </a:lnSpc>
-              <a:spcBef>
-                <a:spcPts val="500"/>
-              </a:spcBef>
-              <a:spcAft>
-                <a:spcPts val="0"/>
-              </a:spcAft>
-            </a:pPr>
-            <a:r>
-              <a:rPr sz="1600" b="0" i="0">
-                <a:solidFill>
-                  <a:srgbClr val="6A6E76"/>
-                </a:solidFill>
-                <a:latin typeface="Segoe UI"/>
-              </a:rPr>
-              <a:t>·  </a:t>
-            </a:r>
-            <a:r>
-              <a:rPr sz="1472" b="0" i="0">
-                <a:solidFill>
-                  <a:srgbClr val="6A6E76"/>
-                </a:solidFill>
-                <a:latin typeface="Consolas"/>
-              </a:rPr>
-              <a:t>CLAUDE.md</a:t>
-            </a:r>
-            <a:r>
-              <a:rPr sz="1600" b="0" i="0">
-                <a:solidFill>
-                  <a:srgbClr val="6A6E76"/>
-                </a:solidFill>
-                <a:latin typeface="Segoe UI"/>
-              </a:rPr>
-              <a:t>, skills, material de apoio e subagents</a:t>
-            </a:r>
-          </a:p>
-          <a:p>
-            <a:pPr lvl="1">
-              <a:lnSpc>
-                <a:spcPct val="122000"/>
-              </a:lnSpc>
-              <a:spcBef>
-                <a:spcPts val="500"/>
-              </a:spcBef>
-              <a:spcAft>
-                <a:spcPts val="0"/>
-              </a:spcAft>
-            </a:pPr>
-            <a:r>
-              <a:rPr sz="1600" b="0" i="0">
-                <a:solidFill>
-                  <a:srgbClr val="6A6E76"/>
-                </a:solidFill>
-                <a:latin typeface="Segoe UI"/>
-              </a:rPr>
-              <a:t>·  quatro superfícies: terminal, IDE, aplicativo de desktop e web</a:t>
-            </a:r>
-          </a:p>
-          <a:p>
-            <a:pPr>
-              <a:lnSpc>
-                <a:spcPct val="122000"/>
-              </a:lnSpc>
-              <a:spcBef>
-                <a:spcPts val="1300"/>
-              </a:spcBef>
-              <a:spcAft>
-                <a:spcPts val="0"/>
-              </a:spcAft>
-            </a:pPr>
-            <a:r>
-              <a:rPr sz="1900" b="0" i="0">
-                <a:solidFill>
-                  <a:srgbClr val="16181D"/>
-                </a:solidFill>
-                <a:latin typeface="Segoe UI"/>
-              </a:rPr>
-              <a:t>—  </a:t>
-            </a:r>
-            <a:r>
-              <a:rPr sz="1900" b="1" i="0">
-                <a:solidFill>
-                  <a:srgbClr val="16181D"/>
-                </a:solidFill>
-                <a:latin typeface="Segoe UI"/>
-              </a:rPr>
-              <a:t>Hooks</a:t>
-            </a:r>
-            <a:r>
-              <a:rPr sz="1900" b="0" i="0">
-                <a:solidFill>
-                  <a:srgbClr val="16181D"/>
-                </a:solidFill>
-                <a:latin typeface="Segoe UI"/>
-              </a:rPr>
-              <a:t> — comando determinístico em torno de um núcleo estocástico</a:t>
-            </a:r>
-          </a:p>
-          <a:p>
-            <a:pPr lvl="1">
-              <a:lnSpc>
-                <a:spcPct val="122000"/>
-              </a:lnSpc>
-              <a:spcBef>
-                <a:spcPts val="500"/>
-              </a:spcBef>
-              <a:spcAft>
-                <a:spcPts val="0"/>
-              </a:spcAft>
-            </a:pPr>
-            <a:r>
-              <a:rPr sz="1600" b="0" i="0">
-                <a:solidFill>
-                  <a:srgbClr val="6A6E76"/>
-                </a:solidFill>
-                <a:latin typeface="Segoe UI"/>
-              </a:rPr>
-              <a:t>·  é a ponte para reprodutibilidade, que volta no próximo bloco</a:t>
-            </a:r>
-          </a:p>
-          <a:p>
-            <a:pPr>
-              <a:lnSpc>
-                <a:spcPct val="122000"/>
-              </a:lnSpc>
-              <a:spcBef>
-                <a:spcPts val="1300"/>
-              </a:spcBef>
-              <a:spcAft>
-                <a:spcPts val="0"/>
-              </a:spcAft>
-            </a:pPr>
-            <a:r>
-              <a:rPr sz="1900" b="0" i="0">
-                <a:solidFill>
-                  <a:srgbClr val="16181D"/>
-                </a:solidFill>
-                <a:latin typeface="Segoe UI"/>
-              </a:rPr>
-              <a:t>—  </a:t>
-            </a:r>
-            <a:r>
-              <a:rPr sz="1900" b="1" i="0">
-                <a:solidFill>
-                  <a:srgbClr val="16181D"/>
-                </a:solidFill>
-                <a:latin typeface="Segoe UI"/>
-              </a:rPr>
-              <a:t>Checkpointing</a:t>
-            </a:r>
-            <a:r>
-              <a:rPr sz="1900" b="0" i="0">
-                <a:solidFill>
-                  <a:srgbClr val="16181D"/>
-                </a:solidFill>
-                <a:latin typeface="Segoe UI"/>
-              </a:rPr>
-              <a:t> — desfazer o que o agente fez</a:t>
-            </a:r>
-          </a:p>
-        </p:txBody>
-      </p:sp>
-      <p:sp>
-        <p:nvSpPr>
-          <p:cNvPr id="5" name="TextBox 4"/>
-          <p:cNvSpPr txBox="1"/>
-          <p:nvPr/>
-        </p:nvSpPr>
-        <p:spPr>
-          <a:xfrm>
-            <a:off x="868680" y="6355080"/>
-            <a:ext cx="9905695" cy="310896"/>
-          </a:xfrm>
-          <a:prstGeom prst="rect">
-            <a:avLst/>
-          </a:prstGeom>
-          <a:noFill/>
-        </p:spPr>
-        <p:txBody>
-          <a:bodyPr wrap="square" anchor="t">
-            <a:spAutoFit/>
-          </a:bodyPr>
-          <a:lstStyle/>
-          <a:p>
-            <a:pPr algn="l">
-              <a:lnSpc>
-                <a:spcPct val="100000"/>
-              </a:lnSpc>
-              <a:spcBef>
-                <a:spcPts val="0"/>
-              </a:spcBef>
-              <a:spcAft>
-                <a:spcPts val="0"/>
-              </a:spcAft>
-            </a:pPr>
-            <a:r>
-              <a:rPr sz="1000" b="0" i="0">
-                <a:solidFill>
-                  <a:srgbClr val="6A6E76"/>
-                </a:solidFill>
-                <a:latin typeface="Segoe UI"/>
-              </a:rPr>
-              <a:t>Paulo E. R. Araujo · 4 · Claude concreto</a:t>
-            </a:r>
-          </a:p>
-        </p:txBody>
-      </p:sp>
-      <p:sp>
-        <p:nvSpPr>
-          <p:cNvPr id="6" name="TextBox 5"/>
-          <p:cNvSpPr txBox="1"/>
-          <p:nvPr/>
-        </p:nvSpPr>
-        <p:spPr>
-          <a:xfrm>
-            <a:off x="10774375" y="6355080"/>
-            <a:ext cx="548640" cy="310896"/>
-          </a:xfrm>
-          <a:prstGeom prst="rect">
-            <a:avLst/>
-          </a:prstGeom>
-          <a:noFill/>
-        </p:spPr>
-        <p:txBody>
-          <a:bodyPr wrap="square" anchor="t">
-            <a:spAutoFit/>
-          </a:bodyPr>
-          <a:lstStyle/>
-          <a:p>
-            <a:pPr algn="r">
-              <a:lnSpc>
-                <a:spcPct val="100000"/>
-              </a:lnSpc>
-              <a:spcBef>
-                <a:spcPts val="0"/>
-              </a:spcBef>
-              <a:spcAft>
-                <a:spcPts val="0"/>
-              </a:spcAft>
-            </a:pPr>
-            <a:r>
-              <a:rPr sz="1000" b="0" i="0">
-                <a:solidFill>
-                  <a:srgbClr val="6A6E76"/>
-                </a:solidFill>
-                <a:latin typeface="Segoe UI"/>
-              </a:rPr>
-              <a:t>27</a:t>
-            </a:r>
-          </a:p>
-        </p:txBody>
-      </p:sp>
-    </p:spTree>
-  </p:cSld>
-  <p:clrMapOvr>
-    <a:masterClrMapping/>
-  </p:clrMapOvr>
-</p:sld>
-</file>
-
-<file path=ppt/slides/slide33.xml><?xml version="1.0" encoding="utf-8"?>
-<p:sld xmlns:a="http://schemas.openxmlformats.org/drawingml/2006/main" xmlns:p="http://schemas.openxmlformats.org/presentationml/2006/main" xmlns:r="http://schemas.openxmlformats.org/officeDocument/2006/relationships">
-  <p:cSld>
-    <p:bg>
-      <p:bgPr>
-        <a:solidFill>
-          <a:srgbClr val="1B2A3A"/>
-        </a:solidFill>
-        <a:effectLst/>
-      </p:bgPr>
-    </p:bg>
-    <p:spTree>
-      <p:nvGrpSpPr>
-        <p:cNvPr id="1" name=""/>
-        <p:cNvGrpSpPr/>
-        <p:nvPr/>
-      </p:nvGrpSpPr>
-      <p:grpSpPr/>
-      <p:sp>
-        <p:nvSpPr>
-          <p:cNvPr id="2" name="Rectangle 1"/>
-          <p:cNvSpPr/>
-          <p:nvPr/>
-        </p:nvSpPr>
-        <p:spPr>
-          <a:xfrm>
-            <a:off x="868680" y="2788920"/>
-            <a:ext cx="1463040" cy="31750"/>
-          </a:xfrm>
-          <a:prstGeom prst="rect">
-            <a:avLst/>
-          </a:prstGeom>
-          <a:solidFill>
-            <a:srgbClr val="BC7A2F"/>
-          </a:solidFill>
-          <a:ln>
-            <a:noFill/>
-          </a:ln>
-          <a:effectLst/>
-        </p:spPr>
-        <p:style>
-          <a:lnRef idx="1">
-            <a:schemeClr val="accent1"/>
-          </a:lnRef>
-          <a:fillRef idx="3">
-            <a:schemeClr val="accent1"/>
-          </a:fillRef>
-          <a:effectRef idx="2">
-            <a:schemeClr val="accent1"/>
-          </a:effectRef>
-          <a:fontRef idx="minor">
-            <a:schemeClr val="lt1"/>
-          </a:fontRef>
-        </p:style>
-        <p:txBody>
-          <a:bodyPr rtlCol="0" anchor="ctr"/>
-          <a:lstStyle/>
-          <a:p>
-            <a:pPr algn="ctr"/>
-          </a:p>
-        </p:txBody>
-      </p:sp>
-      <p:sp>
-        <p:nvSpPr>
-          <p:cNvPr id="3" name="TextBox 2"/>
-          <p:cNvSpPr txBox="1"/>
-          <p:nvPr/>
-        </p:nvSpPr>
-        <p:spPr>
-          <a:xfrm>
-            <a:off x="868680" y="3063240"/>
-            <a:ext cx="10454335" cy="1463040"/>
-          </a:xfrm>
-          <a:prstGeom prst="rect">
-            <a:avLst/>
-          </a:prstGeom>
-          <a:noFill/>
-        </p:spPr>
-        <p:txBody>
-          <a:bodyPr wrap="square" anchor="t">
-            <a:spAutoFit/>
-          </a:bodyPr>
-          <a:lstStyle/>
-          <a:p>
-            <a:pPr algn="l">
-              <a:lnSpc>
-                <a:spcPct val="100000"/>
-              </a:lnSpc>
-              <a:spcBef>
-                <a:spcPts val="0"/>
-              </a:spcBef>
-              <a:spcAft>
-                <a:spcPts val="0"/>
-              </a:spcAft>
-            </a:pPr>
-            <a:r>
-              <a:rPr sz="3200" b="0" i="0">
-                <a:solidFill>
-                  <a:srgbClr val="F7F6F2"/>
-                </a:solidFill>
-                <a:latin typeface="Georgia"/>
-              </a:rPr>
-              <a:t>Bloco 5</a:t>
-            </a:r>
-          </a:p>
-          <a:p>
-            <a:pPr>
-              <a:lnSpc>
-                <a:spcPct val="100000"/>
-              </a:lnSpc>
-              <a:spcBef>
-                <a:spcPts val="1000"/>
-              </a:spcBef>
-              <a:spcAft>
-                <a:spcPts val="0"/>
-              </a:spcAft>
-            </a:pPr>
-            <a:r>
-              <a:rPr sz="1600" b="0" i="0">
-                <a:solidFill>
-                  <a:srgbClr val="7FA8C9"/>
-                </a:solidFill>
-                <a:latin typeface="Segoe UI"/>
-              </a:rPr>
-              <a:t>Aplicação em pesquisa em computação</a:t>
+              <a:t>28</a:t>
             </a:r>
           </a:p>
         </p:txBody>
@@ -13923,7 +14467,7 @@
                 </a:solidFill>
                 <a:latin typeface="Georgia"/>
               </a:rPr>
-              <a:t>Quatro tipos de trabalho, não quatro domínios</a:t>
+              <a:t>Onde cada conceito aparece — Chat e Cowork</a:t>
             </a:r>
           </a:p>
         </p:txBody>
@@ -14012,6 +14556,28 @@
                 </a:solidFill>
                 <a:latin typeface="Segoe UI"/>
               </a:rPr>
+              <a:t>—  Os dois são harnesses: mesma base, ambientes diferentes</a:t>
+            </a:r>
+          </a:p>
+          <a:p>
+            <a:pPr>
+              <a:lnSpc>
+                <a:spcPct val="122000"/>
+              </a:lnSpc>
+              <a:spcBef>
+                <a:spcPts val="1300"/>
+              </a:spcBef>
+              <a:spcAft>
+                <a:spcPts val="0"/>
+              </a:spcAft>
+            </a:pPr>
+            <a:r>
+              <a:rPr sz="1900" b="0" i="0">
+                <a:solidFill>
+                  <a:srgbClr val="16181D"/>
+                </a:solidFill>
+                <a:latin typeface="Segoe UI"/>
+              </a:rPr>
               <a:t>—  </a:t>
             </a:r>
             <a:r>
@@ -14021,7 +14587,16 @@
                 </a:solidFill>
                 <a:latin typeface="Segoe UI"/>
               </a:rPr>
-              <a:t>Entender artefato herdado</a:t>
+              <a:t>Chat</a:t>
+            </a:r>
+            <a:r>
+              <a:rPr sz="1900" b="0" i="0">
+                <a:solidFill>
+                  <a:srgbClr val="16181D"/>
+                </a:solidFill>
+                <a:latin typeface="Segoe UI"/>
+              </a:rPr>
+              <a:t> — a porta de entrada do pesquisador</a:t>
             </a:r>
           </a:p>
           <a:p>
@@ -14043,7 +14618,7 @@
                 </a:solidFill>
                 <a:latin typeface="Segoe UI"/>
               </a:rPr>
-              <a:t>·  o simulador que o aluno anterior deixou, um pipeline, um protótipo</a:t>
+              <a:t>·  Projects e memória fazem o papel de contexto persistente</a:t>
             </a:r>
           </a:p>
           <a:p>
@@ -14065,7 +14640,7 @@
                 </a:solidFill>
                 <a:latin typeface="Segoe UI"/>
               </a:rPr>
-              <a:t>·  o problema é sempre o mesmo: código sem ninguém para explicá-lo</a:t>
+              <a:t>·  connectors são tool use com outra roupa</a:t>
             </a:r>
           </a:p>
           <a:p>
@@ -14096,7 +14671,16 @@
                 </a:solidFill>
                 <a:latin typeface="Segoe UI"/>
               </a:rPr>
-              <a:t>Analisar resultado experimental</a:t>
+              <a:t>Cowork</a:t>
+            </a:r>
+            <a:r>
+              <a:rPr sz="1900" b="0" i="0">
+                <a:solidFill>
+                  <a:srgbClr val="16181D"/>
+                </a:solidFill>
+                <a:latin typeface="Segoe UI"/>
+              </a:rPr>
+              <a:t> — trabalho delegado sobre arquivos e tarefas</a:t>
             </a:r>
           </a:p>
           <a:p>
@@ -14118,29 +14702,7 @@
                 </a:solidFill>
                 <a:latin typeface="Segoe UI"/>
               </a:rPr>
-              <a:t>·  saída de simulação, log, captura, planilha de coleta, questionário</a:t>
-            </a:r>
-          </a:p>
-          <a:p>
-            <a:pPr lvl="1">
-              <a:lnSpc>
-                <a:spcPct val="122000"/>
-              </a:lnSpc>
-              <a:spcBef>
-                <a:spcPts val="500"/>
-              </a:spcBef>
-              <a:spcAft>
-                <a:spcPts val="0"/>
-              </a:spcAft>
-            </a:pPr>
-            <a:r>
-              <a:rPr sz="1600" b="0" i="0">
-                <a:solidFill>
-                  <a:srgbClr val="6A6E76"/>
-                </a:solidFill>
-                <a:latin typeface="Segoe UI"/>
-              </a:rPr>
-              <a:t>·  o problema é sempre o mesmo: volume acima da leitura manual</a:t>
+              <a:t>·  dispatch e times de agentes são o orquestrador com interface</a:t>
             </a:r>
           </a:p>
         </p:txBody>
@@ -14185,7 +14747,7 @@
                 </a:solidFill>
                 <a:latin typeface="Segoe UI"/>
               </a:rPr>
-              <a:t>Paulo E. R. Araujo · 5 · Aplicação em pesquisa</a:t>
+              <a:t>Paulo E. R. Araujo · 4 · Claude concreto</a:t>
             </a:r>
           </a:p>
         </p:txBody>
@@ -14230,7 +14792,7 @@
                 </a:solidFill>
                 <a:latin typeface="Segoe UI"/>
               </a:rPr>
-              <a:t>28</a:t>
+              <a:t>29</a:t>
             </a:r>
           </a:p>
         </p:txBody>
@@ -14301,7 +14863,7 @@
                 </a:solidFill>
                 <a:latin typeface="Georgia"/>
               </a:rPr>
-              <a:t>Quatro tipos de trabalho, não quatro domínios</a:t>
+              <a:t>Onde cada conceito aparece — Code</a:t>
             </a:r>
           </a:p>
         </p:txBody>
@@ -14399,7 +14961,16 @@
                 </a:solidFill>
                 <a:latin typeface="Segoe UI"/>
               </a:rPr>
-              <a:t>Levantar e organizar literatura</a:t>
+              <a:t>Code</a:t>
+            </a:r>
+            <a:r>
+              <a:rPr sz="1900" b="0" i="0">
+                <a:solidFill>
+                  <a:srgbClr val="16181D"/>
+                </a:solidFill>
+                <a:latin typeface="Segoe UI"/>
+              </a:rPr>
+              <a:t> — o agente dentro do repositório</a:t>
             </a:r>
           </a:p>
           <a:p>
@@ -14421,7 +14992,25 @@
                 </a:solidFill>
                 <a:latin typeface="Segoe UI"/>
               </a:rPr>
-              <a:t>·  triagem, extração de critérios, tabela comparativa de revisão sistemática</a:t>
+              <a:t>·  </a:t>
+            </a:r>
+            <a:r>
+              <a:rPr sz="1472" b="0" i="0">
+                <a:solidFill>
+                  <a:srgbClr val="6A6E76"/>
+                </a:solidFill>
+                <a:latin typeface="Consolas"/>
+              </a:rPr>
+              <a:t>CLAUDE.md</a:t>
+            </a:r>
+            <a:r>
+              <a:rPr sz="1600" b="0" i="0">
+                <a:solidFill>
+                  <a:srgbClr val="6A6E76"/>
+                </a:solidFill>
+                <a:latin typeface="Segoe UI"/>
+              </a:rPr>
+              <a:t>, skills, material de apoio e subagents</a:t>
             </a:r>
           </a:p>
           <a:p>
@@ -14443,7 +15032,7 @@
                 </a:solidFill>
                 <a:latin typeface="Segoe UI"/>
               </a:rPr>
-              <a:t>·  ressalva: o modelo não é fonte bibliográfica, e sim ferramenta de organização sobre o que você forneceu</a:t>
+              <a:t>·  quatro superfícies: terminal, IDE, aplicativo de desktop e web</a:t>
             </a:r>
           </a:p>
           <a:p>
@@ -14474,7 +15063,7 @@
                 </a:solidFill>
                 <a:latin typeface="Segoe UI"/>
               </a:rPr>
-              <a:t>Apoiar a escrita</a:t>
+              <a:t>Hooks</a:t>
             </a:r>
             <a:r>
               <a:rPr sz="1900" b="0" i="0">
@@ -14483,7 +15072,29 @@
                 </a:solidFill>
                 <a:latin typeface="Segoe UI"/>
               </a:rPr>
-              <a:t> — estrutura, clareza, revisão de argumento</a:t>
+              <a:t> — comando determinístico em torno de um núcleo estocástico</a:t>
+            </a:r>
+          </a:p>
+          <a:p>
+            <a:pPr lvl="1">
+              <a:lnSpc>
+                <a:spcPct val="122000"/>
+              </a:lnSpc>
+              <a:spcBef>
+                <a:spcPts val="500"/>
+              </a:spcBef>
+              <a:spcAft>
+                <a:spcPts val="0"/>
+              </a:spcAft>
+            </a:pPr>
+            <a:r>
+              <a:rPr sz="1600" b="0" i="0">
+                <a:solidFill>
+                  <a:srgbClr val="6A6E76"/>
+                </a:solidFill>
+                <a:latin typeface="Segoe UI"/>
+              </a:rPr>
+              <a:t>·  é a ponte para reprodutibilidade, que volta no próximo bloco</a:t>
             </a:r>
           </a:p>
           <a:p>
@@ -14505,7 +15116,7 @@
                 </a:solidFill>
                 <a:latin typeface="Segoe UI"/>
               </a:rPr>
-              <a:t>—  Atravessando os quatro: </a:t>
+              <a:t>—  </a:t>
             </a:r>
             <a:r>
               <a:rPr sz="1900" b="1" i="0">
@@ -14514,29 +15125,16 @@
                 </a:solidFill>
                 <a:latin typeface="Segoe UI"/>
               </a:rPr>
-              <a:t>reprodutibilidade</a:t>
-            </a:r>
-          </a:p>
-          <a:p>
-            <a:pPr lvl="1">
-              <a:lnSpc>
-                <a:spcPct val="122000"/>
-              </a:lnSpc>
-              <a:spcBef>
-                <a:spcPts val="500"/>
-              </a:spcBef>
-              <a:spcAft>
-                <a:spcPts val="0"/>
-              </a:spcAft>
-            </a:pPr>
-            <a:r>
-              <a:rPr sz="1600" b="0" i="0">
-                <a:solidFill>
-                  <a:srgbClr val="6A6E76"/>
-                </a:solidFill>
-                <a:latin typeface="Segoe UI"/>
-              </a:rPr>
-              <a:t>·  o que o agente fez precisa virar script, commit e ambiente registrados</a:t>
+              <a:t>Checkpointing</a:t>
+            </a:r>
+            <a:r>
+              <a:rPr sz="1900" b="0" i="0">
+                <a:solidFill>
+                  <a:srgbClr val="16181D"/>
+                </a:solidFill>
+                <a:latin typeface="Segoe UI"/>
+              </a:rPr>
+              <a:t> — desfazer o que o agente fez</a:t>
             </a:r>
           </a:p>
         </p:txBody>
@@ -14581,7 +15179,7 @@
                 </a:solidFill>
                 <a:latin typeface="Segoe UI"/>
               </a:rPr>
-              <a:t>Paulo E. R. Araujo · 5 · Aplicação em pesquisa</a:t>
+              <a:t>Paulo E. R. Araujo · 4 · Claude concreto</a:t>
             </a:r>
           </a:p>
         </p:txBody>
@@ -14626,7 +15224,7 @@
                 </a:solidFill>
                 <a:latin typeface="Segoe UI"/>
               </a:rPr>
-              <a:t>29</a:t>
+              <a:t>30</a:t>
             </a:r>
           </a:p>
         </p:txBody>
@@ -14645,7 +15243,7 @@
     <p:bg>
       <p:bgPr>
         <a:solidFill>
-          <a:srgbClr val="FBFAF7"/>
+          <a:srgbClr val="1B2A3A"/>
         </a:solidFill>
         <a:effectLst/>
       </p:bgPr>
@@ -14659,65 +15257,20 @@
       <p:grpSpPr/>
       <p:sp>
         <p:nvSpPr>
-          <p:cNvPr id="2" name="TextBox 1"/>
-          <p:cNvSpPr txBox="1"/>
-          <p:nvPr/>
-        </p:nvSpPr>
-        <p:spPr>
-          <a:xfrm>
-            <a:off x="868680" y="566928"/>
-            <a:ext cx="10454335" cy="822960"/>
-          </a:xfrm>
-          <a:prstGeom prst="rect">
-            <a:avLst/>
-          </a:prstGeom>
-          <a:noFill/>
-        </p:spPr>
-        <p:txBody>
-          <a:bodyPr wrap="square" anchor="t">
-            <a:spAutoFit/>
-          </a:bodyPr>
-          <a:lstStyle/>
-          <a:p>
-            <a:pPr algn="l">
-              <a:lnSpc>
-                <a:spcPct val="100000"/>
-              </a:lnSpc>
-              <a:spcBef>
-                <a:spcPts val="0"/>
-              </a:spcBef>
-              <a:spcAft>
-                <a:spcPts val="0"/>
-              </a:spcAft>
-            </a:pPr>
-            <a:r>
-              <a:rPr sz="3000" b="0" i="0">
-                <a:solidFill>
-                  <a:srgbClr val="16181D"/>
-                </a:solidFill>
-                <a:latin typeface="Georgia"/>
-              </a:rPr>
-              <a:t>Permissões: o portão do laço</a:t>
-            </a:r>
-          </a:p>
-        </p:txBody>
-      </p:sp>
-      <p:sp>
-        <p:nvSpPr>
-          <p:cNvPr id="3" name="Rectangle 2"/>
+          <p:cNvPr id="2" name="Rectangle 1"/>
           <p:cNvSpPr/>
           <p:nvPr/>
         </p:nvSpPr>
         <p:spPr>
           <a:xfrm>
-            <a:off x="868680" y="1335024"/>
-            <a:ext cx="10454335" cy="12700"/>
+            <a:off x="868680" y="2788920"/>
+            <a:ext cx="1463040" cy="31750"/>
           </a:xfrm>
           <a:prstGeom prst="rect">
             <a:avLst/>
           </a:prstGeom>
           <a:solidFill>
-            <a:srgbClr val="D8D4CB"/>
+            <a:srgbClr val="BC7A2F"/>
           </a:solidFill>
           <a:ln>
             <a:noFill/>
@@ -14748,14 +15301,14 @@
       </p:sp>
       <p:sp>
         <p:nvSpPr>
-          <p:cNvPr id="4" name="TextBox 3"/>
+          <p:cNvPr id="3" name="TextBox 2"/>
           <p:cNvSpPr txBox="1"/>
           <p:nvPr/>
         </p:nvSpPr>
         <p:spPr>
           <a:xfrm>
-            <a:off x="868680" y="1609343"/>
-            <a:ext cx="10454335" cy="4562856"/>
+            <a:off x="868680" y="3063240"/>
+            <a:ext cx="10454335" cy="1463040"/>
           </a:xfrm>
           <a:prstGeom prst="rect">
             <a:avLst/>
@@ -14770,215 +15323,45 @@
           <a:p>
             <a:pPr algn="l">
               <a:lnSpc>
-                <a:spcPct val="122000"/>
-              </a:lnSpc>
-              <a:spcBef>
-                <a:spcPts val="0"/>
-              </a:spcBef>
-              <a:spcAft>
-                <a:spcPts val="0"/>
-              </a:spcAft>
-            </a:pPr>
-            <a:r>
-              <a:rPr sz="1900" b="0" i="0">
-                <a:solidFill>
-                  <a:srgbClr val="16181D"/>
-                </a:solidFill>
-                <a:latin typeface="Segoe UI"/>
-              </a:rPr>
-              <a:t>—  Um agente com acesso ao repositório edita arquivos e executa comandos</a:t>
+                <a:spcPct val="100000"/>
+              </a:lnSpc>
+              <a:spcBef>
+                <a:spcPts val="0"/>
+              </a:spcBef>
+              <a:spcAft>
+                <a:spcPts val="0"/>
+              </a:spcAft>
+            </a:pPr>
+            <a:r>
+              <a:rPr sz="3200" b="0" i="0">
+                <a:solidFill>
+                  <a:srgbClr val="F7F6F2"/>
+                </a:solidFill>
+                <a:latin typeface="Georgia"/>
+              </a:rPr>
+              <a:t>Bloco 5</a:t>
             </a:r>
           </a:p>
           <a:p>
             <a:pPr>
               <a:lnSpc>
-                <a:spcPct val="122000"/>
-              </a:lnSpc>
-              <a:spcBef>
-                <a:spcPts val="1300"/>
-              </a:spcBef>
-              <a:spcAft>
-                <a:spcPts val="0"/>
-              </a:spcAft>
-            </a:pPr>
-            <a:r>
-              <a:rPr sz="1900" b="0" i="0">
-                <a:solidFill>
-                  <a:srgbClr val="16181D"/>
-                </a:solidFill>
-                <a:latin typeface="Segoe UI"/>
-              </a:rPr>
-              <a:t>—  O portão é do </a:t>
-            </a:r>
-            <a:r>
-              <a:rPr sz="1900" b="1" i="0">
-                <a:solidFill>
-                  <a:srgbClr val="16181D"/>
-                </a:solidFill>
-                <a:latin typeface="Segoe UI"/>
-              </a:rPr>
-              <a:t>harness</a:t>
-            </a:r>
-            <a:r>
-              <a:rPr sz="1900" b="0" i="0">
-                <a:solidFill>
-                  <a:srgbClr val="16181D"/>
-                </a:solidFill>
-                <a:latin typeface="Segoe UI"/>
-              </a:rPr>
-              <a:t>, não do modelo: pedir aprovação, aceitar edições, ou planejar antes de agir</a:t>
-            </a:r>
-          </a:p>
-          <a:p>
-            <a:pPr>
-              <a:lnSpc>
-                <a:spcPct val="122000"/>
-              </a:lnSpc>
-              <a:spcBef>
-                <a:spcPts val="1300"/>
-              </a:spcBef>
-              <a:spcAft>
-                <a:spcPts val="0"/>
-              </a:spcAft>
-            </a:pPr>
-            <a:r>
-              <a:rPr sz="1900" b="0" i="0">
-                <a:solidFill>
-                  <a:srgbClr val="16181D"/>
-                </a:solidFill>
-                <a:latin typeface="Segoe UI"/>
-              </a:rPr>
-              <a:t>—  </a:t>
-            </a:r>
-            <a:r>
-              <a:rPr sz="1900" b="1" i="0">
-                <a:solidFill>
-                  <a:srgbClr val="16181D"/>
-                </a:solidFill>
-                <a:latin typeface="Segoe UI"/>
-              </a:rPr>
-              <a:t>Plan mode</a:t>
-            </a:r>
-            <a:r>
-              <a:rPr sz="1900" b="0" i="0">
-                <a:solidFill>
-                  <a:srgbClr val="16181D"/>
-                </a:solidFill>
-                <a:latin typeface="Segoe UI"/>
-              </a:rPr>
-              <a:t>: o agente mostra o plano e espera. Você lê antes de qualquer escrita</a:t>
-            </a:r>
-          </a:p>
-          <a:p>
-            <a:pPr>
-              <a:lnSpc>
-                <a:spcPct val="122000"/>
-              </a:lnSpc>
-              <a:spcBef>
-                <a:spcPts val="1300"/>
-              </a:spcBef>
-              <a:spcAft>
-                <a:spcPts val="0"/>
-              </a:spcAft>
-            </a:pPr>
-            <a:r>
-              <a:rPr sz="1900" b="0" i="0">
-                <a:solidFill>
-                  <a:srgbClr val="16181D"/>
-                </a:solidFill>
-                <a:latin typeface="Segoe UI"/>
-              </a:rPr>
-              <a:t>—  Regra prática: repositório de terceiro, base de coleta ou artefato que você não pode recriar começa em plan mode</a:t>
-            </a:r>
-          </a:p>
-        </p:txBody>
-      </p:sp>
-      <p:sp>
-        <p:nvSpPr>
-          <p:cNvPr id="5" name="TextBox 4"/>
-          <p:cNvSpPr txBox="1"/>
-          <p:nvPr/>
-        </p:nvSpPr>
-        <p:spPr>
-          <a:xfrm>
-            <a:off x="868680" y="6355080"/>
-            <a:ext cx="9905695" cy="310896"/>
-          </a:xfrm>
-          <a:prstGeom prst="rect">
-            <a:avLst/>
-          </a:prstGeom>
-          <a:noFill/>
-        </p:spPr>
-        <p:txBody>
-          <a:bodyPr wrap="square" anchor="t">
-            <a:spAutoFit/>
-          </a:bodyPr>
-          <a:lstStyle/>
-          <a:p>
-            <a:pPr algn="l">
-              <a:lnSpc>
                 <a:spcPct val="100000"/>
               </a:lnSpc>
               <a:spcBef>
-                <a:spcPts val="0"/>
-              </a:spcBef>
-              <a:spcAft>
-                <a:spcPts val="0"/>
-              </a:spcAft>
-            </a:pPr>
-            <a:r>
-              <a:rPr sz="1000" b="0" i="0">
-                <a:solidFill>
-                  <a:srgbClr val="6A6E76"/>
-                </a:solidFill>
-                <a:latin typeface="Segoe UI"/>
-              </a:rPr>
-              <a:t>Paulo E. R. Araujo · 5 · Aplicação em pesquisa</a:t>
-            </a:r>
-          </a:p>
-        </p:txBody>
-      </p:sp>
-      <p:sp>
-        <p:nvSpPr>
-          <p:cNvPr id="6" name="TextBox 5"/>
-          <p:cNvSpPr txBox="1"/>
-          <p:nvPr/>
-        </p:nvSpPr>
-        <p:spPr>
-          <a:xfrm>
-            <a:off x="10774375" y="6355080"/>
-            <a:ext cx="548640" cy="310896"/>
-          </a:xfrm>
-          <a:prstGeom prst="rect">
-            <a:avLst/>
-          </a:prstGeom>
-          <a:noFill/>
-        </p:spPr>
-        <p:txBody>
-          <a:bodyPr wrap="square" anchor="t">
-            <a:spAutoFit/>
-          </a:bodyPr>
-          <a:lstStyle/>
-          <a:p>
-            <a:pPr algn="r">
-              <a:lnSpc>
-                <a:spcPct val="100000"/>
-              </a:lnSpc>
-              <a:spcBef>
-                <a:spcPts val="0"/>
-              </a:spcBef>
-              <a:spcAft>
-                <a:spcPts val="0"/>
-              </a:spcAft>
-            </a:pPr>
-            <a:r>
-              <a:rPr sz="1000" b="0" i="0">
-                <a:solidFill>
-                  <a:srgbClr val="6A6E76"/>
-                </a:solidFill>
-                <a:latin typeface="Segoe UI"/>
-              </a:rPr>
-              <a:t>30</a:t>
+                <a:spcPts val="1000"/>
+              </a:spcBef>
+              <a:spcAft>
+                <a:spcPts val="0"/>
+              </a:spcAft>
+            </a:pPr>
+            <a:r>
+              <a:rPr sz="1600" b="0" i="0">
+                <a:solidFill>
+                  <a:srgbClr val="7FA8C9"/>
+                </a:solidFill>
+                <a:latin typeface="Segoe UI"/>
+              </a:rPr>
+              <a:t>Aplicação em pesquisa em computação</a:t>
             </a:r>
           </a:p>
         </p:txBody>
@@ -15049,7 +15432,7 @@
                 </a:solidFill>
                 <a:latin typeface="Georgia"/>
               </a:rPr>
-              <a:t>Dados sensíveis: duas categorias, duas réguas</a:t>
+              <a:t>Quatro tipos de trabalho, não quatro domínios</a:t>
             </a:r>
           </a:p>
         </p:txBody>
@@ -15147,7 +15530,7 @@
                 </a:solidFill>
                 <a:latin typeface="Segoe UI"/>
               </a:rPr>
-              <a:t>Dado técnico</a:t>
+              <a:t>Entender artefato herdado</a:t>
             </a:r>
           </a:p>
           <a:p>
@@ -15169,7 +15552,7 @@
                 </a:solidFill>
                 <a:latin typeface="Segoe UI"/>
               </a:rPr>
-              <a:t>·  credencial, chave, endereço de infraestrutura, identificador de rede</a:t>
+              <a:t>·  o simulador que o aluno anterior deixou, um pipeline, um protótipo</a:t>
             </a:r>
           </a:p>
           <a:p>
@@ -15191,7 +15574,7 @@
                 </a:solidFill>
                 <a:latin typeface="Segoe UI"/>
               </a:rPr>
-              <a:t>·  régua: política da instituição e bom senso operacional</a:t>
+              <a:t>·  o problema é sempre o mesmo: código sem ninguém para explicá-lo</a:t>
             </a:r>
           </a:p>
           <a:p>
@@ -15222,7 +15605,7 @@
                 </a:solidFill>
                 <a:latin typeface="Segoe UI"/>
               </a:rPr>
-              <a:t>Dado de pessoa</a:t>
+              <a:t>Analisar resultado experimental</a:t>
             </a:r>
           </a:p>
           <a:p>
@@ -15244,7 +15627,7 @@
                 </a:solidFill>
                 <a:latin typeface="Segoe UI"/>
               </a:rPr>
-              <a:t>·  prontuário, registro de aluno, resposta de questionário, qualquer coisa sob TCLE</a:t>
+              <a:t>·  saída de simulação, log, captura, planilha de coleta, questionário</a:t>
             </a:r>
           </a:p>
           <a:p>
@@ -15266,7 +15649,7 @@
                 </a:solidFill>
                 <a:latin typeface="Segoe UI"/>
               </a:rPr>
-              <a:t>·  régua: o protocolo de pesquisa e a LGPD, não o que a ferramenta permite</a:t>
+              <a:t>·  o problema é sempre o mesmo: volume acima da leitura manual</a:t>
             </a:r>
           </a:p>
         </p:txBody>
@@ -15427,7 +15810,7 @@
                 </a:solidFill>
                 <a:latin typeface="Georgia"/>
               </a:rPr>
-              <a:t>A régua do dado de pessoa</a:t>
+              <a:t>Quatro tipos de trabalho, não quatro domínios</a:t>
             </a:r>
           </a:p>
         </p:txBody>
@@ -15516,7 +15899,60 @@
                 </a:solidFill>
                 <a:latin typeface="Segoe UI"/>
               </a:rPr>
-              <a:t>—  Se o consentimento não previu processamento por serviço de terceiro, o dado não sai da máquina</a:t>
+              <a:t>—  </a:t>
+            </a:r>
+            <a:r>
+              <a:rPr sz="1900" b="1" i="0">
+                <a:solidFill>
+                  <a:srgbClr val="16181D"/>
+                </a:solidFill>
+                <a:latin typeface="Segoe UI"/>
+              </a:rPr>
+              <a:t>Levantar e organizar literatura</a:t>
+            </a:r>
+          </a:p>
+          <a:p>
+            <a:pPr lvl="1">
+              <a:lnSpc>
+                <a:spcPct val="122000"/>
+              </a:lnSpc>
+              <a:spcBef>
+                <a:spcPts val="500"/>
+              </a:spcBef>
+              <a:spcAft>
+                <a:spcPts val="0"/>
+              </a:spcAft>
+            </a:pPr>
+            <a:r>
+              <a:rPr sz="1600" b="0" i="0">
+                <a:solidFill>
+                  <a:srgbClr val="6A6E76"/>
+                </a:solidFill>
+                <a:latin typeface="Segoe UI"/>
+              </a:rPr>
+              <a:t>·  triagem, extração de critérios, tabela comparativa de revisão sistemática</a:t>
+            </a:r>
+          </a:p>
+          <a:p>
+            <a:pPr lvl="1">
+              <a:lnSpc>
+                <a:spcPct val="122000"/>
+              </a:lnSpc>
+              <a:spcBef>
+                <a:spcPts val="500"/>
+              </a:spcBef>
+              <a:spcAft>
+                <a:spcPts val="0"/>
+              </a:spcAft>
+            </a:pPr>
+            <a:r>
+              <a:rPr sz="1600" b="0" i="0">
+                <a:solidFill>
+                  <a:srgbClr val="6A6E76"/>
+                </a:solidFill>
+                <a:latin typeface="Segoe UI"/>
+              </a:rPr>
+              <a:t>·  ressalva: o modelo não é fonte bibliográfica, e sim ferramenta de organização sobre o que você forneceu</a:t>
             </a:r>
           </a:p>
           <a:p>
@@ -15538,7 +15974,25 @@
                 </a:solidFill>
                 <a:latin typeface="Segoe UI"/>
               </a:rPr>
-              <a:t>—  Anonimização é decisão de projeto, não etapa improvisada na véspera</a:t>
+              <a:t>—  </a:t>
+            </a:r>
+            <a:r>
+              <a:rPr sz="1900" b="1" i="0">
+                <a:solidFill>
+                  <a:srgbClr val="16181D"/>
+                </a:solidFill>
+                <a:latin typeface="Segoe UI"/>
+              </a:rPr>
+              <a:t>Apoiar a escrita</a:t>
+            </a:r>
+            <a:r>
+              <a:rPr sz="1900" b="0" i="0">
+                <a:solidFill>
+                  <a:srgbClr val="16181D"/>
+                </a:solidFill>
+                <a:latin typeface="Segoe UI"/>
+              </a:rPr>
+              <a:t> — estrutura, clareza, revisão de argumento</a:t>
             </a:r>
           </a:p>
           <a:p>
@@ -15560,7 +16014,38 @@
                 </a:solidFill>
                 <a:latin typeface="Segoe UI"/>
               </a:rPr>
-              <a:t>—  Na dúvida, o caminho é o comitê de ética, não a documentação da ferramenta</a:t>
+              <a:t>—  Atravessando os quatro: </a:t>
+            </a:r>
+            <a:r>
+              <a:rPr sz="1900" b="1" i="0">
+                <a:solidFill>
+                  <a:srgbClr val="16181D"/>
+                </a:solidFill>
+                <a:latin typeface="Segoe UI"/>
+              </a:rPr>
+              <a:t>reprodutibilidade</a:t>
+            </a:r>
+          </a:p>
+          <a:p>
+            <a:pPr lvl="1">
+              <a:lnSpc>
+                <a:spcPct val="122000"/>
+              </a:lnSpc>
+              <a:spcBef>
+                <a:spcPts val="500"/>
+              </a:spcBef>
+              <a:spcAft>
+                <a:spcPts val="0"/>
+              </a:spcAft>
+            </a:pPr>
+            <a:r>
+              <a:rPr sz="1600" b="0" i="0">
+                <a:solidFill>
+                  <a:srgbClr val="6A6E76"/>
+                </a:solidFill>
+                <a:latin typeface="Segoe UI"/>
+              </a:rPr>
+              <a:t>·  o que o agente fez precisa virar script, commit e ambiente registrados</a:t>
             </a:r>
           </a:p>
         </p:txBody>
@@ -15721,7 +16206,7 @@
                 </a:solidFill>
                 <a:latin typeface="Georgia"/>
               </a:rPr>
-              <a:t>Verificação e honestidade acadêmica</a:t>
+              <a:t>Permissões: o portão do laço</a:t>
             </a:r>
           </a:p>
         </p:txBody>
@@ -15810,7 +16295,7 @@
                 </a:solidFill>
                 <a:latin typeface="Segoe UI"/>
               </a:rPr>
-              <a:t>—  Saída plausível não é saída correta — o Bloco 1 já mostrou por quê</a:t>
+              <a:t>—  Um agente com acesso ao repositório edita arquivos e executa comandos</a:t>
             </a:r>
           </a:p>
           <a:p>
@@ -15832,7 +16317,25 @@
                 </a:solidFill>
                 <a:latin typeface="Segoe UI"/>
               </a:rPr>
-              <a:t>—  O que o modelo produz é rascunho até você rodar, conferir e reproduzir</a:t>
+              <a:t>—  O portão é do </a:t>
+            </a:r>
+            <a:r>
+              <a:rPr sz="1900" b="1" i="0">
+                <a:solidFill>
+                  <a:srgbClr val="16181D"/>
+                </a:solidFill>
+                <a:latin typeface="Segoe UI"/>
+              </a:rPr>
+              <a:t>harness</a:t>
+            </a:r>
+            <a:r>
+              <a:rPr sz="1900" b="0" i="0">
+                <a:solidFill>
+                  <a:srgbClr val="16181D"/>
+                </a:solidFill>
+                <a:latin typeface="Segoe UI"/>
+              </a:rPr>
+              <a:t>, não do modelo: pedir aprovação, aceitar edições, ou planejar antes de agir</a:t>
             </a:r>
           </a:p>
           <a:p>
@@ -15854,59 +16357,33 @@
                 </a:solidFill>
                 <a:latin typeface="Segoe UI"/>
               </a:rPr>
-              <a:t>—  Duas armadilhas específicas do nosso trabalho:</a:t>
-            </a:r>
-          </a:p>
-          <a:p>
-            <a:pPr lvl="1">
+              <a:t>—  </a:t>
+            </a:r>
+            <a:r>
+              <a:rPr sz="1900" b="1" i="0">
+                <a:solidFill>
+                  <a:srgbClr val="16181D"/>
+                </a:solidFill>
+                <a:latin typeface="Segoe UI"/>
+              </a:rPr>
+              <a:t>Plan mode</a:t>
+            </a:r>
+            <a:r>
+              <a:rPr sz="1900" b="0" i="0">
+                <a:solidFill>
+                  <a:srgbClr val="16181D"/>
+                </a:solidFill>
+                <a:latin typeface="Segoe UI"/>
+              </a:rPr>
+              <a:t>: o agente mostra o plano e espera. Você lê antes de qualquer escrita</a:t>
+            </a:r>
+          </a:p>
+          <a:p>
+            <a:pPr>
               <a:lnSpc>
                 <a:spcPct val="122000"/>
               </a:lnSpc>
               <a:spcBef>
-                <a:spcPts val="500"/>
-              </a:spcBef>
-              <a:spcAft>
-                <a:spcPts val="0"/>
-              </a:spcAft>
-            </a:pPr>
-            <a:r>
-              <a:rPr sz="1600" b="0" i="0">
-                <a:solidFill>
-                  <a:srgbClr val="6A6E76"/>
-                </a:solidFill>
-                <a:latin typeface="Segoe UI"/>
-              </a:rPr>
-              <a:t>·  referência bibliográfica inventada com aparência perfeita</a:t>
-            </a:r>
-          </a:p>
-          <a:p>
-            <a:pPr lvl="1">
-              <a:lnSpc>
-                <a:spcPct val="122000"/>
-              </a:lnSpc>
-              <a:spcBef>
-                <a:spcPts val="500"/>
-              </a:spcBef>
-              <a:spcAft>
-                <a:spcPts val="0"/>
-              </a:spcAft>
-            </a:pPr>
-            <a:r>
-              <a:rPr sz="1600" b="0" i="0">
-                <a:solidFill>
-                  <a:srgbClr val="6A6E76"/>
-                </a:solidFill>
-                <a:latin typeface="Segoe UI"/>
-              </a:rPr>
-              <a:t>·  resultado numérico produzido sem que nada tenha sido executado</a:t>
-            </a:r>
-          </a:p>
-          <a:p>
-            <a:pPr>
-              <a:lnSpc>
-                <a:spcPct val="122000"/>
-              </a:lnSpc>
-              <a:spcBef>
                 <a:spcPts val="1300"/>
               </a:spcBef>
               <a:spcAft>
@@ -15920,7 +16397,7 @@
                 </a:solidFill>
                 <a:latin typeface="Segoe UI"/>
               </a:rPr>
-              <a:t>—  Declarar o uso conforme a norma do programa e do veículo</a:t>
+              <a:t>—  Regra prática: repositório de terceiro, base de coleta ou artefato que você não pode recriar começa em plan mode</a:t>
             </a:r>
           </a:p>
         </p:txBody>
@@ -16166,7 +16643,7 @@
     <p:bg>
       <p:bgPr>
         <a:solidFill>
-          <a:srgbClr val="F1EEE7"/>
+          <a:srgbClr val="FBFAF7"/>
         </a:solidFill>
         <a:effectLst/>
       </p:bgPr>
@@ -16180,20 +16657,65 @@
       <p:grpSpPr/>
       <p:sp>
         <p:nvSpPr>
-          <p:cNvPr id="2" name="Rectangle 1"/>
+          <p:cNvPr id="2" name="TextBox 1"/>
+          <p:cNvSpPr txBox="1"/>
+          <p:nvPr/>
+        </p:nvSpPr>
+        <p:spPr>
+          <a:xfrm>
+            <a:off x="868680" y="566928"/>
+            <a:ext cx="10454335" cy="822960"/>
+          </a:xfrm>
+          <a:prstGeom prst="rect">
+            <a:avLst/>
+          </a:prstGeom>
+          <a:noFill/>
+        </p:spPr>
+        <p:txBody>
+          <a:bodyPr wrap="square" anchor="t">
+            <a:spAutoFit/>
+          </a:bodyPr>
+          <a:lstStyle/>
+          <a:p>
+            <a:pPr algn="l">
+              <a:lnSpc>
+                <a:spcPct val="100000"/>
+              </a:lnSpc>
+              <a:spcBef>
+                <a:spcPts val="0"/>
+              </a:spcBef>
+              <a:spcAft>
+                <a:spcPts val="0"/>
+              </a:spcAft>
+            </a:pPr>
+            <a:r>
+              <a:rPr sz="3000" b="0" i="0">
+                <a:solidFill>
+                  <a:srgbClr val="16181D"/>
+                </a:solidFill>
+                <a:latin typeface="Georgia"/>
+              </a:rPr>
+              <a:t>Dados sensíveis: duas categorias, duas réguas</a:t>
+            </a:r>
+          </a:p>
+        </p:txBody>
+      </p:sp>
+      <p:sp>
+        <p:nvSpPr>
+          <p:cNvPr id="3" name="Rectangle 2"/>
           <p:cNvSpPr/>
           <p:nvPr/>
         </p:nvSpPr>
         <p:spPr>
           <a:xfrm>
-            <a:off x="868680" y="2331720"/>
-            <a:ext cx="1463040" cy="31750"/>
+            <a:off x="868680" y="1335024"/>
+            <a:ext cx="10454335" cy="12700"/>
           </a:xfrm>
           <a:prstGeom prst="rect">
             <a:avLst/>
           </a:prstGeom>
           <a:solidFill>
-            <a:srgbClr val="BC7A2F"/>
+            <a:srgbClr val="D8D4CB"/>
           </a:solidFill>
           <a:ln>
             <a:noFill/>
@@ -16224,14 +16746,14 @@
       </p:sp>
       <p:sp>
         <p:nvSpPr>
-          <p:cNvPr id="3" name="TextBox 2"/>
+          <p:cNvPr id="4" name="TextBox 3"/>
           <p:cNvSpPr txBox="1"/>
           <p:nvPr/>
         </p:nvSpPr>
         <p:spPr>
           <a:xfrm>
-            <a:off x="868680" y="2651760"/>
-            <a:ext cx="10454335" cy="2377440"/>
+            <a:off x="868680" y="1609343"/>
+            <a:ext cx="10454335" cy="4562856"/>
           </a:xfrm>
           <a:prstGeom prst="rect">
             <a:avLst/>
@@ -16246,52 +16768,158 @@
           <a:p>
             <a:pPr algn="l">
               <a:lnSpc>
-                <a:spcPct val="135000"/>
-              </a:lnSpc>
-              <a:spcBef>
-                <a:spcPts val="0"/>
-              </a:spcBef>
-              <a:spcAft>
-                <a:spcPts val="0"/>
-              </a:spcAft>
-            </a:pPr>
-            <a:r>
-              <a:rPr sz="2500" b="0" i="1">
-                <a:solidFill>
-                  <a:srgbClr val="16181D"/>
-                </a:solidFill>
-                <a:latin typeface="Georgia"/>
-              </a:rPr>
-              <a:t>O agente acelera a parte mecânica e não assume nenhuma responsabilidade. A assinatura no paper é sua, então a verificação também é — e o dado que saiu do seu computador não volta.</a:t>
+                <a:spcPct val="122000"/>
+              </a:lnSpc>
+              <a:spcBef>
+                <a:spcPts val="0"/>
+              </a:spcBef>
+              <a:spcAft>
+                <a:spcPts val="0"/>
+              </a:spcAft>
+            </a:pPr>
+            <a:r>
+              <a:rPr sz="1900" b="0" i="0">
+                <a:solidFill>
+                  <a:srgbClr val="16181D"/>
+                </a:solidFill>
+                <a:latin typeface="Segoe UI"/>
+              </a:rPr>
+              <a:t>—  </a:t>
+            </a:r>
+            <a:r>
+              <a:rPr sz="1900" b="1" i="0">
+                <a:solidFill>
+                  <a:srgbClr val="16181D"/>
+                </a:solidFill>
+                <a:latin typeface="Segoe UI"/>
+              </a:rPr>
+              <a:t>Dado técnico</a:t>
+            </a:r>
+          </a:p>
+          <a:p>
+            <a:pPr lvl="1">
+              <a:lnSpc>
+                <a:spcPct val="122000"/>
+              </a:lnSpc>
+              <a:spcBef>
+                <a:spcPts val="500"/>
+              </a:spcBef>
+              <a:spcAft>
+                <a:spcPts val="0"/>
+              </a:spcAft>
+            </a:pPr>
+            <a:r>
+              <a:rPr sz="1600" b="0" i="0">
+                <a:solidFill>
+                  <a:srgbClr val="6A6E76"/>
+                </a:solidFill>
+                <a:latin typeface="Segoe UI"/>
+              </a:rPr>
+              <a:t>·  credencial, chave, endereço de infraestrutura, identificador de rede</a:t>
+            </a:r>
+          </a:p>
+          <a:p>
+            <a:pPr lvl="1">
+              <a:lnSpc>
+                <a:spcPct val="122000"/>
+              </a:lnSpc>
+              <a:spcBef>
+                <a:spcPts val="500"/>
+              </a:spcBef>
+              <a:spcAft>
+                <a:spcPts val="0"/>
+              </a:spcAft>
+            </a:pPr>
+            <a:r>
+              <a:rPr sz="1600" b="0" i="0">
+                <a:solidFill>
+                  <a:srgbClr val="6A6E76"/>
+                </a:solidFill>
+                <a:latin typeface="Segoe UI"/>
+              </a:rPr>
+              <a:t>·  régua: política da instituição e bom senso operacional</a:t>
             </a:r>
           </a:p>
           <a:p>
             <a:pPr>
               <a:lnSpc>
-                <a:spcPct val="100000"/>
-              </a:lnSpc>
-              <a:spcBef>
-                <a:spcPts val="1800"/>
-              </a:spcBef>
-              <a:spcAft>
-                <a:spcPts val="0"/>
-              </a:spcAft>
-            </a:pPr>
-            <a:r>
-              <a:rPr sz="1300" b="0" i="0">
+                <a:spcPct val="122000"/>
+              </a:lnSpc>
+              <a:spcBef>
+                <a:spcPts val="1300"/>
+              </a:spcBef>
+              <a:spcAft>
+                <a:spcPts val="0"/>
+              </a:spcAft>
+            </a:pPr>
+            <a:r>
+              <a:rPr sz="1900" b="0" i="0">
+                <a:solidFill>
+                  <a:srgbClr val="16181D"/>
+                </a:solidFill>
+                <a:latin typeface="Segoe UI"/>
+              </a:rPr>
+              <a:t>—  </a:t>
+            </a:r>
+            <a:r>
+              <a:rPr sz="1900" b="1" i="0">
+                <a:solidFill>
+                  <a:srgbClr val="16181D"/>
+                </a:solidFill>
+                <a:latin typeface="Segoe UI"/>
+              </a:rPr>
+              <a:t>Dado de pessoa</a:t>
+            </a:r>
+          </a:p>
+          <a:p>
+            <a:pPr lvl="1">
+              <a:lnSpc>
+                <a:spcPct val="122000"/>
+              </a:lnSpc>
+              <a:spcBef>
+                <a:spcPts val="500"/>
+              </a:spcBef>
+              <a:spcAft>
+                <a:spcPts val="0"/>
+              </a:spcAft>
+            </a:pPr>
+            <a:r>
+              <a:rPr sz="1600" b="0" i="0">
                 <a:solidFill>
                   <a:srgbClr val="6A6E76"/>
                 </a:solidFill>
                 <a:latin typeface="Segoe UI"/>
               </a:rPr>
-              <a:t>Âncora do Bloco 5</a:t>
-            </a:r>
-          </a:p>
-        </p:txBody>
-      </p:sp>
-      <p:sp>
-        <p:nvSpPr>
-          <p:cNvPr id="4" name="TextBox 3"/>
+              <a:t>·  prontuário, registro de aluno, resposta de questionário, qualquer coisa sob TCLE</a:t>
+            </a:r>
+          </a:p>
+          <a:p>
+            <a:pPr lvl="1">
+              <a:lnSpc>
+                <a:spcPct val="122000"/>
+              </a:lnSpc>
+              <a:spcBef>
+                <a:spcPts val="500"/>
+              </a:spcBef>
+              <a:spcAft>
+                <a:spcPts val="0"/>
+              </a:spcAft>
+            </a:pPr>
+            <a:r>
+              <a:rPr sz="1600" b="0" i="0">
+                <a:solidFill>
+                  <a:srgbClr val="6A6E76"/>
+                </a:solidFill>
+                <a:latin typeface="Segoe UI"/>
+              </a:rPr>
+              <a:t>·  régua: o protocolo de pesquisa e a LGPD, não o que a ferramenta permite</a:t>
+            </a:r>
+          </a:p>
+        </p:txBody>
+      </p:sp>
+      <p:sp>
+        <p:nvSpPr>
+          <p:cNvPr id="5" name="TextBox 4"/>
           <p:cNvSpPr txBox="1"/>
           <p:nvPr/>
         </p:nvSpPr>
@@ -16336,7 +16964,7 @@
       </p:sp>
       <p:sp>
         <p:nvSpPr>
-          <p:cNvPr id="5" name="TextBox 4"/>
+          <p:cNvPr id="6" name="TextBox 5"/>
           <p:cNvSpPr txBox="1"/>
           <p:nvPr/>
         </p:nvSpPr>
@@ -16393,7 +17021,7 @@
     <p:bg>
       <p:bgPr>
         <a:solidFill>
-          <a:srgbClr val="1B2A3A"/>
+          <a:srgbClr val="FBFAF7"/>
         </a:solidFill>
         <a:effectLst/>
       </p:bgPr>
@@ -16407,20 +17035,65 @@
       <p:grpSpPr/>
       <p:sp>
         <p:nvSpPr>
-          <p:cNvPr id="2" name="Rectangle 1"/>
+          <p:cNvPr id="2" name="TextBox 1"/>
+          <p:cNvSpPr txBox="1"/>
+          <p:nvPr/>
+        </p:nvSpPr>
+        <p:spPr>
+          <a:xfrm>
+            <a:off x="868680" y="566928"/>
+            <a:ext cx="10454335" cy="822960"/>
+          </a:xfrm>
+          <a:prstGeom prst="rect">
+            <a:avLst/>
+          </a:prstGeom>
+          <a:noFill/>
+        </p:spPr>
+        <p:txBody>
+          <a:bodyPr wrap="square" anchor="t">
+            <a:spAutoFit/>
+          </a:bodyPr>
+          <a:lstStyle/>
+          <a:p>
+            <a:pPr algn="l">
+              <a:lnSpc>
+                <a:spcPct val="100000"/>
+              </a:lnSpc>
+              <a:spcBef>
+                <a:spcPts val="0"/>
+              </a:spcBef>
+              <a:spcAft>
+                <a:spcPts val="0"/>
+              </a:spcAft>
+            </a:pPr>
+            <a:r>
+              <a:rPr sz="3000" b="0" i="0">
+                <a:solidFill>
+                  <a:srgbClr val="16181D"/>
+                </a:solidFill>
+                <a:latin typeface="Georgia"/>
+              </a:rPr>
+              <a:t>A régua do dado de pessoa</a:t>
+            </a:r>
+          </a:p>
+        </p:txBody>
+      </p:sp>
+      <p:sp>
+        <p:nvSpPr>
+          <p:cNvPr id="3" name="Rectangle 2"/>
           <p:cNvSpPr/>
           <p:nvPr/>
         </p:nvSpPr>
         <p:spPr>
           <a:xfrm>
-            <a:off x="868680" y="2148840"/>
-            <a:ext cx="1463040" cy="31750"/>
+            <a:off x="868680" y="1335024"/>
+            <a:ext cx="10454335" cy="12700"/>
           </a:xfrm>
           <a:prstGeom prst="rect">
             <a:avLst/>
           </a:prstGeom>
           <a:solidFill>
-            <a:srgbClr val="BC7A2F"/>
+            <a:srgbClr val="D8D4CB"/>
           </a:solidFill>
           <a:ln>
             <a:noFill/>
@@ -16451,14 +17124,14 @@
       </p:sp>
       <p:sp>
         <p:nvSpPr>
-          <p:cNvPr id="3" name="TextBox 2"/>
+          <p:cNvPr id="4" name="TextBox 3"/>
           <p:cNvSpPr txBox="1"/>
           <p:nvPr/>
         </p:nvSpPr>
         <p:spPr>
           <a:xfrm>
-            <a:off x="868680" y="2468880"/>
-            <a:ext cx="10454335" cy="3108960"/>
+            <a:off x="868680" y="1609343"/>
+            <a:ext cx="10454335" cy="4562856"/>
           </a:xfrm>
           <a:prstGeom prst="rect">
             <a:avLst/>
@@ -16473,118 +17146,74 @@
           <a:p>
             <a:pPr algn="l">
               <a:lnSpc>
-                <a:spcPct val="100000"/>
-              </a:lnSpc>
-              <a:spcBef>
-                <a:spcPts val="0"/>
-              </a:spcBef>
-              <a:spcAft>
-                <a:spcPts val="0"/>
-              </a:spcAft>
-            </a:pPr>
-            <a:r>
-              <a:rPr sz="3000" b="0" i="0">
-                <a:solidFill>
-                  <a:srgbClr val="F7F6F2"/>
-                </a:solidFill>
-                <a:latin typeface="Georgia"/>
-              </a:rPr>
-              <a:t>Na próxima aula, vocês constroem</a:t>
+                <a:spcPct val="122000"/>
+              </a:lnSpc>
+              <a:spcBef>
+                <a:spcPts val="0"/>
+              </a:spcBef>
+              <a:spcAft>
+                <a:spcPts val="0"/>
+              </a:spcAft>
+            </a:pPr>
+            <a:r>
+              <a:rPr sz="1900" b="0" i="0">
+                <a:solidFill>
+                  <a:srgbClr val="16181D"/>
+                </a:solidFill>
+                <a:latin typeface="Segoe UI"/>
+              </a:rPr>
+              <a:t>—  Se o consentimento não previu processamento por serviço de terceiro, o dado não sai da máquina</a:t>
             </a:r>
           </a:p>
           <a:p>
             <a:pPr>
               <a:lnSpc>
-                <a:spcPct val="120000"/>
-              </a:lnSpc>
-              <a:spcBef>
-                <a:spcPts val="1200"/>
-              </a:spcBef>
-              <a:spcAft>
-                <a:spcPts val="0"/>
-              </a:spcAft>
-            </a:pPr>
-            <a:r>
-              <a:rPr sz="1500" b="0" i="0">
-                <a:solidFill>
-                  <a:srgbClr val="F7F6F2"/>
-                </a:solidFill>
-                <a:latin typeface="Segoe UI"/>
-              </a:rPr>
-              <a:t>Um agente que busca o que saiu na semana anterior na sua área e escreve uma newsletter</a:t>
+                <a:spcPct val="122000"/>
+              </a:lnSpc>
+              <a:spcBef>
+                <a:spcPts val="1300"/>
+              </a:spcBef>
+              <a:spcAft>
+                <a:spcPts val="0"/>
+              </a:spcAft>
+            </a:pPr>
+            <a:r>
+              <a:rPr sz="1900" b="0" i="0">
+                <a:solidFill>
+                  <a:srgbClr val="16181D"/>
+                </a:solidFill>
+                <a:latin typeface="Segoe UI"/>
+              </a:rPr>
+              <a:t>—  Anonimização é decisão de projeto, não etapa improvisada na véspera</a:t>
             </a:r>
           </a:p>
           <a:p>
             <a:pPr>
               <a:lnSpc>
-                <a:spcPct val="120000"/>
-              </a:lnSpc>
-              <a:spcBef>
-                <a:spcPts val="1200"/>
-              </a:spcBef>
-              <a:spcAft>
-                <a:spcPts val="0"/>
-              </a:spcAft>
-            </a:pPr>
-            <a:r>
-              <a:rPr sz="1500" b="0" i="0">
-                <a:solidFill>
-                  <a:srgbClr val="F7F6F2"/>
-                </a:solidFill>
-                <a:latin typeface="Segoe UI"/>
-              </a:rPr>
-              <a:t>Do zero: orquestrador, skills e material de apoio, escritos com o próprio agente</a:t>
-            </a:r>
-          </a:p>
-          <a:p>
-            <a:pPr>
-              <a:lnSpc>
-                <a:spcPct val="120000"/>
-              </a:lnSpc>
-              <a:spcBef>
-                <a:spcPts val="1200"/>
-              </a:spcBef>
-              <a:spcAft>
-                <a:spcPts val="0"/>
-              </a:spcAft>
-            </a:pPr>
-            <a:r>
-              <a:rPr sz="1500" b="0" i="0">
-                <a:solidFill>
-                  <a:srgbClr val="F7F6F2"/>
-                </a:solidFill>
-                <a:latin typeface="Segoe UI"/>
-              </a:rPr>
-              <a:t>Para chegar pronto: Claude Code instalado e testado, e 4 a 6 fontes da sua área com as URLs</a:t>
-            </a:r>
-          </a:p>
-          <a:p>
-            <a:pPr>
-              <a:lnSpc>
-                <a:spcPct val="120000"/>
-              </a:lnSpc>
-              <a:spcBef>
-                <a:spcPts val="1200"/>
-              </a:spcBef>
-              <a:spcAft>
-                <a:spcPts val="0"/>
-              </a:spcAft>
-            </a:pPr>
-            <a:r>
-              <a:rPr sz="1500" b="0" i="0">
-                <a:solidFill>
-                  <a:srgbClr val="F7F6F2"/>
-                </a:solidFill>
-                <a:latin typeface="Segoe UI"/>
-              </a:rPr>
-              <a:t>Quem chegar sem isso perde os primeiros quinze minutos</a:t>
-            </a:r>
-          </a:p>
-        </p:txBody>
-      </p:sp>
-      <p:sp>
-        <p:nvSpPr>
-          <p:cNvPr id="4" name="TextBox 3"/>
+                <a:spcPct val="122000"/>
+              </a:lnSpc>
+              <a:spcBef>
+                <a:spcPts val="1300"/>
+              </a:spcBef>
+              <a:spcAft>
+                <a:spcPts val="0"/>
+              </a:spcAft>
+            </a:pPr>
+            <a:r>
+              <a:rPr sz="1900" b="0" i="0">
+                <a:solidFill>
+                  <a:srgbClr val="16181D"/>
+                </a:solidFill>
+                <a:latin typeface="Segoe UI"/>
+              </a:rPr>
+              <a:t>—  Na dúvida, o caminho é o comitê de ética, não a documentação da ferramenta</a:t>
+            </a:r>
+          </a:p>
+        </p:txBody>
+      </p:sp>
+      <p:sp>
+        <p:nvSpPr>
+          <p:cNvPr id="5" name="TextBox 4"/>
           <p:cNvSpPr txBox="1"/>
           <p:nvPr/>
         </p:nvSpPr>
@@ -16629,7 +17258,7 @@
       </p:sp>
       <p:sp>
         <p:nvSpPr>
-          <p:cNvPr id="5" name="TextBox 4"/>
+          <p:cNvPr id="6" name="TextBox 5"/>
           <p:cNvSpPr txBox="1"/>
           <p:nvPr/>
         </p:nvSpPr>
@@ -16667,7 +17296,7 @@
                 </a:solidFill>
                 <a:latin typeface="Segoe UI"/>
               </a:rPr>
-              <a:t>34</a:t>
+              <a:t>35</a:t>
             </a:r>
           </a:p>
         </p:txBody>
@@ -16738,7 +17367,7 @@
                 </a:solidFill>
                 <a:latin typeface="Georgia"/>
               </a:rPr>
-              <a:t>Referências</a:t>
+              <a:t>Verificação e honestidade acadêmica</a:t>
             </a:r>
           </a:p>
         </p:txBody>
@@ -16827,7 +17456,7 @@
                 </a:solidFill>
                 <a:latin typeface="Segoe UI"/>
               </a:rPr>
-              <a:t>—  Documentação oficial do Claude Code — code.claude.com/docs, incluindo o glossário e "How Claude Code works", onde o harness é definido</a:t>
+              <a:t>—  Saída plausível não é saída correta — o Bloco 1 já mostrou por quê</a:t>
             </a:r>
           </a:p>
           <a:p>
@@ -16849,16 +17478,7 @@
                 </a:solidFill>
                 <a:latin typeface="Segoe UI"/>
               </a:rPr>
-              <a:t>—  Documentação de Agent Skills e do formato </a:t>
-            </a:r>
-            <a:r>
-              <a:rPr sz="1748" b="0" i="0">
-                <a:solidFill>
-                  <a:srgbClr val="16181D"/>
-                </a:solidFill>
-                <a:latin typeface="Consolas"/>
-              </a:rPr>
-              <a:t>SKILL.md</a:t>
+              <a:t>—  O que o modelo produz é rascunho até você rodar, conferir e reproduzir</a:t>
             </a:r>
           </a:p>
           <a:p>
@@ -16880,7 +17500,51 @@
                 </a:solidFill>
                 <a:latin typeface="Segoe UI"/>
               </a:rPr>
-              <a:t>—  Central de ajuda do Claude: Projects, memória, connectors e Cowork</a:t>
+              <a:t>—  Duas armadilhas específicas do nosso trabalho:</a:t>
+            </a:r>
+          </a:p>
+          <a:p>
+            <a:pPr lvl="1">
+              <a:lnSpc>
+                <a:spcPct val="122000"/>
+              </a:lnSpc>
+              <a:spcBef>
+                <a:spcPts val="500"/>
+              </a:spcBef>
+              <a:spcAft>
+                <a:spcPts val="0"/>
+              </a:spcAft>
+            </a:pPr>
+            <a:r>
+              <a:rPr sz="1600" b="0" i="0">
+                <a:solidFill>
+                  <a:srgbClr val="6A6E76"/>
+                </a:solidFill>
+                <a:latin typeface="Segoe UI"/>
+              </a:rPr>
+              <a:t>·  referência bibliográfica inventada com aparência perfeita</a:t>
+            </a:r>
+          </a:p>
+          <a:p>
+            <a:pPr lvl="1">
+              <a:lnSpc>
+                <a:spcPct val="122000"/>
+              </a:lnSpc>
+              <a:spcBef>
+                <a:spcPts val="500"/>
+              </a:spcBef>
+              <a:spcAft>
+                <a:spcPts val="0"/>
+              </a:spcAft>
+            </a:pPr>
+            <a:r>
+              <a:rPr sz="1600" b="0" i="0">
+                <a:solidFill>
+                  <a:srgbClr val="6A6E76"/>
+                </a:solidFill>
+                <a:latin typeface="Segoe UI"/>
+              </a:rPr>
+              <a:t>·  resultado numérico produzido sem que nada tenha sido executado</a:t>
             </a:r>
           </a:p>
           <a:p>
@@ -16902,29 +17566,7 @@
                 </a:solidFill>
                 <a:latin typeface="Segoe UI"/>
               </a:rPr>
-              <a:t>—  Política de privacidade e de uso de dados da Anthropic</a:t>
-            </a:r>
-          </a:p>
-          <a:p>
-            <a:pPr>
-              <a:lnSpc>
-                <a:spcPct val="122000"/>
-              </a:lnSpc>
-              <a:spcBef>
-                <a:spcPts val="1300"/>
-              </a:spcBef>
-              <a:spcAft>
-                <a:spcPts val="0"/>
-              </a:spcAft>
-            </a:pPr>
-            <a:r>
-              <a:rPr sz="1900" b="0" i="0">
-                <a:solidFill>
-                  <a:srgbClr val="16181D"/>
-                </a:solidFill>
-                <a:latin typeface="Segoe UI"/>
-              </a:rPr>
-              <a:t>—  Espelho local consultado para esta aula, com data de captura registrada no repositório</a:t>
+              <a:t>—  Declarar o uso conforme a norma do programa e do veículo</a:t>
             </a:r>
           </a:p>
         </p:txBody>
@@ -16969,7 +17611,7 @@
                 </a:solidFill>
                 <a:latin typeface="Segoe UI"/>
               </a:rPr>
-              <a:t>Paulo E. R. Araujo · Referências</a:t>
+              <a:t>Paulo E. R. Araujo · 5 · Aplicação em pesquisa</a:t>
             </a:r>
           </a:p>
         </p:txBody>
@@ -17014,7 +17656,874 @@
                 </a:solidFill>
                 <a:latin typeface="Segoe UI"/>
               </a:rPr>
-              <a:t>35</a:t>
+              <a:t>36</a:t>
+            </a:r>
+          </a:p>
+        </p:txBody>
+      </p:sp>
+    </p:spTree>
+  </p:cSld>
+  <p:clrMapOvr>
+    <a:masterClrMapping/>
+  </p:clrMapOvr>
+</p:sld>
+</file>
+
+<file path=ppt/slides/slide43.xml><?xml version="1.0" encoding="utf-8"?>
+<p:sld xmlns:a="http://schemas.openxmlformats.org/drawingml/2006/main" xmlns:p="http://schemas.openxmlformats.org/presentationml/2006/main" xmlns:r="http://schemas.openxmlformats.org/officeDocument/2006/relationships">
+  <p:cSld>
+    <p:bg>
+      <p:bgPr>
+        <a:solidFill>
+          <a:srgbClr val="F1EEE7"/>
+        </a:solidFill>
+        <a:effectLst/>
+      </p:bgPr>
+    </p:bg>
+    <p:spTree>
+      <p:nvGrpSpPr>
+        <p:cNvPr id="1" name=""/>
+        <p:cNvGrpSpPr/>
+        <p:nvPr/>
+      </p:nvGrpSpPr>
+      <p:grpSpPr/>
+      <p:sp>
+        <p:nvSpPr>
+          <p:cNvPr id="2" name="Rectangle 1"/>
+          <p:cNvSpPr/>
+          <p:nvPr/>
+        </p:nvSpPr>
+        <p:spPr>
+          <a:xfrm>
+            <a:off x="868680" y="2331720"/>
+            <a:ext cx="1463040" cy="31750"/>
+          </a:xfrm>
+          <a:prstGeom prst="rect">
+            <a:avLst/>
+          </a:prstGeom>
+          <a:solidFill>
+            <a:srgbClr val="BC7A2F"/>
+          </a:solidFill>
+          <a:ln>
+            <a:noFill/>
+          </a:ln>
+          <a:effectLst/>
+        </p:spPr>
+        <p:style>
+          <a:lnRef idx="1">
+            <a:schemeClr val="accent1"/>
+          </a:lnRef>
+          <a:fillRef idx="3">
+            <a:schemeClr val="accent1"/>
+          </a:fillRef>
+          <a:effectRef idx="2">
+            <a:schemeClr val="accent1"/>
+          </a:effectRef>
+          <a:fontRef idx="minor">
+            <a:schemeClr val="lt1"/>
+          </a:fontRef>
+        </p:style>
+        <p:txBody>
+          <a:bodyPr rtlCol="0" anchor="ctr"/>
+          <a:lstStyle/>
+          <a:p>
+            <a:pPr algn="ctr"/>
+          </a:p>
+        </p:txBody>
+      </p:sp>
+      <p:sp>
+        <p:nvSpPr>
+          <p:cNvPr id="3" name="TextBox 2"/>
+          <p:cNvSpPr txBox="1"/>
+          <p:nvPr/>
+        </p:nvSpPr>
+        <p:spPr>
+          <a:xfrm>
+            <a:off x="868680" y="2651760"/>
+            <a:ext cx="10454335" cy="2377440"/>
+          </a:xfrm>
+          <a:prstGeom prst="rect">
+            <a:avLst/>
+          </a:prstGeom>
+          <a:noFill/>
+        </p:spPr>
+        <p:txBody>
+          <a:bodyPr wrap="square" anchor="t">
+            <a:spAutoFit/>
+          </a:bodyPr>
+          <a:lstStyle/>
+          <a:p>
+            <a:pPr algn="l">
+              <a:lnSpc>
+                <a:spcPct val="135000"/>
+              </a:lnSpc>
+              <a:spcBef>
+                <a:spcPts val="0"/>
+              </a:spcBef>
+              <a:spcAft>
+                <a:spcPts val="0"/>
+              </a:spcAft>
+            </a:pPr>
+            <a:r>
+              <a:rPr sz="2500" b="0" i="1">
+                <a:solidFill>
+                  <a:srgbClr val="16181D"/>
+                </a:solidFill>
+                <a:latin typeface="Georgia"/>
+              </a:rPr>
+              <a:t>O agente acelera a parte mecânica e não assume nenhuma responsabilidade. A assinatura no paper é sua, então a verificação também é — e o dado que saiu do seu computador não volta.</a:t>
+            </a:r>
+          </a:p>
+          <a:p>
+            <a:pPr>
+              <a:lnSpc>
+                <a:spcPct val="100000"/>
+              </a:lnSpc>
+              <a:spcBef>
+                <a:spcPts val="1800"/>
+              </a:spcBef>
+              <a:spcAft>
+                <a:spcPts val="0"/>
+              </a:spcAft>
+            </a:pPr>
+            <a:r>
+              <a:rPr sz="1300" b="0" i="0">
+                <a:solidFill>
+                  <a:srgbClr val="6A6E76"/>
+                </a:solidFill>
+                <a:latin typeface="Segoe UI"/>
+              </a:rPr>
+              <a:t>Âncora do Bloco 5</a:t>
+            </a:r>
+          </a:p>
+        </p:txBody>
+      </p:sp>
+      <p:sp>
+        <p:nvSpPr>
+          <p:cNvPr id="4" name="TextBox 3"/>
+          <p:cNvSpPr txBox="1"/>
+          <p:nvPr/>
+        </p:nvSpPr>
+        <p:spPr>
+          <a:xfrm>
+            <a:off x="868680" y="6355080"/>
+            <a:ext cx="9905695" cy="310896"/>
+          </a:xfrm>
+          <a:prstGeom prst="rect">
+            <a:avLst/>
+          </a:prstGeom>
+          <a:noFill/>
+        </p:spPr>
+        <p:txBody>
+          <a:bodyPr wrap="square" anchor="t">
+            <a:spAutoFit/>
+          </a:bodyPr>
+          <a:lstStyle/>
+          <a:p>
+            <a:pPr algn="l">
+              <a:lnSpc>
+                <a:spcPct val="100000"/>
+              </a:lnSpc>
+              <a:spcBef>
+                <a:spcPts val="0"/>
+              </a:spcBef>
+              <a:spcAft>
+                <a:spcPts val="0"/>
+              </a:spcAft>
+            </a:pPr>
+            <a:r>
+              <a:rPr sz="1000" b="0" i="0">
+                <a:solidFill>
+                  <a:srgbClr val="6A6E76"/>
+                </a:solidFill>
+                <a:latin typeface="Segoe UI"/>
+              </a:rPr>
+              <a:t>Paulo E. R. Araujo · 5 · Aplicação em pesquisa</a:t>
+            </a:r>
+          </a:p>
+        </p:txBody>
+      </p:sp>
+      <p:sp>
+        <p:nvSpPr>
+          <p:cNvPr id="5" name="TextBox 4"/>
+          <p:cNvSpPr txBox="1"/>
+          <p:nvPr/>
+        </p:nvSpPr>
+        <p:spPr>
+          <a:xfrm>
+            <a:off x="10774375" y="6355080"/>
+            <a:ext cx="548640" cy="310896"/>
+          </a:xfrm>
+          <a:prstGeom prst="rect">
+            <a:avLst/>
+          </a:prstGeom>
+          <a:noFill/>
+        </p:spPr>
+        <p:txBody>
+          <a:bodyPr wrap="square" anchor="t">
+            <a:spAutoFit/>
+          </a:bodyPr>
+          <a:lstStyle/>
+          <a:p>
+            <a:pPr algn="r">
+              <a:lnSpc>
+                <a:spcPct val="100000"/>
+              </a:lnSpc>
+              <a:spcBef>
+                <a:spcPts val="0"/>
+              </a:spcBef>
+              <a:spcAft>
+                <a:spcPts val="0"/>
+              </a:spcAft>
+            </a:pPr>
+            <a:r>
+              <a:rPr sz="1000" b="0" i="0">
+                <a:solidFill>
+                  <a:srgbClr val="6A6E76"/>
+                </a:solidFill>
+                <a:latin typeface="Segoe UI"/>
+              </a:rPr>
+              <a:t>37</a:t>
+            </a:r>
+          </a:p>
+        </p:txBody>
+      </p:sp>
+    </p:spTree>
+  </p:cSld>
+  <p:clrMapOvr>
+    <a:masterClrMapping/>
+  </p:clrMapOvr>
+</p:sld>
+</file>
+
+<file path=ppt/slides/slide44.xml><?xml version="1.0" encoding="utf-8"?>
+<p:sld xmlns:a="http://schemas.openxmlformats.org/drawingml/2006/main" xmlns:p="http://schemas.openxmlformats.org/presentationml/2006/main" xmlns:r="http://schemas.openxmlformats.org/officeDocument/2006/relationships">
+  <p:cSld>
+    <p:bg>
+      <p:bgPr>
+        <a:solidFill>
+          <a:srgbClr val="1B2A3A"/>
+        </a:solidFill>
+        <a:effectLst/>
+      </p:bgPr>
+    </p:bg>
+    <p:spTree>
+      <p:nvGrpSpPr>
+        <p:cNvPr id="1" name=""/>
+        <p:cNvGrpSpPr/>
+        <p:nvPr/>
+      </p:nvGrpSpPr>
+      <p:grpSpPr/>
+      <p:sp>
+        <p:nvSpPr>
+          <p:cNvPr id="2" name="Rectangle 1"/>
+          <p:cNvSpPr/>
+          <p:nvPr/>
+        </p:nvSpPr>
+        <p:spPr>
+          <a:xfrm>
+            <a:off x="868680" y="2148840"/>
+            <a:ext cx="1463040" cy="31750"/>
+          </a:xfrm>
+          <a:prstGeom prst="rect">
+            <a:avLst/>
+          </a:prstGeom>
+          <a:solidFill>
+            <a:srgbClr val="BC7A2F"/>
+          </a:solidFill>
+          <a:ln>
+            <a:noFill/>
+          </a:ln>
+          <a:effectLst/>
+        </p:spPr>
+        <p:style>
+          <a:lnRef idx="1">
+            <a:schemeClr val="accent1"/>
+          </a:lnRef>
+          <a:fillRef idx="3">
+            <a:schemeClr val="accent1"/>
+          </a:fillRef>
+          <a:effectRef idx="2">
+            <a:schemeClr val="accent1"/>
+          </a:effectRef>
+          <a:fontRef idx="minor">
+            <a:schemeClr val="lt1"/>
+          </a:fontRef>
+        </p:style>
+        <p:txBody>
+          <a:bodyPr rtlCol="0" anchor="ctr"/>
+          <a:lstStyle/>
+          <a:p>
+            <a:pPr algn="ctr"/>
+          </a:p>
+        </p:txBody>
+      </p:sp>
+      <p:sp>
+        <p:nvSpPr>
+          <p:cNvPr id="3" name="TextBox 2"/>
+          <p:cNvSpPr txBox="1"/>
+          <p:nvPr/>
+        </p:nvSpPr>
+        <p:spPr>
+          <a:xfrm>
+            <a:off x="868680" y="2468880"/>
+            <a:ext cx="10454335" cy="3108960"/>
+          </a:xfrm>
+          <a:prstGeom prst="rect">
+            <a:avLst/>
+          </a:prstGeom>
+          <a:noFill/>
+        </p:spPr>
+        <p:txBody>
+          <a:bodyPr wrap="square" anchor="t">
+            <a:spAutoFit/>
+          </a:bodyPr>
+          <a:lstStyle/>
+          <a:p>
+            <a:pPr algn="l">
+              <a:lnSpc>
+                <a:spcPct val="100000"/>
+              </a:lnSpc>
+              <a:spcBef>
+                <a:spcPts val="0"/>
+              </a:spcBef>
+              <a:spcAft>
+                <a:spcPts val="0"/>
+              </a:spcAft>
+            </a:pPr>
+            <a:r>
+              <a:rPr sz="3000" b="0" i="0">
+                <a:solidFill>
+                  <a:srgbClr val="F7F6F2"/>
+                </a:solidFill>
+                <a:latin typeface="Georgia"/>
+              </a:rPr>
+              <a:t>Na próxima aula, vocês constroem</a:t>
+            </a:r>
+          </a:p>
+          <a:p>
+            <a:pPr>
+              <a:lnSpc>
+                <a:spcPct val="120000"/>
+              </a:lnSpc>
+              <a:spcBef>
+                <a:spcPts val="1200"/>
+              </a:spcBef>
+              <a:spcAft>
+                <a:spcPts val="0"/>
+              </a:spcAft>
+            </a:pPr>
+            <a:r>
+              <a:rPr sz="1500" b="0" i="0">
+                <a:solidFill>
+                  <a:srgbClr val="F7F6F2"/>
+                </a:solidFill>
+                <a:latin typeface="Segoe UI"/>
+              </a:rPr>
+              <a:t>Um agente que busca o que saiu na semana anterior na sua área e escreve uma newsletter</a:t>
+            </a:r>
+          </a:p>
+          <a:p>
+            <a:pPr>
+              <a:lnSpc>
+                <a:spcPct val="120000"/>
+              </a:lnSpc>
+              <a:spcBef>
+                <a:spcPts val="1200"/>
+              </a:spcBef>
+              <a:spcAft>
+                <a:spcPts val="0"/>
+              </a:spcAft>
+            </a:pPr>
+            <a:r>
+              <a:rPr sz="1500" b="0" i="0">
+                <a:solidFill>
+                  <a:srgbClr val="F7F6F2"/>
+                </a:solidFill>
+                <a:latin typeface="Segoe UI"/>
+              </a:rPr>
+              <a:t>Do zero: orquestrador, skills e material de apoio, escritos com o próprio agente</a:t>
+            </a:r>
+          </a:p>
+          <a:p>
+            <a:pPr>
+              <a:lnSpc>
+                <a:spcPct val="120000"/>
+              </a:lnSpc>
+              <a:spcBef>
+                <a:spcPts val="1200"/>
+              </a:spcBef>
+              <a:spcAft>
+                <a:spcPts val="0"/>
+              </a:spcAft>
+            </a:pPr>
+            <a:r>
+              <a:rPr sz="1500" b="0" i="0">
+                <a:solidFill>
+                  <a:srgbClr val="F7F6F2"/>
+                </a:solidFill>
+                <a:latin typeface="Segoe UI"/>
+              </a:rPr>
+              <a:t>Para chegar pronto: Claude Code instalado e testado, e 4 a 6 fontes da sua área com as URLs</a:t>
+            </a:r>
+          </a:p>
+          <a:p>
+            <a:pPr>
+              <a:lnSpc>
+                <a:spcPct val="120000"/>
+              </a:lnSpc>
+              <a:spcBef>
+                <a:spcPts val="1200"/>
+              </a:spcBef>
+              <a:spcAft>
+                <a:spcPts val="0"/>
+              </a:spcAft>
+            </a:pPr>
+            <a:r>
+              <a:rPr sz="1500" b="0" i="0">
+                <a:solidFill>
+                  <a:srgbClr val="F7F6F2"/>
+                </a:solidFill>
+                <a:latin typeface="Segoe UI"/>
+              </a:rPr>
+              <a:t>Quem chegar sem isso perde os primeiros quinze minutos</a:t>
+            </a:r>
+          </a:p>
+        </p:txBody>
+      </p:sp>
+      <p:sp>
+        <p:nvSpPr>
+          <p:cNvPr id="4" name="TextBox 3"/>
+          <p:cNvSpPr txBox="1"/>
+          <p:nvPr/>
+        </p:nvSpPr>
+        <p:spPr>
+          <a:xfrm>
+            <a:off x="868680" y="6355080"/>
+            <a:ext cx="9905695" cy="310896"/>
+          </a:xfrm>
+          <a:prstGeom prst="rect">
+            <a:avLst/>
+          </a:prstGeom>
+          <a:noFill/>
+        </p:spPr>
+        <p:txBody>
+          <a:bodyPr wrap="square" anchor="t">
+            <a:spAutoFit/>
+          </a:bodyPr>
+          <a:lstStyle/>
+          <a:p>
+            <a:pPr algn="l">
+              <a:lnSpc>
+                <a:spcPct val="100000"/>
+              </a:lnSpc>
+              <a:spcBef>
+                <a:spcPts val="0"/>
+              </a:spcBef>
+              <a:spcAft>
+                <a:spcPts val="0"/>
+              </a:spcAft>
+            </a:pPr>
+            <a:r>
+              <a:rPr sz="1000" b="0" i="0">
+                <a:solidFill>
+                  <a:srgbClr val="6A6E76"/>
+                </a:solidFill>
+                <a:latin typeface="Segoe UI"/>
+              </a:rPr>
+              <a:t>Paulo E. R. Araujo · 5 · Aplicação em pesquisa</a:t>
+            </a:r>
+          </a:p>
+        </p:txBody>
+      </p:sp>
+      <p:sp>
+        <p:nvSpPr>
+          <p:cNvPr id="5" name="TextBox 4"/>
+          <p:cNvSpPr txBox="1"/>
+          <p:nvPr/>
+        </p:nvSpPr>
+        <p:spPr>
+          <a:xfrm>
+            <a:off x="10774375" y="6355080"/>
+            <a:ext cx="548640" cy="310896"/>
+          </a:xfrm>
+          <a:prstGeom prst="rect">
+            <a:avLst/>
+          </a:prstGeom>
+          <a:noFill/>
+        </p:spPr>
+        <p:txBody>
+          <a:bodyPr wrap="square" anchor="t">
+            <a:spAutoFit/>
+          </a:bodyPr>
+          <a:lstStyle/>
+          <a:p>
+            <a:pPr algn="r">
+              <a:lnSpc>
+                <a:spcPct val="100000"/>
+              </a:lnSpc>
+              <a:spcBef>
+                <a:spcPts val="0"/>
+              </a:spcBef>
+              <a:spcAft>
+                <a:spcPts val="0"/>
+              </a:spcAft>
+            </a:pPr>
+            <a:r>
+              <a:rPr sz="1000" b="0" i="0">
+                <a:solidFill>
+                  <a:srgbClr val="6A6E76"/>
+                </a:solidFill>
+                <a:latin typeface="Segoe UI"/>
+              </a:rPr>
+              <a:t>37</a:t>
+            </a:r>
+          </a:p>
+        </p:txBody>
+      </p:sp>
+    </p:spTree>
+  </p:cSld>
+  <p:clrMapOvr>
+    <a:masterClrMapping/>
+  </p:clrMapOvr>
+</p:sld>
+</file>
+
+<file path=ppt/slides/slide45.xml><?xml version="1.0" encoding="utf-8"?>
+<p:sld xmlns:a="http://schemas.openxmlformats.org/drawingml/2006/main" xmlns:p="http://schemas.openxmlformats.org/presentationml/2006/main" xmlns:r="http://schemas.openxmlformats.org/officeDocument/2006/relationships">
+  <p:cSld>
+    <p:bg>
+      <p:bgPr>
+        <a:solidFill>
+          <a:srgbClr val="FBFAF7"/>
+        </a:solidFill>
+        <a:effectLst/>
+      </p:bgPr>
+    </p:bg>
+    <p:spTree>
+      <p:nvGrpSpPr>
+        <p:cNvPr id="1" name=""/>
+        <p:cNvGrpSpPr/>
+        <p:nvPr/>
+      </p:nvGrpSpPr>
+      <p:grpSpPr/>
+      <p:sp>
+        <p:nvSpPr>
+          <p:cNvPr id="2" name="TextBox 1"/>
+          <p:cNvSpPr txBox="1"/>
+          <p:nvPr/>
+        </p:nvSpPr>
+        <p:spPr>
+          <a:xfrm>
+            <a:off x="868680" y="566928"/>
+            <a:ext cx="10454335" cy="822960"/>
+          </a:xfrm>
+          <a:prstGeom prst="rect">
+            <a:avLst/>
+          </a:prstGeom>
+          <a:noFill/>
+        </p:spPr>
+        <p:txBody>
+          <a:bodyPr wrap="square" anchor="t">
+            <a:spAutoFit/>
+          </a:bodyPr>
+          <a:lstStyle/>
+          <a:p>
+            <a:pPr algn="l">
+              <a:lnSpc>
+                <a:spcPct val="100000"/>
+              </a:lnSpc>
+              <a:spcBef>
+                <a:spcPts val="0"/>
+              </a:spcBef>
+              <a:spcAft>
+                <a:spcPts val="0"/>
+              </a:spcAft>
+            </a:pPr>
+            <a:r>
+              <a:rPr sz="3000" b="0" i="0">
+                <a:solidFill>
+                  <a:srgbClr val="16181D"/>
+                </a:solidFill>
+                <a:latin typeface="Georgia"/>
+              </a:rPr>
+              <a:t>Referências</a:t>
+            </a:r>
+          </a:p>
+        </p:txBody>
+      </p:sp>
+      <p:sp>
+        <p:nvSpPr>
+          <p:cNvPr id="3" name="Rectangle 2"/>
+          <p:cNvSpPr/>
+          <p:nvPr/>
+        </p:nvSpPr>
+        <p:spPr>
+          <a:xfrm>
+            <a:off x="868680" y="1335024"/>
+            <a:ext cx="10454335" cy="12700"/>
+          </a:xfrm>
+          <a:prstGeom prst="rect">
+            <a:avLst/>
+          </a:prstGeom>
+          <a:solidFill>
+            <a:srgbClr val="D8D4CB"/>
+          </a:solidFill>
+          <a:ln>
+            <a:noFill/>
+          </a:ln>
+          <a:effectLst/>
+        </p:spPr>
+        <p:style>
+          <a:lnRef idx="1">
+            <a:schemeClr val="accent1"/>
+          </a:lnRef>
+          <a:fillRef idx="3">
+            <a:schemeClr val="accent1"/>
+          </a:fillRef>
+          <a:effectRef idx="2">
+            <a:schemeClr val="accent1"/>
+          </a:effectRef>
+          <a:fontRef idx="minor">
+            <a:schemeClr val="lt1"/>
+          </a:fontRef>
+        </p:style>
+        <p:txBody>
+          <a:bodyPr rtlCol="0" anchor="ctr"/>
+          <a:lstStyle/>
+          <a:p>
+            <a:pPr algn="ctr"/>
+          </a:p>
+        </p:txBody>
+      </p:sp>
+      <p:sp>
+        <p:nvSpPr>
+          <p:cNvPr id="4" name="TextBox 3"/>
+          <p:cNvSpPr txBox="1"/>
+          <p:nvPr/>
+        </p:nvSpPr>
+        <p:spPr>
+          <a:xfrm>
+            <a:off x="868680" y="1609343"/>
+            <a:ext cx="10454335" cy="4562856"/>
+          </a:xfrm>
+          <a:prstGeom prst="rect">
+            <a:avLst/>
+          </a:prstGeom>
+          <a:noFill/>
+        </p:spPr>
+        <p:txBody>
+          <a:bodyPr wrap="square" anchor="t">
+            <a:spAutoFit/>
+          </a:bodyPr>
+          <a:lstStyle/>
+          <a:p>
+            <a:pPr algn="l">
+              <a:lnSpc>
+                <a:spcPct val="122000"/>
+              </a:lnSpc>
+              <a:spcBef>
+                <a:spcPts val="0"/>
+              </a:spcBef>
+              <a:spcAft>
+                <a:spcPts val="0"/>
+              </a:spcAft>
+            </a:pPr>
+            <a:r>
+              <a:rPr sz="1900" b="0" i="0">
+                <a:solidFill>
+                  <a:srgbClr val="16181D"/>
+                </a:solidFill>
+                <a:latin typeface="Segoe UI"/>
+              </a:rPr>
+              <a:t>—  Documentação oficial do Claude Code — code.claude.com/docs, incluindo o glossário e "How Claude Code works", onde o harness é definido</a:t>
+            </a:r>
+          </a:p>
+          <a:p>
+            <a:pPr>
+              <a:lnSpc>
+                <a:spcPct val="122000"/>
+              </a:lnSpc>
+              <a:spcBef>
+                <a:spcPts val="1300"/>
+              </a:spcBef>
+              <a:spcAft>
+                <a:spcPts val="0"/>
+              </a:spcAft>
+            </a:pPr>
+            <a:r>
+              <a:rPr sz="1900" b="0" i="0">
+                <a:solidFill>
+                  <a:srgbClr val="16181D"/>
+                </a:solidFill>
+                <a:latin typeface="Segoe UI"/>
+              </a:rPr>
+              <a:t>—  Documentação de Agent Skills e do formato </a:t>
+            </a:r>
+            <a:r>
+              <a:rPr sz="1748" b="0" i="0">
+                <a:solidFill>
+                  <a:srgbClr val="16181D"/>
+                </a:solidFill>
+                <a:latin typeface="Consolas"/>
+              </a:rPr>
+              <a:t>SKILL.md</a:t>
+            </a:r>
+          </a:p>
+          <a:p>
+            <a:pPr>
+              <a:lnSpc>
+                <a:spcPct val="122000"/>
+              </a:lnSpc>
+              <a:spcBef>
+                <a:spcPts val="1300"/>
+              </a:spcBef>
+              <a:spcAft>
+                <a:spcPts val="0"/>
+              </a:spcAft>
+            </a:pPr>
+            <a:r>
+              <a:rPr sz="1900" b="0" i="0">
+                <a:solidFill>
+                  <a:srgbClr val="16181D"/>
+                </a:solidFill>
+                <a:latin typeface="Segoe UI"/>
+              </a:rPr>
+              <a:t>—  Central de ajuda do Claude: Projects, memória, connectors e Cowork</a:t>
+            </a:r>
+          </a:p>
+          <a:p>
+            <a:pPr>
+              <a:lnSpc>
+                <a:spcPct val="122000"/>
+              </a:lnSpc>
+              <a:spcBef>
+                <a:spcPts val="1300"/>
+              </a:spcBef>
+              <a:spcAft>
+                <a:spcPts val="0"/>
+              </a:spcAft>
+            </a:pPr>
+            <a:r>
+              <a:rPr sz="1900" b="0" i="0">
+                <a:solidFill>
+                  <a:srgbClr val="16181D"/>
+                </a:solidFill>
+                <a:latin typeface="Segoe UI"/>
+              </a:rPr>
+              <a:t>—  Política de privacidade e de uso de dados da Anthropic</a:t>
+            </a:r>
+          </a:p>
+          <a:p>
+            <a:pPr>
+              <a:lnSpc>
+                <a:spcPct val="122000"/>
+              </a:lnSpc>
+              <a:spcBef>
+                <a:spcPts val="1300"/>
+              </a:spcBef>
+              <a:spcAft>
+                <a:spcPts val="0"/>
+              </a:spcAft>
+            </a:pPr>
+            <a:r>
+              <a:rPr sz="1900" b="0" i="0">
+                <a:solidFill>
+                  <a:srgbClr val="16181D"/>
+                </a:solidFill>
+                <a:latin typeface="Segoe UI"/>
+              </a:rPr>
+              <a:t>—  Espelho local consultado para esta aula, com data de captura registrada no repositório</a:t>
+            </a:r>
+          </a:p>
+        </p:txBody>
+      </p:sp>
+      <p:sp>
+        <p:nvSpPr>
+          <p:cNvPr id="5" name="TextBox 4"/>
+          <p:cNvSpPr txBox="1"/>
+          <p:nvPr/>
+        </p:nvSpPr>
+        <p:spPr>
+          <a:xfrm>
+            <a:off x="868680" y="6355080"/>
+            <a:ext cx="9905695" cy="310896"/>
+          </a:xfrm>
+          <a:prstGeom prst="rect">
+            <a:avLst/>
+          </a:prstGeom>
+          <a:noFill/>
+        </p:spPr>
+        <p:txBody>
+          <a:bodyPr wrap="square" anchor="t">
+            <a:spAutoFit/>
+          </a:bodyPr>
+          <a:lstStyle/>
+          <a:p>
+            <a:pPr algn="l">
+              <a:lnSpc>
+                <a:spcPct val="100000"/>
+              </a:lnSpc>
+              <a:spcBef>
+                <a:spcPts val="0"/>
+              </a:spcBef>
+              <a:spcAft>
+                <a:spcPts val="0"/>
+              </a:spcAft>
+            </a:pPr>
+            <a:r>
+              <a:rPr sz="1000" b="0" i="0">
+                <a:solidFill>
+                  <a:srgbClr val="6A6E76"/>
+                </a:solidFill>
+                <a:latin typeface="Segoe UI"/>
+              </a:rPr>
+              <a:t>Paulo E. R. Araujo · Referências</a:t>
+            </a:r>
+          </a:p>
+        </p:txBody>
+      </p:sp>
+      <p:sp>
+        <p:nvSpPr>
+          <p:cNvPr id="6" name="TextBox 5"/>
+          <p:cNvSpPr txBox="1"/>
+          <p:nvPr/>
+        </p:nvSpPr>
+        <p:spPr>
+          <a:xfrm>
+            <a:off x="10774375" y="6355080"/>
+            <a:ext cx="548640" cy="310896"/>
+          </a:xfrm>
+          <a:prstGeom prst="rect">
+            <a:avLst/>
+          </a:prstGeom>
+          <a:noFill/>
+        </p:spPr>
+        <p:txBody>
+          <a:bodyPr wrap="square" anchor="t">
+            <a:spAutoFit/>
+          </a:bodyPr>
+          <a:lstStyle/>
+          <a:p>
+            <a:pPr algn="r">
+              <a:lnSpc>
+                <a:spcPct val="100000"/>
+              </a:lnSpc>
+              <a:spcBef>
+                <a:spcPts val="0"/>
+              </a:spcBef>
+              <a:spcAft>
+                <a:spcPts val="0"/>
+              </a:spcAft>
+            </a:pPr>
+            <a:r>
+              <a:rPr sz="1000" b="0" i="0">
+                <a:solidFill>
+                  <a:srgbClr val="6A6E76"/>
+                </a:solidFill>
+                <a:latin typeface="Segoe UI"/>
+              </a:rPr>
+              <a:t>38</a:t>
             </a:r>
           </a:p>
         </p:txBody>
